--- a/ADG/14장/14장_Broker모니터링과검증명령.pptx
+++ b/ADG/14장/14장_Broker모니터링과검증명령.pptx
@@ -6823,7 +6823,45 @@
                 </a:solidFill>
                 <a:latin typeface="맑은 고딕"/>
               </a:rPr>
-              <a:t>•  `Gap Status: No Gap` — 7장 `V$ARCHIVE_GAP` 을 한 줄로</a:t>
+              <a:t>•  </a:t>
+            </a:r>
+            <a:r>
+              <a:rPr sz="1700" b="0">
+                <a:solidFill>
+                  <a:srgbClr val="222222"/>
+                </a:solidFill>
+                <a:latin typeface="Consolas"/>
+                <a:cs typeface="Consolas"/>
+              </a:rPr>
+              <a:t>Gap Status: No Gap</a:t>
+            </a:r>
+            <a:r>
+              <a:rPr sz="1700" b="0">
+                <a:solidFill>
+                  <a:srgbClr val="222222"/>
+                </a:solidFill>
+                <a:latin typeface="맑은 고딕"/>
+              </a:rPr>
+              <a:t> — 7장 </a:t>
+            </a:r>
+            <a:r>
+              <a:rPr sz="1700" b="0">
+                <a:solidFill>
+                  <a:srgbClr val="222222"/>
+                </a:solidFill>
+                <a:latin typeface="Consolas"/>
+                <a:cs typeface="Consolas"/>
+              </a:rPr>
+              <a:t>V$ARCHIVE_GAP</a:t>
+            </a:r>
+            <a:r>
+              <a:rPr sz="1700" b="0">
+                <a:solidFill>
+                  <a:srgbClr val="222222"/>
+                </a:solidFill>
+                <a:latin typeface="맑은 고딕"/>
+              </a:rPr>
+              <a:t> 을 한 줄로</a:t>
             </a:r>
           </a:p>
           <a:p>
@@ -6839,7 +6877,45 @@
                 </a:solidFill>
                 <a:latin typeface="맑은 고딕"/>
               </a:rPr>
-              <a:t>•  `Capacity` · `TEMP Files` (실측 3 / 3)</a:t>
+              <a:t>•  </a:t>
+            </a:r>
+            <a:r>
+              <a:rPr sz="1700" b="0">
+                <a:solidFill>
+                  <a:srgbClr val="222222"/>
+                </a:solidFill>
+                <a:latin typeface="Consolas"/>
+                <a:cs typeface="Consolas"/>
+              </a:rPr>
+              <a:t>Capacity</a:t>
+            </a:r>
+            <a:r>
+              <a:rPr sz="1700" b="0">
+                <a:solidFill>
+                  <a:srgbClr val="222222"/>
+                </a:solidFill>
+                <a:latin typeface="맑은 고딕"/>
+              </a:rPr>
+              <a:t> · </a:t>
+            </a:r>
+            <a:r>
+              <a:rPr sz="1700" b="0">
+                <a:solidFill>
+                  <a:srgbClr val="222222"/>
+                </a:solidFill>
+                <a:latin typeface="Consolas"/>
+                <a:cs typeface="Consolas"/>
+              </a:rPr>
+              <a:t>TEMP Files</a:t>
+            </a:r>
+            <a:r>
+              <a:rPr sz="1700" b="0">
+                <a:solidFill>
+                  <a:srgbClr val="222222"/>
+                </a:solidFill>
+                <a:latin typeface="맑은 고딕"/>
+              </a:rPr>
+              <a:t> (실측 3 / 3)</a:t>
             </a:r>
           </a:p>
           <a:p>
@@ -6855,7 +6931,26 @@
                 </a:solidFill>
                 <a:latin typeface="맑은 고딕"/>
               </a:rPr>
-              <a:t>•  `Current` 구성 — chicago 온라인 3 + boston SRL 4</a:t>
+              <a:t>•  </a:t>
+            </a:r>
+            <a:r>
+              <a:rPr sz="1700" b="0">
+                <a:solidFill>
+                  <a:srgbClr val="222222"/>
+                </a:solidFill>
+                <a:latin typeface="Consolas"/>
+                <a:cs typeface="Consolas"/>
+              </a:rPr>
+              <a:t>Current</a:t>
+            </a:r>
+            <a:r>
+              <a:rPr sz="1700" b="0">
+                <a:solidFill>
+                  <a:srgbClr val="222222"/>
+                </a:solidFill>
+                <a:latin typeface="맑은 고딕"/>
+              </a:rPr>
+              <a:t> 구성 — chicago 온라인 3 + boston SRL 4</a:t>
             </a:r>
           </a:p>
           <a:p>
@@ -6871,7 +6966,26 @@
                 </a:solidFill>
                 <a:latin typeface="맑은 고딕"/>
               </a:rPr>
-              <a:t>•  `Future` 구성 — boston 온라인 3 + chicago SRL 4</a:t>
+              <a:t>•  </a:t>
+            </a:r>
+            <a:r>
+              <a:rPr sz="1700" b="0">
+                <a:solidFill>
+                  <a:srgbClr val="222222"/>
+                </a:solidFill>
+                <a:latin typeface="Consolas"/>
+                <a:cs typeface="Consolas"/>
+              </a:rPr>
+              <a:t>Future</a:t>
+            </a:r>
+            <a:r>
+              <a:rPr sz="1700" b="0">
+                <a:solidFill>
+                  <a:srgbClr val="222222"/>
+                </a:solidFill>
+                <a:latin typeface="맑은 고딕"/>
+              </a:rPr>
+              <a:t> 구성 — boston 온라인 3 + chicago SRL 4</a:t>
             </a:r>
           </a:p>
           <a:p>
@@ -6887,7 +7001,25 @@
                 </a:solidFill>
                 <a:latin typeface="맑은 고딕"/>
               </a:rPr>
-              <a:t>•  양쪽 다 **Sufficient SRLs**, 크기 200MB 동일</a:t>
+              <a:t>•  양쪽 다 </a:t>
+            </a:r>
+            <a:r>
+              <a:rPr sz="1700" b="1">
+                <a:solidFill>
+                  <a:srgbClr val="222222"/>
+                </a:solidFill>
+                <a:latin typeface="맑은 고딕"/>
+              </a:rPr>
+              <a:t>Sufficient SRLs</a:t>
+            </a:r>
+            <a:r>
+              <a:rPr sz="1700" b="0">
+                <a:solidFill>
+                  <a:srgbClr val="222222"/>
+                </a:solidFill>
+                <a:latin typeface="맑은 고딕"/>
+              </a:rPr>
+              <a:t>, 크기 200MB 동일</a:t>
             </a:r>
           </a:p>
         </p:txBody>
@@ -7321,7 +7453,26 @@
                 </a:solidFill>
                 <a:latin typeface="맑은 고딕"/>
               </a:rPr>
-              <a:t>•  `StatusReport` — 인스턴스별 오류를 표로</a:t>
+              <a:t>•  </a:t>
+            </a:r>
+            <a:r>
+              <a:rPr sz="1700" b="0">
+                <a:solidFill>
+                  <a:srgbClr val="222222"/>
+                </a:solidFill>
+                <a:latin typeface="Consolas"/>
+                <a:cs typeface="Consolas"/>
+              </a:rPr>
+              <a:t>StatusReport</a:t>
+            </a:r>
+            <a:r>
+              <a:rPr sz="1700" b="0">
+                <a:solidFill>
+                  <a:srgbClr val="222222"/>
+                </a:solidFill>
+                <a:latin typeface="맑은 고딕"/>
+              </a:rPr>
+              <a:t> — 인스턴스별 오류를 표로</a:t>
             </a:r>
           </a:p>
           <a:p>
@@ -7337,7 +7488,36 @@
                 </a:solidFill>
                 <a:latin typeface="맑은 고딕"/>
               </a:rPr>
-              <a:t>•  `LogXptStatus` — Primary 에서 조회. 실측 `VALID`</a:t>
+              <a:t>•  </a:t>
+            </a:r>
+            <a:r>
+              <a:rPr sz="1700" b="0">
+                <a:solidFill>
+                  <a:srgbClr val="222222"/>
+                </a:solidFill>
+                <a:latin typeface="Consolas"/>
+                <a:cs typeface="Consolas"/>
+              </a:rPr>
+              <a:t>LogXptStatus</a:t>
+            </a:r>
+            <a:r>
+              <a:rPr sz="1700" b="0">
+                <a:solidFill>
+                  <a:srgbClr val="222222"/>
+                </a:solidFill>
+                <a:latin typeface="맑은 고딕"/>
+              </a:rPr>
+              <a:t> — Primary 에서 조회. 실측 </a:t>
+            </a:r>
+            <a:r>
+              <a:rPr sz="1700" b="0">
+                <a:solidFill>
+                  <a:srgbClr val="222222"/>
+                </a:solidFill>
+                <a:latin typeface="Consolas"/>
+                <a:cs typeface="Consolas"/>
+              </a:rPr>
+              <a:t>VALID</a:t>
             </a:r>
           </a:p>
           <a:p>
@@ -7353,7 +7533,45 @@
                 </a:solidFill>
                 <a:latin typeface="맑은 고딕"/>
               </a:rPr>
-              <a:t>•  `SendQEntries` / `RecvQEntries` — 두 개의 큐</a:t>
+              <a:t>•  </a:t>
+            </a:r>
+            <a:r>
+              <a:rPr sz="1700" b="0">
+                <a:solidFill>
+                  <a:srgbClr val="222222"/>
+                </a:solidFill>
+                <a:latin typeface="Consolas"/>
+                <a:cs typeface="Consolas"/>
+              </a:rPr>
+              <a:t>SendQEntries</a:t>
+            </a:r>
+            <a:r>
+              <a:rPr sz="1700" b="0">
+                <a:solidFill>
+                  <a:srgbClr val="222222"/>
+                </a:solidFill>
+                <a:latin typeface="맑은 고딕"/>
+              </a:rPr>
+              <a:t> / </a:t>
+            </a:r>
+            <a:r>
+              <a:rPr sz="1700" b="0">
+                <a:solidFill>
+                  <a:srgbClr val="222222"/>
+                </a:solidFill>
+                <a:latin typeface="Consolas"/>
+                <a:cs typeface="Consolas"/>
+              </a:rPr>
+              <a:t>RecvQEntries</a:t>
+            </a:r>
+            <a:r>
+              <a:rPr sz="1700" b="0">
+                <a:solidFill>
+                  <a:srgbClr val="222222"/>
+                </a:solidFill>
+                <a:latin typeface="맑은 고딕"/>
+              </a:rPr>
+              <a:t> — 두 개의 큐</a:t>
             </a:r>
           </a:p>
           <a:p>
@@ -7369,7 +7587,26 @@
                 </a:solidFill>
                 <a:latin typeface="맑은 고딕"/>
               </a:rPr>
-              <a:t>•  `TopWaitEvents` — 상위 대기 이벤트</a:t>
+              <a:t>•  </a:t>
+            </a:r>
+            <a:r>
+              <a:rPr sz="1700" b="0">
+                <a:solidFill>
+                  <a:srgbClr val="222222"/>
+                </a:solidFill>
+                <a:latin typeface="Consolas"/>
+                <a:cs typeface="Consolas"/>
+              </a:rPr>
+              <a:t>TopWaitEvents</a:t>
+            </a:r>
+            <a:r>
+              <a:rPr sz="1700" b="0">
+                <a:solidFill>
+                  <a:srgbClr val="222222"/>
+                </a:solidFill>
+                <a:latin typeface="맑은 고딕"/>
+              </a:rPr>
+              <a:t> — 상위 대기 이벤트</a:t>
             </a:r>
           </a:p>
           <a:p>
@@ -7385,7 +7622,26 @@
                 </a:solidFill>
                 <a:latin typeface="맑은 고딕"/>
               </a:rPr>
-              <a:t>•  `InconsistentProperties` — 메모리·SPFILE·Broker 비교</a:t>
+              <a:t>•  </a:t>
+            </a:r>
+            <a:r>
+              <a:rPr sz="1700" b="0">
+                <a:solidFill>
+                  <a:srgbClr val="222222"/>
+                </a:solidFill>
+                <a:latin typeface="Consolas"/>
+                <a:cs typeface="Consolas"/>
+              </a:rPr>
+              <a:t>InconsistentProperties</a:t>
+            </a:r>
+            <a:r>
+              <a:rPr sz="1700" b="0">
+                <a:solidFill>
+                  <a:srgbClr val="222222"/>
+                </a:solidFill>
+                <a:latin typeface="맑은 고딕"/>
+              </a:rPr>
+              <a:t> — 메모리·SPFILE·Broker 비교</a:t>
             </a:r>
           </a:p>
         </p:txBody>
@@ -7564,7 +7820,26 @@
                 </a:solidFill>
                 <a:latin typeface="맑은 고딕"/>
               </a:rPr>
-              <a:t>•  `SendQEntries` — 보낼 것이 남아 있는가 (Primary)</a:t>
+              <a:t>•  </a:t>
+            </a:r>
+            <a:r>
+              <a:rPr sz="1700" b="0">
+                <a:solidFill>
+                  <a:srgbClr val="222222"/>
+                </a:solidFill>
+                <a:latin typeface="Consolas"/>
+                <a:cs typeface="Consolas"/>
+              </a:rPr>
+              <a:t>SendQEntries</a:t>
+            </a:r>
+            <a:r>
+              <a:rPr sz="1700" b="0">
+                <a:solidFill>
+                  <a:srgbClr val="222222"/>
+                </a:solidFill>
+                <a:latin typeface="맑은 고딕"/>
+              </a:rPr>
+              <a:t> — 보낼 것이 남아 있는가 (Primary)</a:t>
             </a:r>
           </a:p>
           <a:p>
@@ -7580,7 +7855,26 @@
                 </a:solidFill>
                 <a:latin typeface="맑은 고딕"/>
               </a:rPr>
-              <a:t>•  `RecvQEntries` — 받았지만 적용 못 한 것 (Standby)</a:t>
+              <a:t>•  </a:t>
+            </a:r>
+            <a:r>
+              <a:rPr sz="1700" b="0">
+                <a:solidFill>
+                  <a:srgbClr val="222222"/>
+                </a:solidFill>
+                <a:latin typeface="Consolas"/>
+                <a:cs typeface="Consolas"/>
+              </a:rPr>
+              <a:t>RecvQEntries</a:t>
+            </a:r>
+            <a:r>
+              <a:rPr sz="1700" b="0">
+                <a:solidFill>
+                  <a:srgbClr val="222222"/>
+                </a:solidFill>
+                <a:latin typeface="맑은 고딕"/>
+              </a:rPr>
+              <a:t> — 받았지만 적용 못 한 것 (Standby)</a:t>
             </a:r>
           </a:p>
           <a:p>
@@ -7596,7 +7890,54 @@
                 </a:solidFill>
                 <a:latin typeface="맑은 고딕"/>
               </a:rPr>
-              <a:t>•  실측 — SendQ `STATUS=CURRENT` `LOG_SEQ 69` **6,911KB**</a:t>
+              <a:t>•  실측 — SendQ </a:t>
+            </a:r>
+            <a:r>
+              <a:rPr sz="1700" b="0">
+                <a:solidFill>
+                  <a:srgbClr val="222222"/>
+                </a:solidFill>
+                <a:latin typeface="Consolas"/>
+                <a:cs typeface="Consolas"/>
+              </a:rPr>
+              <a:t>STATUS=CURRENT</a:t>
+            </a:r>
+            <a:r>
+              <a:rPr sz="1700" b="0">
+                <a:solidFill>
+                  <a:srgbClr val="222222"/>
+                </a:solidFill>
+                <a:latin typeface="맑은 고딕"/>
+              </a:rPr>
+              <a:t> </a:t>
+            </a:r>
+            <a:r>
+              <a:rPr sz="1700" b="0">
+                <a:solidFill>
+                  <a:srgbClr val="222222"/>
+                </a:solidFill>
+                <a:latin typeface="Consolas"/>
+                <a:cs typeface="Consolas"/>
+              </a:rPr>
+              <a:t>LOG_SEQ 69</a:t>
+            </a:r>
+            <a:r>
+              <a:rPr sz="1700" b="0">
+                <a:solidFill>
+                  <a:srgbClr val="222222"/>
+                </a:solidFill>
+                <a:latin typeface="맑은 고딕"/>
+              </a:rPr>
+              <a:t> </a:t>
+            </a:r>
+            <a:r>
+              <a:rPr sz="1700" b="1">
+                <a:solidFill>
+                  <a:srgbClr val="222222"/>
+                </a:solidFill>
+                <a:latin typeface="맑은 고딕"/>
+              </a:rPr>
+              <a:t>6,911KB</a:t>
             </a:r>
           </a:p>
           <a:p>
@@ -7791,7 +8132,16 @@
                 </a:solidFill>
                 <a:latin typeface="맑은 고딕"/>
               </a:rPr>
-              <a:t>•  SendQ 비었거나 CURRENT + RecvQ 비었음 → **정상**</a:t>
+              <a:t>•  SendQ 비었거나 CURRENT + RecvQ 비었음 → </a:t>
+            </a:r>
+            <a:r>
+              <a:rPr sz="1700" b="1">
+                <a:solidFill>
+                  <a:srgbClr val="222222"/>
+                </a:solidFill>
+                <a:latin typeface="맑은 고딕"/>
+              </a:rPr>
+              <a:t>정상</a:t>
             </a:r>
           </a:p>
           <a:p>
@@ -7807,7 +8157,16 @@
                 </a:solidFill>
                 <a:latin typeface="맑은 고딕"/>
               </a:rPr>
-              <a:t>•  SendQ 쌓임 + RecvQ 비었음 → **전송이 막혔다**</a:t>
+              <a:t>•  SendQ 쌓임 + RecvQ 비었음 → </a:t>
+            </a:r>
+            <a:r>
+              <a:rPr sz="1700" b="1">
+                <a:solidFill>
+                  <a:srgbClr val="222222"/>
+                </a:solidFill>
+                <a:latin typeface="맑은 고딕"/>
+              </a:rPr>
+              <a:t>전송이 막혔다</a:t>
             </a:r>
           </a:p>
           <a:p>
@@ -7823,7 +8182,16 @@
                 </a:solidFill>
                 <a:latin typeface="맑은 고딕"/>
               </a:rPr>
-              <a:t>•  SendQ 비었음 + RecvQ 쌓임 → **적용이 막혔다**</a:t>
+              <a:t>•  SendQ 비었음 + RecvQ 쌓임 → </a:t>
+            </a:r>
+            <a:r>
+              <a:rPr sz="1700" b="1">
+                <a:solidFill>
+                  <a:srgbClr val="222222"/>
+                </a:solidFill>
+                <a:latin typeface="맑은 고딕"/>
+              </a:rPr>
+              <a:t>적용이 막혔다</a:t>
             </a:r>
           </a:p>
           <a:p>
@@ -7839,7 +8207,16 @@
                 </a:solidFill>
                 <a:latin typeface="맑은 고딕"/>
               </a:rPr>
-              <a:t>•  둘 다 쌓임 → 양쪽 문제이거나 **Standby 가 멈췄다**</a:t>
+              <a:t>•  둘 다 쌓임 → 양쪽 문제이거나 </a:t>
+            </a:r>
+            <a:r>
+              <a:rPr sz="1700" b="1">
+                <a:solidFill>
+                  <a:srgbClr val="222222"/>
+                </a:solidFill>
+                <a:latin typeface="맑은 고딕"/>
+              </a:rPr>
+              <a:t>Standby 가 멈췄다</a:t>
             </a:r>
           </a:p>
         </p:txBody>
@@ -8018,7 +8395,26 @@
                 </a:solidFill>
                 <a:latin typeface="맑은 고딕"/>
               </a:rPr>
-              <a:t>•  `rdbms ipc message` 8,006,598 — 유휴</a:t>
+              <a:t>•  </a:t>
+            </a:r>
+            <a:r>
+              <a:rPr sz="1700" b="0">
+                <a:solidFill>
+                  <a:srgbClr val="222222"/>
+                </a:solidFill>
+                <a:latin typeface="Consolas"/>
+                <a:cs typeface="Consolas"/>
+              </a:rPr>
+              <a:t>rdbms ipc message</a:t>
+            </a:r>
+            <a:r>
+              <a:rPr sz="1700" b="0">
+                <a:solidFill>
+                  <a:srgbClr val="222222"/>
+                </a:solidFill>
+                <a:latin typeface="맑은 고딕"/>
+              </a:rPr>
+              <a:t> 8,006,598 — 유휴</a:t>
             </a:r>
           </a:p>
           <a:p>
@@ -8034,7 +8430,26 @@
                 </a:solidFill>
                 <a:latin typeface="맑은 고딕"/>
               </a:rPr>
-              <a:t>•  `PX Idle Wait` 2,912,212 — 유휴</a:t>
+              <a:t>•  </a:t>
+            </a:r>
+            <a:r>
+              <a:rPr sz="1700" b="0">
+                <a:solidFill>
+                  <a:srgbClr val="222222"/>
+                </a:solidFill>
+                <a:latin typeface="Consolas"/>
+                <a:cs typeface="Consolas"/>
+              </a:rPr>
+              <a:t>PX Idle Wait</a:t>
+            </a:r>
+            <a:r>
+              <a:rPr sz="1700" b="0">
+                <a:solidFill>
+                  <a:srgbClr val="222222"/>
+                </a:solidFill>
+                <a:latin typeface="맑은 고딕"/>
+              </a:rPr>
+              <a:t> 2,912,212 — 유휴</a:t>
             </a:r>
           </a:p>
           <a:p>
@@ -8050,7 +8465,26 @@
                 </a:solidFill>
                 <a:latin typeface="맑은 고딕"/>
               </a:rPr>
-              <a:t>•  `Space Manager: slave idle wait` — 유휴</a:t>
+              <a:t>•  </a:t>
+            </a:r>
+            <a:r>
+              <a:rPr sz="1700" b="0">
+                <a:solidFill>
+                  <a:srgbClr val="222222"/>
+                </a:solidFill>
+                <a:latin typeface="Consolas"/>
+                <a:cs typeface="Consolas"/>
+              </a:rPr>
+              <a:t>Space Manager: slave idle wait</a:t>
+            </a:r>
+            <a:r>
+              <a:rPr sz="1700" b="0">
+                <a:solidFill>
+                  <a:srgbClr val="222222"/>
+                </a:solidFill>
+                <a:latin typeface="맑은 고딕"/>
+              </a:rPr>
+              <a:t> — 유휴</a:t>
             </a:r>
           </a:p>
           <a:p>
@@ -8066,7 +8500,26 @@
                 </a:solidFill>
                 <a:latin typeface="맑은 고딕"/>
               </a:rPr>
-              <a:t>•  `parallel recovery slave next change` — 적용 관련이나 대기</a:t>
+              <a:t>•  </a:t>
+            </a:r>
+            <a:r>
+              <a:rPr sz="1700" b="0">
+                <a:solidFill>
+                  <a:srgbClr val="222222"/>
+                </a:solidFill>
+                <a:latin typeface="Consolas"/>
+                <a:cs typeface="Consolas"/>
+              </a:rPr>
+              <a:t>parallel recovery slave next change</a:t>
+            </a:r>
+            <a:r>
+              <a:rPr sz="1700" b="0">
+                <a:solidFill>
+                  <a:srgbClr val="222222"/>
+                </a:solidFill>
+                <a:latin typeface="맑은 고딕"/>
+              </a:rPr>
+              <a:t> — 적용 관련이나 대기</a:t>
             </a:r>
           </a:p>
           <a:p>
@@ -8082,7 +8535,16 @@
                 </a:solidFill>
                 <a:latin typeface="맑은 고딕"/>
               </a:rPr>
-              <a:t>•  **절대값이 아니라 평소와의 차이를 본다**</a:t>
+              <a:t>•  </a:t>
+            </a:r>
+            <a:r>
+              <a:rPr sz="1700" b="1">
+                <a:solidFill>
+                  <a:srgbClr val="222222"/>
+                </a:solidFill>
+                <a:latin typeface="맑은 고딕"/>
+              </a:rPr>
+              <a:t>절대값이 아니라 평소와의 차이를 본다</a:t>
             </a:r>
           </a:p>
         </p:txBody>
@@ -8261,7 +8723,17 @@
                 </a:solidFill>
                 <a:latin typeface="맑은 고딕"/>
               </a:rPr>
-              <a:t>•  `edit database 'boston' set property 'TopWaitEvents'='5';`</a:t>
+              <a:t>•  </a:t>
+            </a:r>
+            <a:r>
+              <a:rPr sz="1700" b="0">
+                <a:solidFill>
+                  <a:srgbClr val="222222"/>
+                </a:solidFill>
+                <a:latin typeface="Consolas"/>
+                <a:cs typeface="Consolas"/>
+              </a:rPr>
+              <a:t>edit database 'boston' set property 'TopWaitEvents'='5';</a:t>
             </a:r>
           </a:p>
           <a:p>
@@ -8277,7 +8749,17 @@
                 </a:solidFill>
                 <a:latin typeface="맑은 고딕"/>
               </a:rPr>
-              <a:t>•  → **`Error: ORA-16568: cannot set property`**</a:t>
+              <a:t>•  → </a:t>
+            </a:r>
+            <a:r>
+              <a:rPr sz="1700" b="1">
+                <a:solidFill>
+                  <a:srgbClr val="222222"/>
+                </a:solidFill>
+                <a:latin typeface="Consolas"/>
+                <a:cs typeface="Consolas"/>
+              </a:rPr>
+              <a:t>Error: ORA-16568: cannot set property</a:t>
             </a:r>
           </a:p>
           <a:p>
@@ -8293,7 +8775,26 @@
                 </a:solidFill>
                 <a:latin typeface="맑은 고딕"/>
               </a:rPr>
-              <a:t>•  `ORA-16538` 속성 이름이 없다</a:t>
+              <a:t>•  </a:t>
+            </a:r>
+            <a:r>
+              <a:rPr sz="1700" b="0">
+                <a:solidFill>
+                  <a:srgbClr val="222222"/>
+                </a:solidFill>
+                <a:latin typeface="Consolas"/>
+                <a:cs typeface="Consolas"/>
+              </a:rPr>
+              <a:t>ORA-16538</a:t>
+            </a:r>
+            <a:r>
+              <a:rPr sz="1700" b="0">
+                <a:solidFill>
+                  <a:srgbClr val="222222"/>
+                </a:solidFill>
+                <a:latin typeface="맑은 고딕"/>
+              </a:rPr>
+              <a:t> 속성 이름이 없다</a:t>
             </a:r>
           </a:p>
           <a:p>
@@ -8309,7 +8810,26 @@
                 </a:solidFill>
                 <a:latin typeface="맑은 고딕"/>
               </a:rPr>
-              <a:t>•  `ORA-16790` 값이 틀렸다</a:t>
+              <a:t>•  </a:t>
+            </a:r>
+            <a:r>
+              <a:rPr sz="1700" b="0">
+                <a:solidFill>
+                  <a:srgbClr val="222222"/>
+                </a:solidFill>
+                <a:latin typeface="Consolas"/>
+                <a:cs typeface="Consolas"/>
+              </a:rPr>
+              <a:t>ORA-16790</a:t>
+            </a:r>
+            <a:r>
+              <a:rPr sz="1700" b="0">
+                <a:solidFill>
+                  <a:srgbClr val="222222"/>
+                </a:solidFill>
+                <a:latin typeface="맑은 고딕"/>
+              </a:rPr>
+              <a:t> 값이 틀렸다</a:t>
             </a:r>
           </a:p>
           <a:p>
@@ -8325,7 +8845,35 @@
                 </a:solidFill>
                 <a:latin typeface="맑은 고딕"/>
               </a:rPr>
-              <a:t>•  `ORA-16568` 있는데 **설정할 수 없다**</a:t>
+              <a:t>•  </a:t>
+            </a:r>
+            <a:r>
+              <a:rPr sz="1700" b="0">
+                <a:solidFill>
+                  <a:srgbClr val="222222"/>
+                </a:solidFill>
+                <a:latin typeface="Consolas"/>
+                <a:cs typeface="Consolas"/>
+              </a:rPr>
+              <a:t>ORA-16568</a:t>
+            </a:r>
+            <a:r>
+              <a:rPr sz="1700" b="0">
+                <a:solidFill>
+                  <a:srgbClr val="222222"/>
+                </a:solidFill>
+                <a:latin typeface="맑은 고딕"/>
+              </a:rPr>
+              <a:t> 있는데 </a:t>
+            </a:r>
+            <a:r>
+              <a:rPr sz="1700" b="1">
+                <a:solidFill>
+                  <a:srgbClr val="222222"/>
+                </a:solidFill>
+                <a:latin typeface="맑은 고딕"/>
+              </a:rPr>
+              <a:t>설정할 수 없다</a:t>
             </a:r>
           </a:p>
         </p:txBody>
@@ -8759,7 +9307,44 @@
                 </a:solidFill>
                 <a:latin typeface="맑은 고딕"/>
               </a:rPr>
-              <a:t>•  `ApplyLagThreshold` → **ORA-16853** 적용이 늦다</a:t>
+              <a:t>•  </a:t>
+            </a:r>
+            <a:r>
+              <a:rPr sz="1700" b="0">
+                <a:solidFill>
+                  <a:srgbClr val="222222"/>
+                </a:solidFill>
+                <a:latin typeface="Consolas"/>
+                <a:cs typeface="Consolas"/>
+              </a:rPr>
+              <a:t>ApplyLagThreshold</a:t>
+            </a:r>
+            <a:r>
+              <a:rPr sz="1700" b="0">
+                <a:solidFill>
+                  <a:srgbClr val="222222"/>
+                </a:solidFill>
+                <a:latin typeface="맑은 고딕"/>
+              </a:rPr>
+              <a:t> → </a:t>
+            </a:r>
+            <a:r>
+              <a:rPr sz="1700" b="1">
+                <a:solidFill>
+                  <a:srgbClr val="222222"/>
+                </a:solidFill>
+                <a:latin typeface="맑은 고딕"/>
+              </a:rPr>
+              <a:t>ORA-16853</a:t>
+            </a:r>
+            <a:r>
+              <a:rPr sz="1700" b="0">
+                <a:solidFill>
+                  <a:srgbClr val="222222"/>
+                </a:solidFill>
+                <a:latin typeface="맑은 고딕"/>
+              </a:rPr>
+              <a:t> 적용이 늦다</a:t>
             </a:r>
           </a:p>
           <a:p>
@@ -8775,7 +9360,44 @@
                 </a:solidFill>
                 <a:latin typeface="맑은 고딕"/>
               </a:rPr>
-              <a:t>•  `TransportLagThreshold` → **ORA-16855** 전송이 늦다</a:t>
+              <a:t>•  </a:t>
+            </a:r>
+            <a:r>
+              <a:rPr sz="1700" b="0">
+                <a:solidFill>
+                  <a:srgbClr val="222222"/>
+                </a:solidFill>
+                <a:latin typeface="Consolas"/>
+                <a:cs typeface="Consolas"/>
+              </a:rPr>
+              <a:t>TransportLagThreshold</a:t>
+            </a:r>
+            <a:r>
+              <a:rPr sz="1700" b="0">
+                <a:solidFill>
+                  <a:srgbClr val="222222"/>
+                </a:solidFill>
+                <a:latin typeface="맑은 고딕"/>
+              </a:rPr>
+              <a:t> → </a:t>
+            </a:r>
+            <a:r>
+              <a:rPr sz="1700" b="1">
+                <a:solidFill>
+                  <a:srgbClr val="222222"/>
+                </a:solidFill>
+                <a:latin typeface="맑은 고딕"/>
+              </a:rPr>
+              <a:t>ORA-16855</a:t>
+            </a:r>
+            <a:r>
+              <a:rPr sz="1700" b="0">
+                <a:solidFill>
+                  <a:srgbClr val="222222"/>
+                </a:solidFill>
+                <a:latin typeface="맑은 고딕"/>
+              </a:rPr>
+              <a:t> 전송이 늦다</a:t>
             </a:r>
           </a:p>
           <a:p>
@@ -8791,7 +9413,44 @@
                 </a:solidFill>
                 <a:latin typeface="맑은 고딕"/>
               </a:rPr>
-              <a:t>•  `TransportDisconnectedThreshold` → **ORA-16857** 연결이 끊겼다</a:t>
+              <a:t>•  </a:t>
+            </a:r>
+            <a:r>
+              <a:rPr sz="1700" b="0">
+                <a:solidFill>
+                  <a:srgbClr val="222222"/>
+                </a:solidFill>
+                <a:latin typeface="Consolas"/>
+                <a:cs typeface="Consolas"/>
+              </a:rPr>
+              <a:t>TransportDisconnectedThreshold</a:t>
+            </a:r>
+            <a:r>
+              <a:rPr sz="1700" b="0">
+                <a:solidFill>
+                  <a:srgbClr val="222222"/>
+                </a:solidFill>
+                <a:latin typeface="맑은 고딕"/>
+              </a:rPr>
+              <a:t> → </a:t>
+            </a:r>
+            <a:r>
+              <a:rPr sz="1700" b="1">
+                <a:solidFill>
+                  <a:srgbClr val="222222"/>
+                </a:solidFill>
+                <a:latin typeface="맑은 고딕"/>
+              </a:rPr>
+              <a:t>ORA-16857</a:t>
+            </a:r>
+            <a:r>
+              <a:rPr sz="1700" b="0">
+                <a:solidFill>
+                  <a:srgbClr val="222222"/>
+                </a:solidFill>
+                <a:latin typeface="맑은 고딕"/>
+              </a:rPr>
+              <a:t> 연결이 끊겼다</a:t>
             </a:r>
           </a:p>
           <a:p>
@@ -8986,7 +9645,17 @@
                 </a:solidFill>
                 <a:latin typeface="맑은 고딕"/>
               </a:rPr>
-              <a:t>•  `edit database 'boston' set property 'DelayMins'='2'`</a:t>
+              <a:t>•  </a:t>
+            </a:r>
+            <a:r>
+              <a:rPr sz="1700" b="0">
+                <a:solidFill>
+                  <a:srgbClr val="222222"/>
+                </a:solidFill>
+                <a:latin typeface="Consolas"/>
+                <a:cs typeface="Consolas"/>
+              </a:rPr>
+              <a:t>edit database 'boston' set property 'DelayMins'='2'</a:t>
             </a:r>
           </a:p>
           <a:p>
@@ -9002,7 +9671,25 @@
                 </a:solidFill>
                 <a:latin typeface="맑은 고딕"/>
               </a:rPr>
-              <a:t>•  transport lag **0** — 리두는 이미 도착했다</a:t>
+              <a:t>•  transport lag </a:t>
+            </a:r>
+            <a:r>
+              <a:rPr sz="1700" b="1">
+                <a:solidFill>
+                  <a:srgbClr val="222222"/>
+                </a:solidFill>
+                <a:latin typeface="맑은 고딕"/>
+              </a:rPr>
+              <a:t>0</a:t>
+            </a:r>
+            <a:r>
+              <a:rPr sz="1700" b="0">
+                <a:solidFill>
+                  <a:srgbClr val="222222"/>
+                </a:solidFill>
+                <a:latin typeface="맑은 고딕"/>
+              </a:rPr>
+              <a:t> — 리두는 이미 도착했다</a:t>
             </a:r>
           </a:p>
           <a:p>
@@ -9018,7 +9705,25 @@
                 </a:solidFill>
                 <a:latin typeface="맑은 고딕"/>
               </a:rPr>
-              <a:t>•  apply lag **1분 33초** — 적용을 일부러 미룬다</a:t>
+              <a:t>•  apply lag </a:t>
+            </a:r>
+            <a:r>
+              <a:rPr sz="1700" b="1">
+                <a:solidFill>
+                  <a:srgbClr val="222222"/>
+                </a:solidFill>
+                <a:latin typeface="맑은 고딕"/>
+              </a:rPr>
+              <a:t>1분 33초</a:t>
+            </a:r>
+            <a:r>
+              <a:rPr sz="1700" b="0">
+                <a:solidFill>
+                  <a:srgbClr val="222222"/>
+                </a:solidFill>
+                <a:latin typeface="맑은 고딕"/>
+              </a:rPr>
+              <a:t> — 적용을 일부러 미룬다</a:t>
             </a:r>
           </a:p>
           <a:p>
@@ -9034,7 +9739,17 @@
                 </a:solidFill>
                 <a:latin typeface="맑은 고딕"/>
               </a:rPr>
-              <a:t>•  `Database Warning(s): ORA-16853`</a:t>
+              <a:t>•  </a:t>
+            </a:r>
+            <a:r>
+              <a:rPr sz="1700" b="0">
+                <a:solidFill>
+                  <a:srgbClr val="222222"/>
+                </a:solidFill>
+                <a:latin typeface="Consolas"/>
+                <a:cs typeface="Consolas"/>
+              </a:rPr>
+              <a:t>Database Warning(s): ORA-16853</a:t>
             </a:r>
           </a:p>
           <a:p>
@@ -9050,7 +9765,16 @@
                 </a:solidFill>
                 <a:latin typeface="맑은 고딕"/>
               </a:rPr>
-              <a:t>•  Database Status: **WARNING**</a:t>
+              <a:t>•  Database Status: </a:t>
+            </a:r>
+            <a:r>
+              <a:rPr sz="1700" b="1">
+                <a:solidFill>
+                  <a:srgbClr val="222222"/>
+                </a:solidFill>
+                <a:latin typeface="맑은 고딕"/>
+              </a:rPr>
+              <a:t>WARNING</a:t>
             </a:r>
           </a:p>
         </p:txBody>
@@ -9190,7 +9914,45 @@
                 </a:solidFill>
                 <a:latin typeface="맑은 고딕"/>
               </a:rPr>
-              <a:t>•  `SHOW` 와 `VALIDATE` 가 각각 어떤 질문에 답하는지 구별한다.</a:t>
+              <a:t>•  </a:t>
+            </a:r>
+            <a:r>
+              <a:rPr sz="1600" b="0">
+                <a:solidFill>
+                  <a:srgbClr val="222222"/>
+                </a:solidFill>
+                <a:latin typeface="Consolas"/>
+                <a:cs typeface="Consolas"/>
+              </a:rPr>
+              <a:t>SHOW</a:t>
+            </a:r>
+            <a:r>
+              <a:rPr sz="1600" b="0">
+                <a:solidFill>
+                  <a:srgbClr val="222222"/>
+                </a:solidFill>
+                <a:latin typeface="맑은 고딕"/>
+              </a:rPr>
+              <a:t> 와 </a:t>
+            </a:r>
+            <a:r>
+              <a:rPr sz="1600" b="0">
+                <a:solidFill>
+                  <a:srgbClr val="222222"/>
+                </a:solidFill>
+                <a:latin typeface="Consolas"/>
+                <a:cs typeface="Consolas"/>
+              </a:rPr>
+              <a:t>VALIDATE</a:t>
+            </a:r>
+            <a:r>
+              <a:rPr sz="1600" b="0">
+                <a:solidFill>
+                  <a:srgbClr val="222222"/>
+                </a:solidFill>
+                <a:latin typeface="맑은 고딕"/>
+              </a:rPr>
+              <a:t> 가 각각 어떤 질문에 답하는지 구별한다.</a:t>
             </a:r>
           </a:p>
           <a:p>
@@ -9206,7 +9968,26 @@
                 </a:solidFill>
                 <a:latin typeface="맑은 고딕"/>
               </a:rPr>
-              <a:t>•  전송이 끊겼는데 `SUCCESS` 가 나오는 상황을 실측으로 확인한다.</a:t>
+              <a:t>•  전송이 끊겼는데 </a:t>
+            </a:r>
+            <a:r>
+              <a:rPr sz="1600" b="0">
+                <a:solidFill>
+                  <a:srgbClr val="222222"/>
+                </a:solidFill>
+                <a:latin typeface="Consolas"/>
+                <a:cs typeface="Consolas"/>
+              </a:rPr>
+              <a:t>SUCCESS</a:t>
+            </a:r>
+            <a:r>
+              <a:rPr sz="1600" b="0">
+                <a:solidFill>
+                  <a:srgbClr val="222222"/>
+                </a:solidFill>
+                <a:latin typeface="맑은 고딕"/>
+              </a:rPr>
+              <a:t> 가 나오는 상황을 실측으로 확인한다.</a:t>
             </a:r>
           </a:p>
           <a:p>
@@ -9254,7 +10035,26 @@
                 </a:solidFill>
                 <a:latin typeface="맑은 고딕"/>
               </a:rPr>
-              <a:t>•  `DelayMins` 가 사는 것과 파는 것을 설명한다.</a:t>
+              <a:t>•  </a:t>
+            </a:r>
+            <a:r>
+              <a:rPr sz="1600" b="0">
+                <a:solidFill>
+                  <a:srgbClr val="222222"/>
+                </a:solidFill>
+                <a:latin typeface="Consolas"/>
+                <a:cs typeface="Consolas"/>
+              </a:rPr>
+              <a:t>DelayMins</a:t>
+            </a:r>
+            <a:r>
+              <a:rPr sz="1600" b="0">
+                <a:solidFill>
+                  <a:srgbClr val="222222"/>
+                </a:solidFill>
+                <a:latin typeface="맑은 고딕"/>
+              </a:rPr>
+              <a:t> 가 사는 것과 파는 것을 설명한다.</a:t>
             </a:r>
           </a:p>
           <a:p>
@@ -9481,7 +10281,26 @@
                 </a:solidFill>
                 <a:latin typeface="맑은 고딕"/>
               </a:rPr>
-              <a:t>•  `Ready for Switchover:` No</a:t>
+              <a:t>•  </a:t>
+            </a:r>
+            <a:r>
+              <a:rPr sz="1700" b="0">
+                <a:solidFill>
+                  <a:srgbClr val="222222"/>
+                </a:solidFill>
+                <a:latin typeface="Consolas"/>
+                <a:cs typeface="Consolas"/>
+              </a:rPr>
+              <a:t>Ready for Switchover:</a:t>
+            </a:r>
+            <a:r>
+              <a:rPr sz="1700" b="0">
+                <a:solidFill>
+                  <a:srgbClr val="222222"/>
+                </a:solidFill>
+                <a:latin typeface="맑은 고딕"/>
+              </a:rPr>
+              <a:t> No</a:t>
             </a:r>
           </a:p>
           <a:p>
@@ -9497,7 +10316,17 @@
                 </a:solidFill>
                 <a:latin typeface="맑은 고딕"/>
               </a:rPr>
-              <a:t>•  `Error: Switchover to this standby is not possible`</a:t>
+              <a:t>•  </a:t>
+            </a:r>
+            <a:r>
+              <a:rPr sz="1700" b="0">
+                <a:solidFill>
+                  <a:srgbClr val="222222"/>
+                </a:solidFill>
+                <a:latin typeface="Consolas"/>
+                <a:cs typeface="Consolas"/>
+              </a:rPr>
+              <a:t>Error: Switchover to this standby is not possible</a:t>
             </a:r>
           </a:p>
           <a:p>
@@ -9513,7 +10342,17 @@
                 </a:solidFill>
                 <a:latin typeface="맑은 고딕"/>
               </a:rPr>
-              <a:t>•  `because an apply delay has been set`</a:t>
+              <a:t>•  </a:t>
+            </a:r>
+            <a:r>
+              <a:rPr sz="1700" b="0">
+                <a:solidFill>
+                  <a:srgbClr val="222222"/>
+                </a:solidFill>
+                <a:latin typeface="Consolas"/>
+                <a:cs typeface="Consolas"/>
+              </a:rPr>
+              <a:t>because an apply delay has been set</a:t>
             </a:r>
           </a:p>
           <a:p>
@@ -9529,7 +10368,17 @@
                 </a:solidFill>
                 <a:latin typeface="맑은 고딕"/>
               </a:rPr>
-              <a:t>•  `Apply Delay: 2 minutes`</a:t>
+              <a:t>•  </a:t>
+            </a:r>
+            <a:r>
+              <a:rPr sz="1700" b="0">
+                <a:solidFill>
+                  <a:srgbClr val="222222"/>
+                </a:solidFill>
+                <a:latin typeface="Consolas"/>
+                <a:cs typeface="Consolas"/>
+              </a:rPr>
+              <a:t>Apply Delay: 2 minutes</a:t>
             </a:r>
           </a:p>
           <a:p>
@@ -9545,7 +10394,25 @@
                 </a:solidFill>
                 <a:latin typeface="맑은 고딕"/>
               </a:rPr>
-              <a:t>•  DelayMins 는 Apply / Transport **양쪽 표**에 나온다</a:t>
+              <a:t>•  DelayMins 는 Apply / Transport </a:t>
+            </a:r>
+            <a:r>
+              <a:rPr sz="1700" b="1">
+                <a:solidFill>
+                  <a:srgbClr val="222222"/>
+                </a:solidFill>
+                <a:latin typeface="맑은 고딕"/>
+              </a:rPr>
+              <a:t>양쪽 표</a:t>
+            </a:r>
+            <a:r>
+              <a:rPr sz="1700" b="0">
+                <a:solidFill>
+                  <a:srgbClr val="222222"/>
+                </a:solidFill>
+                <a:latin typeface="맑은 고딕"/>
+              </a:rPr>
+              <a:t>에 나온다</a:t>
             </a:r>
           </a:p>
         </p:txBody>
@@ -9724,7 +10591,35 @@
                 </a:solidFill>
                 <a:latin typeface="맑은 고딕"/>
               </a:rPr>
-              <a:t>•  `LogShipping=OFF` → SUCCESS. **경보 없음**</a:t>
+              <a:t>•  </a:t>
+            </a:r>
+            <a:r>
+              <a:rPr sz="1700" b="0">
+                <a:solidFill>
+                  <a:srgbClr val="222222"/>
+                </a:solidFill>
+                <a:latin typeface="Consolas"/>
+                <a:cs typeface="Consolas"/>
+              </a:rPr>
+              <a:t>LogShipping=OFF</a:t>
+            </a:r>
+            <a:r>
+              <a:rPr sz="1700" b="0">
+                <a:solidFill>
+                  <a:srgbClr val="222222"/>
+                </a:solidFill>
+                <a:latin typeface="맑은 고딕"/>
+              </a:rPr>
+              <a:t> → SUCCESS. </a:t>
+            </a:r>
+            <a:r>
+              <a:rPr sz="1700" b="1">
+                <a:solidFill>
+                  <a:srgbClr val="222222"/>
+                </a:solidFill>
+                <a:latin typeface="맑은 고딕"/>
+              </a:rPr>
+              <a:t>경보 없음</a:t>
             </a:r>
           </a:p>
           <a:p>
@@ -9740,7 +10635,35 @@
                 </a:solidFill>
                 <a:latin typeface="맑은 고딕"/>
               </a:rPr>
-              <a:t>•  `DelayMins=2` → WARNING. **경보 있음**</a:t>
+              <a:t>•  </a:t>
+            </a:r>
+            <a:r>
+              <a:rPr sz="1700" b="0">
+                <a:solidFill>
+                  <a:srgbClr val="222222"/>
+                </a:solidFill>
+                <a:latin typeface="Consolas"/>
+                <a:cs typeface="Consolas"/>
+              </a:rPr>
+              <a:t>DelayMins=2</a:t>
+            </a:r>
+            <a:r>
+              <a:rPr sz="1700" b="0">
+                <a:solidFill>
+                  <a:srgbClr val="222222"/>
+                </a:solidFill>
+                <a:latin typeface="맑은 고딕"/>
+              </a:rPr>
+              <a:t> → WARNING. </a:t>
+            </a:r>
+            <a:r>
+              <a:rPr sz="1700" b="1">
+                <a:solidFill>
+                  <a:srgbClr val="222222"/>
+                </a:solidFill>
+                <a:latin typeface="맑은 고딕"/>
+              </a:rPr>
+              <a:t>경보 있음</a:t>
             </a:r>
           </a:p>
           <a:p>
@@ -9772,7 +10695,16 @@
                 </a:solidFill>
                 <a:latin typeface="맑은 고딕"/>
               </a:rPr>
-              <a:t>•  차이 = **비교할 숫자 기준이 있는가**</a:t>
+              <a:t>•  차이 = </a:t>
+            </a:r>
+            <a:r>
+              <a:rPr sz="1700" b="1">
+                <a:solidFill>
+                  <a:srgbClr val="222222"/>
+                </a:solidFill>
+                <a:latin typeface="맑은 고딕"/>
+              </a:rPr>
+              <a:t>비교할 숫자 기준이 있는가</a:t>
             </a:r>
           </a:p>
         </p:txBody>
@@ -9951,7 +10883,45 @@
                 </a:solidFill>
                 <a:latin typeface="맑은 고딕"/>
               </a:rPr>
-              <a:t>•  `DelayMins=2` + `ApplyLagThreshold=30` → 즉시 ORA-16853</a:t>
+              <a:t>•  </a:t>
+            </a:r>
+            <a:r>
+              <a:rPr sz="1700" b="0">
+                <a:solidFill>
+                  <a:srgbClr val="222222"/>
+                </a:solidFill>
+                <a:latin typeface="Consolas"/>
+                <a:cs typeface="Consolas"/>
+              </a:rPr>
+              <a:t>DelayMins=2</a:t>
+            </a:r>
+            <a:r>
+              <a:rPr sz="1700" b="0">
+                <a:solidFill>
+                  <a:srgbClr val="222222"/>
+                </a:solidFill>
+                <a:latin typeface="맑은 고딕"/>
+              </a:rPr>
+              <a:t> + </a:t>
+            </a:r>
+            <a:r>
+              <a:rPr sz="1700" b="0">
+                <a:solidFill>
+                  <a:srgbClr val="222222"/>
+                </a:solidFill>
+                <a:latin typeface="Consolas"/>
+                <a:cs typeface="Consolas"/>
+              </a:rPr>
+              <a:t>ApplyLagThreshold=30</a:t>
+            </a:r>
+            <a:r>
+              <a:rPr sz="1700" b="0">
+                <a:solidFill>
+                  <a:srgbClr val="222222"/>
+                </a:solidFill>
+                <a:latin typeface="맑은 고딕"/>
+              </a:rPr>
+              <a:t> → 즉시 ORA-16853</a:t>
             </a:r>
           </a:p>
           <a:p>
@@ -9967,7 +10937,16 @@
                 </a:solidFill>
                 <a:latin typeface="맑은 고딕"/>
               </a:rPr>
-              <a:t>•  임계값을 10 으로 낮추자 구성 전체가 **WARNING**</a:t>
+              <a:t>•  임계값을 10 으로 낮추자 구성 전체가 </a:t>
+            </a:r>
+            <a:r>
+              <a:rPr sz="1700" b="1">
+                <a:solidFill>
+                  <a:srgbClr val="222222"/>
+                </a:solidFill>
+                <a:latin typeface="맑은 고딕"/>
+              </a:rPr>
+              <a:t>WARNING</a:t>
             </a:r>
           </a:p>
           <a:p>
@@ -9983,7 +10962,35 @@
                 </a:solidFill>
                 <a:latin typeface="맑은 고딕"/>
               </a:rPr>
-              <a:t>•  `DelayMins=30` 이면 임계값은 **30분보다 넉넉하게**</a:t>
+              <a:t>•  </a:t>
+            </a:r>
+            <a:r>
+              <a:rPr sz="1700" b="0">
+                <a:solidFill>
+                  <a:srgbClr val="222222"/>
+                </a:solidFill>
+                <a:latin typeface="Consolas"/>
+                <a:cs typeface="Consolas"/>
+              </a:rPr>
+              <a:t>DelayMins=30</a:t>
+            </a:r>
+            <a:r>
+              <a:rPr sz="1700" b="0">
+                <a:solidFill>
+                  <a:srgbClr val="222222"/>
+                </a:solidFill>
+                <a:latin typeface="맑은 고딕"/>
+              </a:rPr>
+              <a:t> 이면 임계값은 </a:t>
+            </a:r>
+            <a:r>
+              <a:rPr sz="1700" b="1">
+                <a:solidFill>
+                  <a:srgbClr val="222222"/>
+                </a:solidFill>
+                <a:latin typeface="맑은 고딕"/>
+              </a:rPr>
+              <a:t>30분보다 넉넉하게</a:t>
             </a:r>
           </a:p>
           <a:p>
@@ -10433,7 +11440,26 @@
                 </a:solidFill>
                 <a:latin typeface="맑은 고딕"/>
               </a:rPr>
-              <a:t>•  `SEVERITY` — Informational / Control / Warning</a:t>
+              <a:t>•  </a:t>
+            </a:r>
+            <a:r>
+              <a:rPr sz="1700" b="0">
+                <a:solidFill>
+                  <a:srgbClr val="222222"/>
+                </a:solidFill>
+                <a:latin typeface="Consolas"/>
+                <a:cs typeface="Consolas"/>
+              </a:rPr>
+              <a:t>SEVERITY</a:t>
+            </a:r>
+            <a:r>
+              <a:rPr sz="1700" b="0">
+                <a:solidFill>
+                  <a:srgbClr val="222222"/>
+                </a:solidFill>
+                <a:latin typeface="맑은 고딕"/>
+              </a:rPr>
+              <a:t> — Informational / Control / Warning</a:t>
             </a:r>
           </a:p>
           <a:p>
@@ -10449,7 +11475,35 @@
                 </a:solidFill>
                 <a:latin typeface="맑은 고딕"/>
               </a:rPr>
-              <a:t>•  실측 `SRL selected for T-1.S-69 for LAD:2` 가 **Warning**</a:t>
+              <a:t>•  실측 </a:t>
+            </a:r>
+            <a:r>
+              <a:rPr sz="1700" b="0">
+                <a:solidFill>
+                  <a:srgbClr val="222222"/>
+                </a:solidFill>
+                <a:latin typeface="Consolas"/>
+                <a:cs typeface="Consolas"/>
+              </a:rPr>
+              <a:t>SRL selected for T-1.S-69 for LAD:2</a:t>
+            </a:r>
+            <a:r>
+              <a:rPr sz="1700" b="0">
+                <a:solidFill>
+                  <a:srgbClr val="222222"/>
+                </a:solidFill>
+                <a:latin typeface="맑은 고딕"/>
+              </a:rPr>
+              <a:t> 가 </a:t>
+            </a:r>
+            <a:r>
+              <a:rPr sz="1700" b="1">
+                <a:solidFill>
+                  <a:srgbClr val="222222"/>
+                </a:solidFill>
+                <a:latin typeface="맑은 고딕"/>
+              </a:rPr>
+              <a:t>Warning</a:t>
             </a:r>
           </a:p>
           <a:p>
@@ -10465,7 +11519,35 @@
                 </a:solidFill>
                 <a:latin typeface="맑은 고딕"/>
               </a:rPr>
-              <a:t>•  그런데 `ERROR_CODE` 는 **0**</a:t>
+              <a:t>•  그런데 </a:t>
+            </a:r>
+            <a:r>
+              <a:rPr sz="1700" b="0">
+                <a:solidFill>
+                  <a:srgbClr val="222222"/>
+                </a:solidFill>
+                <a:latin typeface="Consolas"/>
+                <a:cs typeface="Consolas"/>
+              </a:rPr>
+              <a:t>ERROR_CODE</a:t>
+            </a:r>
+            <a:r>
+              <a:rPr sz="1700" b="0">
+                <a:solidFill>
+                  <a:srgbClr val="222222"/>
+                </a:solidFill>
+                <a:latin typeface="맑은 고딕"/>
+              </a:rPr>
+              <a:t> 는 </a:t>
+            </a:r>
+            <a:r>
+              <a:rPr sz="1700" b="1">
+                <a:solidFill>
+                  <a:srgbClr val="222222"/>
+                </a:solidFill>
+                <a:latin typeface="맑은 고딕"/>
+              </a:rPr>
+              <a:t>0</a:t>
             </a:r>
           </a:p>
           <a:p>
@@ -10481,7 +11563,25 @@
                 </a:solidFill>
                 <a:latin typeface="맑은 고딕"/>
               </a:rPr>
-              <a:t>•  거르면 11건 → **2건** (ORA-16037)</a:t>
+              <a:t>•  거르면 11건 → </a:t>
+            </a:r>
+            <a:r>
+              <a:rPr sz="1700" b="1">
+                <a:solidFill>
+                  <a:srgbClr val="222222"/>
+                </a:solidFill>
+                <a:latin typeface="맑은 고딕"/>
+              </a:rPr>
+              <a:t>2건</a:t>
+            </a:r>
+            <a:r>
+              <a:rPr sz="1700" b="0">
+                <a:solidFill>
+                  <a:srgbClr val="222222"/>
+                </a:solidFill>
+                <a:latin typeface="맑은 고딕"/>
+              </a:rPr>
+              <a:t> (ORA-16037)</a:t>
             </a:r>
           </a:p>
         </p:txBody>
@@ -10660,7 +11760,45 @@
                 </a:solidFill>
                 <a:latin typeface="맑은 고딕"/>
               </a:rPr>
-              <a:t>•  `transport lag` / `apply lag` — 7장부터 본 둘</a:t>
+              <a:t>•  </a:t>
+            </a:r>
+            <a:r>
+              <a:rPr sz="1700" b="0">
+                <a:solidFill>
+                  <a:srgbClr val="222222"/>
+                </a:solidFill>
+                <a:latin typeface="Consolas"/>
+                <a:cs typeface="Consolas"/>
+              </a:rPr>
+              <a:t>transport lag</a:t>
+            </a:r>
+            <a:r>
+              <a:rPr sz="1700" b="0">
+                <a:solidFill>
+                  <a:srgbClr val="222222"/>
+                </a:solidFill>
+                <a:latin typeface="맑은 고딕"/>
+              </a:rPr>
+              <a:t> / </a:t>
+            </a:r>
+            <a:r>
+              <a:rPr sz="1700" b="0">
+                <a:solidFill>
+                  <a:srgbClr val="222222"/>
+                </a:solidFill>
+                <a:latin typeface="Consolas"/>
+                <a:cs typeface="Consolas"/>
+              </a:rPr>
+              <a:t>apply lag</a:t>
+            </a:r>
+            <a:r>
+              <a:rPr sz="1700" b="0">
+                <a:solidFill>
+                  <a:srgbClr val="222222"/>
+                </a:solidFill>
+                <a:latin typeface="맑은 고딕"/>
+              </a:rPr>
+              <a:t> — 7장부터 본 둘</a:t>
             </a:r>
           </a:p>
           <a:p>
@@ -10676,7 +11814,26 @@
                 </a:solidFill>
                 <a:latin typeface="맑은 고딕"/>
               </a:rPr>
-              <a:t>•  **`apply finish time`** — 밀린 것을 다 적용할 예상 시간</a:t>
+              <a:t>•  </a:t>
+            </a:r>
+            <a:r>
+              <a:rPr sz="1700" b="1">
+                <a:solidFill>
+                  <a:srgbClr val="222222"/>
+                </a:solidFill>
+                <a:latin typeface="Consolas"/>
+                <a:cs typeface="Consolas"/>
+              </a:rPr>
+              <a:t>apply finish time</a:t>
+            </a:r>
+            <a:r>
+              <a:rPr sz="1700" b="0">
+                <a:solidFill>
+                  <a:srgbClr val="222222"/>
+                </a:solidFill>
+                <a:latin typeface="맑은 고딕"/>
+              </a:rPr>
+              <a:t> — 밀린 것을 다 적용할 예상 시간</a:t>
             </a:r>
           </a:p>
           <a:p>
@@ -10692,7 +11849,35 @@
                 </a:solidFill>
                 <a:latin typeface="맑은 고딕"/>
               </a:rPr>
-              <a:t>•  **`estimated startup time`** — 실측 **11초**</a:t>
+              <a:t>•  </a:t>
+            </a:r>
+            <a:r>
+              <a:rPr sz="1700" b="1">
+                <a:solidFill>
+                  <a:srgbClr val="222222"/>
+                </a:solidFill>
+                <a:latin typeface="Consolas"/>
+                <a:cs typeface="Consolas"/>
+              </a:rPr>
+              <a:t>estimated startup time</a:t>
+            </a:r>
+            <a:r>
+              <a:rPr sz="1700" b="0">
+                <a:solidFill>
+                  <a:srgbClr val="222222"/>
+                </a:solidFill>
+                <a:latin typeface="맑은 고딕"/>
+              </a:rPr>
+              <a:t> — 실측 </a:t>
+            </a:r>
+            <a:r>
+              <a:rPr sz="1700" b="1">
+                <a:solidFill>
+                  <a:srgbClr val="222222"/>
+                </a:solidFill>
+                <a:latin typeface="맑은 고딕"/>
+              </a:rPr>
+              <a:t>11초</a:t>
             </a:r>
           </a:p>
           <a:p>
@@ -10708,7 +11893,16 @@
                 </a:solidFill>
                 <a:latin typeface="맑은 고딕"/>
               </a:rPr>
-              <a:t>•  두 값을 더하면 **RTO 근거**</a:t>
+              <a:t>•  두 값을 더하면 </a:t>
+            </a:r>
+            <a:r>
+              <a:rPr sz="1700" b="1">
+                <a:solidFill>
+                  <a:srgbClr val="222222"/>
+                </a:solidFill>
+                <a:latin typeface="맑은 고딕"/>
+              </a:rPr>
+              <a:t>RTO 근거</a:t>
             </a:r>
           </a:p>
         </p:txBody>
@@ -10903,7 +12097,26 @@
                 </a:solidFill>
                 <a:latin typeface="맑은 고딕"/>
               </a:rPr>
-              <a:t>•  **Primary 에서 조회 → `no rows selected`**</a:t>
+              <a:t>•  </a:t>
+            </a:r>
+            <a:r>
+              <a:rPr sz="1700" b="1">
+                <a:solidFill>
+                  <a:srgbClr val="222222"/>
+                </a:solidFill>
+                <a:latin typeface="맑은 고딕"/>
+              </a:rPr>
+              <a:t>Primary 에서 조회 → </a:t>
+            </a:r>
+            <a:r>
+              <a:rPr sz="1700" b="1">
+                <a:solidFill>
+                  <a:srgbClr val="222222"/>
+                </a:solidFill>
+                <a:latin typeface="Consolas"/>
+                <a:cs typeface="Consolas"/>
+              </a:rPr>
+              <a:t>no rows selected</a:t>
             </a:r>
           </a:p>
           <a:p>
@@ -10919,7 +12132,25 @@
                 </a:solidFill>
                 <a:latin typeface="맑은 고딕"/>
               </a:rPr>
-              <a:t>•  지연은 **받는 쪽**의 개념이므로 당연</a:t>
+              <a:t>•  지연은 </a:t>
+            </a:r>
+            <a:r>
+              <a:rPr sz="1700" b="1">
+                <a:solidFill>
+                  <a:srgbClr val="222222"/>
+                </a:solidFill>
+                <a:latin typeface="맑은 고딕"/>
+              </a:rPr>
+              <a:t>받는 쪽</a:t>
+            </a:r>
+            <a:r>
+              <a:rPr sz="1700" b="0">
+                <a:solidFill>
+                  <a:srgbClr val="222222"/>
+                </a:solidFill>
+                <a:latin typeface="맑은 고딕"/>
+              </a:rPr>
+              <a:t>의 개념이므로 당연</a:t>
             </a:r>
           </a:p>
           <a:p>
@@ -11114,7 +12345,35 @@
                 </a:solidFill>
                 <a:latin typeface="맑은 고딕"/>
               </a:rPr>
-              <a:t>•  `REDO_SOURCE` 가 **들여쓰기를 대신한다**</a:t>
+              <a:t>•  </a:t>
+            </a:r>
+            <a:r>
+              <a:rPr sz="1700" b="0">
+                <a:solidFill>
+                  <a:srgbClr val="222222"/>
+                </a:solidFill>
+                <a:latin typeface="Consolas"/>
+                <a:cs typeface="Consolas"/>
+              </a:rPr>
+              <a:t>REDO_SOURCE</a:t>
+            </a:r>
+            <a:r>
+              <a:rPr sz="1700" b="0">
+                <a:solidFill>
+                  <a:srgbClr val="222222"/>
+                </a:solidFill>
+                <a:latin typeface="맑은 고딕"/>
+              </a:rPr>
+              <a:t> 가 </a:t>
+            </a:r>
+            <a:r>
+              <a:rPr sz="1700" b="1">
+                <a:solidFill>
+                  <a:srgbClr val="222222"/>
+                </a:solidFill>
+                <a:latin typeface="맑은 고딕"/>
+              </a:rPr>
+              <a:t>들여쓰기를 대신한다</a:t>
             </a:r>
           </a:p>
           <a:p>
@@ -11130,7 +12389,36 @@
                 </a:solidFill>
                 <a:latin typeface="맑은 고딕"/>
               </a:rPr>
-              <a:t>•  chicago `-N/A-` / boston `chicago`</a:t>
+              <a:t>•  chicago </a:t>
+            </a:r>
+            <a:r>
+              <a:rPr sz="1700" b="0">
+                <a:solidFill>
+                  <a:srgbClr val="222222"/>
+                </a:solidFill>
+                <a:latin typeface="Consolas"/>
+                <a:cs typeface="Consolas"/>
+              </a:rPr>
+              <a:t>-N/A-</a:t>
+            </a:r>
+            <a:r>
+              <a:rPr sz="1700" b="0">
+                <a:solidFill>
+                  <a:srgbClr val="222222"/>
+                </a:solidFill>
+                <a:latin typeface="맑은 고딕"/>
+              </a:rPr>
+              <a:t> / boston </a:t>
+            </a:r>
+            <a:r>
+              <a:rPr sz="1700" b="0">
+                <a:solidFill>
+                  <a:srgbClr val="222222"/>
+                </a:solidFill>
+                <a:latin typeface="Consolas"/>
+                <a:cs typeface="Consolas"/>
+              </a:rPr>
+              <a:t>chicago</a:t>
             </a:r>
           </a:p>
           <a:p>
@@ -11162,7 +12450,73 @@
                 </a:solidFill>
                 <a:latin typeface="맑은 고딕"/>
               </a:rPr>
-              <a:t>•  `STATUS` 는 문자열이 아니라 **숫자** — `a10` 주면 `##########`</a:t>
+              <a:t>•  </a:t>
+            </a:r>
+            <a:r>
+              <a:rPr sz="1700" b="0">
+                <a:solidFill>
+                  <a:srgbClr val="222222"/>
+                </a:solidFill>
+                <a:latin typeface="Consolas"/>
+                <a:cs typeface="Consolas"/>
+              </a:rPr>
+              <a:t>STATUS</a:t>
+            </a:r>
+            <a:r>
+              <a:rPr sz="1700" b="0">
+                <a:solidFill>
+                  <a:srgbClr val="222222"/>
+                </a:solidFill>
+                <a:latin typeface="맑은 고딕"/>
+              </a:rPr>
+              <a:t> 는 문자열이 아니라 </a:t>
+            </a:r>
+            <a:r>
+              <a:rPr sz="1700" b="1">
+                <a:solidFill>
+                  <a:srgbClr val="222222"/>
+                </a:solidFill>
+                <a:latin typeface="맑은 고딕"/>
+              </a:rPr>
+              <a:t>숫자</a:t>
+            </a:r>
+            <a:r>
+              <a:rPr sz="1700" b="0">
+                <a:solidFill>
+                  <a:srgbClr val="222222"/>
+                </a:solidFill>
+                <a:latin typeface="맑은 고딕"/>
+              </a:rPr>
+              <a:t> — </a:t>
+            </a:r>
+            <a:r>
+              <a:rPr sz="1700" b="0">
+                <a:solidFill>
+                  <a:srgbClr val="222222"/>
+                </a:solidFill>
+                <a:latin typeface="Consolas"/>
+                <a:cs typeface="Consolas"/>
+              </a:rPr>
+              <a:t>a10</a:t>
+            </a:r>
+            <a:r>
+              <a:rPr sz="1700" b="0">
+                <a:solidFill>
+                  <a:srgbClr val="222222"/>
+                </a:solidFill>
+                <a:latin typeface="맑은 고딕"/>
+              </a:rPr>
+              <a:t> 주면 </a:t>
+            </a:r>
+            <a:r>
+              <a:rPr sz="1700" b="0">
+                <a:solidFill>
+                  <a:srgbClr val="222222"/>
+                </a:solidFill>
+                <a:latin typeface="Consolas"/>
+                <a:cs typeface="Consolas"/>
+              </a:rPr>
+              <a:t>##########</a:t>
             </a:r>
           </a:p>
         </p:txBody>
@@ -11341,7 +12695,26 @@
                 </a:solidFill>
                 <a:latin typeface="맑은 고딕"/>
               </a:rPr>
-              <a:t>•  `V$DATAGUARD_STATUS` 상태 메시지</a:t>
+              <a:t>•  </a:t>
+            </a:r>
+            <a:r>
+              <a:rPr sz="1700" b="0">
+                <a:solidFill>
+                  <a:srgbClr val="222222"/>
+                </a:solidFill>
+                <a:latin typeface="Consolas"/>
+                <a:cs typeface="Consolas"/>
+              </a:rPr>
+              <a:t>V$DATAGUARD_STATUS</a:t>
+            </a:r>
+            <a:r>
+              <a:rPr sz="1700" b="0">
+                <a:solidFill>
+                  <a:srgbClr val="222222"/>
+                </a:solidFill>
+                <a:latin typeface="맑은 고딕"/>
+              </a:rPr>
+              <a:t> 상태 메시지</a:t>
             </a:r>
           </a:p>
           <a:p>
@@ -11357,7 +12730,35 @@
                 </a:solidFill>
                 <a:latin typeface="맑은 고딕"/>
               </a:rPr>
-              <a:t>•  `V$DATAGUARD_STATS` 통계 — **한 글자 차이**</a:t>
+              <a:t>•  </a:t>
+            </a:r>
+            <a:r>
+              <a:rPr sz="1700" b="0">
+                <a:solidFill>
+                  <a:srgbClr val="222222"/>
+                </a:solidFill>
+                <a:latin typeface="Consolas"/>
+                <a:cs typeface="Consolas"/>
+              </a:rPr>
+              <a:t>V$DATAGUARD_STATS</a:t>
+            </a:r>
+            <a:r>
+              <a:rPr sz="1700" b="0">
+                <a:solidFill>
+                  <a:srgbClr val="222222"/>
+                </a:solidFill>
+                <a:latin typeface="맑은 고딕"/>
+              </a:rPr>
+              <a:t> 통계 — </a:t>
+            </a:r>
+            <a:r>
+              <a:rPr sz="1700" b="1">
+                <a:solidFill>
+                  <a:srgbClr val="222222"/>
+                </a:solidFill>
+                <a:latin typeface="맑은 고딕"/>
+              </a:rPr>
+              <a:t>한 글자 차이</a:t>
             </a:r>
           </a:p>
           <a:p>
@@ -11373,7 +12774,17 @@
                 </a:solidFill>
                 <a:latin typeface="맑은 고딕"/>
               </a:rPr>
-              <a:t>•  틀리면 `ORA-00942: table or view does not exist`</a:t>
+              <a:t>•  틀리면 </a:t>
+            </a:r>
+            <a:r>
+              <a:rPr sz="1700" b="0">
+                <a:solidFill>
+                  <a:srgbClr val="222222"/>
+                </a:solidFill>
+                <a:latin typeface="Consolas"/>
+                <a:cs typeface="Consolas"/>
+              </a:rPr>
+              <a:t>ORA-00942: table or view does not exist</a:t>
             </a:r>
           </a:p>
           <a:p>
@@ -11389,7 +12800,16 @@
                 </a:solidFill>
                 <a:latin typeface="맑은 고딕"/>
               </a:rPr>
-              <a:t>•  **같은 번호가 권한 부족일 때도 나온다**</a:t>
+              <a:t>•  </a:t>
+            </a:r>
+            <a:r>
+              <a:rPr sz="1700" b="1">
+                <a:solidFill>
+                  <a:srgbClr val="222222"/>
+                </a:solidFill>
+                <a:latin typeface="맑은 고딕"/>
+              </a:rPr>
+              <a:t>같은 번호가 권한 부족일 때도 나온다</a:t>
             </a:r>
           </a:p>
         </p:txBody>
@@ -12059,7 +13479,36 @@
                 </a:solidFill>
                 <a:latin typeface="맑은 고딕"/>
               </a:rPr>
-              <a:t>•  `export configuration to 'ch14_export.xml'` → `Succeeded.`</a:t>
+              <a:t>•  </a:t>
+            </a:r>
+            <a:r>
+              <a:rPr sz="1700" b="0">
+                <a:solidFill>
+                  <a:srgbClr val="222222"/>
+                </a:solidFill>
+                <a:latin typeface="Consolas"/>
+                <a:cs typeface="Consolas"/>
+              </a:rPr>
+              <a:t>export configuration to 'ch14_export.xml'</a:t>
+            </a:r>
+            <a:r>
+              <a:rPr sz="1700" b="0">
+                <a:solidFill>
+                  <a:srgbClr val="222222"/>
+                </a:solidFill>
+                <a:latin typeface="맑은 고딕"/>
+              </a:rPr>
+              <a:t> → </a:t>
+            </a:r>
+            <a:r>
+              <a:rPr sz="1700" b="0">
+                <a:solidFill>
+                  <a:srgbClr val="222222"/>
+                </a:solidFill>
+                <a:latin typeface="Consolas"/>
+                <a:cs typeface="Consolas"/>
+              </a:rPr>
+              <a:t>Succeeded.</a:t>
             </a:r>
           </a:p>
           <a:p>
@@ -12075,7 +13524,16 @@
                 </a:solidFill>
                 <a:latin typeface="맑은 고딕"/>
               </a:rPr>
-              <a:t>•  **어디에 만들었는지 말해 주지 않는다**</a:t>
+              <a:t>•  </a:t>
+            </a:r>
+            <a:r>
+              <a:rPr sz="1700" b="1">
+                <a:solidFill>
+                  <a:srgbClr val="222222"/>
+                </a:solidFill>
+                <a:latin typeface="맑은 고딕"/>
+              </a:rPr>
+              <a:t>어디에 만들었는지 말해 주지 않는다</a:t>
             </a:r>
           </a:p>
           <a:p>
@@ -12091,7 +13549,26 @@
                 </a:solidFill>
                 <a:latin typeface="맑은 고딕"/>
               </a:rPr>
-              <a:t>•  `$ORACLE_HOME/dbs` 에는 없다</a:t>
+              <a:t>•  </a:t>
+            </a:r>
+            <a:r>
+              <a:rPr sz="1700" b="0">
+                <a:solidFill>
+                  <a:srgbClr val="222222"/>
+                </a:solidFill>
+                <a:latin typeface="Consolas"/>
+                <a:cs typeface="Consolas"/>
+              </a:rPr>
+              <a:t>$ORACLE_HOME/dbs</a:t>
+            </a:r>
+            <a:r>
+              <a:rPr sz="1700" b="0">
+                <a:solidFill>
+                  <a:srgbClr val="222222"/>
+                </a:solidFill>
+                <a:latin typeface="맑은 고딕"/>
+              </a:rPr>
+              <a:t> 에는 없다</a:t>
             </a:r>
           </a:p>
           <a:p>
@@ -12107,7 +13584,17 @@
                 </a:solidFill>
                 <a:latin typeface="맑은 고딕"/>
               </a:rPr>
-              <a:t>•  실측 → `/u01/app/oracle/diag/rdbms/chicago/chicago/trace/`</a:t>
+              <a:t>•  실측 → </a:t>
+            </a:r>
+            <a:r>
+              <a:rPr sz="1700" b="0">
+                <a:solidFill>
+                  <a:srgbClr val="222222"/>
+                </a:solidFill>
+                <a:latin typeface="Consolas"/>
+                <a:cs typeface="Consolas"/>
+              </a:rPr>
+              <a:t>/u01/app/oracle/diag/rdbms/chicago/chicago/trace/</a:t>
             </a:r>
           </a:p>
           <a:p>
@@ -12302,7 +13789,17 @@
                 </a:solidFill>
                 <a:latin typeface="맑은 고딕"/>
               </a:rPr>
-              <a:t>•  `export configuration to '/tmp/ch14_abs.xml';`</a:t>
+              <a:t>•  </a:t>
+            </a:r>
+            <a:r>
+              <a:rPr sz="1700" b="0">
+                <a:solidFill>
+                  <a:srgbClr val="222222"/>
+                </a:solidFill>
+                <a:latin typeface="Consolas"/>
+                <a:cs typeface="Consolas"/>
+              </a:rPr>
+              <a:t>export configuration to '/tmp/ch14_abs.xml';</a:t>
             </a:r>
           </a:p>
           <a:p>
@@ -12318,7 +13815,17 @@
                 </a:solidFill>
                 <a:latin typeface="맑은 고딕"/>
               </a:rPr>
-              <a:t>•  → **`ORA-16540: invalid argument`**</a:t>
+              <a:t>•  → </a:t>
+            </a:r>
+            <a:r>
+              <a:rPr sz="1700" b="1">
+                <a:solidFill>
+                  <a:srgbClr val="222222"/>
+                </a:solidFill>
+                <a:latin typeface="Consolas"/>
+                <a:cs typeface="Consolas"/>
+              </a:rPr>
+              <a:t>ORA-16540: invalid argument</a:t>
             </a:r>
           </a:p>
           <a:p>
@@ -12334,7 +13841,17 @@
                 </a:solidFill>
                 <a:latin typeface="맑은 고딕"/>
               </a:rPr>
-              <a:t>•  `ORA-06512: at "SYS.DBMS_DRS", line 1947`</a:t>
+              <a:t>•  </a:t>
+            </a:r>
+            <a:r>
+              <a:rPr sz="1700" b="0">
+                <a:solidFill>
+                  <a:srgbClr val="222222"/>
+                </a:solidFill>
+                <a:latin typeface="Consolas"/>
+                <a:cs typeface="Consolas"/>
+              </a:rPr>
+              <a:t>ORA-06512: at "SYS.DBMS_DRS", line 1947</a:t>
             </a:r>
           </a:p>
           <a:p>
@@ -12350,7 +13867,35 @@
                 </a:solidFill>
                 <a:latin typeface="맑은 고딕"/>
               </a:rPr>
-              <a:t>•  `/` 아래도 같은 오류 — **위치와 무관**</a:t>
+              <a:t>•  </a:t>
+            </a:r>
+            <a:r>
+              <a:rPr sz="1700" b="0">
+                <a:solidFill>
+                  <a:srgbClr val="222222"/>
+                </a:solidFill>
+                <a:latin typeface="Consolas"/>
+                <a:cs typeface="Consolas"/>
+              </a:rPr>
+              <a:t>/</a:t>
+            </a:r>
+            <a:r>
+              <a:rPr sz="1700" b="0">
+                <a:solidFill>
+                  <a:srgbClr val="222222"/>
+                </a:solidFill>
+                <a:latin typeface="맑은 고딕"/>
+              </a:rPr>
+              <a:t> 아래도 같은 오류 — </a:t>
+            </a:r>
+            <a:r>
+              <a:rPr sz="1700" b="1">
+                <a:solidFill>
+                  <a:srgbClr val="222222"/>
+                </a:solidFill>
+                <a:latin typeface="맑은 고딕"/>
+              </a:rPr>
+              <a:t>위치와 무관</a:t>
             </a:r>
           </a:p>
           <a:p>
@@ -12366,7 +13911,16 @@
                 </a:solidFill>
                 <a:latin typeface="맑은 고딕"/>
               </a:rPr>
-              <a:t>•  인자는 경로가 아니라 **파일 이름**</a:t>
+              <a:t>•  인자는 경로가 아니라 </a:t>
+            </a:r>
+            <a:r>
+              <a:rPr sz="1700" b="1">
+                <a:solidFill>
+                  <a:srgbClr val="222222"/>
+                </a:solidFill>
+                <a:latin typeface="맑은 고딕"/>
+              </a:rPr>
+              <a:t>파일 이름</a:t>
             </a:r>
           </a:p>
         </p:txBody>
@@ -12545,7 +14099,17 @@
                 </a:solidFill>
                 <a:latin typeface="맑은 고딕"/>
               </a:rPr>
-              <a:t>•  `import configuration from 'ch14_export.xml';`</a:t>
+              <a:t>•  </a:t>
+            </a:r>
+            <a:r>
+              <a:rPr sz="1700" b="0">
+                <a:solidFill>
+                  <a:srgbClr val="222222"/>
+                </a:solidFill>
+                <a:latin typeface="Consolas"/>
+                <a:cs typeface="Consolas"/>
+              </a:rPr>
+              <a:t>import configuration from 'ch14_export.xml';</a:t>
             </a:r>
           </a:p>
           <a:p>
@@ -12561,7 +14125,17 @@
                 </a:solidFill>
                 <a:latin typeface="맑은 고딕"/>
               </a:rPr>
-              <a:t>•  → **`ORA-16504: configuration already exists`**</a:t>
+              <a:t>•  → </a:t>
+            </a:r>
+            <a:r>
+              <a:rPr sz="1700" b="1">
+                <a:solidFill>
+                  <a:srgbClr val="222222"/>
+                </a:solidFill>
+                <a:latin typeface="Consolas"/>
+                <a:cs typeface="Consolas"/>
+              </a:rPr>
+              <a:t>ORA-16504: configuration already exists</a:t>
             </a:r>
           </a:p>
           <a:p>
@@ -12593,7 +14167,36 @@
                 </a:solidFill>
                 <a:latin typeface="맑은 고딕"/>
               </a:rPr>
-              <a:t>•  복구는 `REMOVE CONFIGURATION` → `IMPORT`</a:t>
+              <a:t>•  복구는 </a:t>
+            </a:r>
+            <a:r>
+              <a:rPr sz="1700" b="0">
+                <a:solidFill>
+                  <a:srgbClr val="222222"/>
+                </a:solidFill>
+                <a:latin typeface="Consolas"/>
+                <a:cs typeface="Consolas"/>
+              </a:rPr>
+              <a:t>REMOVE CONFIGURATION</a:t>
+            </a:r>
+            <a:r>
+              <a:rPr sz="1700" b="0">
+                <a:solidFill>
+                  <a:srgbClr val="222222"/>
+                </a:solidFill>
+                <a:latin typeface="맑은 고딕"/>
+              </a:rPr>
+              <a:t> → </a:t>
+            </a:r>
+            <a:r>
+              <a:rPr sz="1700" b="0">
+                <a:solidFill>
+                  <a:srgbClr val="222222"/>
+                </a:solidFill>
+                <a:latin typeface="Consolas"/>
+                <a:cs typeface="Consolas"/>
+              </a:rPr>
+              <a:t>IMPORT</a:t>
             </a:r>
           </a:p>
           <a:p>
@@ -12609,7 +14212,25 @@
                 </a:solidFill>
                 <a:latin typeface="맑은 고딕"/>
               </a:rPr>
-              <a:t>•  그사이 **감시 공백 구간**이 생긴다</a:t>
+              <a:t>•  그사이 </a:t>
+            </a:r>
+            <a:r>
+              <a:rPr sz="1700" b="1">
+                <a:solidFill>
+                  <a:srgbClr val="222222"/>
+                </a:solidFill>
+                <a:latin typeface="맑은 고딕"/>
+              </a:rPr>
+              <a:t>감시 공백 구간</a:t>
+            </a:r>
+            <a:r>
+              <a:rPr sz="1700" b="0">
+                <a:solidFill>
+                  <a:srgbClr val="222222"/>
+                </a:solidFill>
+                <a:latin typeface="맑은 고딕"/>
+              </a:rPr>
+              <a:t>이 생긴다</a:t>
             </a:r>
           </a:p>
         </p:txBody>
@@ -12788,7 +14409,25 @@
                 </a:solidFill>
                 <a:latin typeface="맑은 고딕"/>
               </a:rPr>
-              <a:t>•  13장 구성 직후 — **8,192** 바이트</a:t>
+              <a:t>•  13장 구성 직후 — </a:t>
+            </a:r>
+            <a:r>
+              <a:rPr sz="1700" b="1">
+                <a:solidFill>
+                  <a:srgbClr val="222222"/>
+                </a:solidFill>
+                <a:latin typeface="맑은 고딕"/>
+              </a:rPr>
+              <a:t>8,192</a:t>
+            </a:r>
+            <a:r>
+              <a:rPr sz="1700" b="0">
+                <a:solidFill>
+                  <a:srgbClr val="222222"/>
+                </a:solidFill>
+                <a:latin typeface="맑은 고딕"/>
+              </a:rPr>
+              <a:t> 바이트</a:t>
             </a:r>
           </a:p>
           <a:p>
@@ -12804,7 +14443,25 @@
                 </a:solidFill>
                 <a:latin typeface="맑은 고딕"/>
               </a:rPr>
-              <a:t>•  14장 속성·FSFO 를 손본 뒤 — **12,288** 바이트</a:t>
+              <a:t>•  14장 속성·FSFO 를 손본 뒤 — </a:t>
+            </a:r>
+            <a:r>
+              <a:rPr sz="1700" b="1">
+                <a:solidFill>
+                  <a:srgbClr val="222222"/>
+                </a:solidFill>
+                <a:latin typeface="맑은 고딕"/>
+              </a:rPr>
+              <a:t>12,288</a:t>
+            </a:r>
+            <a:r>
+              <a:rPr sz="1700" b="0">
+                <a:solidFill>
+                  <a:srgbClr val="222222"/>
+                </a:solidFill>
+                <a:latin typeface="맑은 고딕"/>
+              </a:rPr>
+              <a:t> 바이트</a:t>
             </a:r>
           </a:p>
           <a:p>
@@ -12836,7 +14493,26 @@
                 </a:solidFill>
                 <a:latin typeface="맑은 고딕"/>
               </a:rPr>
-              <a:t>•  XML 을 정기적으로 남기고 `diff` 로 비교</a:t>
+              <a:t>•  XML 을 정기적으로 남기고 </a:t>
+            </a:r>
+            <a:r>
+              <a:rPr sz="1700" b="0">
+                <a:solidFill>
+                  <a:srgbClr val="222222"/>
+                </a:solidFill>
+                <a:latin typeface="Consolas"/>
+                <a:cs typeface="Consolas"/>
+              </a:rPr>
+              <a:t>diff</a:t>
+            </a:r>
+            <a:r>
+              <a:rPr sz="1700" b="0">
+                <a:solidFill>
+                  <a:srgbClr val="222222"/>
+                </a:solidFill>
+                <a:latin typeface="맑은 고딕"/>
+              </a:rPr>
+              <a:t> 로 비교</a:t>
             </a:r>
           </a:p>
         </p:txBody>
@@ -13286,7 +14962,16 @@
                 </a:solidFill>
                 <a:latin typeface="맑은 고딕"/>
               </a:rPr>
-              <a:t>•  판단 주체 = **관측자(Observer)**</a:t>
+              <a:t>•  판단 주체 = </a:t>
+            </a:r>
+            <a:r>
+              <a:rPr sz="1700" b="1">
+                <a:solidFill>
+                  <a:srgbClr val="222222"/>
+                </a:solidFill>
+                <a:latin typeface="맑은 고딕"/>
+              </a:rPr>
+              <a:t>관측자(Observer)</a:t>
             </a:r>
           </a:p>
           <a:p>
@@ -13302,7 +14987,16 @@
                 </a:solidFill>
                 <a:latin typeface="맑은 고딕"/>
               </a:rPr>
-              <a:t>•  Standby 가 스스로 판단하면 **split brain**</a:t>
+              <a:t>•  Standby 가 스스로 판단하면 </a:t>
+            </a:r>
+            <a:r>
+              <a:rPr sz="1700" b="1">
+                <a:solidFill>
+                  <a:srgbClr val="222222"/>
+                </a:solidFill>
+                <a:latin typeface="맑은 고딕"/>
+              </a:rPr>
+              <a:t>split brain</a:t>
             </a:r>
           </a:p>
           <a:p>
@@ -13334,7 +15028,25 @@
                 </a:solidFill>
                 <a:latin typeface="맑은 고딕"/>
               </a:rPr>
-              <a:t>•  Primary·Standby 와 **다른 호스트**에 둔다</a:t>
+              <a:t>•  Primary·Standby 와 </a:t>
+            </a:r>
+            <a:r>
+              <a:rPr sz="1700" b="1">
+                <a:solidFill>
+                  <a:srgbClr val="222222"/>
+                </a:solidFill>
+                <a:latin typeface="맑은 고딕"/>
+              </a:rPr>
+              <a:t>다른 호스트</a:t>
+            </a:r>
+            <a:r>
+              <a:rPr sz="1700" b="0">
+                <a:solidFill>
+                  <a:srgbClr val="222222"/>
+                </a:solidFill>
+                <a:latin typeface="맑은 고딕"/>
+              </a:rPr>
+              <a:t>에 둔다</a:t>
             </a:r>
           </a:p>
         </p:txBody>
@@ -13513,7 +15225,17 @@
                 </a:solidFill>
                 <a:latin typeface="맑은 고딕"/>
               </a:rPr>
-              <a:t>•  `START OBSERVER ... IN BACKGROUND`</a:t>
+              <a:t>•  </a:t>
+            </a:r>
+            <a:r>
+              <a:rPr sz="1700" b="0">
+                <a:solidFill>
+                  <a:srgbClr val="222222"/>
+                </a:solidFill>
+                <a:latin typeface="Consolas"/>
+                <a:cs typeface="Consolas"/>
+              </a:rPr>
+              <a:t>START OBSERVER ... IN BACKGROUND</a:t>
             </a:r>
           </a:p>
           <a:p>
@@ -13529,7 +15251,17 @@
                 </a:solidFill>
                 <a:latin typeface="맑은 고딕"/>
               </a:rPr>
-              <a:t>•  `CONNECT IDENTIFIER IS &lt;connect identifier&gt;`</a:t>
+              <a:t>•  </a:t>
+            </a:r>
+            <a:r>
+              <a:rPr sz="1700" b="0">
+                <a:solidFill>
+                  <a:srgbClr val="222222"/>
+                </a:solidFill>
+                <a:latin typeface="Consolas"/>
+                <a:cs typeface="Consolas"/>
+              </a:rPr>
+              <a:t>CONNECT IDENTIFIER IS &lt;connect identifier&gt;</a:t>
             </a:r>
           </a:p>
           <a:p>
@@ -13545,7 +15277,16 @@
                 </a:solidFill>
                 <a:latin typeface="맑은 고딕"/>
               </a:rPr>
-              <a:t>•  → **tnsnames 로 접속하는 클라이언트**</a:t>
+              <a:t>•  → </a:t>
+            </a:r>
+            <a:r>
+              <a:rPr sz="1700" b="1">
+                <a:solidFill>
+                  <a:srgbClr val="222222"/>
+                </a:solidFill>
+                <a:latin typeface="맑은 고딕"/>
+              </a:rPr>
+              <a:t>tnsnames 로 접속하는 클라이언트</a:t>
             </a:r>
           </a:p>
           <a:p>
@@ -13561,7 +15302,26 @@
                 </a:solidFill>
                 <a:latin typeface="맑은 고딕"/>
               </a:rPr>
-              <a:t>•  `FILE IS &lt;observer file&gt;` — 상태를 파일에 남긴다</a:t>
+              <a:t>•  </a:t>
+            </a:r>
+            <a:r>
+              <a:rPr sz="1700" b="0">
+                <a:solidFill>
+                  <a:srgbClr val="222222"/>
+                </a:solidFill>
+                <a:latin typeface="Consolas"/>
+                <a:cs typeface="Consolas"/>
+              </a:rPr>
+              <a:t>FILE IS &lt;observer file&gt;</a:t>
+            </a:r>
+            <a:r>
+              <a:rPr sz="1700" b="0">
+                <a:solidFill>
+                  <a:srgbClr val="222222"/>
+                </a:solidFill>
+                <a:latin typeface="맑은 고딕"/>
+              </a:rPr>
+              <a:t> — 상태를 파일에 남긴다</a:t>
             </a:r>
           </a:p>
           <a:p>
@@ -13756,7 +15516,26 @@
                 </a:solidFill>
                 <a:latin typeface="맑은 고딕"/>
               </a:rPr>
-              <a:t>•  `Corrupted Controlfile` YES</a:t>
+              <a:t>•  </a:t>
+            </a:r>
+            <a:r>
+              <a:rPr sz="1700" b="0">
+                <a:solidFill>
+                  <a:srgbClr val="222222"/>
+                </a:solidFill>
+                <a:latin typeface="Consolas"/>
+                <a:cs typeface="Consolas"/>
+              </a:rPr>
+              <a:t>Corrupted Controlfile</a:t>
+            </a:r>
+            <a:r>
+              <a:rPr sz="1700" b="0">
+                <a:solidFill>
+                  <a:srgbClr val="222222"/>
+                </a:solidFill>
+                <a:latin typeface="맑은 고딕"/>
+              </a:rPr>
+              <a:t> YES</a:t>
             </a:r>
           </a:p>
           <a:p>
@@ -13772,7 +15551,26 @@
                 </a:solidFill>
                 <a:latin typeface="맑은 고딕"/>
               </a:rPr>
-              <a:t>•  `Corrupted Dictionary` YES</a:t>
+              <a:t>•  </a:t>
+            </a:r>
+            <a:r>
+              <a:rPr sz="1700" b="0">
+                <a:solidFill>
+                  <a:srgbClr val="222222"/>
+                </a:solidFill>
+                <a:latin typeface="Consolas"/>
+                <a:cs typeface="Consolas"/>
+              </a:rPr>
+              <a:t>Corrupted Dictionary</a:t>
+            </a:r>
+            <a:r>
+              <a:rPr sz="1700" b="0">
+                <a:solidFill>
+                  <a:srgbClr val="222222"/>
+                </a:solidFill>
+                <a:latin typeface="맑은 고딕"/>
+              </a:rPr>
+              <a:t> YES</a:t>
             </a:r>
           </a:p>
           <a:p>
@@ -13788,7 +15586,35 @@
                 </a:solidFill>
                 <a:latin typeface="맑은 고딕"/>
               </a:rPr>
-              <a:t>•  `Inaccessible Logfile` **NO**</a:t>
+              <a:t>•  </a:t>
+            </a:r>
+            <a:r>
+              <a:rPr sz="1700" b="0">
+                <a:solidFill>
+                  <a:srgbClr val="222222"/>
+                </a:solidFill>
+                <a:latin typeface="Consolas"/>
+                <a:cs typeface="Consolas"/>
+              </a:rPr>
+              <a:t>Inaccessible Logfile</a:t>
+            </a:r>
+            <a:r>
+              <a:rPr sz="1700" b="0">
+                <a:solidFill>
+                  <a:srgbClr val="222222"/>
+                </a:solidFill>
+                <a:latin typeface="맑은 고딕"/>
+              </a:rPr>
+              <a:t> </a:t>
+            </a:r>
+            <a:r>
+              <a:rPr sz="1700" b="1">
+                <a:solidFill>
+                  <a:srgbClr val="222222"/>
+                </a:solidFill>
+                <a:latin typeface="맑은 고딕"/>
+              </a:rPr>
+              <a:t>NO</a:t>
             </a:r>
           </a:p>
           <a:p>
@@ -13804,7 +15630,35 @@
                 </a:solidFill>
                 <a:latin typeface="맑은 고딕"/>
               </a:rPr>
-              <a:t>•  `Stuck Archiver` **NO**</a:t>
+              <a:t>•  </a:t>
+            </a:r>
+            <a:r>
+              <a:rPr sz="1700" b="0">
+                <a:solidFill>
+                  <a:srgbClr val="222222"/>
+                </a:solidFill>
+                <a:latin typeface="Consolas"/>
+                <a:cs typeface="Consolas"/>
+              </a:rPr>
+              <a:t>Stuck Archiver</a:t>
+            </a:r>
+            <a:r>
+              <a:rPr sz="1700" b="0">
+                <a:solidFill>
+                  <a:srgbClr val="222222"/>
+                </a:solidFill>
+                <a:latin typeface="맑은 고딕"/>
+              </a:rPr>
+              <a:t> </a:t>
+            </a:r>
+            <a:r>
+              <a:rPr sz="1700" b="1">
+                <a:solidFill>
+                  <a:srgbClr val="222222"/>
+                </a:solidFill>
+                <a:latin typeface="맑은 고딕"/>
+              </a:rPr>
+              <a:t>NO</a:t>
             </a:r>
           </a:p>
           <a:p>
@@ -13820,7 +15674,26 @@
                 </a:solidFill>
                 <a:latin typeface="맑은 고딕"/>
               </a:rPr>
-              <a:t>•  `Datafile Write Errors` YES</a:t>
+              <a:t>•  </a:t>
+            </a:r>
+            <a:r>
+              <a:rPr sz="1700" b="0">
+                <a:solidFill>
+                  <a:srgbClr val="222222"/>
+                </a:solidFill>
+                <a:latin typeface="Consolas"/>
+                <a:cs typeface="Consolas"/>
+              </a:rPr>
+              <a:t>Datafile Write Errors</a:t>
+            </a:r>
+            <a:r>
+              <a:rPr sz="1700" b="0">
+                <a:solidFill>
+                  <a:srgbClr val="222222"/>
+                </a:solidFill>
+                <a:latin typeface="맑은 고딕"/>
+              </a:rPr>
+              <a:t> YES</a:t>
             </a:r>
           </a:p>
         </p:txBody>
@@ -13999,7 +15872,17 @@
                 </a:solidFill>
                 <a:latin typeface="맑은 고딕"/>
               </a:rPr>
-              <a:t>•  `enable fast_start failover`</a:t>
+              <a:t>•  </a:t>
+            </a:r>
+            <a:r>
+              <a:rPr sz="1700" b="0">
+                <a:solidFill>
+                  <a:srgbClr val="222222"/>
+                </a:solidFill>
+                <a:latin typeface="Consolas"/>
+                <a:cs typeface="Consolas"/>
+              </a:rPr>
+              <a:t>enable fast_start failover</a:t>
             </a:r>
           </a:p>
           <a:p>
@@ -14015,7 +15898,17 @@
                 </a:solidFill>
                 <a:latin typeface="맑은 고딕"/>
               </a:rPr>
-              <a:t>•  → **`Warning: ORA-16827: Flashback Database is disabled`**</a:t>
+              <a:t>•  → </a:t>
+            </a:r>
+            <a:r>
+              <a:rPr sz="1700" b="1">
+                <a:solidFill>
+                  <a:srgbClr val="222222"/>
+                </a:solidFill>
+                <a:latin typeface="Consolas"/>
+                <a:cs typeface="Consolas"/>
+              </a:rPr>
+              <a:t>Warning: ORA-16827: Flashback Database is disabled</a:t>
             </a:r>
           </a:p>
           <a:p>
@@ -14031,7 +15924,16 @@
                 </a:solidFill>
                 <a:latin typeface="맑은 고딕"/>
               </a:rPr>
-              <a:t>•  **Error 가 아니라 Warning. 그리고 켜졌다**</a:t>
+              <a:t>•  </a:t>
+            </a:r>
+            <a:r>
+              <a:rPr sz="1700" b="1">
+                <a:solidFill>
+                  <a:srgbClr val="222222"/>
+                </a:solidFill>
+                <a:latin typeface="맑은 고딕"/>
+              </a:rPr>
+              <a:t>Error 가 아니라 Warning. 그리고 켜졌다</a:t>
             </a:r>
           </a:p>
           <a:p>
@@ -14047,7 +15949,25 @@
                 </a:solidFill>
                 <a:latin typeface="맑은 고딕"/>
               </a:rPr>
-              <a:t>•  13장 보호 모드 변경은 ORA-16627 로 **거부**했다</a:t>
+              <a:t>•  13장 보호 모드 변경은 ORA-16627 로 </a:t>
+            </a:r>
+            <a:r>
+              <a:rPr sz="1700" b="1">
+                <a:solidFill>
+                  <a:srgbClr val="222222"/>
+                </a:solidFill>
+                <a:latin typeface="맑은 고딕"/>
+              </a:rPr>
+              <a:t>거부</a:t>
+            </a:r>
+            <a:r>
+              <a:rPr sz="1700" b="0">
+                <a:solidFill>
+                  <a:srgbClr val="222222"/>
+                </a:solidFill>
+                <a:latin typeface="맑은 고딕"/>
+              </a:rPr>
+              <a:t>했다</a:t>
             </a:r>
           </a:p>
           <a:p>
@@ -14063,7 +15983,16 @@
                 </a:solidFill>
                 <a:latin typeface="맑은 고딕"/>
               </a:rPr>
-              <a:t>•  **검사 강도가 명령마다 다르다**</a:t>
+              <a:t>•  </a:t>
+            </a:r>
+            <a:r>
+              <a:rPr sz="1700" b="1">
+                <a:solidFill>
+                  <a:srgbClr val="222222"/>
+                </a:solidFill>
+                <a:latin typeface="맑은 고딕"/>
+              </a:rPr>
+              <a:t>검사 강도가 명령마다 다르다</a:t>
             </a:r>
           </a:p>
         </p:txBody>
@@ -14242,7 +16171,17 @@
                 </a:solidFill>
                 <a:latin typeface="맑은 고딕"/>
               </a:rPr>
-              <a:t>•  `boston  - (*) Physical standby database`</a:t>
+              <a:t>•  </a:t>
+            </a:r>
+            <a:r>
+              <a:rPr sz="1700" b="0">
+                <a:solidFill>
+                  <a:srgbClr val="222222"/>
+                </a:solidFill>
+                <a:latin typeface="Consolas"/>
+                <a:cs typeface="Consolas"/>
+              </a:rPr>
+              <a:t>boston  - (*) Physical standby database</a:t>
             </a:r>
           </a:p>
           <a:p>
@@ -14258,7 +16197,26 @@
                 </a:solidFill>
                 <a:latin typeface="맑은 고딕"/>
               </a:rPr>
-              <a:t>•  `(*) Fast-Start Failover target` — 범례까지 붙는다</a:t>
+              <a:t>•  </a:t>
+            </a:r>
+            <a:r>
+              <a:rPr sz="1700" b="0">
+                <a:solidFill>
+                  <a:srgbClr val="222222"/>
+                </a:solidFill>
+                <a:latin typeface="Consolas"/>
+                <a:cs typeface="Consolas"/>
+              </a:rPr>
+              <a:t>(*) Fast-Start Failover target</a:t>
+            </a:r>
+            <a:r>
+              <a:rPr sz="1700" b="0">
+                <a:solidFill>
+                  <a:srgbClr val="222222"/>
+                </a:solidFill>
+                <a:latin typeface="맑은 고딕"/>
+              </a:rPr>
+              <a:t> — 범례까지 붙는다</a:t>
             </a:r>
           </a:p>
           <a:p>
@@ -14274,7 +16232,17 @@
                 </a:solidFill>
                 <a:latin typeface="맑은 고딕"/>
               </a:rPr>
-              <a:t>•  `Warning: ORA-16819: observer not started`</a:t>
+              <a:t>•  </a:t>
+            </a:r>
+            <a:r>
+              <a:rPr sz="1700" b="0">
+                <a:solidFill>
+                  <a:srgbClr val="222222"/>
+                </a:solidFill>
+                <a:latin typeface="Consolas"/>
+                <a:cs typeface="Consolas"/>
+              </a:rPr>
+              <a:t>Warning: ORA-16819: observer not started</a:t>
             </a:r>
           </a:p>
           <a:p>
@@ -14290,7 +16258,17 @@
                 </a:solidFill>
                 <a:latin typeface="맑은 고딕"/>
               </a:rPr>
-              <a:t>•  `Enabled in Potential Data Loss Mode`</a:t>
+              <a:t>•  </a:t>
+            </a:r>
+            <a:r>
+              <a:rPr sz="1700" b="0">
+                <a:solidFill>
+                  <a:srgbClr val="222222"/>
+                </a:solidFill>
+                <a:latin typeface="Consolas"/>
+                <a:cs typeface="Consolas"/>
+              </a:rPr>
+              <a:t>Enabled in Potential Data Loss Mode</a:t>
             </a:r>
           </a:p>
           <a:p>
@@ -14306,7 +16284,16 @@
                 </a:solidFill>
                 <a:latin typeface="맑은 고딕"/>
               </a:rPr>
-              <a:t>•  Configuration Status: **WARNING**</a:t>
+              <a:t>•  Configuration Status: </a:t>
+            </a:r>
+            <a:r>
+              <a:rPr sz="1700" b="1">
+                <a:solidFill>
+                  <a:srgbClr val="222222"/>
+                </a:solidFill>
+                <a:latin typeface="맑은 고딕"/>
+              </a:rPr>
+              <a:t>WARNING</a:t>
             </a:r>
           </a:p>
         </p:txBody>
@@ -14740,7 +16727,26 @@
                 </a:solidFill>
                 <a:latin typeface="맑은 고딕"/>
               </a:rPr>
-              <a:t>•  `set property 'FastStartFailoverTarget'=''` 양쪽</a:t>
+              <a:t>•  </a:t>
+            </a:r>
+            <a:r>
+              <a:rPr sz="1700" b="0">
+                <a:solidFill>
+                  <a:srgbClr val="222222"/>
+                </a:solidFill>
+                <a:latin typeface="Consolas"/>
+                <a:cs typeface="Consolas"/>
+              </a:rPr>
+              <a:t>set property 'FastStartFailoverTarget'=''</a:t>
+            </a:r>
+            <a:r>
+              <a:rPr sz="1700" b="0">
+                <a:solidFill>
+                  <a:srgbClr val="222222"/>
+                </a:solidFill>
+                <a:latin typeface="맑은 고딕"/>
+              </a:rPr>
+              <a:t> 양쪽</a:t>
             </a:r>
           </a:p>
           <a:p>
@@ -14756,7 +16762,35 @@
                 </a:solidFill>
                 <a:latin typeface="맑은 고딕"/>
               </a:rPr>
-              <a:t>•  `Fast-Start Failover:` **여전히 Enabled**</a:t>
+              <a:t>•  </a:t>
+            </a:r>
+            <a:r>
+              <a:rPr sz="1700" b="0">
+                <a:solidFill>
+                  <a:srgbClr val="222222"/>
+                </a:solidFill>
+                <a:latin typeface="Consolas"/>
+                <a:cs typeface="Consolas"/>
+              </a:rPr>
+              <a:t>Fast-Start Failover:</a:t>
+            </a:r>
+            <a:r>
+              <a:rPr sz="1700" b="0">
+                <a:solidFill>
+                  <a:srgbClr val="222222"/>
+                </a:solidFill>
+                <a:latin typeface="맑은 고딕"/>
+              </a:rPr>
+              <a:t> </a:t>
+            </a:r>
+            <a:r>
+              <a:rPr sz="1700" b="1">
+                <a:solidFill>
+                  <a:srgbClr val="222222"/>
+                </a:solidFill>
+                <a:latin typeface="맑은 고딕"/>
+              </a:rPr>
+              <a:t>여전히 Enabled</a:t>
             </a:r>
           </a:p>
           <a:p>
@@ -14772,7 +16806,36 @@
                 </a:solidFill>
                 <a:latin typeface="맑은 고딕"/>
               </a:rPr>
-              <a:t>•  `Potential Targets: (none)` 인데 `Active Target: boston`</a:t>
+              <a:t>•  </a:t>
+            </a:r>
+            <a:r>
+              <a:rPr sz="1700" b="0">
+                <a:solidFill>
+                  <a:srgbClr val="222222"/>
+                </a:solidFill>
+                <a:latin typeface="Consolas"/>
+                <a:cs typeface="Consolas"/>
+              </a:rPr>
+              <a:t>Potential Targets: (none)</a:t>
+            </a:r>
+            <a:r>
+              <a:rPr sz="1700" b="0">
+                <a:solidFill>
+                  <a:srgbClr val="222222"/>
+                </a:solidFill>
+                <a:latin typeface="맑은 고딕"/>
+              </a:rPr>
+              <a:t> 인데 </a:t>
+            </a:r>
+            <a:r>
+              <a:rPr sz="1700" b="0">
+                <a:solidFill>
+                  <a:srgbClr val="222222"/>
+                </a:solidFill>
+                <a:latin typeface="Consolas"/>
+                <a:cs typeface="Consolas"/>
+              </a:rPr>
+              <a:t>Active Target: boston</a:t>
             </a:r>
           </a:p>
           <a:p>
@@ -14788,7 +16851,16 @@
                 </a:solidFill>
                 <a:latin typeface="맑은 고딕"/>
               </a:rPr>
-              <a:t>•  기능은 켜져 있고 설정만 반쯤 지워진 **중간 상태**</a:t>
+              <a:t>•  기능은 켜져 있고 설정만 반쯤 지워진 </a:t>
+            </a:r>
+            <a:r>
+              <a:rPr sz="1700" b="1">
+                <a:solidFill>
+                  <a:srgbClr val="222222"/>
+                </a:solidFill>
+                <a:latin typeface="맑은 고딕"/>
+              </a:rPr>
+              <a:t>중간 상태</a:t>
             </a:r>
           </a:p>
           <a:p>
@@ -14983,7 +17055,17 @@
                 </a:solidFill>
                 <a:latin typeface="맑은 고딕"/>
               </a:rPr>
-              <a:t>•  `disable fast_start failover`</a:t>
+              <a:t>•  </a:t>
+            </a:r>
+            <a:r>
+              <a:rPr sz="1700" b="0">
+                <a:solidFill>
+                  <a:srgbClr val="222222"/>
+                </a:solidFill>
+                <a:latin typeface="Consolas"/>
+                <a:cs typeface="Consolas"/>
+              </a:rPr>
+              <a:t>disable fast_start failover</a:t>
             </a:r>
           </a:p>
           <a:p>
@@ -14999,7 +17081,36 @@
                 </a:solidFill>
                 <a:latin typeface="맑은 고딕"/>
               </a:rPr>
-              <a:t>•  → `Fast-Start Failover: Disabled`, `Active Target: (none)`</a:t>
+              <a:t>•  → </a:t>
+            </a:r>
+            <a:r>
+              <a:rPr sz="1700" b="0">
+                <a:solidFill>
+                  <a:srgbClr val="222222"/>
+                </a:solidFill>
+                <a:latin typeface="Consolas"/>
+                <a:cs typeface="Consolas"/>
+              </a:rPr>
+              <a:t>Fast-Start Failover: Disabled</a:t>
+            </a:r>
+            <a:r>
+              <a:rPr sz="1700" b="0">
+                <a:solidFill>
+                  <a:srgbClr val="222222"/>
+                </a:solidFill>
+                <a:latin typeface="맑은 고딕"/>
+              </a:rPr>
+              <a:t>, </a:t>
+            </a:r>
+            <a:r>
+              <a:rPr sz="1700" b="0">
+                <a:solidFill>
+                  <a:srgbClr val="222222"/>
+                </a:solidFill>
+                <a:latin typeface="Consolas"/>
+                <a:cs typeface="Consolas"/>
+              </a:rPr>
+              <a:t>Active Target: (none)</a:t>
             </a:r>
           </a:p>
           <a:p>
@@ -15047,7 +17158,26 @@
                 </a:solidFill>
                 <a:latin typeface="맑은 고딕"/>
               </a:rPr>
-              <a:t>•  `OBSERVE ONLY` 로 먼저 관찰한 뒤 켜는 것이 안전</a:t>
+              <a:t>•  </a:t>
+            </a:r>
+            <a:r>
+              <a:rPr sz="1700" b="0">
+                <a:solidFill>
+                  <a:srgbClr val="222222"/>
+                </a:solidFill>
+                <a:latin typeface="Consolas"/>
+                <a:cs typeface="Consolas"/>
+              </a:rPr>
+              <a:t>OBSERVE ONLY</a:t>
+            </a:r>
+            <a:r>
+              <a:rPr sz="1700" b="0">
+                <a:solidFill>
+                  <a:srgbClr val="222222"/>
+                </a:solidFill>
+                <a:latin typeface="맑은 고딕"/>
+              </a:rPr>
+              <a:t> 로 먼저 관찰한 뒤 켜는 것이 안전</a:t>
             </a:r>
           </a:p>
         </p:txBody>
@@ -15226,7 +17356,26 @@
                 </a:solidFill>
                 <a:latin typeface="맑은 고딕"/>
               </a:rPr>
-              <a:t>•  `DISABLE` 직후에도 ORA-16819 가 남아 있었다</a:t>
+              <a:t>•  </a:t>
+            </a:r>
+            <a:r>
+              <a:rPr sz="1700" b="0">
+                <a:solidFill>
+                  <a:srgbClr val="222222"/>
+                </a:solidFill>
+                <a:latin typeface="Consolas"/>
+                <a:cs typeface="Consolas"/>
+              </a:rPr>
+              <a:t>DISABLE</a:t>
+            </a:r>
+            <a:r>
+              <a:rPr sz="1700" b="0">
+                <a:solidFill>
+                  <a:srgbClr val="222222"/>
+                </a:solidFill>
+                <a:latin typeface="맑은 고딕"/>
+              </a:rPr>
+              <a:t> 직후에도 ORA-16819 가 남아 있었다</a:t>
             </a:r>
           </a:p>
           <a:p>
@@ -15242,7 +17391,17 @@
                 </a:solidFill>
                 <a:latin typeface="맑은 고딕"/>
               </a:rPr>
-              <a:t>•  잠시 후 다시 조회 → `SUCCESS`</a:t>
+              <a:t>•  잠시 후 다시 조회 → </a:t>
+            </a:r>
+            <a:r>
+              <a:rPr sz="1700" b="0">
+                <a:solidFill>
+                  <a:srgbClr val="222222"/>
+                </a:solidFill>
+                <a:latin typeface="Consolas"/>
+                <a:cs typeface="Consolas"/>
+              </a:rPr>
+              <a:t>SUCCESS</a:t>
             </a:r>
           </a:p>
           <a:p>
@@ -15258,7 +17417,35 @@
                 </a:solidFill>
                 <a:latin typeface="맑은 고딕"/>
               </a:rPr>
-              <a:t>•  `status updated NN seconds ago` 의 **초를 함께 읽는다**</a:t>
+              <a:t>•  </a:t>
+            </a:r>
+            <a:r>
+              <a:rPr sz="1700" b="0">
+                <a:solidFill>
+                  <a:srgbClr val="222222"/>
+                </a:solidFill>
+                <a:latin typeface="Consolas"/>
+                <a:cs typeface="Consolas"/>
+              </a:rPr>
+              <a:t>status updated NN seconds ago</a:t>
+            </a:r>
+            <a:r>
+              <a:rPr sz="1700" b="0">
+                <a:solidFill>
+                  <a:srgbClr val="222222"/>
+                </a:solidFill>
+                <a:latin typeface="맑은 고딕"/>
+              </a:rPr>
+              <a:t> 의 </a:t>
+            </a:r>
+            <a:r>
+              <a:rPr sz="1700" b="1">
+                <a:solidFill>
+                  <a:srgbClr val="222222"/>
+                </a:solidFill>
+                <a:latin typeface="맑은 고딕"/>
+              </a:rPr>
+              <a:t>초를 함께 읽는다</a:t>
             </a:r>
           </a:p>
           <a:p>
@@ -15692,7 +17879,26 @@
                 </a:solidFill>
                 <a:latin typeface="맑은 고딕"/>
               </a:rPr>
-              <a:t>•  1층 `SHOW CONFIGURATION` — 분 단위. 설정과 다른 상태</a:t>
+              <a:t>•  1층 </a:t>
+            </a:r>
+            <a:r>
+              <a:rPr sz="1700" b="0">
+                <a:solidFill>
+                  <a:srgbClr val="222222"/>
+                </a:solidFill>
+                <a:latin typeface="Consolas"/>
+                <a:cs typeface="Consolas"/>
+              </a:rPr>
+              <a:t>SHOW CONFIGURATION</a:t>
+            </a:r>
+            <a:r>
+              <a:rPr sz="1700" b="0">
+                <a:solidFill>
+                  <a:srgbClr val="222222"/>
+                </a:solidFill>
+                <a:latin typeface="맑은 고딕"/>
+              </a:rPr>
+              <a:t> — 분 단위. 설정과 다른 상태</a:t>
             </a:r>
           </a:p>
           <a:p>
@@ -15708,7 +17914,26 @@
                 </a:solidFill>
                 <a:latin typeface="맑은 고딕"/>
               </a:rPr>
-              <a:t>•  2층 `V$DATAGUARD_STATS` — 분 단위. 지연 추세</a:t>
+              <a:t>•  2층 </a:t>
+            </a:r>
+            <a:r>
+              <a:rPr sz="1700" b="0">
+                <a:solidFill>
+                  <a:srgbClr val="222222"/>
+                </a:solidFill>
+                <a:latin typeface="Consolas"/>
+                <a:cs typeface="Consolas"/>
+              </a:rPr>
+              <a:t>V$DATAGUARD_STATS</a:t>
+            </a:r>
+            <a:r>
+              <a:rPr sz="1700" b="0">
+                <a:solidFill>
+                  <a:srgbClr val="222222"/>
+                </a:solidFill>
+                <a:latin typeface="맑은 고딕"/>
+              </a:rPr>
+              <a:t> — 분 단위. 지연 추세</a:t>
             </a:r>
           </a:p>
           <a:p>
@@ -15724,7 +17949,26 @@
                 </a:solidFill>
                 <a:latin typeface="맑은 고딕"/>
               </a:rPr>
-              <a:t>•  3층 `V$DATAGUARD_STATUS` — 필요시. 사건의 흐름</a:t>
+              <a:t>•  3층 </a:t>
+            </a:r>
+            <a:r>
+              <a:rPr sz="1700" b="0">
+                <a:solidFill>
+                  <a:srgbClr val="222222"/>
+                </a:solidFill>
+                <a:latin typeface="Consolas"/>
+                <a:cs typeface="Consolas"/>
+              </a:rPr>
+              <a:t>V$DATAGUARD_STATUS</a:t>
+            </a:r>
+            <a:r>
+              <a:rPr sz="1700" b="0">
+                <a:solidFill>
+                  <a:srgbClr val="222222"/>
+                </a:solidFill>
+                <a:latin typeface="맑은 고딕"/>
+              </a:rPr>
+              <a:t> — 필요시. 사건의 흐름</a:t>
             </a:r>
           </a:p>
           <a:p>
@@ -15740,7 +17984,35 @@
                 </a:solidFill>
                 <a:latin typeface="맑은 고딕"/>
               </a:rPr>
-              <a:t>•  4층 `VALIDATE DATABASE` — 일·주 단위. **전환 가능 여부**</a:t>
+              <a:t>•  4층 </a:t>
+            </a:r>
+            <a:r>
+              <a:rPr sz="1700" b="0">
+                <a:solidFill>
+                  <a:srgbClr val="222222"/>
+                </a:solidFill>
+                <a:latin typeface="Consolas"/>
+                <a:cs typeface="Consolas"/>
+              </a:rPr>
+              <a:t>VALIDATE DATABASE</a:t>
+            </a:r>
+            <a:r>
+              <a:rPr sz="1700" b="0">
+                <a:solidFill>
+                  <a:srgbClr val="222222"/>
+                </a:solidFill>
+                <a:latin typeface="맑은 고딕"/>
+              </a:rPr>
+              <a:t> — 일·주 단위. </a:t>
+            </a:r>
+            <a:r>
+              <a:rPr sz="1700" b="1">
+                <a:solidFill>
+                  <a:srgbClr val="222222"/>
+                </a:solidFill>
+                <a:latin typeface="맑은 고딕"/>
+              </a:rPr>
+              <a:t>전환 가능 여부</a:t>
             </a:r>
           </a:p>
           <a:p>
@@ -15756,7 +18028,16 @@
                 </a:solidFill>
                 <a:latin typeface="맑은 고딕"/>
               </a:rPr>
-              <a:t>•  5층 알림 로그 — 문제 발생 시. **근본 원인**</a:t>
+              <a:t>•  5층 알림 로그 — 문제 발생 시. </a:t>
+            </a:r>
+            <a:r>
+              <a:rPr sz="1700" b="1">
+                <a:solidFill>
+                  <a:srgbClr val="222222"/>
+                </a:solidFill>
+                <a:latin typeface="맑은 고딕"/>
+              </a:rPr>
+              <a:t>근본 원인</a:t>
             </a:r>
           </a:p>
         </p:txBody>
@@ -15967,7 +18248,26 @@
                 </a:solidFill>
                 <a:latin typeface="맑은 고딕"/>
               </a:rPr>
-              <a:t>•  평소에는 늘 `Yes` 라 넣을 필요를 못 느낀다</a:t>
+              <a:t>•  평소에는 늘 </a:t>
+            </a:r>
+            <a:r>
+              <a:rPr sz="1700" b="0">
+                <a:solidFill>
+                  <a:srgbClr val="222222"/>
+                </a:solidFill>
+                <a:latin typeface="Consolas"/>
+                <a:cs typeface="Consolas"/>
+              </a:rPr>
+              <a:t>Yes</a:t>
+            </a:r>
+            <a:r>
+              <a:rPr sz="1700" b="0">
+                <a:solidFill>
+                  <a:srgbClr val="222222"/>
+                </a:solidFill>
+                <a:latin typeface="맑은 고딕"/>
+              </a:rPr>
+              <a:t> 라 넣을 필요를 못 느낀다</a:t>
             </a:r>
           </a:p>
           <a:p>
@@ -15983,7 +18283,16 @@
                 </a:solidFill>
                 <a:latin typeface="맑은 고딕"/>
               </a:rPr>
-              <a:t>•  그래서 **장애가 나서 전환하려 할 때 처음 안다**</a:t>
+              <a:t>•  그래서 </a:t>
+            </a:r>
+            <a:r>
+              <a:rPr sz="1700" b="1">
+                <a:solidFill>
+                  <a:srgbClr val="222222"/>
+                </a:solidFill>
+                <a:latin typeface="맑은 고딕"/>
+              </a:rPr>
+              <a:t>장애가 나서 전환하려 할 때 처음 안다</a:t>
             </a:r>
           </a:p>
         </p:txBody>
@@ -16162,7 +18471,35 @@
                 </a:solidFill>
                 <a:latin typeface="맑은 고딕"/>
               </a:rPr>
-              <a:t>•  `LogShipping=OFF` 인데 SUCCESS → **설정한 대로**</a:t>
+              <a:t>•  </a:t>
+            </a:r>
+            <a:r>
+              <a:rPr sz="1700" b="0">
+                <a:solidFill>
+                  <a:srgbClr val="222222"/>
+                </a:solidFill>
+                <a:latin typeface="Consolas"/>
+                <a:cs typeface="Consolas"/>
+              </a:rPr>
+              <a:t>LogShipping=OFF</a:t>
+            </a:r>
+            <a:r>
+              <a:rPr sz="1700" b="0">
+                <a:solidFill>
+                  <a:srgbClr val="222222"/>
+                </a:solidFill>
+                <a:latin typeface="맑은 고딕"/>
+              </a:rPr>
+              <a:t> 인데 SUCCESS → </a:t>
+            </a:r>
+            <a:r>
+              <a:rPr sz="1700" b="1">
+                <a:solidFill>
+                  <a:srgbClr val="222222"/>
+                </a:solidFill>
+                <a:latin typeface="맑은 고딕"/>
+              </a:rPr>
+              <a:t>설정한 대로</a:t>
             </a:r>
           </a:p>
           <a:p>
@@ -16178,7 +18515,54 @@
                 </a:solidFill>
                 <a:latin typeface="맑은 고딕"/>
               </a:rPr>
-              <a:t>•  `VALIDATE` 가 `Ready for Switchover: No` → **조치 필요**</a:t>
+              <a:t>•  </a:t>
+            </a:r>
+            <a:r>
+              <a:rPr sz="1700" b="0">
+                <a:solidFill>
+                  <a:srgbClr val="222222"/>
+                </a:solidFill>
+                <a:latin typeface="Consolas"/>
+                <a:cs typeface="Consolas"/>
+              </a:rPr>
+              <a:t>VALIDATE</a:t>
+            </a:r>
+            <a:r>
+              <a:rPr sz="1700" b="0">
+                <a:solidFill>
+                  <a:srgbClr val="222222"/>
+                </a:solidFill>
+                <a:latin typeface="맑은 고딕"/>
+              </a:rPr>
+              <a:t> 가 </a:t>
+            </a:r>
+            <a:r>
+              <a:rPr sz="1700" b="0">
+                <a:solidFill>
+                  <a:srgbClr val="222222"/>
+                </a:solidFill>
+                <a:latin typeface="Consolas"/>
+                <a:cs typeface="Consolas"/>
+              </a:rPr>
+              <a:t>Ready for Switchover: No</a:t>
+            </a:r>
+            <a:r>
+              <a:rPr sz="1700" b="0">
+                <a:solidFill>
+                  <a:srgbClr val="222222"/>
+                </a:solidFill>
+                <a:latin typeface="맑은 고딕"/>
+              </a:rPr>
+              <a:t> → </a:t>
+            </a:r>
+            <a:r>
+              <a:rPr sz="1700" b="1">
+                <a:solidFill>
+                  <a:srgbClr val="222222"/>
+                </a:solidFill>
+                <a:latin typeface="맑은 고딕"/>
+              </a:rPr>
+              <a:t>조치 필요</a:t>
             </a:r>
           </a:p>
           <a:p>
@@ -16194,7 +18578,45 @@
                 </a:solidFill>
                 <a:latin typeface="맑은 고딕"/>
               </a:rPr>
-              <a:t>•  `Warning` 인데 `ERROR_CODE` 0 → 정상</a:t>
+              <a:t>•  </a:t>
+            </a:r>
+            <a:r>
+              <a:rPr sz="1700" b="0">
+                <a:solidFill>
+                  <a:srgbClr val="222222"/>
+                </a:solidFill>
+                <a:latin typeface="Consolas"/>
+                <a:cs typeface="Consolas"/>
+              </a:rPr>
+              <a:t>Warning</a:t>
+            </a:r>
+            <a:r>
+              <a:rPr sz="1700" b="0">
+                <a:solidFill>
+                  <a:srgbClr val="222222"/>
+                </a:solidFill>
+                <a:latin typeface="맑은 고딕"/>
+              </a:rPr>
+              <a:t> 인데 </a:t>
+            </a:r>
+            <a:r>
+              <a:rPr sz="1700" b="0">
+                <a:solidFill>
+                  <a:srgbClr val="222222"/>
+                </a:solidFill>
+                <a:latin typeface="Consolas"/>
+                <a:cs typeface="Consolas"/>
+              </a:rPr>
+              <a:t>ERROR_CODE</a:t>
+            </a:r>
+            <a:r>
+              <a:rPr sz="1700" b="0">
+                <a:solidFill>
+                  <a:srgbClr val="222222"/>
+                </a:solidFill>
+                <a:latin typeface="맑은 고딕"/>
+              </a:rPr>
+              <a:t> 0 → 정상</a:t>
             </a:r>
           </a:p>
           <a:p>
@@ -16210,7 +18632,26 @@
                 </a:solidFill>
                 <a:latin typeface="맑은 고딕"/>
               </a:rPr>
-              <a:t>•  `TopWaitEvents` 1위가 800만 → 정상 (유휴)</a:t>
+              <a:t>•  </a:t>
+            </a:r>
+            <a:r>
+              <a:rPr sz="1700" b="0">
+                <a:solidFill>
+                  <a:srgbClr val="222222"/>
+                </a:solidFill>
+                <a:latin typeface="Consolas"/>
+                <a:cs typeface="Consolas"/>
+              </a:rPr>
+              <a:t>TopWaitEvents</a:t>
+            </a:r>
+            <a:r>
+              <a:rPr sz="1700" b="0">
+                <a:solidFill>
+                  <a:srgbClr val="222222"/>
+                </a:solidFill>
+                <a:latin typeface="맑은 고딕"/>
+              </a:rPr>
+              <a:t> 1위가 800만 → 정상 (유휴)</a:t>
             </a:r>
           </a:p>
           <a:p>
@@ -16226,7 +18667,35 @@
                 </a:solidFill>
                 <a:latin typeface="맑은 고딕"/>
               </a:rPr>
-              <a:t>•  `ORA-16827` 인데 켜졌다 → **조치 필요**</a:t>
+              <a:t>•  </a:t>
+            </a:r>
+            <a:r>
+              <a:rPr sz="1700" b="0">
+                <a:solidFill>
+                  <a:srgbClr val="222222"/>
+                </a:solidFill>
+                <a:latin typeface="Consolas"/>
+                <a:cs typeface="Consolas"/>
+              </a:rPr>
+              <a:t>ORA-16827</a:t>
+            </a:r>
+            <a:r>
+              <a:rPr sz="1700" b="0">
+                <a:solidFill>
+                  <a:srgbClr val="222222"/>
+                </a:solidFill>
+                <a:latin typeface="맑은 고딕"/>
+              </a:rPr>
+              <a:t> 인데 켜졌다 → </a:t>
+            </a:r>
+            <a:r>
+              <a:rPr sz="1700" b="1">
+                <a:solidFill>
+                  <a:srgbClr val="222222"/>
+                </a:solidFill>
+                <a:latin typeface="맑은 고딕"/>
+              </a:rPr>
+              <a:t>조치 필요</a:t>
             </a:r>
           </a:p>
         </p:txBody>
@@ -16644,7 +19113,36 @@
                 </a:solidFill>
                 <a:latin typeface="맑은 고딕"/>
               </a:rPr>
-              <a:t>•  `DATABASE [VERBOSE]` / `... DATAFILE &lt;n&gt; OUTPUT=&lt;file&gt;`</a:t>
+              <a:t>•  </a:t>
+            </a:r>
+            <a:r>
+              <a:rPr sz="1700" b="0">
+                <a:solidFill>
+                  <a:srgbClr val="222222"/>
+                </a:solidFill>
+                <a:latin typeface="Consolas"/>
+                <a:cs typeface="Consolas"/>
+              </a:rPr>
+              <a:t>DATABASE [VERBOSE]</a:t>
+            </a:r>
+            <a:r>
+              <a:rPr sz="1700" b="0">
+                <a:solidFill>
+                  <a:srgbClr val="222222"/>
+                </a:solidFill>
+                <a:latin typeface="맑은 고딕"/>
+              </a:rPr>
+              <a:t> / </a:t>
+            </a:r>
+            <a:r>
+              <a:rPr sz="1700" b="0">
+                <a:solidFill>
+                  <a:srgbClr val="222222"/>
+                </a:solidFill>
+                <a:latin typeface="Consolas"/>
+                <a:cs typeface="Consolas"/>
+              </a:rPr>
+              <a:t>... DATAFILE &lt;n&gt; OUTPUT=&lt;file&gt;</a:t>
             </a:r>
           </a:p>
           <a:p>
@@ -16660,7 +19158,45 @@
                 </a:solidFill>
                 <a:latin typeface="맑은 고딕"/>
               </a:rPr>
-              <a:t>•  `... SPFILE` / `FAR_SYNC` (10장)</a:t>
+              <a:t>•  </a:t>
+            </a:r>
+            <a:r>
+              <a:rPr sz="1700" b="0">
+                <a:solidFill>
+                  <a:srgbClr val="222222"/>
+                </a:solidFill>
+                <a:latin typeface="Consolas"/>
+                <a:cs typeface="Consolas"/>
+              </a:rPr>
+              <a:t>... SPFILE</a:t>
+            </a:r>
+            <a:r>
+              <a:rPr sz="1700" b="0">
+                <a:solidFill>
+                  <a:srgbClr val="222222"/>
+                </a:solidFill>
+                <a:latin typeface="맑은 고딕"/>
+              </a:rPr>
+              <a:t> / </a:t>
+            </a:r>
+            <a:r>
+              <a:rPr sz="1700" b="0">
+                <a:solidFill>
+                  <a:srgbClr val="222222"/>
+                </a:solidFill>
+                <a:latin typeface="Consolas"/>
+                <a:cs typeface="Consolas"/>
+              </a:rPr>
+              <a:t>FAR_SYNC</a:t>
+            </a:r>
+            <a:r>
+              <a:rPr sz="1700" b="0">
+                <a:solidFill>
+                  <a:srgbClr val="222222"/>
+                </a:solidFill>
+                <a:latin typeface="맑은 고딕"/>
+              </a:rPr>
+              <a:t> (10장)</a:t>
             </a:r>
           </a:p>
           <a:p>
@@ -16676,7 +19212,17 @@
                 </a:solidFill>
                 <a:latin typeface="맑은 고딕"/>
               </a:rPr>
-              <a:t>•  `NETWORK CONFIGURATION FOR { ALL | &lt;member&gt; }`</a:t>
+              <a:t>•  </a:t>
+            </a:r>
+            <a:r>
+              <a:rPr sz="1700" b="0">
+                <a:solidFill>
+                  <a:srgbClr val="222222"/>
+                </a:solidFill>
+                <a:latin typeface="Consolas"/>
+                <a:cs typeface="Consolas"/>
+              </a:rPr>
+              <a:t>NETWORK CONFIGURATION FOR { ALL | &lt;member&gt; }</a:t>
             </a:r>
           </a:p>
           <a:p>
@@ -16692,7 +19238,17 @@
                 </a:solidFill>
                 <a:latin typeface="맑은 고딕"/>
               </a:rPr>
-              <a:t>•  `STATIC CONNECT IDENTIFIER FOR { ALL | &lt;database&gt; }`</a:t>
+              <a:t>•  </a:t>
+            </a:r>
+            <a:r>
+              <a:rPr sz="1700" b="0">
+                <a:solidFill>
+                  <a:srgbClr val="222222"/>
+                </a:solidFill>
+                <a:latin typeface="Consolas"/>
+                <a:cs typeface="Consolas"/>
+              </a:rPr>
+              <a:t>STATIC CONNECT IDENTIFIER FOR { ALL | &lt;database&gt; }</a:t>
             </a:r>
           </a:p>
         </p:txBody>
@@ -16871,7 +19427,25 @@
                 </a:solidFill>
                 <a:latin typeface="맑은 고딕"/>
               </a:rPr>
-              <a:t>•  결과물은 **대상(Standby) 쪽 trace** 에 생긴다</a:t>
+              <a:t>•  결과물은 </a:t>
+            </a:r>
+            <a:r>
+              <a:rPr sz="1700" b="1">
+                <a:solidFill>
+                  <a:srgbClr val="222222"/>
+                </a:solidFill>
+                <a:latin typeface="맑은 고딕"/>
+              </a:rPr>
+              <a:t>대상(Standby) 쪽 trace</a:t>
+            </a:r>
+            <a:r>
+              <a:rPr sz="1700" b="0">
+                <a:solidFill>
+                  <a:srgbClr val="222222"/>
+                </a:solidFill>
+                <a:latin typeface="맑은 고딕"/>
+              </a:rPr>
+              <a:t> 에 생긴다</a:t>
             </a:r>
           </a:p>
           <a:p>
@@ -16887,7 +19461,26 @@
                 </a:solidFill>
                 <a:latin typeface="맑은 고딕"/>
               </a:rPr>
-              <a:t>•  내용은 5장 실습 07 의 **`DBMS_DBCOMP`** 비교 결과</a:t>
+              <a:t>•  내용은 5장 실습 07 의 </a:t>
+            </a:r>
+            <a:r>
+              <a:rPr sz="1700" b="1">
+                <a:solidFill>
+                  <a:srgbClr val="222222"/>
+                </a:solidFill>
+                <a:latin typeface="Consolas"/>
+                <a:cs typeface="Consolas"/>
+              </a:rPr>
+              <a:t>DBMS_DBCOMP</a:t>
+            </a:r>
+            <a:r>
+              <a:rPr sz="1700" b="0">
+                <a:solidFill>
+                  <a:srgbClr val="222222"/>
+                </a:solidFill>
+                <a:latin typeface="맑은 고딕"/>
+              </a:rPr>
+              <a:t> 비교 결과</a:t>
             </a:r>
           </a:p>
           <a:p>
@@ -16903,7 +19496,101 @@
                 </a:solidFill>
                 <a:latin typeface="맑은 고딕"/>
               </a:rPr>
-              <a:t>•  `CORR`·`LWLOC`·`LWRMT`·`DIFFPAIR` 가 **0** 이어야 한다</a:t>
+              <a:t>•  </a:t>
+            </a:r>
+            <a:r>
+              <a:rPr sz="1700" b="0">
+                <a:solidFill>
+                  <a:srgbClr val="222222"/>
+                </a:solidFill>
+                <a:latin typeface="Consolas"/>
+                <a:cs typeface="Consolas"/>
+              </a:rPr>
+              <a:t>CORR</a:t>
+            </a:r>
+            <a:r>
+              <a:rPr sz="1700" b="0">
+                <a:solidFill>
+                  <a:srgbClr val="222222"/>
+                </a:solidFill>
+                <a:latin typeface="맑은 고딕"/>
+              </a:rPr>
+              <a:t>·</a:t>
+            </a:r>
+            <a:r>
+              <a:rPr sz="1700" b="0">
+                <a:solidFill>
+                  <a:srgbClr val="222222"/>
+                </a:solidFill>
+                <a:latin typeface="Consolas"/>
+                <a:cs typeface="Consolas"/>
+              </a:rPr>
+              <a:t>LWLOC</a:t>
+            </a:r>
+            <a:r>
+              <a:rPr sz="1700" b="0">
+                <a:solidFill>
+                  <a:srgbClr val="222222"/>
+                </a:solidFill>
+                <a:latin typeface="맑은 고딕"/>
+              </a:rPr>
+              <a:t>·</a:t>
+            </a:r>
+            <a:r>
+              <a:rPr sz="1700" b="0">
+                <a:solidFill>
+                  <a:srgbClr val="222222"/>
+                </a:solidFill>
+                <a:latin typeface="Consolas"/>
+                <a:cs typeface="Consolas"/>
+              </a:rPr>
+              <a:t>LWRMT</a:t>
+            </a:r>
+            <a:r>
+              <a:rPr sz="1700" b="0">
+                <a:solidFill>
+                  <a:srgbClr val="222222"/>
+                </a:solidFill>
+                <a:latin typeface="맑은 고딕"/>
+              </a:rPr>
+              <a:t>·</a:t>
+            </a:r>
+            <a:r>
+              <a:rPr sz="1700" b="0">
+                <a:solidFill>
+                  <a:srgbClr val="222222"/>
+                </a:solidFill>
+                <a:latin typeface="Consolas"/>
+                <a:cs typeface="Consolas"/>
+              </a:rPr>
+              <a:t>DIFFPAIR</a:t>
+            </a:r>
+            <a:r>
+              <a:rPr sz="1700" b="0">
+                <a:solidFill>
+                  <a:srgbClr val="222222"/>
+                </a:solidFill>
+                <a:latin typeface="맑은 고딕"/>
+              </a:rPr>
+              <a:t> 가 </a:t>
+            </a:r>
+            <a:r>
+              <a:rPr sz="1700" b="1">
+                <a:solidFill>
+                  <a:srgbClr val="222222"/>
+                </a:solidFill>
+                <a:latin typeface="맑은 고딕"/>
+              </a:rPr>
+              <a:t>0</a:t>
+            </a:r>
+            <a:r>
+              <a:rPr sz="1700" b="0">
+                <a:solidFill>
+                  <a:srgbClr val="222222"/>
+                </a:solidFill>
+                <a:latin typeface="맑은 고딕"/>
+              </a:rPr>
+              <a:t> 이어야 한다</a:t>
             </a:r>
           </a:p>
           <a:p>
@@ -16919,7 +19606,44 @@
                 </a:solidFill>
                 <a:latin typeface="맑은 고딕"/>
               </a:rPr>
-              <a:t>•  없는 파일 번호 → **ORA-53201** + `SYS.DBMS_DBCOMP` 스택</a:t>
+              <a:t>•  없는 파일 번호 → </a:t>
+            </a:r>
+            <a:r>
+              <a:rPr sz="1700" b="1">
+                <a:solidFill>
+                  <a:srgbClr val="222222"/>
+                </a:solidFill>
+                <a:latin typeface="맑은 고딕"/>
+              </a:rPr>
+              <a:t>ORA-53201</a:t>
+            </a:r>
+            <a:r>
+              <a:rPr sz="1700" b="0">
+                <a:solidFill>
+                  <a:srgbClr val="222222"/>
+                </a:solidFill>
+                <a:latin typeface="맑은 고딕"/>
+              </a:rPr>
+              <a:t> + </a:t>
+            </a:r>
+            <a:r>
+              <a:rPr sz="1700" b="0">
+                <a:solidFill>
+                  <a:srgbClr val="222222"/>
+                </a:solidFill>
+                <a:latin typeface="Consolas"/>
+                <a:cs typeface="Consolas"/>
+              </a:rPr>
+              <a:t>SYS.DBMS_DBCOMP</a:t>
+            </a:r>
+            <a:r>
+              <a:rPr sz="1700" b="0">
+                <a:solidFill>
+                  <a:srgbClr val="222222"/>
+                </a:solidFill>
+                <a:latin typeface="맑은 고딕"/>
+              </a:rPr>
+              <a:t> 스택</a:t>
             </a:r>
           </a:p>
         </p:txBody>
@@ -17098,7 +19822,44 @@
                 </a:solidFill>
                 <a:latin typeface="맑은 고딕"/>
               </a:rPr>
-              <a:t>•  `SHOW CONFIGURATION` — 지금 **의도대로** 동작하는가</a:t>
+              <a:t>•  </a:t>
+            </a:r>
+            <a:r>
+              <a:rPr sz="1700" b="0">
+                <a:solidFill>
+                  <a:srgbClr val="222222"/>
+                </a:solidFill>
+                <a:latin typeface="Consolas"/>
+                <a:cs typeface="Consolas"/>
+              </a:rPr>
+              <a:t>SHOW CONFIGURATION</a:t>
+            </a:r>
+            <a:r>
+              <a:rPr sz="1700" b="0">
+                <a:solidFill>
+                  <a:srgbClr val="222222"/>
+                </a:solidFill>
+                <a:latin typeface="맑은 고딕"/>
+              </a:rPr>
+              <a:t> — 지금 </a:t>
+            </a:r>
+            <a:r>
+              <a:rPr sz="1700" b="1">
+                <a:solidFill>
+                  <a:srgbClr val="222222"/>
+                </a:solidFill>
+                <a:latin typeface="맑은 고딕"/>
+              </a:rPr>
+              <a:t>의도대로</a:t>
+            </a:r>
+            <a:r>
+              <a:rPr sz="1700" b="0">
+                <a:solidFill>
+                  <a:srgbClr val="222222"/>
+                </a:solidFill>
+                <a:latin typeface="맑은 고딕"/>
+              </a:rPr>
+              <a:t> 동작하는가</a:t>
             </a:r>
           </a:p>
           <a:p>
@@ -17114,7 +19875,26 @@
                 </a:solidFill>
                 <a:latin typeface="맑은 고딕"/>
               </a:rPr>
-              <a:t>•  `SHOW DATABASE` — 이 멤버가 의도대로인가</a:t>
+              <a:t>•  </a:t>
+            </a:r>
+            <a:r>
+              <a:rPr sz="1700" b="0">
+                <a:solidFill>
+                  <a:srgbClr val="222222"/>
+                </a:solidFill>
+                <a:latin typeface="Consolas"/>
+                <a:cs typeface="Consolas"/>
+              </a:rPr>
+              <a:t>SHOW DATABASE</a:t>
+            </a:r>
+            <a:r>
+              <a:rPr sz="1700" b="0">
+                <a:solidFill>
+                  <a:srgbClr val="222222"/>
+                </a:solidFill>
+                <a:latin typeface="맑은 고딕"/>
+              </a:rPr>
+              <a:t> — 이 멤버가 의도대로인가</a:t>
             </a:r>
           </a:p>
           <a:p>
@@ -17130,7 +19910,35 @@
                 </a:solidFill>
                 <a:latin typeface="맑은 고딕"/>
               </a:rPr>
-              <a:t>•  `VALIDATE DATABASE` — 지금 **역할을 바꿀 수 있는가**</a:t>
+              <a:t>•  </a:t>
+            </a:r>
+            <a:r>
+              <a:rPr sz="1700" b="0">
+                <a:solidFill>
+                  <a:srgbClr val="222222"/>
+                </a:solidFill>
+                <a:latin typeface="Consolas"/>
+                <a:cs typeface="Consolas"/>
+              </a:rPr>
+              <a:t>VALIDATE DATABASE</a:t>
+            </a:r>
+            <a:r>
+              <a:rPr sz="1700" b="0">
+                <a:solidFill>
+                  <a:srgbClr val="222222"/>
+                </a:solidFill>
+                <a:latin typeface="맑은 고딕"/>
+              </a:rPr>
+              <a:t> — 지금 </a:t>
+            </a:r>
+            <a:r>
+              <a:rPr sz="1700" b="1">
+                <a:solidFill>
+                  <a:srgbClr val="222222"/>
+                </a:solidFill>
+                <a:latin typeface="맑은 고딕"/>
+              </a:rPr>
+              <a:t>역할을 바꿀 수 있는가</a:t>
             </a:r>
           </a:p>
           <a:p>
@@ -17325,7 +20133,54 @@
                 </a:solidFill>
                 <a:latin typeface="맑은 고딕"/>
               </a:rPr>
-              <a:t>•  `audit_file_dest` / `fal_client` — 다른 것이 **정상**</a:t>
+              <a:t>•  </a:t>
+            </a:r>
+            <a:r>
+              <a:rPr sz="1700" b="0">
+                <a:solidFill>
+                  <a:srgbClr val="222222"/>
+                </a:solidFill>
+                <a:latin typeface="Consolas"/>
+                <a:cs typeface="Consolas"/>
+              </a:rPr>
+              <a:t>audit_file_dest</a:t>
+            </a:r>
+            <a:r>
+              <a:rPr sz="1700" b="0">
+                <a:solidFill>
+                  <a:srgbClr val="222222"/>
+                </a:solidFill>
+                <a:latin typeface="맑은 고딕"/>
+              </a:rPr>
+              <a:t> / </a:t>
+            </a:r>
+            <a:r>
+              <a:rPr sz="1700" b="0">
+                <a:solidFill>
+                  <a:srgbClr val="222222"/>
+                </a:solidFill>
+                <a:latin typeface="Consolas"/>
+                <a:cs typeface="Consolas"/>
+              </a:rPr>
+              <a:t>fal_client</a:t>
+            </a:r>
+            <a:r>
+              <a:rPr sz="1700" b="0">
+                <a:solidFill>
+                  <a:srgbClr val="222222"/>
+                </a:solidFill>
+                <a:latin typeface="맑은 고딕"/>
+              </a:rPr>
+              <a:t> — 다른 것이 </a:t>
+            </a:r>
+            <a:r>
+              <a:rPr sz="1700" b="1">
+                <a:solidFill>
+                  <a:srgbClr val="222222"/>
+                </a:solidFill>
+                <a:latin typeface="맑은 고딕"/>
+              </a:rPr>
+              <a:t>정상</a:t>
             </a:r>
           </a:p>
           <a:p>
@@ -17341,7 +20196,44 @@
                 </a:solidFill>
                 <a:latin typeface="맑은 고딕"/>
               </a:rPr>
-              <a:t>•  `diagnostic_dest` — **끝의 슬래시 하나** 차이</a:t>
+              <a:t>•  </a:t>
+            </a:r>
+            <a:r>
+              <a:rPr sz="1700" b="0">
+                <a:solidFill>
+                  <a:srgbClr val="222222"/>
+                </a:solidFill>
+                <a:latin typeface="Consolas"/>
+                <a:cs typeface="Consolas"/>
+              </a:rPr>
+              <a:t>diagnostic_dest</a:t>
+            </a:r>
+            <a:r>
+              <a:rPr sz="1700" b="0">
+                <a:solidFill>
+                  <a:srgbClr val="222222"/>
+                </a:solidFill>
+                <a:latin typeface="맑은 고딕"/>
+              </a:rPr>
+              <a:t> — </a:t>
+            </a:r>
+            <a:r>
+              <a:rPr sz="1700" b="1">
+                <a:solidFill>
+                  <a:srgbClr val="222222"/>
+                </a:solidFill>
+                <a:latin typeface="맑은 고딕"/>
+              </a:rPr>
+              <a:t>끝의 슬래시 하나</a:t>
+            </a:r>
+            <a:r>
+              <a:rPr sz="1700" b="0">
+                <a:solidFill>
+                  <a:srgbClr val="222222"/>
+                </a:solidFill>
+                <a:latin typeface="맑은 고딕"/>
+              </a:rPr>
+              <a:t> 차이</a:t>
             </a:r>
           </a:p>
           <a:p>
@@ -17357,7 +20249,55 @@
                 </a:solidFill>
                 <a:latin typeface="맑은 고딕"/>
               </a:rPr>
-              <a:t>•  `log_archive_trace` — chicago `0` / boston `NOT SPECIFIED`</a:t>
+              <a:t>•  </a:t>
+            </a:r>
+            <a:r>
+              <a:rPr sz="1700" b="0">
+                <a:solidFill>
+                  <a:srgbClr val="222222"/>
+                </a:solidFill>
+                <a:latin typeface="Consolas"/>
+                <a:cs typeface="Consolas"/>
+              </a:rPr>
+              <a:t>log_archive_trace</a:t>
+            </a:r>
+            <a:r>
+              <a:rPr sz="1700" b="0">
+                <a:solidFill>
+                  <a:srgbClr val="222222"/>
+                </a:solidFill>
+                <a:latin typeface="맑은 고딕"/>
+              </a:rPr>
+              <a:t> — chicago </a:t>
+            </a:r>
+            <a:r>
+              <a:rPr sz="1700" b="0">
+                <a:solidFill>
+                  <a:srgbClr val="222222"/>
+                </a:solidFill>
+                <a:latin typeface="Consolas"/>
+                <a:cs typeface="Consolas"/>
+              </a:rPr>
+              <a:t>0</a:t>
+            </a:r>
+            <a:r>
+              <a:rPr sz="1700" b="0">
+                <a:solidFill>
+                  <a:srgbClr val="222222"/>
+                </a:solidFill>
+                <a:latin typeface="맑은 고딕"/>
+              </a:rPr>
+              <a:t> / boston </a:t>
+            </a:r>
+            <a:r>
+              <a:rPr sz="1700" b="0">
+                <a:solidFill>
+                  <a:srgbClr val="222222"/>
+                </a:solidFill>
+                <a:latin typeface="Consolas"/>
+                <a:cs typeface="Consolas"/>
+              </a:rPr>
+              <a:t>NOT SPECIFIED</a:t>
             </a:r>
           </a:p>
           <a:p>
@@ -17373,7 +20313,25 @@
                 </a:solidFill>
                 <a:latin typeface="맑은 고딕"/>
               </a:rPr>
-              <a:t>•  전부 고치는 것이 아니라 **읽고 판정하는 것**이 목적</a:t>
+              <a:t>•  전부 고치는 것이 아니라 </a:t>
+            </a:r>
+            <a:r>
+              <a:rPr sz="1700" b="1">
+                <a:solidFill>
+                  <a:srgbClr val="222222"/>
+                </a:solidFill>
+                <a:latin typeface="맑은 고딕"/>
+              </a:rPr>
+              <a:t>읽고 판정하는 것</a:t>
+            </a:r>
+            <a:r>
+              <a:rPr sz="1700" b="0">
+                <a:solidFill>
+                  <a:srgbClr val="222222"/>
+                </a:solidFill>
+                <a:latin typeface="맑은 고딕"/>
+              </a:rPr>
+              <a:t>이 목적</a:t>
             </a:r>
           </a:p>
         </p:txBody>
@@ -17568,7 +20526,45 @@
                 </a:solidFill>
                 <a:latin typeface="맑은 고딕"/>
               </a:rPr>
-              <a:t>•  `VALIDATE STATIC CONNECT IDENTIFIER` → **`ORA-12514` Failed**</a:t>
+              <a:t>•  </a:t>
+            </a:r>
+            <a:r>
+              <a:rPr sz="1700" b="0">
+                <a:solidFill>
+                  <a:srgbClr val="222222"/>
+                </a:solidFill>
+                <a:latin typeface="Consolas"/>
+                <a:cs typeface="Consolas"/>
+              </a:rPr>
+              <a:t>VALIDATE STATIC CONNECT IDENTIFIER</a:t>
+            </a:r>
+            <a:r>
+              <a:rPr sz="1700" b="0">
+                <a:solidFill>
+                  <a:srgbClr val="222222"/>
+                </a:solidFill>
+                <a:latin typeface="맑은 고딕"/>
+              </a:rPr>
+              <a:t> → </a:t>
+            </a:r>
+            <a:r>
+              <a:rPr sz="1700" b="1">
+                <a:solidFill>
+                  <a:srgbClr val="222222"/>
+                </a:solidFill>
+                <a:latin typeface="Consolas"/>
+                <a:cs typeface="Consolas"/>
+              </a:rPr>
+              <a:t>ORA-12514</a:t>
+            </a:r>
+            <a:r>
+              <a:rPr sz="1700" b="1">
+                <a:solidFill>
+                  <a:srgbClr val="222222"/>
+                </a:solidFill>
+                <a:latin typeface="맑은 고딕"/>
+              </a:rPr>
+              <a:t> Failed</a:t>
             </a:r>
           </a:p>
           <a:p>
@@ -17584,7 +20580,36 @@
                 </a:solidFill>
                 <a:latin typeface="맑은 고딕"/>
               </a:rPr>
-              <a:t>•  그런데 `VALIDATE DATABASE` → **`Ready for Switchover: Yes`**</a:t>
+              <a:t>•  그런데 </a:t>
+            </a:r>
+            <a:r>
+              <a:rPr sz="1700" b="0">
+                <a:solidFill>
+                  <a:srgbClr val="222222"/>
+                </a:solidFill>
+                <a:latin typeface="Consolas"/>
+                <a:cs typeface="Consolas"/>
+              </a:rPr>
+              <a:t>VALIDATE DATABASE</a:t>
+            </a:r>
+            <a:r>
+              <a:rPr sz="1700" b="0">
+                <a:solidFill>
+                  <a:srgbClr val="222222"/>
+                </a:solidFill>
+                <a:latin typeface="맑은 고딕"/>
+              </a:rPr>
+              <a:t> → </a:t>
+            </a:r>
+            <a:r>
+              <a:rPr sz="1700" b="1">
+                <a:solidFill>
+                  <a:srgbClr val="222222"/>
+                </a:solidFill>
+                <a:latin typeface="Consolas"/>
+                <a:cs typeface="Consolas"/>
+              </a:rPr>
+              <a:t>Ready for Switchover: Yes</a:t>
             </a:r>
           </a:p>
           <a:p>
@@ -17600,7 +20625,36 @@
                 </a:solidFill>
                 <a:latin typeface="맑은 고딕"/>
               </a:rPr>
-              <a:t>•  `SHOW CONFIGURATION` → **`SUCCESS`**</a:t>
+              <a:t>•  </a:t>
+            </a:r>
+            <a:r>
+              <a:rPr sz="1700" b="0">
+                <a:solidFill>
+                  <a:srgbClr val="222222"/>
+                </a:solidFill>
+                <a:latin typeface="Consolas"/>
+                <a:cs typeface="Consolas"/>
+              </a:rPr>
+              <a:t>SHOW CONFIGURATION</a:t>
+            </a:r>
+            <a:r>
+              <a:rPr sz="1700" b="0">
+                <a:solidFill>
+                  <a:srgbClr val="222222"/>
+                </a:solidFill>
+                <a:latin typeface="맑은 고딕"/>
+              </a:rPr>
+              <a:t> → </a:t>
+            </a:r>
+            <a:r>
+              <a:rPr sz="1700" b="1">
+                <a:solidFill>
+                  <a:srgbClr val="222222"/>
+                </a:solidFill>
+                <a:latin typeface="Consolas"/>
+                <a:cs typeface="Consolas"/>
+              </a:rPr>
+              <a:t>SUCCESS</a:t>
             </a:r>
           </a:p>
         </p:txBody>
@@ -17779,7 +20833,16 @@
                 </a:solidFill>
                 <a:latin typeface="맑은 고딕"/>
               </a:rPr>
-              <a:t>•  위치는 알림 로그와 같은 **ADR 의 trace**</a:t>
+              <a:t>•  위치는 알림 로그와 같은 </a:t>
+            </a:r>
+            <a:r>
+              <a:rPr sz="1700" b="1">
+                <a:solidFill>
+                  <a:srgbClr val="222222"/>
+                </a:solidFill>
+                <a:latin typeface="맑은 고딕"/>
+              </a:rPr>
+              <a:t>ADR 의 trace</a:t>
             </a:r>
           </a:p>
           <a:p>
@@ -17795,7 +20858,44 @@
                 </a:solidFill>
                 <a:latin typeface="맑은 고딕"/>
               </a:rPr>
-              <a:t>•  **명령과 결과가 한 쌍**으로 남는다 (`... completed with error ORA-16568`)</a:t>
+              <a:t>•  </a:t>
+            </a:r>
+            <a:r>
+              <a:rPr sz="1700" b="1">
+                <a:solidFill>
+                  <a:srgbClr val="222222"/>
+                </a:solidFill>
+                <a:latin typeface="맑은 고딕"/>
+              </a:rPr>
+              <a:t>명령과 결과가 한 쌍</a:t>
+            </a:r>
+            <a:r>
+              <a:rPr sz="1700" b="0">
+                <a:solidFill>
+                  <a:srgbClr val="222222"/>
+                </a:solidFill>
+                <a:latin typeface="맑은 고딕"/>
+              </a:rPr>
+              <a:t>으로 남는다 (</a:t>
+            </a:r>
+            <a:r>
+              <a:rPr sz="1700" b="0">
+                <a:solidFill>
+                  <a:srgbClr val="222222"/>
+                </a:solidFill>
+                <a:latin typeface="Consolas"/>
+                <a:cs typeface="Consolas"/>
+              </a:rPr>
+              <a:t>... completed with error ORA-16568</a:t>
+            </a:r>
+            <a:r>
+              <a:rPr sz="1700" b="0">
+                <a:solidFill>
+                  <a:srgbClr val="222222"/>
+                </a:solidFill>
+                <a:latin typeface="맑은 고딕"/>
+              </a:rPr>
+              <a:t>)</a:t>
             </a:r>
           </a:p>
           <a:p>
@@ -17811,7 +20911,54 @@
                 </a:solidFill>
                 <a:latin typeface="맑은 고딕"/>
               </a:rPr>
-              <a:t>•  화면에 없는 **구성 수준 오류 번호** — `ORA-16607`·`ORA-16608`</a:t>
+              <a:t>•  화면에 없는 </a:t>
+            </a:r>
+            <a:r>
+              <a:rPr sz="1700" b="1">
+                <a:solidFill>
+                  <a:srgbClr val="222222"/>
+                </a:solidFill>
+                <a:latin typeface="맑은 고딕"/>
+              </a:rPr>
+              <a:t>구성 수준 오류 번호</a:t>
+            </a:r>
+            <a:r>
+              <a:rPr sz="1700" b="0">
+                <a:solidFill>
+                  <a:srgbClr val="222222"/>
+                </a:solidFill>
+                <a:latin typeface="맑은 고딕"/>
+              </a:rPr>
+              <a:t> — </a:t>
+            </a:r>
+            <a:r>
+              <a:rPr sz="1700" b="0">
+                <a:solidFill>
+                  <a:srgbClr val="222222"/>
+                </a:solidFill>
+                <a:latin typeface="Consolas"/>
+                <a:cs typeface="Consolas"/>
+              </a:rPr>
+              <a:t>ORA-16607</a:t>
+            </a:r>
+            <a:r>
+              <a:rPr sz="1700" b="0">
+                <a:solidFill>
+                  <a:srgbClr val="222222"/>
+                </a:solidFill>
+                <a:latin typeface="맑은 고딕"/>
+              </a:rPr>
+              <a:t>·</a:t>
+            </a:r>
+            <a:r>
+              <a:rPr sz="1700" b="0">
+                <a:solidFill>
+                  <a:srgbClr val="222222"/>
+                </a:solidFill>
+                <a:latin typeface="Consolas"/>
+                <a:cs typeface="Consolas"/>
+              </a:rPr>
+              <a:t>ORA-16608</a:t>
             </a:r>
           </a:p>
           <a:p>
@@ -17827,7 +20974,45 @@
                 </a:solidFill>
                 <a:latin typeface="맑은 고딕"/>
               </a:rPr>
-              <a:t>•  정상은 **`ORA-0`**. Broker 가 스스로 실행한 `IncarnationTable` 도 남는다</a:t>
+              <a:t>•  정상은 </a:t>
+            </a:r>
+            <a:r>
+              <a:rPr sz="1700" b="1">
+                <a:solidFill>
+                  <a:srgbClr val="222222"/>
+                </a:solidFill>
+                <a:latin typeface="Consolas"/>
+                <a:cs typeface="Consolas"/>
+              </a:rPr>
+              <a:t>ORA-0</a:t>
+            </a:r>
+            <a:r>
+              <a:rPr sz="1700" b="0">
+                <a:solidFill>
+                  <a:srgbClr val="222222"/>
+                </a:solidFill>
+                <a:latin typeface="맑은 고딕"/>
+              </a:rPr>
+              <a:t>. Broker 가 스스로 실행한 </a:t>
+            </a:r>
+            <a:r>
+              <a:rPr sz="1700" b="0">
+                <a:solidFill>
+                  <a:srgbClr val="222222"/>
+                </a:solidFill>
+                <a:latin typeface="Consolas"/>
+                <a:cs typeface="Consolas"/>
+              </a:rPr>
+              <a:t>IncarnationTable</a:t>
+            </a:r>
+            <a:r>
+              <a:rPr sz="1700" b="0">
+                <a:solidFill>
+                  <a:srgbClr val="222222"/>
+                </a:solidFill>
+                <a:latin typeface="맑은 고딕"/>
+              </a:rPr>
+              <a:t> 도 남는다</a:t>
             </a:r>
           </a:p>
         </p:txBody>
@@ -17967,7 +21152,45 @@
                 </a:solidFill>
                 <a:latin typeface="맑은 고딕"/>
               </a:rPr>
-              <a:t>•  `SHOW` 는 "의도대로인가", `VALIDATE` 는 "전환할 수 있는가"</a:t>
+              <a:t>•  </a:t>
+            </a:r>
+            <a:r>
+              <a:rPr sz="1600" b="0">
+                <a:solidFill>
+                  <a:srgbClr val="222222"/>
+                </a:solidFill>
+                <a:latin typeface="Consolas"/>
+                <a:cs typeface="Consolas"/>
+              </a:rPr>
+              <a:t>SHOW</a:t>
+            </a:r>
+            <a:r>
+              <a:rPr sz="1600" b="0">
+                <a:solidFill>
+                  <a:srgbClr val="222222"/>
+                </a:solidFill>
+                <a:latin typeface="맑은 고딕"/>
+              </a:rPr>
+              <a:t> 는 "의도대로인가", </a:t>
+            </a:r>
+            <a:r>
+              <a:rPr sz="1600" b="0">
+                <a:solidFill>
+                  <a:srgbClr val="222222"/>
+                </a:solidFill>
+                <a:latin typeface="Consolas"/>
+                <a:cs typeface="Consolas"/>
+              </a:rPr>
+              <a:t>VALIDATE</a:t>
+            </a:r>
+            <a:r>
+              <a:rPr sz="1600" b="0">
+                <a:solidFill>
+                  <a:srgbClr val="222222"/>
+                </a:solidFill>
+                <a:latin typeface="맑은 고딕"/>
+              </a:rPr>
+              <a:t> 는 "전환할 수 있는가"</a:t>
             </a:r>
           </a:p>
           <a:p>
@@ -17983,7 +21206,45 @@
                 </a:solidFill>
                 <a:latin typeface="맑은 고딕"/>
               </a:rPr>
-              <a:t>•  실측 — `LogShipping=OFF` 인데 `SUCCESS`, 두 지연도 0</a:t>
+              <a:t>•  실측 — </a:t>
+            </a:r>
+            <a:r>
+              <a:rPr sz="1600" b="0">
+                <a:solidFill>
+                  <a:srgbClr val="222222"/>
+                </a:solidFill>
+                <a:latin typeface="Consolas"/>
+                <a:cs typeface="Consolas"/>
+              </a:rPr>
+              <a:t>LogShipping=OFF</a:t>
+            </a:r>
+            <a:r>
+              <a:rPr sz="1600" b="0">
+                <a:solidFill>
+                  <a:srgbClr val="222222"/>
+                </a:solidFill>
+                <a:latin typeface="맑은 고딕"/>
+              </a:rPr>
+              <a:t> 인데 </a:t>
+            </a:r>
+            <a:r>
+              <a:rPr sz="1600" b="0">
+                <a:solidFill>
+                  <a:srgbClr val="222222"/>
+                </a:solidFill>
+                <a:latin typeface="Consolas"/>
+                <a:cs typeface="Consolas"/>
+              </a:rPr>
+              <a:t>SUCCESS</a:t>
+            </a:r>
+            <a:r>
+              <a:rPr sz="1600" b="0">
+                <a:solidFill>
+                  <a:srgbClr val="222222"/>
+                </a:solidFill>
+                <a:latin typeface="맑은 고딕"/>
+              </a:rPr>
+              <a:t>, 두 지연도 0</a:t>
             </a:r>
           </a:p>
           <a:p>
@@ -17999,7 +21260,45 @@
                 </a:solidFill>
                 <a:latin typeface="맑은 고딕"/>
               </a:rPr>
-              <a:t>•  Broker 는 `DEFER` 가 아니라 **`RESET`** 을 쓴다</a:t>
+              <a:t>•  Broker 는 </a:t>
+            </a:r>
+            <a:r>
+              <a:rPr sz="1600" b="0">
+                <a:solidFill>
+                  <a:srgbClr val="222222"/>
+                </a:solidFill>
+                <a:latin typeface="Consolas"/>
+                <a:cs typeface="Consolas"/>
+              </a:rPr>
+              <a:t>DEFER</a:t>
+            </a:r>
+            <a:r>
+              <a:rPr sz="1600" b="0">
+                <a:solidFill>
+                  <a:srgbClr val="222222"/>
+                </a:solidFill>
+                <a:latin typeface="맑은 고딕"/>
+              </a:rPr>
+              <a:t> 가 아니라 </a:t>
+            </a:r>
+            <a:r>
+              <a:rPr sz="1600" b="1">
+                <a:solidFill>
+                  <a:srgbClr val="222222"/>
+                </a:solidFill>
+                <a:latin typeface="Consolas"/>
+                <a:cs typeface="Consolas"/>
+              </a:rPr>
+              <a:t>RESET</a:t>
+            </a:r>
+            <a:r>
+              <a:rPr sz="1600" b="0">
+                <a:solidFill>
+                  <a:srgbClr val="222222"/>
+                </a:solidFill>
+                <a:latin typeface="맑은 고딕"/>
+              </a:rPr>
+              <a:t> 을 쓴다</a:t>
             </a:r>
           </a:p>
           <a:p>
@@ -18015,7 +21314,45 @@
                 </a:solidFill>
                 <a:latin typeface="맑은 고딕"/>
               </a:rPr>
-              <a:t>•  `VERBOSE` 는 `Future` 구성까지 계산한다</a:t>
+              <a:t>•  </a:t>
+            </a:r>
+            <a:r>
+              <a:rPr sz="1600" b="0">
+                <a:solidFill>
+                  <a:srgbClr val="222222"/>
+                </a:solidFill>
+                <a:latin typeface="Consolas"/>
+                <a:cs typeface="Consolas"/>
+              </a:rPr>
+              <a:t>VERBOSE</a:t>
+            </a:r>
+            <a:r>
+              <a:rPr sz="1600" b="0">
+                <a:solidFill>
+                  <a:srgbClr val="222222"/>
+                </a:solidFill>
+                <a:latin typeface="맑은 고딕"/>
+              </a:rPr>
+              <a:t> 는 </a:t>
+            </a:r>
+            <a:r>
+              <a:rPr sz="1600" b="0">
+                <a:solidFill>
+                  <a:srgbClr val="222222"/>
+                </a:solidFill>
+                <a:latin typeface="Consolas"/>
+                <a:cs typeface="Consolas"/>
+              </a:rPr>
+              <a:t>Future</a:t>
+            </a:r>
+            <a:r>
+              <a:rPr sz="1600" b="0">
+                <a:solidFill>
+                  <a:srgbClr val="222222"/>
+                </a:solidFill>
+                <a:latin typeface="맑은 고딕"/>
+              </a:rPr>
+              <a:t> 구성까지 계산한다</a:t>
             </a:r>
           </a:p>
           <a:p>
@@ -18047,7 +21384,16 @@
                 </a:solidFill>
                 <a:latin typeface="맑은 고딕"/>
               </a:rPr>
-              <a:t>•  **임계값이 있는 항목만 경보한다**</a:t>
+              <a:t>•  </a:t>
+            </a:r>
+            <a:r>
+              <a:rPr sz="1600" b="1">
+                <a:solidFill>
+                  <a:srgbClr val="222222"/>
+                </a:solidFill>
+                <a:latin typeface="맑은 고딕"/>
+              </a:rPr>
+              <a:t>임계값이 있는 항목만 경보한다</a:t>
             </a:r>
           </a:p>
           <a:p>
@@ -18063,7 +21409,26 @@
                 </a:solidFill>
                 <a:latin typeface="맑은 고딕"/>
               </a:rPr>
-              <a:t>•  `EXPORT` 는 trace 디렉터리. 경로를 주면 ORA-16540</a:t>
+              <a:t>•  </a:t>
+            </a:r>
+            <a:r>
+              <a:rPr sz="1600" b="0">
+                <a:solidFill>
+                  <a:srgbClr val="222222"/>
+                </a:solidFill>
+                <a:latin typeface="Consolas"/>
+                <a:cs typeface="Consolas"/>
+              </a:rPr>
+              <a:t>EXPORT</a:t>
+            </a:r>
+            <a:r>
+              <a:rPr sz="1600" b="0">
+                <a:solidFill>
+                  <a:srgbClr val="222222"/>
+                </a:solidFill>
+                <a:latin typeface="맑은 고딕"/>
+              </a:rPr>
+              <a:t> 는 trace 디렉터리. 경로를 주면 ORA-16540</a:t>
             </a:r>
           </a:p>
           <a:p>
@@ -18079,7 +21444,26 @@
                 </a:solidFill>
                 <a:latin typeface="맑은 고딕"/>
               </a:rPr>
-              <a:t>•  `IMPORT` 는 구성이 있으면 ORA-16504</a:t>
+              <a:t>•  </a:t>
+            </a:r>
+            <a:r>
+              <a:rPr sz="1600" b="0">
+                <a:solidFill>
+                  <a:srgbClr val="222222"/>
+                </a:solidFill>
+                <a:latin typeface="Consolas"/>
+                <a:cs typeface="Consolas"/>
+              </a:rPr>
+              <a:t>IMPORT</a:t>
+            </a:r>
+            <a:r>
+              <a:rPr sz="1600" b="0">
+                <a:solidFill>
+                  <a:srgbClr val="222222"/>
+                </a:solidFill>
+                <a:latin typeface="맑은 고딕"/>
+              </a:rPr>
+              <a:t> 는 구성이 있으면 ORA-16504</a:t>
             </a:r>
           </a:p>
           <a:p>
@@ -18111,7 +21495,26 @@
                 </a:solidFill>
                 <a:latin typeface="맑은 고딕"/>
               </a:rPr>
-              <a:t>•  끌 때는 **`DISABLE` 이 먼저**</a:t>
+              <a:t>•  끌 때는 </a:t>
+            </a:r>
+            <a:r>
+              <a:rPr sz="1600" b="1">
+                <a:solidFill>
+                  <a:srgbClr val="222222"/>
+                </a:solidFill>
+                <a:latin typeface="Consolas"/>
+                <a:cs typeface="Consolas"/>
+              </a:rPr>
+              <a:t>DISABLE</a:t>
+            </a:r>
+            <a:r>
+              <a:rPr sz="1600" b="1">
+                <a:solidFill>
+                  <a:srgbClr val="222222"/>
+                </a:solidFill>
+                <a:latin typeface="맑은 고딕"/>
+              </a:rPr>
+              <a:t> 이 먼저</a:t>
             </a:r>
           </a:p>
           <a:p>
@@ -18127,7 +21530,16 @@
                 </a:solidFill>
                 <a:latin typeface="맑은 고딕"/>
               </a:rPr>
-              <a:t>•  감시 다섯 층 중 **4층을 빠뜨리는 것이 가장 흔한 실수**</a:t>
+              <a:t>•  감시 다섯 층 중 </a:t>
+            </a:r>
+            <a:r>
+              <a:rPr sz="1600" b="1">
+                <a:solidFill>
+                  <a:srgbClr val="222222"/>
+                </a:solidFill>
+                <a:latin typeface="맑은 고딕"/>
+              </a:rPr>
+              <a:t>4층을 빠뜨리는 것이 가장 흔한 실수</a:t>
             </a:r>
           </a:p>
           <a:p>
@@ -18143,7 +21555,54 @@
                 </a:solidFill>
                 <a:latin typeface="맑은 고딕"/>
               </a:rPr>
-              <a:t>•  `VALIDATE` 는 여섯 구문. **★ `VALIDATE DATABASE` 는 Primary 의 정적 등록만 검사한다**</a:t>
+              <a:t>•  </a:t>
+            </a:r>
+            <a:r>
+              <a:rPr sz="1600" b="0">
+                <a:solidFill>
+                  <a:srgbClr val="222222"/>
+                </a:solidFill>
+                <a:latin typeface="Consolas"/>
+                <a:cs typeface="Consolas"/>
+              </a:rPr>
+              <a:t>VALIDATE</a:t>
+            </a:r>
+            <a:r>
+              <a:rPr sz="1600" b="0">
+                <a:solidFill>
+                  <a:srgbClr val="222222"/>
+                </a:solidFill>
+                <a:latin typeface="맑은 고딕"/>
+              </a:rPr>
+              <a:t> 는 여섯 구문. </a:t>
+            </a:r>
+            <a:r>
+              <a:rPr sz="1600" b="1">
+                <a:solidFill>
+                  <a:srgbClr val="222222"/>
+                </a:solidFill>
+                <a:latin typeface="맑은 고딕"/>
+              </a:rPr>
+              <a:t>★ </a:t>
+            </a:r>
+            <a:r>
+              <a:rPr sz="1600" b="1">
+                <a:solidFill>
+                  <a:srgbClr val="222222"/>
+                </a:solidFill>
+                <a:latin typeface="Consolas"/>
+                <a:cs typeface="Consolas"/>
+              </a:rPr>
+              <a:t>VALIDATE DATABASE</a:t>
+            </a:r>
+            <a:r>
+              <a:rPr sz="1600" b="1">
+                <a:solidFill>
+                  <a:srgbClr val="222222"/>
+                </a:solidFill>
+                <a:latin typeface="맑은 고딕"/>
+              </a:rPr>
+              <a:t> 는 Primary 의 정적 등록만 검사한다</a:t>
             </a:r>
           </a:p>
           <a:p>
@@ -18159,7 +21618,44 @@
                 </a:solidFill>
                 <a:latin typeface="맑은 고딕"/>
               </a:rPr>
-              <a:t>•  `drc&lt;이름&gt;.log` 에 명령·결과와 **구성 수준 오류**(ORA-16607·16608)가 남는다</a:t>
+              <a:t>•  </a:t>
+            </a:r>
+            <a:r>
+              <a:rPr sz="1600" b="0">
+                <a:solidFill>
+                  <a:srgbClr val="222222"/>
+                </a:solidFill>
+                <a:latin typeface="Consolas"/>
+                <a:cs typeface="Consolas"/>
+              </a:rPr>
+              <a:t>drc&lt;이름&gt;.log</a:t>
+            </a:r>
+            <a:r>
+              <a:rPr sz="1600" b="0">
+                <a:solidFill>
+                  <a:srgbClr val="222222"/>
+                </a:solidFill>
+                <a:latin typeface="맑은 고딕"/>
+              </a:rPr>
+              <a:t> 에 명령·결과와 </a:t>
+            </a:r>
+            <a:r>
+              <a:rPr sz="1600" b="1">
+                <a:solidFill>
+                  <a:srgbClr val="222222"/>
+                </a:solidFill>
+                <a:latin typeface="맑은 고딕"/>
+              </a:rPr>
+              <a:t>구성 수준 오류</a:t>
+            </a:r>
+            <a:r>
+              <a:rPr sz="1600" b="0">
+                <a:solidFill>
+                  <a:srgbClr val="222222"/>
+                </a:solidFill>
+                <a:latin typeface="맑은 고딕"/>
+              </a:rPr>
+              <a:t>(ORA-16607·16608)가 남는다</a:t>
             </a:r>
           </a:p>
         </p:txBody>
@@ -18526,7 +22022,17 @@
                 </a:solidFill>
                 <a:latin typeface="맑은 고딕"/>
               </a:rPr>
-              <a:t>•  `edit database 'boston' set property 'LogShipping'='OFF'`</a:t>
+              <a:t>•  </a:t>
+            </a:r>
+            <a:r>
+              <a:rPr sz="1700" b="0">
+                <a:solidFill>
+                  <a:srgbClr val="222222"/>
+                </a:solidFill>
+                <a:latin typeface="Consolas"/>
+                <a:cs typeface="Consolas"/>
+              </a:rPr>
+              <a:t>edit database 'boston' set property 'LogShipping'='OFF'</a:t>
             </a:r>
           </a:p>
           <a:p>
@@ -18558,7 +22064,35 @@
                 </a:solidFill>
                 <a:latin typeface="맑은 고딕"/>
               </a:rPr>
-              <a:t>•  `SHOW CONFIGURATION` → **SUCCESS**</a:t>
+              <a:t>•  </a:t>
+            </a:r>
+            <a:r>
+              <a:rPr sz="1700" b="0">
+                <a:solidFill>
+                  <a:srgbClr val="222222"/>
+                </a:solidFill>
+                <a:latin typeface="Consolas"/>
+                <a:cs typeface="Consolas"/>
+              </a:rPr>
+              <a:t>SHOW CONFIGURATION</a:t>
+            </a:r>
+            <a:r>
+              <a:rPr sz="1700" b="0">
+                <a:solidFill>
+                  <a:srgbClr val="222222"/>
+                </a:solidFill>
+                <a:latin typeface="맑은 고딕"/>
+              </a:rPr>
+              <a:t> → </a:t>
+            </a:r>
+            <a:r>
+              <a:rPr sz="1700" b="1">
+                <a:solidFill>
+                  <a:srgbClr val="222222"/>
+                </a:solidFill>
+                <a:latin typeface="맑은 고딕"/>
+              </a:rPr>
+              <a:t>SUCCESS</a:t>
             </a:r>
           </a:p>
           <a:p>
@@ -18574,7 +22108,35 @@
                 </a:solidFill>
                 <a:latin typeface="맑은 고딕"/>
               </a:rPr>
-              <a:t>•  `SHOW DATABASE 'boston'` → **SUCCESS**</a:t>
+              <a:t>•  </a:t>
+            </a:r>
+            <a:r>
+              <a:rPr sz="1700" b="0">
+                <a:solidFill>
+                  <a:srgbClr val="222222"/>
+                </a:solidFill>
+                <a:latin typeface="Consolas"/>
+                <a:cs typeface="Consolas"/>
+              </a:rPr>
+              <a:t>SHOW DATABASE 'boston'</a:t>
+            </a:r>
+            <a:r>
+              <a:rPr sz="1700" b="0">
+                <a:solidFill>
+                  <a:srgbClr val="222222"/>
+                </a:solidFill>
+                <a:latin typeface="맑은 고딕"/>
+              </a:rPr>
+              <a:t> → </a:t>
+            </a:r>
+            <a:r>
+              <a:rPr sz="1700" b="1">
+                <a:solidFill>
+                  <a:srgbClr val="222222"/>
+                </a:solidFill>
+                <a:latin typeface="맑은 고딕"/>
+              </a:rPr>
+              <a:t>SUCCESS</a:t>
             </a:r>
           </a:p>
           <a:p>
@@ -18590,7 +22152,34 @@
                 </a:solidFill>
                 <a:latin typeface="맑은 고딕"/>
               </a:rPr>
-              <a:t>•  Transport Lag **0** / Apply Lag **0**</a:t>
+              <a:t>•  Transport Lag </a:t>
+            </a:r>
+            <a:r>
+              <a:rPr sz="1700" b="1">
+                <a:solidFill>
+                  <a:srgbClr val="222222"/>
+                </a:solidFill>
+                <a:latin typeface="맑은 고딕"/>
+              </a:rPr>
+              <a:t>0</a:t>
+            </a:r>
+            <a:r>
+              <a:rPr sz="1700" b="0">
+                <a:solidFill>
+                  <a:srgbClr val="222222"/>
+                </a:solidFill>
+                <a:latin typeface="맑은 고딕"/>
+              </a:rPr>
+              <a:t> / Apply Lag </a:t>
+            </a:r>
+            <a:r>
+              <a:rPr sz="1700" b="1">
+                <a:solidFill>
+                  <a:srgbClr val="222222"/>
+                </a:solidFill>
+                <a:latin typeface="맑은 고딕"/>
+              </a:rPr>
+              <a:t>0</a:t>
             </a:r>
           </a:p>
         </p:txBody>
@@ -18769,7 +22358,35 @@
                 </a:solidFill>
                 <a:latin typeface="맑은 고딕"/>
               </a:rPr>
-              <a:t>•  `Ready for Switchover:` **No**</a:t>
+              <a:t>•  </a:t>
+            </a:r>
+            <a:r>
+              <a:rPr sz="1700" b="0">
+                <a:solidFill>
+                  <a:srgbClr val="222222"/>
+                </a:solidFill>
+                <a:latin typeface="Consolas"/>
+                <a:cs typeface="Consolas"/>
+              </a:rPr>
+              <a:t>Ready for Switchover:</a:t>
+            </a:r>
+            <a:r>
+              <a:rPr sz="1700" b="0">
+                <a:solidFill>
+                  <a:srgbClr val="222222"/>
+                </a:solidFill>
+                <a:latin typeface="맑은 고딕"/>
+              </a:rPr>
+              <a:t> </a:t>
+            </a:r>
+            <a:r>
+              <a:rPr sz="1700" b="1">
+                <a:solidFill>
+                  <a:srgbClr val="222222"/>
+                </a:solidFill>
+                <a:latin typeface="맑은 고딕"/>
+              </a:rPr>
+              <a:t>No</a:t>
             </a:r>
           </a:p>
           <a:p>
@@ -18785,7 +22402,26 @@
                 </a:solidFill>
                 <a:latin typeface="맑은 고딕"/>
               </a:rPr>
-              <a:t>•  `Ready for Failover:` Yes (Primary Running)</a:t>
+              <a:t>•  </a:t>
+            </a:r>
+            <a:r>
+              <a:rPr sz="1700" b="0">
+                <a:solidFill>
+                  <a:srgbClr val="222222"/>
+                </a:solidFill>
+                <a:latin typeface="Consolas"/>
+                <a:cs typeface="Consolas"/>
+              </a:rPr>
+              <a:t>Ready for Failover:</a:t>
+            </a:r>
+            <a:r>
+              <a:rPr sz="1700" b="0">
+                <a:solidFill>
+                  <a:srgbClr val="222222"/>
+                </a:solidFill>
+                <a:latin typeface="맑은 고딕"/>
+              </a:rPr>
+              <a:t> Yes (Primary Running)</a:t>
             </a:r>
           </a:p>
           <a:p>
@@ -18801,7 +22437,35 @@
                 </a:solidFill>
                 <a:latin typeface="맑은 고딕"/>
               </a:rPr>
-              <a:t>•  속성 표에 `LogShipping ON / OFF` **한 줄만**</a:t>
+              <a:t>•  속성 표에 </a:t>
+            </a:r>
+            <a:r>
+              <a:rPr sz="1700" b="0">
+                <a:solidFill>
+                  <a:srgbClr val="222222"/>
+                </a:solidFill>
+                <a:latin typeface="Consolas"/>
+                <a:cs typeface="Consolas"/>
+              </a:rPr>
+              <a:t>LogShipping ON / OFF</a:t>
+            </a:r>
+            <a:r>
+              <a:rPr sz="1700" b="0">
+                <a:solidFill>
+                  <a:srgbClr val="222222"/>
+                </a:solidFill>
+                <a:latin typeface="맑은 고딕"/>
+              </a:rPr>
+              <a:t> </a:t>
+            </a:r>
+            <a:r>
+              <a:rPr sz="1700" b="1">
+                <a:solidFill>
+                  <a:srgbClr val="222222"/>
+                </a:solidFill>
+                <a:latin typeface="맑은 고딕"/>
+              </a:rPr>
+              <a:t>한 줄만</a:t>
             </a:r>
           </a:p>
           <a:p>
@@ -18817,7 +22481,25 @@
                 </a:solidFill>
                 <a:latin typeface="맑은 고딕"/>
               </a:rPr>
-              <a:t>•  VALIDATE 는 **값이 다른 것만** 골라 보여 준다</a:t>
+              <a:t>•  VALIDATE 는 </a:t>
+            </a:r>
+            <a:r>
+              <a:rPr sz="1700" b="1">
+                <a:solidFill>
+                  <a:srgbClr val="222222"/>
+                </a:solidFill>
+                <a:latin typeface="맑은 고딕"/>
+              </a:rPr>
+              <a:t>값이 다른 것만</a:t>
+            </a:r>
+            <a:r>
+              <a:rPr sz="1700" b="0">
+                <a:solidFill>
+                  <a:srgbClr val="222222"/>
+                </a:solidFill>
+                <a:latin typeface="맑은 고딕"/>
+              </a:rPr>
+              <a:t> 골라 보여 준다</a:t>
             </a:r>
           </a:p>
         </p:txBody>
@@ -18996,7 +22678,44 @@
                 </a:solidFill>
                 <a:latin typeface="맑은 고딕"/>
               </a:rPr>
-              <a:t>•  `LOG_ARCHIVE_DEST_STATE_2` = **RESET** (DEFER 아님)</a:t>
+              <a:t>•  </a:t>
+            </a:r>
+            <a:r>
+              <a:rPr sz="1700" b="0">
+                <a:solidFill>
+                  <a:srgbClr val="222222"/>
+                </a:solidFill>
+                <a:latin typeface="Consolas"/>
+                <a:cs typeface="Consolas"/>
+              </a:rPr>
+              <a:t>LOG_ARCHIVE_DEST_STATE_2</a:t>
+            </a:r>
+            <a:r>
+              <a:rPr sz="1700" b="0">
+                <a:solidFill>
+                  <a:srgbClr val="222222"/>
+                </a:solidFill>
+                <a:latin typeface="맑은 고딕"/>
+              </a:rPr>
+              <a:t> = </a:t>
+            </a:r>
+            <a:r>
+              <a:rPr sz="1700" b="1">
+                <a:solidFill>
+                  <a:srgbClr val="222222"/>
+                </a:solidFill>
+                <a:latin typeface="맑은 고딕"/>
+              </a:rPr>
+              <a:t>RESET</a:t>
+            </a:r>
+            <a:r>
+              <a:rPr sz="1700" b="0">
+                <a:solidFill>
+                  <a:srgbClr val="222222"/>
+                </a:solidFill>
+                <a:latin typeface="맑은 고딕"/>
+              </a:rPr>
+              <a:t> (DEFER 아님)</a:t>
             </a:r>
           </a:p>
           <a:p>
@@ -19012,7 +22731,35 @@
                 </a:solidFill>
                 <a:latin typeface="맑은 고딕"/>
               </a:rPr>
-              <a:t>•  `V$ARCHIVE_DEST_STATUS` STATUS = **DEFERRED**</a:t>
+              <a:t>•  </a:t>
+            </a:r>
+            <a:r>
+              <a:rPr sz="1700" b="0">
+                <a:solidFill>
+                  <a:srgbClr val="222222"/>
+                </a:solidFill>
+                <a:latin typeface="Consolas"/>
+                <a:cs typeface="Consolas"/>
+              </a:rPr>
+              <a:t>V$ARCHIVE_DEST_STATUS</a:t>
+            </a:r>
+            <a:r>
+              <a:rPr sz="1700" b="0">
+                <a:solidFill>
+                  <a:srgbClr val="222222"/>
+                </a:solidFill>
+                <a:latin typeface="맑은 고딕"/>
+              </a:rPr>
+              <a:t> STATUS = </a:t>
+            </a:r>
+            <a:r>
+              <a:rPr sz="1700" b="1">
+                <a:solidFill>
+                  <a:srgbClr val="222222"/>
+                </a:solidFill>
+                <a:latin typeface="맑은 고딕"/>
+              </a:rPr>
+              <a:t>DEFERRED</a:t>
             </a:r>
           </a:p>
           <a:p>
@@ -19028,7 +22775,17 @@
                 </a:solidFill>
                 <a:latin typeface="맑은 고딕"/>
               </a:rPr>
-              <a:t>•  7장에서 손으로 껐을 때는 `DEFER`</a:t>
+              <a:t>•  7장에서 손으로 껐을 때는 </a:t>
+            </a:r>
+            <a:r>
+              <a:rPr sz="1700" b="0">
+                <a:solidFill>
+                  <a:srgbClr val="222222"/>
+                </a:solidFill>
+                <a:latin typeface="Consolas"/>
+                <a:cs typeface="Consolas"/>
+              </a:rPr>
+              <a:t>DEFER</a:t>
             </a:r>
           </a:p>
           <a:p>
@@ -19044,7 +22801,25 @@
                 </a:solidFill>
                 <a:latin typeface="맑은 고딕"/>
               </a:rPr>
-              <a:t>•  값만 보고 **누가 껐는지** 구별할 수 있다</a:t>
+              <a:t>•  값만 보고 </a:t>
+            </a:r>
+            <a:r>
+              <a:rPr sz="1700" b="1">
+                <a:solidFill>
+                  <a:srgbClr val="222222"/>
+                </a:solidFill>
+                <a:latin typeface="맑은 고딕"/>
+              </a:rPr>
+              <a:t>누가 껐는지</a:t>
+            </a:r>
+            <a:r>
+              <a:rPr sz="1700" b="0">
+                <a:solidFill>
+                  <a:srgbClr val="222222"/>
+                </a:solidFill>
+                <a:latin typeface="맑은 고딕"/>
+              </a:rPr>
+              <a:t> 구별할 수 있다</a:t>
             </a:r>
           </a:p>
         </p:txBody>
@@ -19223,7 +22998,45 @@
                 </a:solidFill>
                 <a:latin typeface="맑은 고딕"/>
               </a:rPr>
-              <a:t>•  `Ready for Switchover` / `Ready for Failover` — 핵심 답</a:t>
+              <a:t>•  </a:t>
+            </a:r>
+            <a:r>
+              <a:rPr sz="1700" b="0">
+                <a:solidFill>
+                  <a:srgbClr val="222222"/>
+                </a:solidFill>
+                <a:latin typeface="Consolas"/>
+                <a:cs typeface="Consolas"/>
+              </a:rPr>
+              <a:t>Ready for Switchover</a:t>
+            </a:r>
+            <a:r>
+              <a:rPr sz="1700" b="0">
+                <a:solidFill>
+                  <a:srgbClr val="222222"/>
+                </a:solidFill>
+                <a:latin typeface="맑은 고딕"/>
+              </a:rPr>
+              <a:t> / </a:t>
+            </a:r>
+            <a:r>
+              <a:rPr sz="1700" b="0">
+                <a:solidFill>
+                  <a:srgbClr val="222222"/>
+                </a:solidFill>
+                <a:latin typeface="Consolas"/>
+                <a:cs typeface="Consolas"/>
+              </a:rPr>
+              <a:t>Ready for Failover</a:t>
+            </a:r>
+            <a:r>
+              <a:rPr sz="1700" b="0">
+                <a:solidFill>
+                  <a:srgbClr val="222222"/>
+                </a:solidFill>
+                <a:latin typeface="맑은 고딕"/>
+              </a:rPr>
+              <a:t> — 핵심 답</a:t>
             </a:r>
           </a:p>
           <a:p>
@@ -19239,7 +23052,26 @@
                 </a:solidFill>
                 <a:latin typeface="맑은 고딕"/>
               </a:rPr>
-              <a:t>•  `Flashback Database Status` — 16장 Reinstate 와 연결</a:t>
+              <a:t>•  </a:t>
+            </a:r>
+            <a:r>
+              <a:rPr sz="1700" b="0">
+                <a:solidFill>
+                  <a:srgbClr val="222222"/>
+                </a:solidFill>
+                <a:latin typeface="Consolas"/>
+                <a:cs typeface="Consolas"/>
+              </a:rPr>
+              <a:t>Flashback Database Status</a:t>
+            </a:r>
+            <a:r>
+              <a:rPr sz="1700" b="0">
+                <a:solidFill>
+                  <a:srgbClr val="222222"/>
+                </a:solidFill>
+                <a:latin typeface="맑은 고딕"/>
+              </a:rPr>
+              <a:t> — 16장 Reinstate 와 연결</a:t>
             </a:r>
           </a:p>
           <a:p>
@@ -19255,7 +23087,35 @@
                 </a:solidFill>
                 <a:latin typeface="맑은 고딕"/>
               </a:rPr>
-              <a:t>•  `static connect identifier` — **실제로 접속해 시험한다**</a:t>
+              <a:t>•  </a:t>
+            </a:r>
+            <a:r>
+              <a:rPr sz="1700" b="0">
+                <a:solidFill>
+                  <a:srgbClr val="222222"/>
+                </a:solidFill>
+                <a:latin typeface="Consolas"/>
+                <a:cs typeface="Consolas"/>
+              </a:rPr>
+              <a:t>static connect identifier</a:t>
+            </a:r>
+            <a:r>
+              <a:rPr sz="1700" b="0">
+                <a:solidFill>
+                  <a:srgbClr val="222222"/>
+                </a:solidFill>
+                <a:latin typeface="맑은 고딕"/>
+              </a:rPr>
+              <a:t> — </a:t>
+            </a:r>
+            <a:r>
+              <a:rPr sz="1700" b="1">
+                <a:solidFill>
+                  <a:srgbClr val="222222"/>
+                </a:solidFill>
+                <a:latin typeface="맑은 고딕"/>
+              </a:rPr>
+              <a:t>실제로 접속해 시험한다</a:t>
             </a:r>
           </a:p>
           <a:p>
@@ -19271,7 +23131,26 @@
                 </a:solidFill>
                 <a:latin typeface="맑은 고딕"/>
               </a:rPr>
-              <a:t>•  `Log Files Cleared` — 전환 후 쓸 로그가 준비됐는가</a:t>
+              <a:t>•  </a:t>
+            </a:r>
+            <a:r>
+              <a:rPr sz="1700" b="0">
+                <a:solidFill>
+                  <a:srgbClr val="222222"/>
+                </a:solidFill>
+                <a:latin typeface="Consolas"/>
+                <a:cs typeface="Consolas"/>
+              </a:rPr>
+              <a:t>Log Files Cleared</a:t>
+            </a:r>
+            <a:r>
+              <a:rPr sz="1700" b="0">
+                <a:solidFill>
+                  <a:srgbClr val="222222"/>
+                </a:solidFill>
+                <a:latin typeface="맑은 고딕"/>
+              </a:rPr>
+              <a:t> — 전환 후 쓸 로그가 준비됐는가</a:t>
             </a:r>
           </a:p>
           <a:p>

--- a/ADG/14장/14장_Broker모니터링과검증명령.pptx
+++ b/ADG/14장/14장_Broker모니터링과검증명령.pptx
@@ -555,7 +555,7 @@
           <a:lstStyle/>
           <a:p>
             <a:r>
-              <a:t>13장에서 Intended State 를 배웠다. Broker 는 우리가 지시한 상태와 실제가 일치하면 정상으로 본다. 그것이 SHOW 의 판정 기준이다. VALIDATE 는 의도를 묻지 않고 전환 가능 여부라는 별개의 조건을 검사한다. 두 명령이 같은 상황에서 다른 답을 낼 수 있다는 뜻이며, 이 장은 그 장면을 실제로 만들어 보는 데서 시작한다. SUCCESS 라는 글자를 안전으로 읽는 습관이 이 장에서 깨진다.</a:t>
+              <a:t>DGMGRL에서 명령을 칠 때마다 Broker가 모든 구성원을 새로 검사한다고 생각하기 쉬운데, 실제로는 Primary의 DMON이 주기적으로 돌린 점검 결과를 메모리에 두고 보여 줍니다. 19c 출력에서 상태 줄 옆에 붙는 status updated 몇 초 전이라는 표시가 그 증거입니다. 장애가 막 생긴 직후 몇십 초 동안은 이전 상태가 그대로 보일 수 있고, 이 시간이 계속 늘어난다면 점검 자체가 돌지 못하는 상황이니 그때는 상태 값보다 통신 문제를 먼저 봐야 합니다.</a:t>
             </a:r>
           </a:p>
         </p:txBody>
@@ -625,7 +625,7 @@
           <a:lstStyle/>
           <a:p>
             <a:r>
-              <a:t>값이 크다고 문제가 아니다. 적용할 리두가 없어 기다리는 것이므로 유휴에 가깝다. 적용이 병목이라면 유휴가 아닌 I/O 계열이 상위로 올라온다. 이 속성을 쓰는 방법은 하나다. 평소 값을 알아 두는 것이다. 정기 점검에서 이 목록을 기록해 두면 나중에 비교할 근거가 생긴다. 기준선 없이 한 번 보는 것으로는 아무 판단도 할 수 없으며, 그 기준선을 만드는 일이 곧 이 속성을 쓰는 준비다. 상위 다섯 건과 값을 그대로 옮겨 적어 두는 것으로 충분하다.</a:t>
+              <a:t>Far Sync는 데이터 파일이 없는 중계점이라 적용 관련 항목이 없습니다. 대신 Far Sync가 막히면 그 뒤에 매달린 Standby들의 transport lag가 한꺼번에 늘어납니다. 자동 전환이 켜진 구성에서는 Observer 관련 경고를 지연 경고보다 먼저 봐야 합니다. Observer가 없으면 Primary가 사라져도 아무도 전환을 결정하지 않기 때문입니다. Observer의 동작과 전환 조건은 16장에서 다루고, 여기서는 경고를 알아보는 데까지만 갑니다.</a:t>
             </a:r>
           </a:p>
         </p:txBody>
@@ -695,7 +695,7 @@
           <a:lstStyle/>
           <a:p>
             <a:r>
-              <a:t>세 번호가 이름-값-권한의 순서로 대응한다고 기억하면 편하다. 무엇을 고쳐야 하는지가 번호만으로 정해진다. 조회 전용이라는 사실은 SHOW DATABASE VERBOSE 출력에서 값이 '(monitor)' 로 나오는 것으로 미리 알 수 있으므로, 스크립트를 짤 때 그 표시를 먼저 확인하면 이 오류를 피할 수 있다. 조치는 SET 이 아니라 SHOW 를 쓰는 것이다.</a:t>
+              <a:t>장애 상황에서는 여러 명령을 한꺼번에 치게 되는데, 순서를 정해 두면 놓치는 것이 줄어듭니다. 구성 화면에서 문제 구성원을 찾고, 그 구성원의 요약에서 원인 코드를 확인하고, 코드 종류에 맞는 모니터링 속성으로 내려갑니다. 마지막 단계의 로그는 언제 시작됐는지를 알려 주는 자료라서, 화면이 지금 상태만 보여 준다는 한계를 메워 줍니다. 각 단계에서 처음 이상이 보인 곳에 멈춰 원인을 찾는 방식입니다.</a:t>
             </a:r>
           </a:p>
         </p:txBody>
@@ -765,7 +765,7 @@
           <a:lstStyle/>
           <a:p>
             <a:r>
-              <a:t>실측에서 셋 다 기본값이 30 이었다. 임계값을 너무 짧게 잡으면 늘 WARNING 이 뜨고, 그러면 아무도 보지 않게 된다. 경보의 가치가 사라진다. 반대로 너무 길게 잡으면 문제를 늦게 안다. 환경의 정상 범위를 먼저 관찰한 뒤 그보다 위에 두는 것이 원칙이다. 임계값은 기술적 설정이 아니라 운영 정책의 표현이다. 숫자를 정하는 것은 어디까지를 정상으로 볼 것인가를 정하는 일이며, 그래서 담당자가 아니라 운영 규칙이 답을 가지고 있어야 한다.</a:t>
+              <a:t>속성 관련 오류 세 가지는 실습에서 자주 마주칩니다. 이름을 잘못 쓰면 16538, 이름은 맞는데 값이 이상하면 16790, 모니터링 속성에 값을 주려 하면 16568이 납니다. 모니터링 속성은 조회할 때마다 Broker가 대상 구성원에서 값을 모아 오기 때문에 SHOW CONFIGURATION보다 느릴 수 있습니다. 감시 스크립트에 넣을 때는 경고가 떴을 때 원인을 보는 용도로 쓰고, 1분 단위 반복 조회 같은 방식은 피하는 것이 좋습니다.</a:t>
             </a:r>
           </a:p>
         </p:txBody>
@@ -835,7 +835,7 @@
           <a:lstStyle/>
           <a:p>
             <a:r>
-              <a:t>이 장면이 두 지연을 나눠 보는 이유를 분명하게 만든다. 지금 보이는 apply lag 은 장애가 아니라 설정이며, transport lag 이 0 이라는 사실이 그것을 증명한다. 반대로 transport lag 이 커지면 그때는 진짜 문제다. 같은 지연이라는 말을 쓰지만 뜻이 다르다. 진단할 때 두 값을 반드시 함께 읽어야 하는 이유가 여기 있다. 하나만 보면 설정과 장애를 구별할 수 없으며, apply lag 하나로 경보를 만든 감시 체계가 거짓 경보를 쏟아 내는 원인이 된다.</a:t>
+              <a:t>StatusReport는 묶음 코드를 펼치는 도구입니다. 머리글만 있고 행이 없으면 문제가 없는 상태입니다. LogXptStatus는 리두를 보내는 쪽에서 본 결과라 Primary에 대해 조회해야 의미가 있습니다. Standby에 대해 조회하면 보낼 곳이 없으니 내용이 없습니다. ERROR 칸에 ORA-12541이나 ORA-12514 같은 Oracle Net 오류가 보이면 리스너와 접속 문자열을 의심할 차례이므로 3장에서 만든 구성을 다시 확인합니다.</a:t>
             </a:r>
           </a:p>
         </p:txBody>
@@ -905,7 +905,7 @@
           <a:lstStyle/>
           <a:p>
             <a:r>
-              <a:t>이것이 DelayMins 가 파는 것이다. 첫째 계획된 전환이 막힌다. 둘째 재해가 나면 밀린 만큼을 잃는다. 셋째 밀린 리두를 다 적용할 때까지 Failover 도 늦어진다. DelayMins 는 실수 대비를 사고 재해 복구 능력을 파는 거래이지 공짜 안전장치가 아니다. 도입할 때는 이 세 가지 대가를 문서에 명시해 두는 것이 좋다. 나중에 왜 전환이 안 되느냐는 질문을 받았을 때 그 문서가 근거가 되며, 지연을 해제할 시점을 정하는 기준도 거기서 나온다.</a:t>
+              <a:t>불일치는 대부분 누군가 SQL*Plus에서 ALTER SYSTEM으로 파라미터를 직접 바꿨을 때 생깁니다. Broker는 자기 구성 파일의 값을 정답으로 여기므로, 다음 상태 변경이나 재기동 때 Broker 값으로 다시 덮어써 사람이 바꾼 값이 사라질 수 있습니다. 해결 방향은 둘 중 하나입니다. Broker 속성을 원하는 값으로 바꾸거나, 실제 설정을 Broker 값으로 되돌립니다. Broker가 모르는 파라미터의 차이는 여기 나오지 않으며, 그런 차이는 VALIDATE DATABASE SPFILE로 찾습니다.</a:t>
             </a:r>
           </a:p>
         </p:txBody>
@@ -975,7 +975,7 @@
           <a:lstStyle/>
           <a:p>
             <a:r>
-              <a:t>Broker 는 임계값이 있는 항목만 경보한다. 설정 자체가 위험한 것은 알리지 않는다. 임계값을 가진 것은 셋뿐이며 그 바깥의 위험 — 전송 차단, 보호 모드가 요구보다 낮음, 플래시백 꺼짐, 관측자 없음 — 은 경보의 대상이 아니다. 그래서 정기 점검에 VALIDATE 를 넣어야 한다. 경보는 숫자가 임계를 넘었는가만 답한다. 임계값을 가진 것은 셋뿐이며 그 바깥의 위험은 경보의 대상이 아니다. 그래서 정기 점검에 VALIDATE 를 넣어야 한다.</a:t>
+              <a:t>두 큐는 7장에서 transport lag와 apply lag를 나눠 본 것과 같은 일을 로그 파일 단위로 보여 줍니다. 지연 값은 몇 초 늦었는지만 알려 주지만, 큐는 어떤 로그가 어디에 걸려 있는지를 보여 줍니다. 지연 적용을 걸어 둔 Standby는 받은 큐가 늘 길게 나오는데, 설정의 결과이므로 지연 시간에 해당하는 만큼은 정상으로 봅니다. 그 이상 쌓인다면 그때부터가 진짜 적용 지연입니다.</a:t>
             </a:r>
           </a:p>
         </p:txBody>
@@ -1045,7 +1045,7 @@
           <a:lstStyle/>
           <a:p>
             <a:r>
-              <a:t>멤버 하나의 경고가 구성 상태를 끌어내린다. 이것을 반대로 이용하면 SHOW CONFIGURATION 한 줄로 봐야 할 일이 있는가를 판정할 수 있다. 다만 그러려면 임계값이 환경에 맞아야 한다. 담당자가 무시하는 습관이 들면 진짜 경보까지 함께 묻힌다. 경보의 가치는 평소에 조용한 데서 나온다는 원칙을 기억한다. 멤버 하나의 경고가 구성 상태를 끌어내리므로 반대로 이용하면 SHOW CONFIGURATION 한 줄로 봐야 할 일이 있는가를 판정할 수 있다.</a:t>
+              <a:t>지연 경고가 뜨면 많은 경우 네트워크부터 의심합니다. 그런데 보낼 큐가 비어 있다면 리두는 이미 Standby에 도착한 것이고, 네트워크를 늘려도 달라질 것이 없습니다. 받은 큐가 쌓여 있으니 적용이 따라가지 못하는 상황이고, 대기 이벤트가 I/O 쪽을 가리키니 Standby 스토리지가 원인 후보가 됩니다. 이 사례처럼 큐 두 개와 대기 이벤트만으로 DGMGRL을 벗어나지 않고도 병목 위치를 꽤 정확히 좁힐 수 있습니다.</a:t>
             </a:r>
           </a:p>
         </p:txBody>
@@ -1115,7 +1115,7 @@
           <a:lstStyle/>
           <a:p>
             <a:r>
-              <a:t>ERROR_CODE &lt;&gt; 0 인 행을 먼저 보는 것이 요령이다. 이 조건 하나로 봐야 할 것과 그냥 기록이 나뉜다. 남은 두 건은 사용자가 MRP 를 취소했다는 뜻이며 실습 준비 과정의 흔적이다. 이 뷰는 인스턴스를 재기동하기 전까지 과거 기록을 그대로 들고 있으므로, 지금 문제인가를 보려면 TIMESTAMP 를 함께 봐야 한다. 이 뷰는 인스턴스를 재기동하기 전까지 과거 기록을 그대로 들고 있으므로 지금 문제인가를 보려면 TIMESTAMP 를 함께 봐야 한다.</a:t>
+              <a:t>TopWaitEvents의 상위 목록에 리두를 기다리는 유휴 대기가 보이면 처음에는 이상해 보일 수 있지만, 할 일이 없어 기다리는 것이니 정상입니다. 쓸모는 비교에 있습니다. 평소 목록을 한 번 기록해 두면 지연이 생겼을 때 무엇이 새로 올라왔는지 금방 보입니다. Lsby로 시작하는 두 속성은 논리 Standby 전용이라 물리 Standby만 있는 구성에서는 쓸 일이 없고, 12장의 SQL Apply 문제 해결에서 다시 등장합니다.</a:t>
             </a:r>
           </a:p>
         </p:txBody>
@@ -1185,7 +1185,7 @@
           <a:lstStyle/>
           <a:p>
             <a:r>
-              <a:t>Failover 에 걸릴 시간을 가늠하려면 밀린 것을 다 적용하고 Primary 로 열어야 하므로 두 값을 더한다. 지금 환경이라면 약 11초다. 몇 분 걸립니다 대신 지금 값으로 11초입니다 라고 말할 수 있게 된다. 다만 조회 시점의 상태만 반영하므로 평상시 값이 아니라 최악의 시점 값을 기준으로 삼아야 한다. 다만 조회 시점의 상태만 반영하므로 평상시 값이 아니라 최악의 시점 값을 기준으로 삼아야 한다. 배치 작업 중이라면 값이 크게 달라진다.</a:t>
+              <a:t>공식 교재의 VERBOSE 출력 예시를 보면 ApplyLagThreshold와 TransportLagThreshold가 0으로 나오는데, 이전 릴리스 기준의 예시입니다. 19c에서는 세 속성 모두 30초가 기본이라 따로 설정하지 않아도 30초를 넘는 지연은 경고가 됩니다. 계산이 불가능한 경우는 별도 코드로 구분되는데, apply lag는 16854, transport lag는 16856입니다. 역할 전환 직후에 잠깐 보였다 사라지는 경우가 많습니다. ArchiveLagTarget은 이름만 비슷할 뿐 강제 로그 전환을 일으키는 속성입니다.</a:t>
             </a:r>
           </a:p>
         </p:txBody>
@@ -1255,7 +1255,7 @@
           <a:lstStyle/>
           <a:p>
             <a:r>
-              <a:t>감시 스크립트를 짤 때 실제로 자주 겪는 함정이다. 뷰마다 조회할 쪽이 다르다. V$ARCHIVE_DEST_STATUS 는 Primary 에서 dest_id 2, Standby 에서 dest_id 1 을 본다. V$MANAGED_STANDBY 는 Standby 에서만 의미가 있다. 스크립트는 V$DATABASE 로 역할을 먼저 판정하고 역할에 따라 다른 조회 묶음을 실행하는 구조여야 한다.</a:t>
+              <a:t>임계값을 넘었다가 다시 내려오면 경고는 다음 점검에서 조용히 사라집니다. 화면만 보는 감시라면 그런 일이 있었는지조차 모를 수 있습니다. 경고가 생기고 사라진 시각은 Broker 로그에 남으므로, 매일 한 번 로그를 집계하면 배치 시간대마다 반복되는 패턴이 드러납니다. 임계값을 바꿔도 리두가 더 빨리 가거나 적용이 빨라지지 않습니다. 임계값은 Broker가 상태를 판정하는 기준일 뿐이라서, 지연을 줄이려면 전송 방식이나 Standby 자원 쪽을 손봐야 합니다.</a:t>
             </a:r>
           </a:p>
         </p:txBody>
@@ -1325,7 +1325,7 @@
           <a:lstStyle/>
           <a:p>
             <a:r>
-              <a:t>재해 복구 능력이 완전히 사라진 상태인데 화면은 초록불이다. 이유가 둘이다. 첫째, LogShipping=OFF 는 우리가 Broker 에게 지시한 것이므로 의도한 상태다. 둘째, 지연이 0 인 것도 논리적으로 맞다. 전송이 꺼져 있으면 언제까지 받았는가의 기준이 갱신되지 않기 때문이다. 보내지 않으니 늦지도 않는다. 이 장면이 이 장의 출발점이다. 화면이 초록불인 동안 실제로는 재해 복구 능력이 사라져 있었다는 사실을 기억해 둔다.</a:t>
+              <a:t>집계 규칙은 단순합니다. 구성원 하나에 경고와 오류가 섞여 있으면 오류가 이기고, Standby 하나만 WARNING이어도 구성 전체가 WARNING이 됩니다. SHOW CONFIGURATION의 마지막 줄만 보는 감시는 어느 구성원이 문제인지 알려 주지 못합니다. 구성 상태는 경보를 울리는 데 쓰고, 원인은 그 위에 표시된 구성원 줄과 코드에서 찾는 식으로 역할을 나눠 쓰는 것이 실무에서 편합니다. DISABLED는 Broker가 관리를 멈춘 상태라 정상과 구분해서 다뤄야 합니다.</a:t>
             </a:r>
           </a:p>
         </p:txBody>
@@ -1395,7 +1395,7 @@
           <a:lstStyle/>
           <a:p>
             <a:r>
-              <a:t>DATABASE 와 REDO_SOURCE 가 512바이트로 정의되어 있어 서식을 주지 않으면 화면이 무너진다. STATUS 에 문자 서식을 주면 우물 정 자가 나오고 실측값은 0 이었다. SUCCESS 같은 문자열을 기대하고 파싱하면 어긋난다. 구성 정보는 양쪽 구성 파일에 같이 들어 있으므로 Primary 가 죽어도 Standby 에서 구성을 조회할 수 있다는 점도 기억한다.</a:t>
+              <a:t>기본 30초를 그대로 두는 것도 하나의 선택이지만, 업무 기준과 맞는지는 따져 봐야 합니다. 데이터 손실을 몇 분까지 허용하는지가 transport lag 기준이 되고, 전환 후 몇 분 안에 서비스가 열려야 하는지가 apply lag 기준이 됩니다. 값을 정할 때는 먼저 배치 시간대를 포함한 평소 지연을 일주일쯤 기록해 보는 것이 좋습니다. 매일 밤 경고가 뜨는 시스템에서는 운영자가 경고를 무시하게 되고, 그 상태에서 진짜 경고도 함께 묻힙니다.</a:t>
             </a:r>
           </a:p>
         </p:txBody>
@@ -1465,7 +1465,7 @@
           <a:lstStyle/>
           <a:p>
             <a:r>
-              <a:t>감시 계정이 SYSDBA 가 아니라면 이름이 맞아도 이 오류가 난다. 이름을 의심하기 전에 접속 계정을 먼저 본다. V$ 뷰의 실제 이름은 V_$ 로 시작하므로 딕셔너리에서 찾을 때는 그 점에 주의한다. 세 뷰의 이름 규칙도 일관되지 않다. 앞의 둘은 DATAGUARD 인데 구성 뷰만 DG 로 줄어 있다. 세 뷰의 이름 규칙도 일관되지 않다. 앞의 둘은 DATAGUARD 인데 구성 뷰만 DG 로 줄어 있어 더 헷갈린다.</a:t>
+              <a:t>DelayMins를 30분으로 두면 Primary에서 실수로 지운 데이터를 30분 안에 Standby에서 되살릴 여지가 생깁니다. 그 대신 이 Standby로 Failover하려면 밀린 30분어치를 먼저 적용해야 합니다. 이 거래를 받아들였다면 apply lag 기준도 그에 맞게 올려야 늘 WARNING이 뜨는 일을 피할 수 있습니다. 반면 지연 적용은 전송에 아무 영향이 없으므로, transport lag가 늘었다면 설정과 무관한 실제 문제로 다룹니다.</a:t>
             </a:r>
           </a:p>
         </p:txBody>
@@ -1535,7 +1535,7 @@
           <a:lstStyle/>
           <a:p>
             <a:r>
-              <a:t>10장에서 Far Sync 의 ADR 경로를 짐작했다가 틀렸던 일과 같다. 경로는 추측하지 말고 find 로 찾는다. 권한도 본다. dr1 dat 은 640 인데 내보낸 XML 은 644 라 같은 그룹이 아닌 사용자도 읽을 수 있다. 구성 정보가 담긴 파일이므로 백업 위치로 옮긴 뒤 권한을 조이는 것이 낫다. 권한도 본다. dr1 dat 은 640 인데 내보낸 XML 은 644 라 같은 그룹이 아닌 사용자도 읽을 수 있으므로 옮긴 뒤 조이는 것이 낫다.</a:t>
+              <a:t>12.2부터 VALIDATE의 형태가 늘어났고, 19c DGMGRL의 도움말에는 여섯 가지가 나옵니다. 실행 전에 HELP VALIDATE로 지금 쓰는 DGMGRL이 받아들이는 문법을 확인하는 습관을 들이면 구문 오류로 시간을 버리는 일이 줄어듭니다. 대부분의 VALIDATE는 대상 구성원에 직접 접속해 검사하므로, 출력 첫 줄에 접속이 필요하다는 문장이 나옵니다. 대상에 접속할 수 없으면 검사도 끝까지 가지 못합니다.</a:t>
             </a:r>
           </a:p>
         </p:txBody>
@@ -1605,7 +1605,7 @@
           <a:lstStyle/>
           <a:p>
             <a:r>
-              <a:t>두 번째 줄이 중요하다. DGMGRL 명령이 실제로는 서버 쪽 PL/SQL 호출이라는 것이 오류 스택에서 드러난다. 13장에서 DGMGRL 이 SQL 을 대신 실행해 준다고 한 그 구조다. 원하는 곳에 두려면 만들어진 뒤 OS 에서 옮긴다. 백업 스크립트라면 EXPORT 다음 줄에 mv 를 넣고 이름에 날짜를 포함시킨다. 원하는 곳에 두려면 만들어진 뒤 OS 에서 옮긴다. 백업 스크립트라면 EXPORT 다음 줄에 mv 를 넣고 이름에 날짜를 포함시킨다.</a:t>
+              <a:t>Standby에 대해 실행할 때 항목이 가장 많고, Primary에 대해 실행하면 Ready for Failover와 Log Files Cleared가 빠집니다. 둘 다 전환을 받는 쪽에서만 의미가 있는 항목이기 때문입니다. Standby의 Online Redo Log가 Not Cleared로 나오는 것은 경고가 아닙니다. 아직 쓰인 적이 없는 로그라 전환 때 정리됩니다. Ready for Switchover가 No이면 출력에 이유가 문장으로 붙으니 그 문장부터 읽으면 됩니다.</a:t>
             </a:r>
           </a:p>
         </p:txBody>
@@ -1675,7 +1675,7 @@
           <a:lstStyle/>
           <a:p>
             <a:r>
-              <a:t>오래된 XML 로 현재 구성이 덮이는 사고를 막는 안전한 설계다. 13장의 ORA-16532 와 짝이 되는 번호로 기억하면 좋다. 있는데 또 만들려 하면 16504, 없는데 쓰려 하면 16532 다. 구성을 지운 동안에도 전송과 적용은 파라미터대로 계속되지만 장애가 나도 알려 줄 주체가 없으므로 이 작업은 짧게 끝내야 한다. 구성을 지운 동안에도 전송과 적용은 파라미터대로 계속되지만 장애가 나도 알려 줄 주체가 없으므로 이 작업은 짧게 끝내야 한다.</a:t>
+              <a:t>Future 항목이 이 명령에서 가장 유용한 부분 중 하나입니다. 지금 Primary인 chicago에 SRL이 없으면 현재는 문제가 없어도, 전환 후 chicago가 Standby가 됐을 때 실시간 적용이 동작하지 않습니다. VALIDATE는 그 상황을 미리 계산해 보여 줍니다. Gap Status는 7장에서 V$ARCHIVE_GAP으로 확인하던 내용을 한 줄로 정리한 것이고, 임시 파일 수 비교는 전환 직후 정렬 작업이 실패하는 일을 막기 위한 항목입니다.</a:t>
             </a:r>
           </a:p>
         </p:txBody>
@@ -1745,7 +1745,7 @@
           <a:lstStyle/>
           <a:p>
             <a:r>
-              <a:t>파일이 커졌다는 것은 그만큼 명시적으로 설정한 항목이 늘었다는 신호다. XML 안에서 Default="True" 표시가 붙은 항목은 기본값이라는 뜻이므로, 그 표시가 없는 항목을 찾으면 무엇을 손댔는지 알 수 있다. 실측에서 ApplyLagThreshold 는 값이 기본과 같은 30 인데도 Default 표시가 없었다. 한 번 설정하면 값이 같아도 설정한 것으로 남는다.</a:t>
+              <a:t>결과를 처음 보면 목록이 길어 당황하기 쉽습니다. DB_UNIQUE_NAME, FAL_CLIENT, 감사 파일 경로처럼 구성원 이름이 들어가는 값은 다른 것이 정상입니다. 경로 끝의 슬래시 하나 차이나, 한쪽만 기본값을 명시적으로 적은 경우도 다르다고 나옵니다. 목록을 모두 맞추는 것이 목적이 아니고, 항목마다 의도한 차이인지 판정하는 것이 목적입니다. 메모리나 프로세스 관련 값이 Standby 쪽이 작다면 전환 전에 미리 고쳐 둡니다.</a:t>
             </a:r>
           </a:p>
         </p:txBody>
@@ -1815,7 +1815,7 @@
           <a:lstStyle/>
           <a:p>
             <a:r>
-              <a:t>네트워크가 끊겼을 뿐인데 Standby 가 Primary 가 죽었다고 판단해 승격하면 Primary 가 둘이 된다. 양쪽에 서로 다른 쓰기가 쌓이면 되돌릴 수 없다. 관측자는 Primary 만 안 보이는지 내 쪽 네트워크가 문제인지를 구별할 수 있다. 관측자를 Primary 호스트에 두면 그 호스트가 죽을 때 판단 주체가 함께 사라진다. 관측자를 Primary 호스트에 두면 그 호스트가 죽을 때 판단 주체가 함께 사라진다. Standby 에 두면 단독 판정과 다를 바 없어진다.</a:t>
+              <a:t>이 명령은 비교를 시작했다는 메시지를 내고 곧 프롬프트를 돌려줍니다. 공식 교재도 이 메시지만으로 비교 완료나 이상 없음을 판단하지 말라고 적고 있습니다. 결과는 OUTPUT에 준 이름으로 대상 구성원 호스트의 trace 디렉터리에 생깁니다. 검사를 수행한 쪽에 생기므로 명령을 낸 서버만 뒤지다가 파일을 못 찾는 일이 잦습니다. 데이터 파일이 크면 양쪽에 I/O 부하가 생기니 한가한 시간대에 나눠 실행합니다.</a:t>
             </a:r>
           </a:p>
         </p:txBody>
@@ -1885,7 +1885,7 @@
           <a:lstStyle/>
           <a:p>
             <a:r>
-              <a:t>데이터베이스의 백그라운드 프로세스가 아니라는 것이 구문에서 드러난다. FILE 절은 재기동 후에도 이어서 감시하기 위한 것이다. 이 실습에서는 관측자를 시작하지 않는다. 전경에서 돌면 세션을 붙잡고 IN BACKGROUND 로 띄우면 조건이 맞을 때 실제로 전환을 일으키기 때문이다. 실제 전환은 16장에서 다룬다. 이 실습에서는 관측자를 시작하지 않는다. IN BACKGROUND 로 띄우면 조건이 맞을 때 실제로 전환을 일으키기 때문이며 실제 전환은 16장에서 다룬다.</a:t>
+              <a:t>lost write는 스토리지가 쓰기를 마쳤다고 응답했지만 실제로는 기록하지 않은 사고입니다. 전송과 적용이 정상이고 지연이 0이어도 생길 수 있어서 SHOW 계열의 어떤 상태 값에도 드러나지 않습니다. 결과 표에서 LWLOC, LWRMT, DIFFPAIR가 0이면 정상입니다. DIFFV는 Standby가 적용을 계속하는 중이라 비교 순간 버전이 다른 블록이 있는 것이 자연스럽습니다. 7장의 DB_LOST_WRITE_PROTECT와 함께 쓰면 적용 중 감지와 시점 비교를 모두 갖추게 됩니다.</a:t>
             </a:r>
           </a:p>
         </p:txBody>
@@ -1955,7 +1955,7 @@
           <a:lstStyle/>
           <a:p>
             <a:r>
-              <a:t>기본값이 NO 인 둘은 회복 가능한 상황이기 때문이다. 아카이버가 멈춘 것은 FRA 가 찼기 때문일 수 있고 공간을 비우면 풀린다. 그런 상황에 역할을 바꾸는 것은 과하다. 필요하면 ENABLE FAST_START FAILOVER CONDITION 으로 켤 수 있다. 자동 전환의 민감도를 사람이 정한다는 뜻이며 켤수록 빨리 반응하지만 불필요한 전환도 늘어난다.</a:t>
+              <a:t>한쪽 방향만 접속이 되는 상황은 생각보다 흔합니다. 방화벽이 한쪽만 열려 있거나, 한 서버의 tnsnames.ora에만 상대 항목이 있는 경우입니다. 평소에는 Primary에서 Standby로만 리두가 가니 문제를 모르다가, 전환 후 반대 방향이 필요해지는 순간 드러납니다. 이 명령은 그런 비대칭을 미리 찾아 줍니다. 3장에서 만든 접속 구성을 Broker의 시각으로 다시 시험하는 명령이라고 보면 이해가 쉽습니다.</a:t>
             </a:r>
           </a:p>
         </p:txBody>
@@ -2025,7 +2025,7 @@
           <a:lstStyle/>
           <a:p>
             <a:r>
-              <a:t>그러므로 enable 계열 명령은 실행한 뒤 반드시 SHOW 로 결과를 확인해야 한다. 화면에 Warning 이 있으면 그것이 무시해도 되는 것인지 판단한다. 플래시백이 왜 필요한가. 자동 전환 뒤 옛 Primary 를 되살리려면 필요하다. 없으면 옛 Primary 는 버리고 새로 만들어야 한다. 그래서 경고이지 금지는 아니다. 플래시백이 없으면 전환 뒤 옛 Primary 를 되살릴 수 없다. 그래서 경고이지 금지는 아니다. 자동 전환 자체는 동작한다.</a:t>
+              <a:t>역할 전환 중 Broker는 인스턴스를 내렸다 올립니다. 인스턴스가 내려가 있는 동안에는 리스너에 동적으로 등록된 서비스가 사라지므로, 다시 올리려면 정적으로 등록된 서비스가 필요합니다. 13장에서 리스너에 DGMGRL 서비스를 정적으로 적은 이유입니다. 정적 등록이 빠져 있어도 평소 동작에는 아무 영향이 없어서 SHOW는 SUCCESS를 냅니다. 전환을 시작한 뒤에야 중간에 멈추는 형태로 드러나니, 전환 전 점검에 이 명령을 꼭 넣어 둡니다.</a:t>
             </a:r>
           </a:p>
         </p:txBody>
@@ -2095,7 +2095,7 @@
           <a:lstStyle/>
           <a:p>
             <a:r>
-              <a:t>Failover 가 Yes 인 것도 눈여겨본다. Failover 는 데이터 손실을 감수하는 비계획 전환이므로 전송이 꺼져 있어도 할 수는 있다. Switchover 는 무손실이어야 하므로 안 된다. 속성 표가 실습 01 에서는 전체 목록이었는데 여기서는 다른 값만 한 줄로 나왔다. 정상일수록 표가 짧다는 뜻이며, 표의 길이 자체가 점검 신호가 된다. 행이 하나라도 나오면 그 속성이 무엇인지 먼저 확인한다.</a:t>
+              <a:t>Broker는 데이터가 안전한지를 직접 판단하지 않습니다. 운영자가 정해 둔 의도 상태와 실제 상태가 맞는지를 볼 뿐입니다. 적용을 꺼 두겠다고 정했으면 적용이 멈춰 있어도 SUCCESS가 나옵니다. 이 성질은 유지 보수 때 편리하지만, 작업을 마치고 원래 상태로 돌려놓는 것을 잊으면 경고 없이 위험한 상태가 오래 이어집니다. 뒤에서 볼 LogShipping 사례가 정확히 이 구조에서 생깁니다.</a:t>
             </a:r>
           </a:p>
         </p:txBody>
@@ -2165,7 +2165,7 @@
           <a:lstStyle/>
           <a:p>
             <a:r>
-              <a:t>ORA-16819 는 실습에서는 의도한 것이지만 운영에서 보면 심각한 상태다. FSFO 를 켜 놓고 관측자가 없으면 자동 전환이 일어나지 않는다. 자동 전환이 켜져 있다고 안심하는 사이 아무 일도 하지 않는다. Potential Data Loss Mode 는 보호 모드가 MaxPerformance 이므로 전환 시 데이터 손실 가능성이 있다는 뜻이다. Potential Data Loss Mode 는 보호 모드가 MaxPerformance 이므로 전환 시 데이터 손실 가능성이 있다는 뜻이다. MaxAvailability 라면 표현이 달라진다.</a:t>
+              <a:t>Far Sync를 둔 구성에서는 RedoRoutes가 역할에 따라 다른 경로를 정의하는 경우가 많습니다. 지금 chicago가 Primary일 때는 chicagoFS를 거치고, boston이 Primary가 되면 다른 Far Sync를 거치는 식입니다. WHEN PRIMARY IS 절은 이 가운데 아직 쓰이지 않는 경로를 미리 검사하게 해 줍니다. 평소에는 inactive로 표시되던 Far Sync가 전환 후 실제로 일을 할 수 있는지 확인하는 수단입니다. Far Sync가 없는 구성이면 쓸 일이 없습니다.</a:t>
             </a:r>
           </a:p>
         </p:txBody>
@@ -2235,7 +2235,7 @@
           <a:lstStyle/>
           <a:p>
             <a:r>
-              <a:t>대상을 지정하는 것이 켜는 행위처럼 보이기 때문에 생기는 착각이다. 실제로는 ENABLE 이 기능을 켜고 속성은 대상을 정할 뿐이며 둘은 별개다. 이 상태에서 관측자가 떠 있다면 대상이 불명확한 채로 전환 조건을 감시하게 된다. SHOW 로 확인하지 않으면 모른 채 넘어간다는 점이 가장 위험하다. 대상을 지정하는 것이 켜는 행위처럼 보이기 때문에 생기는 착각이다. 실제로는 ENABLE 이 기능을 켜고 속성은 대상을 정할 뿐이며 둘은 별개다. SHOW 로 확인하지 않으면 모른 채 넘어간다.</a:t>
+              <a:t>SHOW의 SUCCESS는 설정한 대로 돌고 있다는 판정입니다. 설정 자체가 전환에 불리해도 SUCCESS가 나옵니다. VALIDATE는 그 설정이 전환을 막는지를 따집니다. 반대로 VALIDATE는 시간에 따라 변하는 지연 같은 값을 계속 지켜보는 데는 맞지 않습니다. 두 명령은 서로를 대신하지 못하므로, 운영에서는 짧은 주기 감시에 SHOW를, 주 단위 점검과 계획된 전환 직전에 VALIDATE를 넣는 식으로 역할을 나눕니다.</a:t>
             </a:r>
           </a:p>
         </p:txBody>
@@ -2305,7 +2305,7 @@
           <a:lstStyle/>
           <a:p>
             <a:r>
-              <a:t>Observe-Only Mode 는 관측자가 조건을 감시하고 기록은 남기지만 실제 전환은 하지 않는 모드다. 도입 단계에서 얼마나 자주 조건에 걸리는지 먼저 관찰한 뒤 진짜로 켤지 판단할 수 있다. 다만 관측 전용이어도 관측자는 필요하며 실측에서 ORA-16819 는 그대로 떴다. 감시만 하는 모드일 뿐 감시할 주체가 없어도 된다는 뜻이 아니다. 다만 관측 전용이어도 관측자는 필요하며 실측에서 ORA-16819 는 그대로 떴다. 감시만 하는 모드일 뿐 감시할 주체가 없어도 된다는 뜻이 아니다.</a:t>
+              <a:t>전송을 끈 것은 운영자가 정한 의도 상태라서 Broker는 문제로 보지 않습니다. Standby 쪽에서는 다음 리두를 기다리는 평범한 상태로 보이고, 리두가 들어오지 않으니 지연을 새로 계산할 근거도 없습니다. 이 상태로 Primary에 장애가 나면 전환할 Standby에는 끈 시점 이후의 데이터가 없습니다. VALIDATE는 전환 가능 여부를 묻기 때문에 이 상황을 곧장 잡아냅니다. 실습 2에서 이 장면을 직접 만들어 봅니다.</a:t>
             </a:r>
           </a:p>
         </p:txBody>
@@ -2375,7 +2375,7 @@
           <a:lstStyle/>
           <a:p>
             <a:r>
-              <a:t>이 시차 때문에 SHOW 를 한 번 보고 판단하면 오판할 수 있다. 방금 무언가를 바꿨다면 갱신 시각을 확인하고 필요하면 다시 조회한다. 반대로 오래된 판정을 최신 상태로 오인하는 경우도 있다. 실습 02 에서 SUCCESS 옆에 58 seconds ago 가 붙어 있었던 것을 떠올린다. 화면의 색깔만이 아니라 그 값이 언제 계산됐는지를 함께 보는 습관이 필요하다.</a:t>
+              <a:t>구성 파일 dr1, dr2는 이진 형식이라 열어 봐도 읽을 수 없습니다. EXPORT CONFIGURATION은 그 내용을 사람이 읽는 XML로 남기는 공식 방법입니다. 인자에는 파일 이름만 줄 수 있고, 파일은 항상 trace 디렉터리에 생기며 명령은 위치를 알려 주지 않습니다. 내보낸 직후 백업 위치로 옮기는 단계까지 스크립트에 넣어 두면 좋습니다. 두 시점의 파일을 diff로 비교하면 누가 언제 어떤 속성을 바꿨는지가 드러나 감사 자료로도 쓸 만합니다.</a:t>
             </a:r>
           </a:p>
         </p:txBody>
@@ -2445,7 +2445,7 @@
           <a:lstStyle/>
           <a:p>
             <a:r>
-              <a:t>1~3층은 SQL 이나 DGMGRL 한 줄로 끝나므로 자동화한다. 4층은 사람이 읽어야 할 항목이 많으므로 정기 점검에 넣는다. 5층은 사건이 났을 때만 본다. 층마다 답하는 질문이 다르므로 어느 하나로 다른 것을 대신할 수 없다. 특히 1층의 SUCCESS 는 4층의 답을 대신하지 못한다는 것이 이 장 전체의 결론이다. 그래서 4층을 자동화하기 어렵더라도 최소한 Ready for Switchover 한 줄은 뽑아 두어야 한다.</a:t>
+              <a:t>가져오기가 기존 구성을 덮어쓰지 않는 것은 안전장치입니다. 오래된 파일을 실수로 가져와 현재 구성이 망가지는 일을 막아 줍니다. 그래서 실제로 쓰려면 구성을 먼저 지워야 합니다. REMOVE CONFIGURATION은 데이터베이스나 리두 흐름을 건드리지 않으므로 위험한 작업은 아니지만, 지운 순간부터 가져오기가 끝날 때까지 Broker의 감시가 사라집니다. 그 사이 장애가 나도 알려 줄 주체가 없으니 짧게 끝내야 합니다.</a:t>
             </a:r>
           </a:p>
         </p:txBody>
@@ -2515,7 +2515,7 @@
           <a:lstStyle/>
           <a:p>
             <a:r>
-              <a:t>이 장에서 실측한 상황이 정확히 그것이다. 전송이 완전히 끊겼는데 1층은 SUCCESS 였고 2층은 두 지연 모두 0 이었다. 4층만이 Ready for Switchover: No 라고 답했다. 최소한 Ready for Switchover 한 줄과 속성 비교 표의 불일치 행만이라도 자동으로 뽑아 주간 점검 기록에 남기면 이 함정을 피할 수 있다. 최소한 Ready for Switchover 한 줄과 속성 비교 표의 불일치 행만이라도 자동으로 뽑아 주간 점검 기록에 남기면 이 함정을 피할 수 있다.</a:t>
+              <a:t>화면은 지금의 상태만 보여 주지만 로그에는 시간순으로 변화가 쌓입니다. 정상 상태는 ORA-0이라는 표기로 남고, 문제가 있으면 구성 수준과 구성원 수준 코드가 함께 기록됩니다. 역할 전환이 중간에 멈췄을 때 어느 단계까지 갔는지도 이 로그에서만 확인됩니다. 명령을 낸 쪽과 실제로 처리한 쪽의 로그 내용이 다를 수 있으므로, 전환 같은 작업을 분석할 때는 Primary와 Standby 양쪽 로그를 같은 시각 기준으로 함께 봐야 합니다.</a:t>
             </a:r>
           </a:p>
         </p:txBody>
@@ -2585,7 +2585,7 @@
           <a:lstStyle/>
           <a:p>
             <a:r>
-              <a:t>일곱 가지 중 셋이 정상이거나 설정한 대로다. Broker 의 화면에서 색깔만 보고 판단하면 안 된다는 것이 이 장의 요지다. SUCCESS 가 안전을 뜻하지 않고 Warning 이 위험을 뜻하지도 않는다. 각 표시가 어떤 질문에 대한 답인지를 알아야 판정할 수 있으며, 그것을 아는 것이 이 장에서 배운 전부다. 각 표시가 어떤 질문에 대한 답인지를 알아야 판정할 수 있으며 그것을 아는 것이 이 장에서 배운 전부다.</a:t>
+              <a:t>Broker가 내리는 조치는 대부분 SQL 문장이라서, 데이터베이스에 내린 조치는 경고 로그에도 그대로 남습니다. drc 로그는 Broker가 무엇을 하려 했는지, 경고 로그는 데이터베이스에서 실제로 무슨 일이 있었는지를 보여 줍니다. 둘을 같은 시각으로 맞춰 놓고 읽으면 Broker의 판단과 결과가 어긋난 지점이 보입니다. TraceLevel을 SUPPORT로 올리면 로그 양이 크게 늘어나므로 지원 요청 자료를 모을 때만 잠깐 올립니다.</a:t>
             </a:r>
           </a:p>
         </p:txBody>
@@ -2655,7 +2655,7 @@
           <a:lstStyle/>
           <a:p>
             <a:r>
-              <a:t>실습 01 에서 쓴 것은 첫 번째뿐이었다. DATAFILE 은 OUTPUT= 이 대괄호 밖에 있어 필수이며 빠뜨리면 Syntax error 다. 그리고 경로를 주면 DGM-17138 로 거부된다. 14.6절의 EXPORT CONFIGURATION 이 ORA-16540 을 낸 것과 같은 구조이며 인자는 경로가 아니라 파일 이름이다. 오류 접두어가 ORA- 가 아니라 DGM- 이라는 점도 판정 스크립트를 짤 때 기억한다.</a:t>
+              <a:t>판정 스크립트는 Configuration Status 줄의 낱말만 보지 말고 ORA와 DGM 접두어 코드를 함께 처리해야 합니다. DGMGRL이 접속에 실패해 아무 결과도 내지 못한 경우도 경보 대상에 넣어야 합니다. 감시 도구가 JDBC로만 붙는 환경처럼 DGMGRL을 쓸 수 없는 경우나, Broker 요약 값의 근거를 확인하고 싶을 때는 V$ 뷰를 직접 조회합니다. 그 방법은 15장에서 이어서 다룹니다. SHOW ALL이 보여 주는 것은 데이터베이스 속성과 별개인 DGMGRL 자체의 설정입니다.</a:t>
             </a:r>
           </a:p>
         </p:txBody>
@@ -2725,77 +2725,7 @@
           <a:lstStyle/>
           <a:p>
             <a:r>
-              <a:t>명령은 Primary 에서 냈는데 결과물은 대상 쪽에 생긴다. 검사를 대상 데이터베이스가 수행하기 때문이며 14.6절의 EXPORT 와 다르므로 명령마다 확인한다. lost write 는 전송과 적용이 정상인데도 데이터가 조용히 어긋나는 사고이며 지연이나 시퀀스로는 드러나지 않는다. 15장에서 만들 점검표로도 잡히지 않고 이 명령만이 잡는다. 실측에서 CORR 와 lost write 는 모두 0 이었다.</a:t>
-            </a:r>
-          </a:p>
-        </p:txBody>
-      </p:sp>
-      <p:sp>
-        <p:nvSpPr>
-          <p:cNvPr id="4" name="Slide Number Placeholder 3"/>
-          <p:cNvSpPr>
-            <a:spLocks noGrp="1"/>
-          </p:cNvSpPr>
-          <p:nvPr>
-            <p:ph type="sldNum" idx="5" sz="quarter"/>
-          </p:nvPr>
-        </p:nvSpPr>
-        <p:spPr/>
-      </p:sp>
-    </p:spTree>
-  </p:cSld>
-  <p:clrMapOvr>
-    <a:masterClrMapping/>
-  </p:clrMapOvr>
-</p:notes>
-</file>
-
-<file path=ppt/notesSlides/notesSlide39.xml><?xml version="1.0" encoding="utf-8"?>
-<p:notes xmlns:a="http://schemas.openxmlformats.org/drawingml/2006/main" xmlns:p="http://schemas.openxmlformats.org/presentationml/2006/main" xmlns:r="http://schemas.openxmlformats.org/officeDocument/2006/relationships">
-  <p:cSld>
-    <p:spTree>
-      <p:nvGrpSpPr>
-        <p:cNvPr id="1" name=""/>
-        <p:cNvGrpSpPr/>
-        <p:nvPr/>
-      </p:nvGrpSpPr>
-      <p:grpSpPr>
-        <a:xfrm>
-          <a:off x="0" y="0"/>
-          <a:ext cx="0" cy="0"/>
-          <a:chOff x="0" y="0"/>
-          <a:chExt cx="0" cy="0"/>
-        </a:xfrm>
-      </p:grpSpPr>
-      <p:sp>
-        <p:nvSpPr>
-          <p:cNvPr id="2" name="Slide Image Placeholder 1"/>
-          <p:cNvSpPr>
-            <a:spLocks noGrp="1"/>
-          </p:cNvSpPr>
-          <p:nvPr>
-            <p:ph type="sldImg" idx="2"/>
-          </p:nvPr>
-        </p:nvSpPr>
-        <p:spPr/>
-      </p:sp>
-      <p:sp>
-        <p:nvSpPr>
-          <p:cNvPr id="3" name="Notes Placeholder 2"/>
-          <p:cNvSpPr>
-            <a:spLocks noGrp="1"/>
-          </p:cNvSpPr>
-          <p:nvPr>
-            <p:ph type="body" idx="3" sz="quarter"/>
-          </p:nvPr>
-        </p:nvSpPr>
-        <p:spPr/>
-        <p:txBody>
-          <a:bodyPr/>
-          <a:lstStyle/>
-          <a:p>
-            <a:r>
-              <a:t>log_archive_trace 가 흥미롭다. 15장에서 chicago 에만 추적을 켰다가 0 으로 되돌리는데 그때 SCOPE=BOTH 로 저장되면서 명시적으로 0 이 된다. boston 은 한 번도 건드리지 않아 NOT SPECIFIED 다. 값은 사실상 같은데 표기가 다르며, 14.6절에서 본 XML 의 Default 표시와 같은 이야기다. 한 번 설정하면 기본값과 같아도 설정한 것으로 남는다.</a:t>
+              <a:t>이 장에서 본 문제 가운데 상당수는 경보 없이 진행된다는 공통점이 있습니다. 의도 상태로 기록된 변경은 SHOW가 문제 삼지 않고, 정적 등록 누락이나 lost write는 상태 값에 아예 나오지 않습니다. 감시 경보와 정기 점검을 따로 설계해야 합니다. 임계값은 구성원 성격에 맞게 따로 두고, Fast-Start Failover를 켠 구성이라면 Observer 경고를 지연 경고보다 먼저 처리합니다. 내보낸 구성 파일은 ADR 정리 때 지워질 수 있으니 바깥으로 옮겨 둡니다.</a:t>
             </a:r>
           </a:p>
         </p:txBody>
@@ -2865,147 +2795,7 @@
           <a:lstStyle/>
           <a:p>
             <a:r>
-              <a:t>이 차이가 진단에 쓰인다. RESET 이 보이면 Broker 가 껐다는 뜻이고 DEFER 가 보이면 사람이 SQL 로 껐다는 뜻이다. 후자라면 13장에서 배운 대로 Broker 가 관리하는 것을 SQL 로 바꾼 상황이므로 다른 문제까지 의심해야 한다. 파라미터 값의 표현 차이가 곧 정보다. 실측에서 파라미터는 RESET 인데 목적지 상태는 DEFERRED 로 표시됐다. 같은 사실을 두 곳에서 다르게 표현하므로 둘을 함께 읽는 습관이 필요하다.</a:t>
-            </a:r>
-          </a:p>
-        </p:txBody>
-      </p:sp>
-      <p:sp>
-        <p:nvSpPr>
-          <p:cNvPr id="4" name="Slide Number Placeholder 3"/>
-          <p:cNvSpPr>
-            <a:spLocks noGrp="1"/>
-          </p:cNvSpPr>
-          <p:nvPr>
-            <p:ph type="sldNum" idx="5" sz="quarter"/>
-          </p:nvPr>
-        </p:nvSpPr>
-        <p:spPr/>
-      </p:sp>
-    </p:spTree>
-  </p:cSld>
-  <p:clrMapOvr>
-    <a:masterClrMapping/>
-  </p:clrMapOvr>
-</p:notes>
-</file>
-
-<file path=ppt/notesSlides/notesSlide40.xml><?xml version="1.0" encoding="utf-8"?>
-<p:notes xmlns:a="http://schemas.openxmlformats.org/drawingml/2006/main" xmlns:p="http://schemas.openxmlformats.org/presentationml/2006/main" xmlns:r="http://schemas.openxmlformats.org/officeDocument/2006/relationships">
-  <p:cSld>
-    <p:spTree>
-      <p:nvGrpSpPr>
-        <p:cNvPr id="1" name=""/>
-        <p:cNvGrpSpPr/>
-        <p:nvPr/>
-      </p:nvGrpSpPr>
-      <p:grpSpPr>
-        <a:xfrm>
-          <a:off x="0" y="0"/>
-          <a:ext cx="0" cy="0"/>
-          <a:chOff x="0" y="0"/>
-          <a:chExt cx="0" cy="0"/>
-        </a:xfrm>
-      </p:grpSpPr>
-      <p:sp>
-        <p:nvSpPr>
-          <p:cNvPr id="2" name="Slide Image Placeholder 1"/>
-          <p:cNvSpPr>
-            <a:spLocks noGrp="1"/>
-          </p:cNvSpPr>
-          <p:nvPr>
-            <p:ph type="sldImg" idx="2"/>
-          </p:nvPr>
-        </p:nvSpPr>
-        <p:spPr/>
-      </p:sp>
-      <p:sp>
-        <p:nvSpPr>
-          <p:cNvPr id="3" name="Notes Placeholder 2"/>
-          <p:cNvSpPr>
-            <a:spLocks noGrp="1"/>
-          </p:cNvSpPr>
-          <p:nvPr>
-            <p:ph type="body" idx="3" sz="quarter"/>
-          </p:nvPr>
-        </p:nvSpPr>
-        <p:spPr/>
-        <p:txBody>
-          <a:bodyPr/>
-          <a:lstStyle/>
-          <a:p>
-            <a:r>
-              <a:t>출력에 이유가 있다. VALIDATE DATABASE 는 Primary 의 정적 등록만 시험하고 대상의 것은 검사하지 않는다. 그런데 16장의 전환 과정은 대상 쪽 정적 등록을 쓰므로 지금 전환하면 New primary is opening 다음에서 멈춘다. 이 장은 SHOW 가 SUCCESS 라고 안전한 것이 아니라는 데서 출발했는데, VALIDATE 가 Yes 라고 전환이 된다는 보장도 아니라는 데까지 온다.</a:t>
-            </a:r>
-          </a:p>
-        </p:txBody>
-      </p:sp>
-      <p:sp>
-        <p:nvSpPr>
-          <p:cNvPr id="4" name="Slide Number Placeholder 3"/>
-          <p:cNvSpPr>
-            <a:spLocks noGrp="1"/>
-          </p:cNvSpPr>
-          <p:nvPr>
-            <p:ph type="sldNum" idx="5" sz="quarter"/>
-          </p:nvPr>
-        </p:nvSpPr>
-        <p:spPr/>
-      </p:sp>
-    </p:spTree>
-  </p:cSld>
-  <p:clrMapOvr>
-    <a:masterClrMapping/>
-  </p:clrMapOvr>
-</p:notes>
-</file>
-
-<file path=ppt/notesSlides/notesSlide41.xml><?xml version="1.0" encoding="utf-8"?>
-<p:notes xmlns:a="http://schemas.openxmlformats.org/drawingml/2006/main" xmlns:p="http://schemas.openxmlformats.org/presentationml/2006/main" xmlns:r="http://schemas.openxmlformats.org/officeDocument/2006/relationships">
-  <p:cSld>
-    <p:spTree>
-      <p:nvGrpSpPr>
-        <p:cNvPr id="1" name=""/>
-        <p:cNvGrpSpPr/>
-        <p:nvPr/>
-      </p:nvGrpSpPr>
-      <p:grpSpPr>
-        <a:xfrm>
-          <a:off x="0" y="0"/>
-          <a:ext cx="0" cy="0"/>
-          <a:chOff x="0" y="0"/>
-          <a:chExt cx="0" cy="0"/>
-        </a:xfrm>
-      </p:grpSpPr>
-      <p:sp>
-        <p:nvSpPr>
-          <p:cNvPr id="2" name="Slide Image Placeholder 1"/>
-          <p:cNvSpPr>
-            <a:spLocks noGrp="1"/>
-          </p:cNvSpPr>
-          <p:nvPr>
-            <p:ph type="sldImg" idx="2"/>
-          </p:nvPr>
-        </p:nvSpPr>
-        <p:spPr/>
-      </p:sp>
-      <p:sp>
-        <p:nvSpPr>
-          <p:cNvPr id="3" name="Notes Placeholder 2"/>
-          <p:cNvSpPr>
-            <a:spLocks noGrp="1"/>
-          </p:cNvSpPr>
-          <p:nvPr>
-            <p:ph type="body" idx="3" sz="quarter"/>
-          </p:nvPr>
-        </p:nvSpPr>
-        <p:spPr/>
-        <p:txBody>
-          <a:bodyPr/>
-          <a:lstStyle/>
-          <a:p>
-            <a:r>
-              <a:t>화면은 SUCCESS·WARNING·ERROR 라는 낱말만 보여 주므로 자동 판정에는 로그 쪽이 쓰기 좋다. IncarnationTable 은 우리가 실행한 적 없는 명령인데 Broker 가 스스로 실행한 것이며, 16장에서 Failover 로 인큐네이션이 바뀐 뒤 그 이력을 기록한 것이다. 값 안의 숫자가 16장에서 볼 RESETLOGS_CHANGE# 와 같다. 화면은 지금을, 로그는 그동안을 보여 준다.</a:t>
+              <a:t>코드를 외우기보다 층을 나누는 습관이 중요합니다. 구성 수준 코드는 어딘가에 문제가 있다는 사실까지만 말해 주고, 실제 원인은 그 아래 원인 수준 코드에 있습니다. 구성 상태가 WARNING이고 로그에 ORA-16608이 찍혔다면 경고를 낸 구성원을 찾아 내려가야 합니다. 원인 수준 코드를 만나면 그때부터는 어느 영역을 볼지가 정해집니다. 적용이면 Standby 프로세스, 전송이면 LogXptStatus, 불일치면 Inconsistent 속성 쪽입니다.</a:t>
             </a:r>
           </a:p>
         </p:txBody>
@@ -3075,7 +2865,7 @@
           <a:lstStyle/>
           <a:p>
             <a:r>
-              <a:t>정적 등록을 실제로 접속해 시험한다는 점이 인상적이다. 13장에서 정적 등록이 없으면 역할 전환이 중간에 멈춘다고 배웠는데, VALIDATE 는 그 전제를 미리 확인해 준다. boston Online Redo Log Files: Not Cleared 는 경고가 아니다. Standby 의 온라인 리두는 아직 쓰이지 않았을 뿐이며 전환되면 그때 정리된다. Primary 쪽 출력에 Ready for Failover 와 Log Files Cleared 가 없는 것도 같은 이유다. 받는 쪽의 관심사만 Standby 출력에 있다.</a:t>
+              <a:t>화면에 여러 개라는 의미의 코드만 보이면 원인이 감춰진 상태입니다. 이때는 해당 구성원의 StatusReport 속성을 조회하면 개별 경고와 오류가 한 줄씩 펼쳐집니다. ORA-16664처럼 결과를 받지 못했다는 코드는 원인이라기보다 점검 실패를 알리는 신호라서, 같이 보이는 다른 값들도 믿기 어렵습니다. DGM으로 시작하는 오류는 대부분 문법이나 인자 형식 문제로, 서버 상태와는 상관이 없습니다.</a:t>
             </a:r>
           </a:p>
         </p:txBody>
@@ -3145,7 +2935,7 @@
           <a:lstStyle/>
           <a:p>
             <a:r>
-              <a:t>Future 는 역할이 바뀐 뒤를 가정한 계산이다. 4장에서 배운 규칙 — SRL 은 온라인 그룹 수 + 1, 크기는 같게 — 이 양방향으로 지켜져야 한다는 뜻이다. Primary 쪽 SRL 을 만들어 두지 않으면 지금은 문제가 없다가 전환한 순간 리두를 받지 못한다. 손으로 하려면 양쪽에서 V$LOG 와 V$STANDBY_LOG 를 각각 조회해 두 번 비교해야 한다.</a:t>
+              <a:t>구성원 목록의 들여쓰기를 그냥 보기 좋게 정렬한 것으로 넘기면 안 됩니다. Primary 아래 들여 쓴 구성원은 Primary에게서 직접 리두를 받고, Far Sync 아래 한 번 더 들여 쓴 구성원은 Far Sync를 거쳐 받습니다. 여러 Standby가 동시에 경고를 낼 때 들여쓰기를 보면 공통 경로가 어디인지 드러납니다. Fast-Start Failover 줄은 켜짐 여부만 알려 주며, 자동 전환의 세부 동작은 16장에서 다룹니다.</a:t>
             </a:r>
           </a:p>
         </p:txBody>
@@ -3215,7 +3005,7 @@
           <a:lstStyle/>
           <a:p>
             <a:r>
-              <a:t>SHOW DATABASE VERBOSE 출력에서 값이 '(monitor)' 로 나오는 것들이다. 값을 설정하는 것이 아니라 조회하면 계산해 주는 속성이며, 이름을 지정해 하나씩 본다. 각각이 대응하는 V$ 뷰가 있지만 Broker 는 그것을 한 번에 요약해 준다. StatusReport 는 RAC 처럼 인스턴스가 여럿일 때 어느 인스턴스인지 구별할 수 있어 특히 쓸모가 있다.</a:t>
+              <a:t>VERBOSE를 붙이면 구성 전체에 걸리는 속성이 나옵니다. 이 가운데 TraceLevel은 뒤에서 Broker 로그의 상세도를 올릴 때 다시 쓰고, CommunicationTimeout은 구성원 사이 통신을 얼마나 기다릴지 정하는 값이라 통신 계열 오류가 잦을 때 확인 대상이 됩니다. 구성원이 여럿이면 하나씩 SHOW DATABASE를 치기보다 지연만 모아 보는 형태가 편합니다. 다만 이 형태의 정확한 문법은 버전에 따라 차이가 있어 HELP SHOW로 먼저 확인하는 편이 안전합니다.</a:t>
             </a:r>
           </a:p>
         </p:txBody>
@@ -3285,7 +3075,7 @@
           <a:lstStyle/>
           <a:p>
             <a:r>
-              <a:t>STATUS=CURRENT 는 지금 쓰고 있는 로그이므로 밀린 것이 아니다. 전송이 밀리면 CURRENT 가 아닌 항목이 쌓인다. 7장에서 transport lag 과 apply lag 을 조합해 같은 진단을 했는데, 큐를 보면 양까지 알 수 있다는 점이 다르다. 얼마나 밀렸는가를 KB 단위로 말할 수 있다는 것이 실무에서 큰 차이를 만든다. SendQEntries 는 Primary 에서, RecvQEntries 는 Standby 를 대상으로 조회한다는 점도 함께 기억한다.</a:t>
+              <a:t>Standby에 대해 실행하면 지연과 적용 속도가 나오고, Primary에 대해 실행하면 역할과 의도 상태 정도만 나옵니다. 지연 값 옆의 computed 몇 초 전 표시는 값을 계산한 시점입니다. 이 시점이 오래됐다면 지연이 0이어도 믿지 않습니다. 공식 교재 예시에는 Apply Rate로 나오지만 19c 출력에서는 Average Apply Rate로 표기됩니다. 지연 값의 출처인 V$DATAGUARD_STATS는 15장에서 직접 조회합니다.</a:t>
             </a:r>
           </a:p>
         </p:txBody>
@@ -3355,7 +3145,7 @@
           <a:lstStyle/>
           <a:p>
             <a:r>
-              <a:t>각 경우의 다음 확인 항목이 정해진다. 전송이 막혔으면 Primary 의 V$ARCHIVE_DEST_STATUS 와 LOG_ARCHIVE_DEST_STATE_2, LogShipping 속성을 본다. 적용이 막혔으면 MRP 존재 여부와 Intended State, DelayMins 를 본다. 다만 전송이 아예 꺼져 있으면 SendQ 도 쌓이지 않을 수 있으므로 큐만으로 판정하지 말고 목적지 상태를 함께 본다.</a:t>
+              <a:t>VERBOSE 목록에는 성격이 다른 두 종류가 섞여 있습니다. DelayMins나 ApplyLagThreshold처럼 운영자가 값을 정하는 설정 속성이 있고, LogXptStatus나 RecvQEntries처럼 조회할 때 Broker가 계산해 주는 모니터링 속성이 있습니다. 모니터링 속성은 목록에서 (monitor)라고만 나오고 내용이 보이지 않습니다. 처음 보는 분들은 값이 비었다고 오해하곤 하는데, SHOW DATABASE 다음에 속성 이름을 붙여 따로 조회해야 표가 나옵니다.</a:t>
             </a:r>
           </a:p>
         </p:txBody>
@@ -6566,7 +6356,7 @@
                 </a:solidFill>
                 <a:latin typeface="맑은 고딕"/>
               </a:rPr>
-              <a:t>Broker 모니터링과 검증</a:t>
+              <a:t>Broker 모니터링과 검증 명령</a:t>
             </a:r>
           </a:p>
         </p:txBody>
@@ -6605,7 +6395,7 @@
                 </a:solidFill>
                 <a:latin typeface="맑은 고딕"/>
               </a:rPr>
-              <a:t>SUCCESS 가 안전을 뜻하지 않는다</a:t>
+              <a:t>지금 괜찮은가, 지금 넘길 수 있는가</a:t>
             </a:r>
           </a:p>
         </p:txBody>
@@ -6644,7 +6434,7 @@
                 </a:solidFill>
                 <a:latin typeface="맑은 고딕"/>
               </a:rPr>
-              <a:t>보는 법을 배우는 자리</a:t>
+              <a:t>제14장</a:t>
             </a:r>
           </a:p>
         </p:txBody>
@@ -6676,7 +6466,7 @@
         <p:spPr>
           <a:xfrm>
             <a:off x="0" y="0"/>
-            <a:ext cx="12191695" cy="1005840"/>
+            <a:ext cx="12191695" cy="6858000"/>
           </a:xfrm>
           <a:prstGeom prst="rect">
             <a:avLst/>
@@ -6719,8 +6509,8 @@
         </p:nvSpPr>
         <p:spPr>
           <a:xfrm>
-            <a:off x="548640" y="91440"/>
-            <a:ext cx="10972800" cy="777240"/>
+            <a:off x="822960" y="2011680"/>
+            <a:ext cx="10515600" cy="1097280"/>
           </a:xfrm>
           <a:prstGeom prst="rect">
             <a:avLst/>
@@ -6739,13 +6529,13 @@
               </a:spcAft>
             </a:pPr>
             <a:r>
-              <a:rPr sz="2600" b="1">
+              <a:rPr sz="4000" b="1">
                 <a:solidFill>
                   <a:srgbClr val="FFFFFF"/>
                 </a:solidFill>
                 <a:latin typeface="맑은 고딕"/>
               </a:rPr>
-              <a:t>VERBOSE 가 더 주는 것</a:t>
+              <a:t>14.3</a:t>
             </a:r>
           </a:p>
         </p:txBody>
@@ -6758,8 +6548,8 @@
         </p:nvSpPr>
         <p:spPr>
           <a:xfrm>
-            <a:off x="640080" y="1078992"/>
-            <a:ext cx="10881360" cy="457200"/>
+            <a:off x="822960" y="3017520"/>
+            <a:ext cx="10515600" cy="914400"/>
           </a:xfrm>
           <a:prstGeom prst="rect">
             <a:avLst/>
@@ -6778,27 +6568,71 @@
               </a:spcAft>
             </a:pPr>
             <a:r>
-              <a:rPr sz="1500" b="0">
-                <a:solidFill>
-                  <a:srgbClr val="5A6672"/>
-                </a:solidFill>
-                <a:latin typeface="맑은 고딕"/>
-              </a:rPr>
-              <a:t>현재와 미래를 함께</a:t>
-            </a:r>
-          </a:p>
-        </p:txBody>
-      </p:sp>
-      <p:sp>
-        <p:nvSpPr>
-          <p:cNvPr id="5" name="TextBox 4"/>
+              <a:rPr sz="2800" b="1">
+                <a:solidFill>
+                  <a:srgbClr val="FFFFFF"/>
+                </a:solidFill>
+                <a:latin typeface="맑은 고딕"/>
+              </a:rPr>
+              <a:t>SHOW 명령으로 상태 읽기</a:t>
+            </a:r>
+          </a:p>
+        </p:txBody>
+      </p:sp>
+      <p:sp>
+        <p:nvSpPr>
+          <p:cNvPr id="5" name="Rectangle 4"/>
+          <p:cNvSpPr/>
+          <p:nvPr/>
+        </p:nvSpPr>
+        <p:spPr>
+          <a:xfrm>
+            <a:off x="822960" y="4114800"/>
+            <a:ext cx="5486400" cy="54864"/>
+          </a:xfrm>
+          <a:prstGeom prst="rect">
+            <a:avLst/>
+          </a:prstGeom>
+          <a:solidFill>
+            <a:srgbClr val="FFFFFF"/>
+          </a:solidFill>
+          <a:ln>
+            <a:noFill/>
+          </a:ln>
+          <a:effectLst/>
+        </p:spPr>
+        <p:style>
+          <a:lnRef idx="1">
+            <a:schemeClr val="accent1"/>
+          </a:lnRef>
+          <a:fillRef idx="3">
+            <a:schemeClr val="accent1"/>
+          </a:fillRef>
+          <a:effectRef idx="2">
+            <a:schemeClr val="accent1"/>
+          </a:effectRef>
+          <a:fontRef idx="minor">
+            <a:schemeClr val="lt1"/>
+          </a:fontRef>
+        </p:style>
+        <p:txBody>
+          <a:bodyPr rtlCol="0" anchor="ctr"/>
+          <a:lstStyle/>
+          <a:p>
+            <a:pPr algn="ctr"/>
+          </a:p>
+        </p:txBody>
+      </p:sp>
+      <p:sp>
+        <p:nvSpPr>
+          <p:cNvPr id="6" name="TextBox 5"/>
           <p:cNvSpPr txBox="1"/>
           <p:nvPr/>
         </p:nvSpPr>
         <p:spPr>
           <a:xfrm>
-            <a:off x="640080" y="1737360"/>
-            <a:ext cx="10881360" cy="4754880"/>
+            <a:off x="822960" y="4297680"/>
+            <a:ext cx="10058400" cy="2011680"/>
           </a:xfrm>
           <a:prstGeom prst="rect">
             <a:avLst/>
@@ -6813,81 +6647,49 @@
           <a:p>
             <a:pPr algn="l">
               <a:spcAft>
-                <a:spcPts val="1000"/>
-              </a:spcAft>
-            </a:pPr>
-            <a:r>
-              <a:rPr sz="1700" b="0">
-                <a:solidFill>
-                  <a:srgbClr val="222222"/>
-                </a:solidFill>
-                <a:latin typeface="맑은 고딕"/>
-              </a:rPr>
-              <a:t>•  `Gap Status: No Gap` — 7장 `V$ARCHIVE_GAP` 을 한 줄로</a:t>
-            </a:r>
-          </a:p>
-          <a:p>
-            <a:pPr algn="l">
-              <a:spcAft>
-                <a:spcPts val="1000"/>
-              </a:spcAft>
-            </a:pPr>
-            <a:r>
-              <a:rPr sz="1700" b="0">
-                <a:solidFill>
-                  <a:srgbClr val="222222"/>
-                </a:solidFill>
-                <a:latin typeface="맑은 고딕"/>
-              </a:rPr>
-              <a:t>•  `Capacity` · `TEMP Files` (실측 3 / 3)</a:t>
-            </a:r>
-          </a:p>
-          <a:p>
-            <a:pPr algn="l">
-              <a:spcAft>
-                <a:spcPts val="1000"/>
-              </a:spcAft>
-            </a:pPr>
-            <a:r>
-              <a:rPr sz="1700" b="0">
-                <a:solidFill>
-                  <a:srgbClr val="222222"/>
-                </a:solidFill>
-                <a:latin typeface="맑은 고딕"/>
-              </a:rPr>
-              <a:t>•  `Current` 구성 — chicago 온라인 3 + boston SRL 4</a:t>
-            </a:r>
-          </a:p>
-          <a:p>
-            <a:pPr algn="l">
-              <a:spcAft>
-                <a:spcPts val="1000"/>
-              </a:spcAft>
-            </a:pPr>
-            <a:r>
-              <a:rPr sz="1700" b="0">
-                <a:solidFill>
-                  <a:srgbClr val="222222"/>
-                </a:solidFill>
-                <a:latin typeface="맑은 고딕"/>
-              </a:rPr>
-              <a:t>•  `Future` 구성 — boston 온라인 3 + chicago SRL 4</a:t>
-            </a:r>
-          </a:p>
-          <a:p>
-            <a:pPr algn="l">
-              <a:spcAft>
-                <a:spcPts val="1000"/>
-              </a:spcAft>
-            </a:pPr>
-            <a:r>
-              <a:rPr sz="1700" b="0">
-                <a:solidFill>
-                  <a:srgbClr val="222222"/>
-                </a:solidFill>
-                <a:latin typeface="맑은 고딕"/>
-              </a:rPr>
-              <a:t>•  양쪽 다 **Sufficient SRLs**, 크기 200MB 동일</a:t>
+                <a:spcPts val="800"/>
+              </a:spcAft>
+            </a:pPr>
+            <a:r>
+              <a:rPr sz="1600" b="0">
+                <a:solidFill>
+                  <a:srgbClr val="FFFFFF"/>
+                </a:solidFill>
+                <a:latin typeface="맑은 고딕"/>
+              </a:rPr>
+              <a:t>•  구성에서 구성원, 인스턴스로 좁힌다</a:t>
+            </a:r>
+          </a:p>
+          <a:p>
+            <a:pPr algn="l">
+              <a:spcAft>
+                <a:spcPts val="800"/>
+              </a:spcAft>
+            </a:pPr>
+            <a:r>
+              <a:rPr sz="1600" b="0">
+                <a:solidFill>
+                  <a:srgbClr val="FFFFFF"/>
+                </a:solidFill>
+                <a:latin typeface="맑은 고딕"/>
+              </a:rPr>
+              <a:t>•  요약 항목과 VERBOSE 속성 목록</a:t>
+            </a:r>
+          </a:p>
+          <a:p>
+            <a:pPr algn="l">
+              <a:spcAft>
+                <a:spcPts val="800"/>
+              </a:spcAft>
+            </a:pPr>
+            <a:r>
+              <a:rPr sz="1600" b="0">
+                <a:solidFill>
+                  <a:srgbClr val="FFFFFF"/>
+                </a:solidFill>
+                <a:latin typeface="맑은 고딕"/>
+              </a:rPr>
+              <a:t>•  Far Sync와 자동 전환의 표시</a:t>
             </a:r>
           </a:p>
         </p:txBody>
@@ -6919,7 +6721,7 @@
         <p:spPr>
           <a:xfrm>
             <a:off x="0" y="0"/>
-            <a:ext cx="12191695" cy="6858000"/>
+            <a:ext cx="12191695" cy="1005840"/>
           </a:xfrm>
           <a:prstGeom prst="rect">
             <a:avLst/>
@@ -6962,8 +6764,8 @@
         </p:nvSpPr>
         <p:spPr>
           <a:xfrm>
-            <a:off x="822960" y="2011680"/>
-            <a:ext cx="10515600" cy="1097280"/>
+            <a:off x="548640" y="91440"/>
+            <a:ext cx="10972800" cy="777240"/>
           </a:xfrm>
           <a:prstGeom prst="rect">
             <a:avLst/>
@@ -6982,13 +6784,13 @@
               </a:spcAft>
             </a:pPr>
             <a:r>
-              <a:rPr sz="4000" b="1">
+              <a:rPr sz="2600" b="1">
                 <a:solidFill>
                   <a:srgbClr val="FFFFFF"/>
                 </a:solidFill>
                 <a:latin typeface="맑은 고딕"/>
               </a:rPr>
-              <a:t>14.3</a:t>
+              <a:t>SHOW CONFIGURATION</a:t>
             </a:r>
           </a:p>
         </p:txBody>
@@ -7001,8 +6803,8 @@
         </p:nvSpPr>
         <p:spPr>
           <a:xfrm>
-            <a:off x="822960" y="3017520"/>
-            <a:ext cx="10515600" cy="914400"/>
+            <a:off x="640080" y="1078992"/>
+            <a:ext cx="10881360" cy="457200"/>
           </a:xfrm>
           <a:prstGeom prst="rect">
             <a:avLst/>
@@ -7021,71 +6823,27 @@
               </a:spcAft>
             </a:pPr>
             <a:r>
-              <a:rPr sz="2800" b="1">
-                <a:solidFill>
-                  <a:srgbClr val="FFFFFF"/>
-                </a:solidFill>
-                <a:latin typeface="맑은 고딕"/>
-              </a:rPr>
-              <a:t>모니터링 전용 속성</a:t>
-            </a:r>
-          </a:p>
-        </p:txBody>
-      </p:sp>
-      <p:sp>
-        <p:nvSpPr>
-          <p:cNvPr id="5" name="Rectangle 4"/>
-          <p:cNvSpPr/>
-          <p:nvPr/>
-        </p:nvSpPr>
-        <p:spPr>
-          <a:xfrm>
-            <a:off x="822960" y="4114800"/>
-            <a:ext cx="5486400" cy="54864"/>
-          </a:xfrm>
-          <a:prstGeom prst="rect">
-            <a:avLst/>
-          </a:prstGeom>
-          <a:solidFill>
-            <a:srgbClr val="FFFFFF"/>
-          </a:solidFill>
-          <a:ln>
-            <a:noFill/>
-          </a:ln>
-          <a:effectLst/>
-        </p:spPr>
-        <p:style>
-          <a:lnRef idx="1">
-            <a:schemeClr val="accent1"/>
-          </a:lnRef>
-          <a:fillRef idx="3">
-            <a:schemeClr val="accent1"/>
-          </a:fillRef>
-          <a:effectRef idx="2">
-            <a:schemeClr val="accent1"/>
-          </a:effectRef>
-          <a:fontRef idx="minor">
-            <a:schemeClr val="lt1"/>
-          </a:fontRef>
-        </p:style>
-        <p:txBody>
-          <a:bodyPr rtlCol="0" anchor="ctr"/>
-          <a:lstStyle/>
-          <a:p>
-            <a:pPr algn="ctr"/>
-          </a:p>
-        </p:txBody>
-      </p:sp>
-      <p:sp>
-        <p:nvSpPr>
-          <p:cNvPr id="6" name="TextBox 5"/>
+              <a:rPr sz="1500" b="0">
+                <a:solidFill>
+                  <a:srgbClr val="5A6672"/>
+                </a:solidFill>
+                <a:latin typeface="맑은 고딕"/>
+              </a:rPr>
+              <a:t>구성 전체를 한 화면에</a:t>
+            </a:r>
+          </a:p>
+        </p:txBody>
+      </p:sp>
+      <p:sp>
+        <p:nvSpPr>
+          <p:cNvPr id="5" name="TextBox 4"/>
           <p:cNvSpPr txBox="1"/>
           <p:nvPr/>
         </p:nvSpPr>
         <p:spPr>
           <a:xfrm>
-            <a:off x="822960" y="4297680"/>
-            <a:ext cx="10058400" cy="2011680"/>
+            <a:off x="640080" y="1737360"/>
+            <a:ext cx="10881360" cy="4754880"/>
           </a:xfrm>
           <a:prstGeom prst="rect">
             <a:avLst/>
@@ -7100,49 +6858,81 @@
           <a:p>
             <a:pPr algn="l">
               <a:spcAft>
-                <a:spcPts val="800"/>
-              </a:spcAft>
-            </a:pPr>
-            <a:r>
-              <a:rPr sz="1600" b="0">
-                <a:solidFill>
-                  <a:srgbClr val="FFFFFF"/>
-                </a:solidFill>
-                <a:latin typeface="맑은 고딕"/>
-              </a:rPr>
-              <a:t>•  (monitor) 로 표시되는 것들</a:t>
-            </a:r>
-          </a:p>
-          <a:p>
-            <a:pPr algn="l">
-              <a:spcAft>
-                <a:spcPts val="800"/>
-              </a:spcAft>
-            </a:pPr>
-            <a:r>
-              <a:rPr sz="1600" b="0">
-                <a:solidFill>
-                  <a:srgbClr val="FFFFFF"/>
-                </a:solidFill>
-                <a:latin typeface="맑은 고딕"/>
-              </a:rPr>
-              <a:t>•  두 큐로 병목 찾기</a:t>
-            </a:r>
-          </a:p>
-          <a:p>
-            <a:pPr algn="l">
-              <a:spcAft>
-                <a:spcPts val="800"/>
-              </a:spcAft>
-            </a:pPr>
-            <a:r>
-              <a:rPr sz="1600" b="0">
-                <a:solidFill>
-                  <a:srgbClr val="FFFFFF"/>
-                </a:solidFill>
-                <a:latin typeface="맑은 고딕"/>
-              </a:rPr>
-              <a:t>•  조회 전용이라는 성질</a:t>
+                <a:spcPts val="1000"/>
+              </a:spcAft>
+            </a:pPr>
+            <a:r>
+              <a:rPr sz="1700" b="0">
+                <a:solidFill>
+                  <a:srgbClr val="222222"/>
+                </a:solidFill>
+                <a:latin typeface="맑은 고딕"/>
+              </a:rPr>
+              <a:t>•  구성 이름과 보호 모드</a:t>
+            </a:r>
+          </a:p>
+          <a:p>
+            <a:pPr algn="l">
+              <a:spcAft>
+                <a:spcPts val="1000"/>
+              </a:spcAft>
+            </a:pPr>
+            <a:r>
+              <a:rPr sz="1700" b="0">
+                <a:solidFill>
+                  <a:srgbClr val="222222"/>
+                </a:solidFill>
+                <a:latin typeface="맑은 고딕"/>
+              </a:rPr>
+              <a:t>•  들여쓰기는 리두가 흐르는 방향</a:t>
+            </a:r>
+          </a:p>
+          <a:p>
+            <a:pPr algn="l">
+              <a:spcAft>
+                <a:spcPts val="1000"/>
+              </a:spcAft>
+            </a:pPr>
+            <a:r>
+              <a:rPr sz="1700" b="0">
+                <a:solidFill>
+                  <a:srgbClr val="222222"/>
+                </a:solidFill>
+                <a:latin typeface="맑은 고딕"/>
+              </a:rPr>
+              <a:t>•  문제 구성원 아래 Warning·Error 줄과 코드</a:t>
+            </a:r>
+          </a:p>
+          <a:p>
+            <a:pPr algn="l">
+              <a:spcAft>
+                <a:spcPts val="1000"/>
+              </a:spcAft>
+            </a:pPr>
+            <a:r>
+              <a:rPr sz="1700" b="0">
+                <a:solidFill>
+                  <a:srgbClr val="222222"/>
+                </a:solidFill>
+                <a:latin typeface="맑은 고딕"/>
+              </a:rPr>
+              <a:t>•  쓰이지 않는 Far Sync는 (inactive)</a:t>
+            </a:r>
+          </a:p>
+          <a:p>
+            <a:pPr algn="l">
+              <a:spcAft>
+                <a:spcPts val="1000"/>
+              </a:spcAft>
+            </a:pPr>
+            <a:r>
+              <a:rPr sz="1700" b="0">
+                <a:solidFill>
+                  <a:srgbClr val="222222"/>
+                </a:solidFill>
+                <a:latin typeface="맑은 고딕"/>
+              </a:rPr>
+              <a:t>•  Fast-Start Failover 켜짐 여부, 구성 상태</a:t>
             </a:r>
           </a:p>
         </p:txBody>
@@ -7243,7 +7033,7 @@
                 </a:solidFill>
                 <a:latin typeface="맑은 고딕"/>
               </a:rPr>
-              <a:t>(monitor) 속성 목록</a:t>
+              <a:t>SHOW CONFIGURATION의 변형</a:t>
             </a:r>
           </a:p>
         </p:txBody>
@@ -7282,7 +7072,7 @@
                 </a:solidFill>
                 <a:latin typeface="맑은 고딕"/>
               </a:rPr>
-              <a:t>설정이 아니라 계산</a:t>
+              <a:t>더 많이, 또는 지연만</a:t>
             </a:r>
           </a:p>
         </p:txBody>
@@ -7321,7 +7111,7 @@
                 </a:solidFill>
                 <a:latin typeface="맑은 고딕"/>
               </a:rPr>
-              <a:t>•  `StatusReport` — 인스턴스별 오류를 표로</a:t>
+              <a:t>•  VERBOSE: 구성 수준 속성까지 표시</a:t>
             </a:r>
           </a:p>
           <a:p>
@@ -7337,7 +7127,7 @@
                 </a:solidFill>
                 <a:latin typeface="맑은 고딕"/>
               </a:rPr>
-              <a:t>•  `LogXptStatus` — Primary 에서 조회. 실측 `VALID`</a:t>
+              <a:t>•  TraceLevel, CommunicationTimeout 등</a:t>
             </a:r>
           </a:p>
           <a:p>
@@ -7353,7 +7143,7 @@
                 </a:solidFill>
                 <a:latin typeface="맑은 고딕"/>
               </a:rPr>
-              <a:t>•  `SendQEntries` / `RecvQEntries` — 두 개의 큐</a:t>
+              <a:t>•  OperationTimeout, FSFO 관련 속성</a:t>
             </a:r>
           </a:p>
           <a:p>
@@ -7369,23 +7159,7 @@
                 </a:solidFill>
                 <a:latin typeface="맑은 고딕"/>
               </a:rPr>
-              <a:t>•  `TopWaitEvents` — 상위 대기 이벤트</a:t>
-            </a:r>
-          </a:p>
-          <a:p>
-            <a:pPr algn="l">
-              <a:spcAft>
-                <a:spcPts val="1000"/>
-              </a:spcAft>
-            </a:pPr>
-            <a:r>
-              <a:rPr sz="1700" b="0">
-                <a:solidFill>
-                  <a:srgbClr val="222222"/>
-                </a:solidFill>
-                <a:latin typeface="맑은 고딕"/>
-              </a:rPr>
-              <a:t>•  `InconsistentProperties` — 메모리·SPFILE·Broker 비교</a:t>
+              <a:t>•  19c LAG 형태: 구성원별 지연을 모아 보기</a:t>
             </a:r>
           </a:p>
         </p:txBody>
@@ -7486,7 +7260,7 @@
                 </a:solidFill>
                 <a:latin typeface="맑은 고딕"/>
               </a:rPr>
-              <a:t>두 개의 큐</a:t>
+              <a:t>SHOW DATABASE</a:t>
             </a:r>
           </a:p>
         </p:txBody>
@@ -7525,7 +7299,7 @@
                 </a:solidFill>
                 <a:latin typeface="맑은 고딕"/>
               </a:rPr>
-              <a:t>어디서 막혔는가</a:t>
+              <a:t>구성원 하나의 요약</a:t>
             </a:r>
           </a:p>
         </p:txBody>
@@ -7564,7 +7338,7 @@
                 </a:solidFill>
                 <a:latin typeface="맑은 고딕"/>
               </a:rPr>
-              <a:t>•  `SendQEntries` — 보낼 것이 남아 있는가 (Primary)</a:t>
+              <a:t>•  Role, Intended State</a:t>
             </a:r>
           </a:p>
           <a:p>
@@ -7580,7 +7354,7 @@
                 </a:solidFill>
                 <a:latin typeface="맑은 고딕"/>
               </a:rPr>
-              <a:t>•  `RecvQEntries` — 받았지만 적용 못 한 것 (Standby)</a:t>
+              <a:t>•  Transport Lag, Apply Lag와 computed 시점</a:t>
             </a:r>
           </a:p>
           <a:p>
@@ -7596,7 +7370,7 @@
                 </a:solidFill>
                 <a:latin typeface="맑은 고딕"/>
               </a:rPr>
-              <a:t>•  실측 — SendQ `STATUS=CURRENT` `LOG_SEQ 69` **6,911KB**</a:t>
+              <a:t>•  Average Apply Rate: 리두 생성 속도와 비교</a:t>
             </a:r>
           </a:p>
           <a:p>
@@ -7612,7 +7386,23 @@
                 </a:solidFill>
                 <a:latin typeface="맑은 고딕"/>
               </a:rPr>
-              <a:t>•  RecvQ 는 비어 있었다 = 밀린 것 없음</a:t>
+              <a:t>•  Real Time Query: ADG 옵션 기능(9장)</a:t>
+            </a:r>
+          </a:p>
+          <a:p>
+            <a:pPr algn="l">
+              <a:spcAft>
+                <a:spcPts val="1000"/>
+              </a:spcAft>
+            </a:pPr>
+            <a:r>
+              <a:rPr sz="1700" b="0">
+                <a:solidFill>
+                  <a:srgbClr val="222222"/>
+                </a:solidFill>
+                <a:latin typeface="맑은 고딕"/>
+              </a:rPr>
+              <a:t>•  경고·오류 목록과 Database Status</a:t>
             </a:r>
           </a:p>
         </p:txBody>
@@ -7713,7 +7503,7 @@
                 </a:solidFill>
                 <a:latin typeface="맑은 고딕"/>
               </a:rPr>
-              <a:t>조합 진단표</a:t>
+              <a:t>SHOW DATABASE VERBOSE</a:t>
             </a:r>
           </a:p>
         </p:txBody>
@@ -7752,7 +7542,7 @@
                 </a:solidFill>
                 <a:latin typeface="맑은 고딕"/>
               </a:rPr>
-              <a:t>네 가지 경우</a:t>
+              <a:t>속성 전체와 (monitor) 표시</a:t>
             </a:r>
           </a:p>
         </p:txBody>
@@ -7791,7 +7581,7 @@
                 </a:solidFill>
                 <a:latin typeface="맑은 고딕"/>
               </a:rPr>
-              <a:t>•  SendQ 비었거나 CURRENT + RecvQ 비었음 → **정상**</a:t>
+              <a:t>•  요약 뒤에 속성 전체를 이름 = 값으로 나열</a:t>
             </a:r>
           </a:p>
           <a:p>
@@ -7807,7 +7597,7 @@
                 </a:solidFill>
                 <a:latin typeface="맑은 고딕"/>
               </a:rPr>
-              <a:t>•  SendQ 쌓임 + RecvQ 비었음 → **전송이 막혔다**</a:t>
+              <a:t>•  설정 속성: 값을 바꿀 수 있음</a:t>
             </a:r>
           </a:p>
           <a:p>
@@ -7823,7 +7613,7 @@
                 </a:solidFill>
                 <a:latin typeface="맑은 고딕"/>
               </a:rPr>
-              <a:t>•  SendQ 비었음 + RecvQ 쌓임 → **적용이 막혔다**</a:t>
+              <a:t>•  모니터링 속성: 값 자리에 (monitor)만 표시</a:t>
             </a:r>
           </a:p>
           <a:p>
@@ -7839,7 +7629,23 @@
                 </a:solidFill>
                 <a:latin typeface="맑은 고딕"/>
               </a:rPr>
-              <a:t>•  둘 다 쌓임 → 양쪽 문제이거나 **Standby 가 멈췄다**</a:t>
+              <a:t>•  모니터링 속성은 이름을 지정해 따로 조회</a:t>
+            </a:r>
+          </a:p>
+          <a:p>
+            <a:pPr algn="l">
+              <a:spcAft>
+                <a:spcPts val="1000"/>
+              </a:spcAft>
+            </a:pPr>
+            <a:r>
+              <a:rPr sz="1700" b="0">
+                <a:solidFill>
+                  <a:srgbClr val="222222"/>
+                </a:solidFill>
+                <a:latin typeface="맑은 고딕"/>
+              </a:rPr>
+              <a:t>•  철자가 틀리면 ORA-16538</a:t>
             </a:r>
           </a:p>
         </p:txBody>
@@ -7940,7 +7746,7 @@
                 </a:solidFill>
                 <a:latin typeface="맑은 고딕"/>
               </a:rPr>
-              <a:t>TopWaitEvents 읽는 법</a:t>
+              <a:t>Far Sync, 인스턴스, 자동 전환</a:t>
             </a:r>
           </a:p>
         </p:txBody>
@@ -7979,7 +7785,7 @@
                 </a:solidFill>
                 <a:latin typeface="맑은 고딕"/>
               </a:rPr>
-              <a:t>상위는 대부분 유휴</a:t>
+              <a:t>모니터링 관점에서만</a:t>
             </a:r>
           </a:p>
         </p:txBody>
@@ -8018,7 +7824,7 @@
                 </a:solidFill>
                 <a:latin typeface="맑은 고딕"/>
               </a:rPr>
-              <a:t>•  `rdbms ipc message` 8,006,598 — 유휴</a:t>
+              <a:t>•  SHOW FAR_SYNC: Apply Lag 항목이 없음</a:t>
             </a:r>
           </a:p>
           <a:p>
@@ -8034,7 +7840,7 @@
                 </a:solidFill>
                 <a:latin typeface="맑은 고딕"/>
               </a:rPr>
-              <a:t>•  `PX Idle Wait` 2,912,212 — 유휴</a:t>
+              <a:t>•  Far Sync 문제는 뒤의 Standby 지연으로 번짐</a:t>
             </a:r>
           </a:p>
           <a:p>
@@ -8050,7 +7856,7 @@
                 </a:solidFill>
                 <a:latin typeface="맑은 고딕"/>
               </a:rPr>
-              <a:t>•  `Space Manager: slave idle wait` — 유휴</a:t>
+              <a:t>•  SHOW INSTANCE: RAC처럼 인스턴스가 여럿일 때</a:t>
             </a:r>
           </a:p>
           <a:p>
@@ -8066,7 +7872,7 @@
                 </a:solidFill>
                 <a:latin typeface="맑은 고딕"/>
               </a:rPr>
-              <a:t>•  `parallel recovery slave next change` — 적용 관련이나 대기</a:t>
+              <a:t>•  SHOW FAST_START FAILOVER: 설정과 Observer</a:t>
             </a:r>
           </a:p>
           <a:p>
@@ -8082,7 +7888,7 @@
                 </a:solidFill>
                 <a:latin typeface="맑은 고딕"/>
               </a:rPr>
-              <a:t>•  **절대값이 아니라 평소와의 차이를 본다**</a:t>
+              <a:t>•  ORA-16819, 16820: Observer 부재 경고</a:t>
             </a:r>
           </a:p>
         </p:txBody>
@@ -8183,7 +7989,7 @@
                 </a:solidFill>
                 <a:latin typeface="맑은 고딕"/>
               </a:rPr>
-              <a:t>오류 재현</a:t>
+              <a:t>SHOW로 문제를 좁히는 순서</a:t>
             </a:r>
           </a:p>
         </p:txBody>
@@ -8222,7 +8028,7 @@
                 </a:solidFill>
                 <a:latin typeface="맑은 고딕"/>
               </a:rPr>
-              <a:t>조회 전용에 값을 주면</a:t>
+              <a:t>위에서 아래로, 한 단계씩</a:t>
             </a:r>
           </a:p>
         </p:txBody>
@@ -8261,7 +8067,7 @@
                 </a:solidFill>
                 <a:latin typeface="맑은 고딕"/>
               </a:rPr>
-              <a:t>•  `edit database 'boston' set property 'TopWaitEvents'='5';`</a:t>
+              <a:t>•  1. SHOW CONFIGURATION: 문제 구성원과 갱신 시각</a:t>
             </a:r>
           </a:p>
           <a:p>
@@ -8277,7 +8083,7 @@
                 </a:solidFill>
                 <a:latin typeface="맑은 고딕"/>
               </a:rPr>
-              <a:t>•  → **`Error: ORA-16568: cannot set property`**</a:t>
+              <a:t>•  2. SHOW DATABASE / FAR_SYNC: 원인 코드</a:t>
             </a:r>
           </a:p>
           <a:p>
@@ -8293,7 +8099,7 @@
                 </a:solidFill>
                 <a:latin typeface="맑은 고딕"/>
               </a:rPr>
-              <a:t>•  `ORA-16538` 속성 이름이 없다</a:t>
+              <a:t>•  3. 묶음 코드면 StatusReport</a:t>
             </a:r>
           </a:p>
           <a:p>
@@ -8309,7 +8115,7 @@
                 </a:solidFill>
                 <a:latin typeface="맑은 고딕"/>
               </a:rPr>
-              <a:t>•  `ORA-16790` 값이 틀렸다</a:t>
+              <a:t>•  3. 전송이면 LogXptStatus, 불일치면 Inconsistent</a:t>
             </a:r>
           </a:p>
           <a:p>
@@ -8325,7 +8131,7 @@
                 </a:solidFill>
                 <a:latin typeface="맑은 고딕"/>
               </a:rPr>
-              <a:t>•  `ORA-16568` 있는데 **설정할 수 없다**</a:t>
+              <a:t>•  4. 그래도 모호하면 drc 로그와 경고 로그</a:t>
             </a:r>
           </a:p>
         </p:txBody>
@@ -8465,7 +8271,7 @@
                 </a:solidFill>
                 <a:latin typeface="맑은 고딕"/>
               </a:rPr>
-              <a:t>임계값과 경고</a:t>
+              <a:t>모니터링 전용 속성</a:t>
             </a:r>
           </a:p>
         </p:txBody>
@@ -8548,7 +8354,7 @@
                 </a:solidFill>
                 <a:latin typeface="맑은 고딕"/>
               </a:rPr>
-              <a:t>•  임계값 셋</a:t>
+              <a:t>•  읽기 전용, 조회할 때 계산</a:t>
             </a:r>
           </a:p>
           <a:p>
@@ -8564,7 +8370,7 @@
                 </a:solidFill>
                 <a:latin typeface="맑은 고딕"/>
               </a:rPr>
-              <a:t>•  DelayMins 의 거래</a:t>
+              <a:t>•  보내는 쪽과 받는 쪽의 큐</a:t>
             </a:r>
           </a:p>
           <a:p>
@@ -8580,7 +8386,7 @@
                 </a:solidFill>
                 <a:latin typeface="맑은 고딕"/>
               </a:rPr>
-              <a:t>•  경보하는 것과 하지 않는 것</a:t>
+              <a:t>•  속성 불일치와 대기 이벤트</a:t>
             </a:r>
           </a:p>
         </p:txBody>
@@ -8681,7 +8487,7 @@
                 </a:solidFill>
                 <a:latin typeface="맑은 고딕"/>
               </a:rPr>
-              <a:t>임계값 셋</a:t>
+              <a:t>설정 속성과 모니터링 속성</a:t>
             </a:r>
           </a:p>
         </p:txBody>
@@ -8720,7 +8526,7 @@
                 </a:solidFill>
                 <a:latin typeface="맑은 고딕"/>
               </a:rPr>
-              <a:t>모두 기본 30초</a:t>
+              <a:t>값을 주면 거부된다</a:t>
             </a:r>
           </a:p>
         </p:txBody>
@@ -8759,7 +8565,7 @@
                 </a:solidFill>
                 <a:latin typeface="맑은 고딕"/>
               </a:rPr>
-              <a:t>•  `ApplyLagThreshold` → **ORA-16853** 적용이 늦다</a:t>
+              <a:t>•  모니터링 속성은 읽기 전용</a:t>
             </a:r>
           </a:p>
           <a:p>
@@ -8775,7 +8581,7 @@
                 </a:solidFill>
                 <a:latin typeface="맑은 고딕"/>
               </a:rPr>
-              <a:t>•  `TransportLagThreshold` → **ORA-16855** 전송이 늦다</a:t>
+              <a:t>•  ORA-16538: 그런 속성이 없음</a:t>
             </a:r>
           </a:p>
           <a:p>
@@ -8791,7 +8597,7 @@
                 </a:solidFill>
                 <a:latin typeface="맑은 고딕"/>
               </a:rPr>
-              <a:t>•  `TransportDisconnectedThreshold` → **ORA-16857** 연결이 끊겼다</a:t>
+              <a:t>•  ORA-16790: 값이 허용 범위 밖</a:t>
             </a:r>
           </a:p>
           <a:p>
@@ -8807,7 +8613,23 @@
                 </a:solidFill>
                 <a:latin typeface="맑은 고딕"/>
               </a:rPr>
-              <a:t>•  0 을 주면 그 항목의 경보를 끈다</a:t>
+              <a:t>•  ORA-16568: 읽기 전용 속성에 값을 줌</a:t>
+            </a:r>
+          </a:p>
+          <a:p>
+            <a:pPr algn="l">
+              <a:spcAft>
+                <a:spcPts val="1000"/>
+              </a:spcAft>
+            </a:pPr>
+            <a:r>
+              <a:rPr sz="1700" b="0">
+                <a:solidFill>
+                  <a:srgbClr val="222222"/>
+                </a:solidFill>
+                <a:latin typeface="맑은 고딕"/>
+              </a:rPr>
+              <a:t>•  조회 때마다 통신하므로 반복 조회는 피함</a:t>
             </a:r>
           </a:p>
         </p:txBody>
@@ -8908,7 +8730,7 @@
                 </a:solidFill>
                 <a:latin typeface="맑은 고딕"/>
               </a:rPr>
-              <a:t>DelayMins 실측</a:t>
+              <a:t>StatusReport와 LogXptStatus</a:t>
             </a:r>
           </a:p>
         </p:txBody>
@@ -8947,7 +8769,7 @@
                 </a:solidFill>
                 <a:latin typeface="맑은 고딕"/>
               </a:rPr>
-              <a:t>두 지연이 갈라진다</a:t>
+              <a:t>문제 목록과 전송 상태</a:t>
             </a:r>
           </a:p>
         </p:txBody>
@@ -8986,7 +8808,7 @@
                 </a:solidFill>
                 <a:latin typeface="맑은 고딕"/>
               </a:rPr>
-              <a:t>•  `edit database 'boston' set property 'DelayMins'='2'`</a:t>
+              <a:t>•  StatusReport: 인스턴스별 심각도와 오류 문장</a:t>
             </a:r>
           </a:p>
           <a:p>
@@ -9002,7 +8824,7 @@
                 </a:solidFill>
                 <a:latin typeface="맑은 고딕"/>
               </a:rPr>
-              <a:t>•  transport lag **0** — 리두는 이미 도착했다</a:t>
+              <a:t>•  행이 없으면 정상</a:t>
             </a:r>
           </a:p>
           <a:p>
@@ -9018,7 +8840,7 @@
                 </a:solidFill>
                 <a:latin typeface="맑은 고딕"/>
               </a:rPr>
-              <a:t>•  apply lag **1분 33초** — 적용을 일부러 미룬다</a:t>
+              <a:t>•  LogXptStatus: Primary에서 조회</a:t>
             </a:r>
           </a:p>
           <a:p>
@@ -9034,7 +8856,7 @@
                 </a:solidFill>
                 <a:latin typeface="맑은 고딕"/>
               </a:rPr>
-              <a:t>•  `Database Warning(s): ORA-16853`</a:t>
+              <a:t>•  목적지별 STATUS와 ERROR</a:t>
             </a:r>
           </a:p>
           <a:p>
@@ -9050,7 +8872,7 @@
                 </a:solidFill>
                 <a:latin typeface="맑은 고딕"/>
               </a:rPr>
-              <a:t>•  Database Status: **WARNING**</a:t>
+              <a:t>•  Net 계열 오류면 3장의 접속 구성부터</a:t>
             </a:r>
           </a:p>
         </p:txBody>
@@ -9151,7 +8973,7 @@
                 </a:solidFill>
                 <a:latin typeface="맑은 고딕"/>
               </a:rPr>
-              <a:t>학습 목표 (Objectives)</a:t>
+              <a:t>학습 목표</a:t>
             </a:r>
           </a:p>
         </p:txBody>
@@ -9190,7 +9012,7 @@
                 </a:solidFill>
                 <a:latin typeface="맑은 고딕"/>
               </a:rPr>
-              <a:t>•  `SHOW` 와 `VALIDATE` 가 각각 어떤 질문에 답하는지 구별한다.</a:t>
+              <a:t>•  DMON의 상태 수집과 SUCCESS·WARNING·ERROR 집계를 설명한다</a:t>
             </a:r>
           </a:p>
           <a:p>
@@ -9206,7 +9028,7 @@
                 </a:solidFill>
                 <a:latin typeface="맑은 고딕"/>
               </a:rPr>
-              <a:t>•  전송이 끊겼는데 `SUCCESS` 가 나오는 상황을 실측으로 확인한다.</a:t>
+              <a:t>•  SHOW 계열 출력과 ORA-166xx 코드로 문제 위치를 좁힌다</a:t>
             </a:r>
           </a:p>
           <a:p>
@@ -9222,7 +9044,7 @@
                 </a:solidFill>
                 <a:latin typeface="맑은 고딕"/>
               </a:rPr>
-              <a:t>•  모니터링 전용 속성으로 큐와 대기 이벤트를 읽는다.</a:t>
+              <a:t>•  모니터링 전용 속성으로 경고의 원인을 찾는다</a:t>
             </a:r>
           </a:p>
           <a:p>
@@ -9238,7 +9060,7 @@
                 </a:solidFill>
                 <a:latin typeface="맑은 고딕"/>
               </a:rPr>
-              <a:t>•  임계값 셋과 대응 오류(ORA-16853·16855·16857)를 안다.</a:t>
+              <a:t>•  지연 임계값 속성으로 경고 기준을 정한다</a:t>
             </a:r>
           </a:p>
           <a:p>
@@ -9254,7 +9076,7 @@
                 </a:solidFill>
                 <a:latin typeface="맑은 고딕"/>
               </a:rPr>
-              <a:t>•  `DelayMins` 가 사는 것과 파는 것을 설명한다.</a:t>
+              <a:t>•  VALIDATE 여섯 가지의 검사 대상을 구분한다</a:t>
             </a:r>
           </a:p>
           <a:p>
@@ -9270,39 +9092,7 @@
                 </a:solidFill>
                 <a:latin typeface="맑은 고딕"/>
               </a:rPr>
-              <a:t>•  V$ 뷰로 Broker 의 요약을 교차 확인한다.</a:t>
-            </a:r>
-          </a:p>
-          <a:p>
-            <a:pPr algn="l">
-              <a:spcAft>
-                <a:spcPts val="1000"/>
-              </a:spcAft>
-            </a:pPr>
-            <a:r>
-              <a:rPr sz="1600" b="0">
-                <a:solidFill>
-                  <a:srgbClr val="222222"/>
-                </a:solidFill>
-                <a:latin typeface="맑은 고딕"/>
-              </a:rPr>
-              <a:t>•  구성을 XML 로 내보내고 그 제약을 안다.</a:t>
-            </a:r>
-          </a:p>
-          <a:p>
-            <a:pPr algn="l">
-              <a:spcAft>
-                <a:spcPts val="1000"/>
-              </a:spcAft>
-            </a:pPr>
-            <a:r>
-              <a:rPr sz="1600" b="0">
-                <a:solidFill>
-                  <a:srgbClr val="222222"/>
-                </a:solidFill>
-                <a:latin typeface="맑은 고딕"/>
-              </a:rPr>
-              <a:t>•  Fast-Start Failover 를 켜고 정식으로 끄는 순서를 익힌다.</a:t>
+              <a:t>•  SHOW와 VALIDATE의 차이, 구성 내보내기, Broker 로그를 다룬다</a:t>
             </a:r>
           </a:p>
         </p:txBody>
@@ -9403,7 +9193,7 @@
                 </a:solidFill>
                 <a:latin typeface="맑은 고딕"/>
               </a:rPr>
-              <a:t>VALIDATE 는 이유를 준다</a:t>
+              <a:t>속성 불일치 두 가지</a:t>
             </a:r>
           </a:p>
         </p:txBody>
@@ -9442,7 +9232,7 @@
                 </a:solidFill>
                 <a:latin typeface="맑은 고딕"/>
               </a:rPr>
-              <a:t>문장으로</a:t>
+              <a:t>메모리, SPFILE, 구성 파일</a:t>
             </a:r>
           </a:p>
         </p:txBody>
@@ -9481,7 +9271,7 @@
                 </a:solidFill>
                 <a:latin typeface="맑은 고딕"/>
               </a:rPr>
-              <a:t>•  `Ready for Switchover:` No</a:t>
+              <a:t>•  InconsistentProperties: 세 값이 다른 항목</a:t>
             </a:r>
           </a:p>
           <a:p>
@@ -9497,7 +9287,7 @@
                 </a:solidFill>
                 <a:latin typeface="맑은 고딕"/>
               </a:rPr>
-              <a:t>•  `Error: Switchover to this standby is not possible`</a:t>
+              <a:t>•  MEMORY_VALUE, SPFILE_VALUE, BROKER_VALUE</a:t>
             </a:r>
           </a:p>
           <a:p>
@@ -9513,7 +9303,7 @@
                 </a:solidFill>
                 <a:latin typeface="맑은 고딕"/>
               </a:rPr>
-              <a:t>•  `because an apply delay has been set`</a:t>
+              <a:t>•  InconsistentLogXptProps: 전송 속성만 비교</a:t>
             </a:r>
           </a:p>
           <a:p>
@@ -9529,7 +9319,7 @@
                 </a:solidFill>
                 <a:latin typeface="맑은 고딕"/>
               </a:rPr>
-              <a:t>•  `Apply Delay: 2 minutes`</a:t>
+              <a:t>•  경고 ORA-16714, 16715로 드러남</a:t>
             </a:r>
           </a:p>
           <a:p>
@@ -9545,7 +9335,7 @@
                 </a:solidFill>
                 <a:latin typeface="맑은 고딕"/>
               </a:rPr>
-              <a:t>•  DelayMins 는 Apply / Transport **양쪽 표**에 나온다</a:t>
+              <a:t>•  Broker 관리 파라미터는 SQL로 바꾸지 않음</a:t>
             </a:r>
           </a:p>
         </p:txBody>
@@ -9646,7 +9436,7 @@
                 </a:solidFill>
                 <a:latin typeface="맑은 고딕"/>
               </a:rPr>
-              <a:t>경보하는 것과 안 하는 것</a:t>
+              <a:t>SendQEntries와 RecvQEntries</a:t>
             </a:r>
           </a:p>
         </p:txBody>
@@ -9685,7 +9475,7 @@
                 </a:solidFill>
                 <a:latin typeface="맑은 고딕"/>
               </a:rPr>
-              <a:t>경계는 임계값</a:t>
+              <a:t>보낼 것과 적용할 것</a:t>
             </a:r>
           </a:p>
         </p:txBody>
@@ -9724,7 +9514,7 @@
                 </a:solidFill>
                 <a:latin typeface="맑은 고딕"/>
               </a:rPr>
-              <a:t>•  `LogShipping=OFF` → SUCCESS. **경보 없음**</a:t>
+              <a:t>•  SendQEntries: Primary에서 아직 못 보낸 로그</a:t>
             </a:r>
           </a:p>
           <a:p>
@@ -9740,7 +9530,7 @@
                 </a:solidFill>
                 <a:latin typeface="맑은 고딕"/>
               </a:rPr>
-              <a:t>•  `DelayMins=2` → WARNING. **경보 있음**</a:t>
+              <a:t>•  정상이면 CURRENT 한 줄 정도</a:t>
             </a:r>
           </a:p>
           <a:p>
@@ -9756,7 +9546,7 @@
                 </a:solidFill>
                 <a:latin typeface="맑은 고딕"/>
               </a:rPr>
-              <a:t>•  둘 다 사람이 설정한 것인데 결과가 다르다</a:t>
+              <a:t>•  RecvQEntries: Standby가 받고 아직 적용 안 한 로그</a:t>
             </a:r>
           </a:p>
           <a:p>
@@ -9772,7 +9562,23 @@
                 </a:solidFill>
                 <a:latin typeface="맑은 고딕"/>
               </a:rPr>
-              <a:t>•  차이 = **비교할 숫자 기준이 있는가**</a:t>
+              <a:t>•  보낼 큐가 길면 전송 구간 문제</a:t>
+            </a:r>
+          </a:p>
+          <a:p>
+            <a:pPr algn="l">
+              <a:spcAft>
+                <a:spcPts val="1000"/>
+              </a:spcAft>
+            </a:pPr>
+            <a:r>
+              <a:rPr sz="1700" b="0">
+                <a:solidFill>
+                  <a:srgbClr val="222222"/>
+                </a:solidFill>
+                <a:latin typeface="맑은 고딕"/>
+              </a:rPr>
+              <a:t>•  받은 큐가 길면 적용 구간 문제</a:t>
             </a:r>
           </a:p>
         </p:txBody>
@@ -9873,7 +9679,7 @@
                 </a:solidFill>
                 <a:latin typeface="맑은 고딕"/>
               </a:rPr>
-              <a:t>지연을 두면 임계값도 올린다</a:t>
+              <a:t>큐 두 개로 병목 가리기</a:t>
             </a:r>
           </a:p>
         </p:txBody>
@@ -9912,7 +9718,7 @@
                 </a:solidFill>
                 <a:latin typeface="맑은 고딕"/>
               </a:rPr>
-              <a:t>함께 조정</a:t>
+              <a:t>야간 배치 중 apply lag 경고</a:t>
             </a:r>
           </a:p>
         </p:txBody>
@@ -9951,7 +9757,7 @@
                 </a:solidFill>
                 <a:latin typeface="맑은 고딕"/>
               </a:rPr>
-              <a:t>•  `DelayMins=2` + `ApplyLagThreshold=30` → 즉시 ORA-16853</a:t>
+              <a:t>•  경고: ORA-16853, 처음 의심은 네트워크</a:t>
             </a:r>
           </a:p>
           <a:p>
@@ -9967,7 +9773,7 @@
                 </a:solidFill>
                 <a:latin typeface="맑은 고딕"/>
               </a:rPr>
-              <a:t>•  임계값을 10 으로 낮추자 구성 전체가 **WARNING**</a:t>
+              <a:t>•  SendQEntries: CURRENT 한 줄, 전송 정상</a:t>
             </a:r>
           </a:p>
           <a:p>
@@ -9983,7 +9789,7 @@
                 </a:solidFill>
                 <a:latin typeface="맑은 고딕"/>
               </a:rPr>
-              <a:t>•  `DelayMins=30` 이면 임계값은 **30분보다 넉넉하게**</a:t>
+              <a:t>•  RecvQEntries: NOT_APPLIED 다수, 적용 지연</a:t>
             </a:r>
           </a:p>
           <a:p>
@@ -9999,7 +9805,23 @@
                 </a:solidFill>
                 <a:latin typeface="맑은 고딕"/>
               </a:rPr>
-              <a:t>•  상시 경고 = 아무도 보지 않는 경고</a:t>
+              <a:t>•  TopWaitEvents: 데이터 파일 읽기 대기 상위</a:t>
+            </a:r>
+          </a:p>
+          <a:p>
+            <a:pPr algn="l">
+              <a:spcAft>
+                <a:spcPts val="1000"/>
+              </a:spcAft>
+            </a:pPr>
+            <a:r>
+              <a:rPr sz="1700" b="0">
+                <a:solidFill>
+                  <a:srgbClr val="222222"/>
+                </a:solidFill>
+                <a:latin typeface="맑은 고딕"/>
+              </a:rPr>
+              <a:t>•  대응: 배치 분산, Standby I/O 점검</a:t>
             </a:r>
           </a:p>
         </p:txBody>
@@ -10031,7 +9853,7 @@
         <p:spPr>
           <a:xfrm>
             <a:off x="0" y="0"/>
-            <a:ext cx="12191695" cy="6858000"/>
+            <a:ext cx="12191695" cy="1005840"/>
           </a:xfrm>
           <a:prstGeom prst="rect">
             <a:avLst/>
@@ -10074,8 +9896,8 @@
         </p:nvSpPr>
         <p:spPr>
           <a:xfrm>
-            <a:off x="822960" y="2011680"/>
-            <a:ext cx="10515600" cy="1097280"/>
+            <a:off x="548640" y="91440"/>
+            <a:ext cx="10972800" cy="777240"/>
           </a:xfrm>
           <a:prstGeom prst="rect">
             <a:avLst/>
@@ -10094,13 +9916,13 @@
               </a:spcAft>
             </a:pPr>
             <a:r>
-              <a:rPr sz="4000" b="1">
+              <a:rPr sz="2600" b="1">
                 <a:solidFill>
                   <a:srgbClr val="FFFFFF"/>
                 </a:solidFill>
                 <a:latin typeface="맑은 고딕"/>
               </a:rPr>
-              <a:t>14.5</a:t>
+              <a:t>TopWaitEvents와 논리 Standby 속성</a:t>
             </a:r>
           </a:p>
         </p:txBody>
@@ -10113,8 +9935,8 @@
         </p:nvSpPr>
         <p:spPr>
           <a:xfrm>
-            <a:off x="822960" y="3017520"/>
-            <a:ext cx="10515600" cy="914400"/>
+            <a:off x="640080" y="1078992"/>
+            <a:ext cx="10881360" cy="457200"/>
           </a:xfrm>
           <a:prstGeom prst="rect">
             <a:avLst/>
@@ -10133,71 +9955,27 @@
               </a:spcAft>
             </a:pPr>
             <a:r>
-              <a:rPr sz="2800" b="1">
-                <a:solidFill>
-                  <a:srgbClr val="FFFFFF"/>
-                </a:solidFill>
-                <a:latin typeface="맑은 고딕"/>
-              </a:rPr>
-              <a:t>V$ 뷰와 대조</a:t>
-            </a:r>
-          </a:p>
-        </p:txBody>
-      </p:sp>
-      <p:sp>
-        <p:nvSpPr>
-          <p:cNvPr id="5" name="Rectangle 4"/>
-          <p:cNvSpPr/>
-          <p:nvPr/>
-        </p:nvSpPr>
-        <p:spPr>
-          <a:xfrm>
-            <a:off x="822960" y="4114800"/>
-            <a:ext cx="5486400" cy="54864"/>
-          </a:xfrm>
-          <a:prstGeom prst="rect">
-            <a:avLst/>
-          </a:prstGeom>
-          <a:solidFill>
-            <a:srgbClr val="FFFFFF"/>
-          </a:solidFill>
-          <a:ln>
-            <a:noFill/>
-          </a:ln>
-          <a:effectLst/>
-        </p:spPr>
-        <p:style>
-          <a:lnRef idx="1">
-            <a:schemeClr val="accent1"/>
-          </a:lnRef>
-          <a:fillRef idx="3">
-            <a:schemeClr val="accent1"/>
-          </a:fillRef>
-          <a:effectRef idx="2">
-            <a:schemeClr val="accent1"/>
-          </a:effectRef>
-          <a:fontRef idx="minor">
-            <a:schemeClr val="lt1"/>
-          </a:fontRef>
-        </p:style>
-        <p:txBody>
-          <a:bodyPr rtlCol="0" anchor="ctr"/>
-          <a:lstStyle/>
-          <a:p>
-            <a:pPr algn="ctr"/>
-          </a:p>
-        </p:txBody>
-      </p:sp>
-      <p:sp>
-        <p:nvSpPr>
-          <p:cNvPr id="6" name="TextBox 5"/>
+              <a:rPr sz="1500" b="0">
+                <a:solidFill>
+                  <a:srgbClr val="5A6672"/>
+                </a:solidFill>
+                <a:latin typeface="맑은 고딕"/>
+              </a:rPr>
+              <a:t>대기 성격과 SQL Apply 정보</a:t>
+            </a:r>
+          </a:p>
+        </p:txBody>
+      </p:sp>
+      <p:sp>
+        <p:nvSpPr>
+          <p:cNvPr id="5" name="TextBox 4"/>
           <p:cNvSpPr txBox="1"/>
           <p:nvPr/>
         </p:nvSpPr>
         <p:spPr>
           <a:xfrm>
-            <a:off x="822960" y="4297680"/>
-            <a:ext cx="10058400" cy="2011680"/>
+            <a:off x="640080" y="1737360"/>
+            <a:ext cx="10881360" cy="4754880"/>
           </a:xfrm>
           <a:prstGeom prst="rect">
             <a:avLst/>
@@ -10212,49 +9990,81 @@
           <a:p>
             <a:pPr algn="l">
               <a:spcAft>
-                <a:spcPts val="800"/>
-              </a:spcAft>
-            </a:pPr>
-            <a:r>
-              <a:rPr sz="1600" b="0">
-                <a:solidFill>
-                  <a:srgbClr val="FFFFFF"/>
-                </a:solidFill>
-                <a:latin typeface="맑은 고딕"/>
-              </a:rPr>
-              <a:t>•  사건의 흐름</a:t>
-            </a:r>
-          </a:p>
-          <a:p>
-            <a:pPr algn="l">
-              <a:spcAft>
-                <a:spcPts val="800"/>
-              </a:spcAft>
-            </a:pPr>
-            <a:r>
-              <a:rPr sz="1600" b="0">
-                <a:solidFill>
-                  <a:srgbClr val="FFFFFF"/>
-                </a:solidFill>
-                <a:latin typeface="맑은 고딕"/>
-              </a:rPr>
-              <a:t>•  지연과 시간 추정</a:t>
-            </a:r>
-          </a:p>
-          <a:p>
-            <a:pPr algn="l">
-              <a:spcAft>
-                <a:spcPts val="800"/>
-              </a:spcAft>
-            </a:pPr>
-            <a:r>
-              <a:rPr sz="1600" b="0">
-                <a:solidFill>
-                  <a:srgbClr val="FFFFFF"/>
-                </a:solidFill>
-                <a:latin typeface="맑은 고딕"/>
-              </a:rPr>
-              <a:t>•  구성을 SQL 로</a:t>
+                <a:spcPts val="1000"/>
+              </a:spcAft>
+            </a:pPr>
+            <a:r>
+              <a:rPr sz="1700" b="0">
+                <a:solidFill>
+                  <a:srgbClr val="222222"/>
+                </a:solidFill>
+                <a:latin typeface="맑은 고딕"/>
+              </a:rPr>
+              <a:t>•  TopWaitEvents: 대기 시간 상위 5개 이벤트</a:t>
+            </a:r>
+          </a:p>
+          <a:p>
+            <a:pPr algn="l">
+              <a:spcAft>
+                <a:spcPts val="1000"/>
+              </a:spcAft>
+            </a:pPr>
+            <a:r>
+              <a:rPr sz="1700" b="0">
+                <a:solidFill>
+                  <a:srgbClr val="222222"/>
+                </a:solidFill>
+                <a:latin typeface="맑은 고딕"/>
+              </a:rPr>
+              <a:t>•  Standby에서는 유휴 대기가 상위인 것이 보통</a:t>
+            </a:r>
+          </a:p>
+          <a:p>
+            <a:pPr algn="l">
+              <a:spcAft>
+                <a:spcPts val="1000"/>
+              </a:spcAft>
+            </a:pPr>
+            <a:r>
+              <a:rPr sz="1700" b="0">
+                <a:solidFill>
+                  <a:srgbClr val="222222"/>
+                </a:solidFill>
+                <a:latin typeface="맑은 고딕"/>
+              </a:rPr>
+              <a:t>•  적용 병목이면 I/O 계열이 올라옴</a:t>
+            </a:r>
+          </a:p>
+          <a:p>
+            <a:pPr algn="l">
+              <a:spcAft>
+                <a:spcPts val="1000"/>
+              </a:spcAft>
+            </a:pPr>
+            <a:r>
+              <a:rPr sz="1700" b="0">
+                <a:solidFill>
+                  <a:srgbClr val="222222"/>
+                </a:solidFill>
+                <a:latin typeface="맑은 고딕"/>
+              </a:rPr>
+              <a:t>•  LsbyFailedTxnInfo: SQL Apply를 멈춘 트랜잭션</a:t>
+            </a:r>
+          </a:p>
+          <a:p>
+            <a:pPr algn="l">
+              <a:spcAft>
+                <a:spcPts val="1000"/>
+              </a:spcAft>
+            </a:pPr>
+            <a:r>
+              <a:rPr sz="1700" b="0">
+                <a:solidFill>
+                  <a:srgbClr val="222222"/>
+                </a:solidFill>
+                <a:latin typeface="맑은 고딕"/>
+              </a:rPr>
+              <a:t>•  LsbyParameters: MAX_SGA, MAX_SERVERS</a:t>
             </a:r>
           </a:p>
         </p:txBody>
@@ -10286,7 +10096,7 @@
         <p:spPr>
           <a:xfrm>
             <a:off x="0" y="0"/>
-            <a:ext cx="12191695" cy="1005840"/>
+            <a:ext cx="12191695" cy="6858000"/>
           </a:xfrm>
           <a:prstGeom prst="rect">
             <a:avLst/>
@@ -10329,8 +10139,8 @@
         </p:nvSpPr>
         <p:spPr>
           <a:xfrm>
-            <a:off x="548640" y="91440"/>
-            <a:ext cx="10972800" cy="777240"/>
+            <a:off x="822960" y="2011680"/>
+            <a:ext cx="10515600" cy="1097280"/>
           </a:xfrm>
           <a:prstGeom prst="rect">
             <a:avLst/>
@@ -10349,13 +10159,13 @@
               </a:spcAft>
             </a:pPr>
             <a:r>
-              <a:rPr sz="2600" b="1">
+              <a:rPr sz="4000" b="1">
                 <a:solidFill>
                   <a:srgbClr val="FFFFFF"/>
                 </a:solidFill>
                 <a:latin typeface="맑은 고딕"/>
               </a:rPr>
-              <a:t>V$DATAGUARD_STATUS</a:t>
+              <a:t>14.5</a:t>
             </a:r>
           </a:p>
         </p:txBody>
@@ -10368,8 +10178,8 @@
         </p:nvSpPr>
         <p:spPr>
           <a:xfrm>
-            <a:off x="640080" y="1078992"/>
-            <a:ext cx="10881360" cy="457200"/>
+            <a:off x="822960" y="3017520"/>
+            <a:ext cx="10515600" cy="914400"/>
           </a:xfrm>
           <a:prstGeom prst="rect">
             <a:avLst/>
@@ -10388,27 +10198,71 @@
               </a:spcAft>
             </a:pPr>
             <a:r>
-              <a:rPr sz="1500" b="0">
-                <a:solidFill>
-                  <a:srgbClr val="5A6672"/>
-                </a:solidFill>
-                <a:latin typeface="맑은 고딕"/>
-              </a:rPr>
-              <a:t>Warning 이 다 문제가 아니다</a:t>
-            </a:r>
-          </a:p>
-        </p:txBody>
-      </p:sp>
-      <p:sp>
-        <p:nvSpPr>
-          <p:cNvPr id="5" name="TextBox 4"/>
+              <a:rPr sz="2800" b="1">
+                <a:solidFill>
+                  <a:srgbClr val="FFFFFF"/>
+                </a:solidFill>
+                <a:latin typeface="맑은 고딕"/>
+              </a:rPr>
+              <a:t>지연 임계값과 경고</a:t>
+            </a:r>
+          </a:p>
+        </p:txBody>
+      </p:sp>
+      <p:sp>
+        <p:nvSpPr>
+          <p:cNvPr id="5" name="Rectangle 4"/>
+          <p:cNvSpPr/>
+          <p:nvPr/>
+        </p:nvSpPr>
+        <p:spPr>
+          <a:xfrm>
+            <a:off x="822960" y="4114800"/>
+            <a:ext cx="5486400" cy="54864"/>
+          </a:xfrm>
+          <a:prstGeom prst="rect">
+            <a:avLst/>
+          </a:prstGeom>
+          <a:solidFill>
+            <a:srgbClr val="FFFFFF"/>
+          </a:solidFill>
+          <a:ln>
+            <a:noFill/>
+          </a:ln>
+          <a:effectLst/>
+        </p:spPr>
+        <p:style>
+          <a:lnRef idx="1">
+            <a:schemeClr val="accent1"/>
+          </a:lnRef>
+          <a:fillRef idx="3">
+            <a:schemeClr val="accent1"/>
+          </a:fillRef>
+          <a:effectRef idx="2">
+            <a:schemeClr val="accent1"/>
+          </a:effectRef>
+          <a:fontRef idx="minor">
+            <a:schemeClr val="lt1"/>
+          </a:fontRef>
+        </p:style>
+        <p:txBody>
+          <a:bodyPr rtlCol="0" anchor="ctr"/>
+          <a:lstStyle/>
+          <a:p>
+            <a:pPr algn="ctr"/>
+          </a:p>
+        </p:txBody>
+      </p:sp>
+      <p:sp>
+        <p:nvSpPr>
+          <p:cNvPr id="6" name="TextBox 5"/>
           <p:cNvSpPr txBox="1"/>
           <p:nvPr/>
         </p:nvSpPr>
         <p:spPr>
           <a:xfrm>
-            <a:off x="640080" y="1737360"/>
-            <a:ext cx="10881360" cy="4754880"/>
+            <a:off x="822960" y="4297680"/>
+            <a:ext cx="10058400" cy="2011680"/>
           </a:xfrm>
           <a:prstGeom prst="rect">
             <a:avLst/>
@@ -10423,65 +10277,49 @@
           <a:p>
             <a:pPr algn="l">
               <a:spcAft>
-                <a:spcPts val="1000"/>
-              </a:spcAft>
-            </a:pPr>
-            <a:r>
-              <a:rPr sz="1700" b="0">
-                <a:solidFill>
-                  <a:srgbClr val="222222"/>
-                </a:solidFill>
-                <a:latin typeface="맑은 고딕"/>
-              </a:rPr>
-              <a:t>•  `SEVERITY` — Informational / Control / Warning</a:t>
-            </a:r>
-          </a:p>
-          <a:p>
-            <a:pPr algn="l">
-              <a:spcAft>
-                <a:spcPts val="1000"/>
-              </a:spcAft>
-            </a:pPr>
-            <a:r>
-              <a:rPr sz="1700" b="0">
-                <a:solidFill>
-                  <a:srgbClr val="222222"/>
-                </a:solidFill>
-                <a:latin typeface="맑은 고딕"/>
-              </a:rPr>
-              <a:t>•  실측 `SRL selected for T-1.S-69 for LAD:2` 가 **Warning**</a:t>
-            </a:r>
-          </a:p>
-          <a:p>
-            <a:pPr algn="l">
-              <a:spcAft>
-                <a:spcPts val="1000"/>
-              </a:spcAft>
-            </a:pPr>
-            <a:r>
-              <a:rPr sz="1700" b="0">
-                <a:solidFill>
-                  <a:srgbClr val="222222"/>
-                </a:solidFill>
-                <a:latin typeface="맑은 고딕"/>
-              </a:rPr>
-              <a:t>•  그런데 `ERROR_CODE` 는 **0**</a:t>
-            </a:r>
-          </a:p>
-          <a:p>
-            <a:pPr algn="l">
-              <a:spcAft>
-                <a:spcPts val="1000"/>
-              </a:spcAft>
-            </a:pPr>
-            <a:r>
-              <a:rPr sz="1700" b="0">
-                <a:solidFill>
-                  <a:srgbClr val="222222"/>
-                </a:solidFill>
-                <a:latin typeface="맑은 고딕"/>
-              </a:rPr>
-              <a:t>•  거르면 11건 → **2건** (ORA-16037)</a:t>
+                <a:spcPts val="800"/>
+              </a:spcAft>
+            </a:pPr>
+            <a:r>
+              <a:rPr sz="1600" b="0">
+                <a:solidFill>
+                  <a:srgbClr val="FFFFFF"/>
+                </a:solidFill>
+                <a:latin typeface="맑은 고딕"/>
+              </a:rPr>
+              <a:t>•  세 임계값 속성</a:t>
+            </a:r>
+          </a:p>
+          <a:p>
+            <a:pPr algn="l">
+              <a:spcAft>
+                <a:spcPts val="800"/>
+              </a:spcAft>
+            </a:pPr>
+            <a:r>
+              <a:rPr sz="1600" b="0">
+                <a:solidFill>
+                  <a:srgbClr val="FFFFFF"/>
+                </a:solidFill>
+                <a:latin typeface="맑은 고딕"/>
+              </a:rPr>
+              <a:t>•  경고가 상태로 번지는 경로</a:t>
+            </a:r>
+          </a:p>
+          <a:p>
+            <a:pPr algn="l">
+              <a:spcAft>
+                <a:spcPts val="800"/>
+              </a:spcAft>
+            </a:pPr>
+            <a:r>
+              <a:rPr sz="1600" b="0">
+                <a:solidFill>
+                  <a:srgbClr val="FFFFFF"/>
+                </a:solidFill>
+                <a:latin typeface="맑은 고딕"/>
+              </a:rPr>
+              <a:t>•  업무 기준으로 값을 정한다</a:t>
             </a:r>
           </a:p>
         </p:txBody>
@@ -10582,7 +10420,7 @@
                 </a:solidFill>
                 <a:latin typeface="맑은 고딕"/>
               </a:rPr>
-              <a:t>V$DATAGUARD_STATS</a:t>
+              <a:t>세 임계값 속성</a:t>
             </a:r>
           </a:p>
         </p:txBody>
@@ -10621,7 +10459,7 @@
                 </a:solidFill>
                 <a:latin typeface="맑은 고딕"/>
               </a:rPr>
-              <a:t>네 개다</a:t>
+              <a:t>19c 기본값은 모두 30초</a:t>
             </a:r>
           </a:p>
         </p:txBody>
@@ -10660,7 +10498,7 @@
                 </a:solidFill>
                 <a:latin typeface="맑은 고딕"/>
               </a:rPr>
-              <a:t>•  `transport lag` / `apply lag` — 7장부터 본 둘</a:t>
+              <a:t>•  ApplyLagThreshold: apply lag, ORA-16853</a:t>
             </a:r>
           </a:p>
           <a:p>
@@ -10676,7 +10514,7 @@
                 </a:solidFill>
                 <a:latin typeface="맑은 고딕"/>
               </a:rPr>
-              <a:t>•  **`apply finish time`** — 밀린 것을 다 적용할 예상 시간</a:t>
+              <a:t>•  TransportLagThreshold: transport lag, ORA-16855</a:t>
             </a:r>
           </a:p>
           <a:p>
@@ -10692,7 +10530,7 @@
                 </a:solidFill>
                 <a:latin typeface="맑은 고딕"/>
               </a:rPr>
-              <a:t>•  **`estimated startup time`** — 실측 **11초**</a:t>
+              <a:t>•  TransportDisconnectedThreshold: ORA-16857</a:t>
             </a:r>
           </a:p>
           <a:p>
@@ -10708,7 +10546,23 @@
                 </a:solidFill>
                 <a:latin typeface="맑은 고딕"/>
               </a:rPr>
-              <a:t>•  두 값을 더하면 **RTO 근거**</a:t>
+              <a:t>•  단위는 초, 구성원마다 지정</a:t>
+            </a:r>
+          </a:p>
+          <a:p>
+            <a:pPr algn="l">
+              <a:spcAft>
+                <a:spcPts val="1000"/>
+              </a:spcAft>
+            </a:pPr>
+            <a:r>
+              <a:rPr sz="1700" b="0">
+                <a:solidFill>
+                  <a:srgbClr val="222222"/>
+                </a:solidFill>
+                <a:latin typeface="맑은 고딕"/>
+              </a:rPr>
+              <a:t>•  0이면 그 항목을 감시하지 않음</a:t>
             </a:r>
           </a:p>
         </p:txBody>
@@ -10809,7 +10663,7 @@
                 </a:solidFill>
                 <a:latin typeface="맑은 고딕"/>
               </a:rPr>
-              <a:t>이 뷰는 어느 쪽에서</a:t>
+              <a:t>경고가 상태로 번지는 경로</a:t>
             </a:r>
           </a:p>
         </p:txBody>
@@ -10848,7 +10702,7 @@
                 </a:solidFill>
                 <a:latin typeface="맑은 고딕"/>
               </a:rPr>
-              <a:t>함정이 있다</a:t>
+              <a:t>구성원에서 구성 전체로</a:t>
             </a:r>
           </a:p>
         </p:txBody>
@@ -10887,7 +10741,7 @@
                 </a:solidFill>
                 <a:latin typeface="맑은 고딕"/>
               </a:rPr>
-              <a:t>•  Standby 에서 조회 → 네 행</a:t>
+              <a:t>•  임계값 초과 → 구성원 WARNING</a:t>
             </a:r>
           </a:p>
           <a:p>
@@ -10903,7 +10757,7 @@
                 </a:solidFill>
                 <a:latin typeface="맑은 고딕"/>
               </a:rPr>
-              <a:t>•  **Primary 에서 조회 → `no rows selected`**</a:t>
+              <a:t>•  구성원 WARNING → 구성 WARNING</a:t>
             </a:r>
           </a:p>
           <a:p>
@@ -10919,7 +10773,7 @@
                 </a:solidFill>
                 <a:latin typeface="맑은 고딕"/>
               </a:rPr>
-              <a:t>•  지연은 **받는 쪽**의 개념이므로 당연</a:t>
+              <a:t>•  다음 상태 점검에서 반영, 즉시는 아님</a:t>
             </a:r>
           </a:p>
           <a:p>
@@ -10935,7 +10789,23 @@
                 </a:solidFill>
                 <a:latin typeface="맑은 고딕"/>
               </a:rPr>
-              <a:t>•  양쪽에 같은 SQL 을 돌리면 빈 결과를 오류로 오인</a:t>
+              <a:t>•  내려가면 SUCCESS로 복귀, 이력은 로그에</a:t>
+            </a:r>
+          </a:p>
+          <a:p>
+            <a:pPr algn="l">
+              <a:spcAft>
+                <a:spcPts val="1000"/>
+              </a:spcAft>
+            </a:pPr>
+            <a:r>
+              <a:rPr sz="1700" b="0">
+                <a:solidFill>
+                  <a:srgbClr val="222222"/>
+                </a:solidFill>
+                <a:latin typeface="맑은 고딕"/>
+              </a:rPr>
+              <a:t>•  임계값은 판정만 바꾸고 전송·적용은 그대로</a:t>
             </a:r>
           </a:p>
         </p:txBody>
@@ -11036,7 +10906,7 @@
                 </a:solidFill>
                 <a:latin typeface="맑은 고딕"/>
               </a:rPr>
-              <a:t>V$DG_BROKER_CONFIG</a:t>
+              <a:t>임계값을 정하는 기준</a:t>
             </a:r>
           </a:p>
         </p:txBody>
@@ -11075,7 +10945,7 @@
                 </a:solidFill>
                 <a:latin typeface="맑은 고딕"/>
               </a:rPr>
-              <a:t>SHOW 를 SQL 로</a:t>
+              <a:t>RPO와 RTO에서 거꾸로</a:t>
             </a:r>
           </a:p>
         </p:txBody>
@@ -11114,7 +10984,7 @@
                 </a:solidFill>
                 <a:latin typeface="맑은 고딕"/>
               </a:rPr>
-              <a:t>•  `REDO_SOURCE` 가 **들여쓰기를 대신한다**</a:t>
+              <a:t>•  TransportLagThreshold는 RPO 쪽</a:t>
             </a:r>
           </a:p>
           <a:p>
@@ -11130,7 +11000,7 @@
                 </a:solidFill>
                 <a:latin typeface="맑은 고딕"/>
               </a:rPr>
-              <a:t>•  chicago `-N/A-` / boston `chicago`</a:t>
+              <a:t>•  ApplyLagThreshold는 RTO 쪽</a:t>
             </a:r>
           </a:p>
           <a:p>
@@ -11146,7 +11016,7 @@
                 </a:solidFill>
                 <a:latin typeface="맑은 고딕"/>
               </a:rPr>
-              <a:t>•  Standby 에서도 같은 내용이 나온다</a:t>
+              <a:t>•  평소 지연 분포를 먼저 기록</a:t>
             </a:r>
           </a:p>
           <a:p>
@@ -11162,7 +11032,23 @@
                 </a:solidFill>
                 <a:latin typeface="맑은 고딕"/>
               </a:rPr>
-              <a:t>•  `STATUS` 는 문자열이 아니라 **숫자** — `a10` 주면 `##########`</a:t>
+              <a:t>•  너무 짧으면 경고 피로, 너무 길면 무의미</a:t>
+            </a:r>
+          </a:p>
+          <a:p>
+            <a:pPr algn="l">
+              <a:spcAft>
+                <a:spcPts val="1000"/>
+              </a:spcAft>
+            </a:pPr>
+            <a:r>
+              <a:rPr sz="1700" b="0">
+                <a:solidFill>
+                  <a:srgbClr val="222222"/>
+                </a:solidFill>
+                <a:latin typeface="맑은 고딕"/>
+              </a:rPr>
+              <a:t>•  ASYNC 원거리 Standby는 별도 기준</a:t>
             </a:r>
           </a:p>
         </p:txBody>
@@ -11263,7 +11149,7 @@
                 </a:solidFill>
                 <a:latin typeface="맑은 고딕"/>
               </a:rPr>
-              <a:t>뷰 이름의 함정</a:t>
+              <a:t>지연 적용과 임계값</a:t>
             </a:r>
           </a:p>
         </p:txBody>
@@ -11302,7 +11188,7 @@
                 </a:solidFill>
                 <a:latin typeface="맑은 고딕"/>
               </a:rPr>
-              <a:t>ORA-00942 의 두 얼굴</a:t>
+              <a:t>DelayMins를 쓰면 함께 바꾼다</a:t>
             </a:r>
           </a:p>
         </p:txBody>
@@ -11341,7 +11227,7 @@
                 </a:solidFill>
                 <a:latin typeface="맑은 고딕"/>
               </a:rPr>
-              <a:t>•  `V$DATAGUARD_STATUS` 상태 메시지</a:t>
+              <a:t>•  DelayMins: 실수 대비 시간을 산다</a:t>
             </a:r>
           </a:p>
           <a:p>
@@ -11357,7 +11243,7 @@
                 </a:solidFill>
                 <a:latin typeface="맑은 고딕"/>
               </a:rPr>
-              <a:t>•  `V$DATAGUARD_STATS` 통계 — **한 글자 차이**</a:t>
+              <a:t>•  대가: Failover 전 밀린 리두 적용 시간</a:t>
             </a:r>
           </a:p>
           <a:p>
@@ -11373,7 +11259,7 @@
                 </a:solidFill>
                 <a:latin typeface="맑은 고딕"/>
               </a:rPr>
-              <a:t>•  틀리면 `ORA-00942: table or view does not exist`</a:t>
+              <a:t>•  ApplyLagThreshold는 지연 시간보다 넉넉하게</a:t>
             </a:r>
           </a:p>
           <a:p>
@@ -11389,7 +11275,23 @@
                 </a:solidFill>
                 <a:latin typeface="맑은 고딕"/>
               </a:rPr>
-              <a:t>•  **같은 번호가 권한 부족일 때도 나온다**</a:t>
+              <a:t>•  TransportLagThreshold는 그대로 둔다</a:t>
+            </a:r>
+          </a:p>
+          <a:p>
+            <a:pPr algn="l">
+              <a:spcAft>
+                <a:spcPts val="1000"/>
+              </a:spcAft>
+            </a:pPr>
+            <a:r>
+              <a:rPr sz="1700" b="0">
+                <a:solidFill>
+                  <a:srgbClr val="222222"/>
+                </a:solidFill>
+                <a:latin typeface="맑은 고딕"/>
+              </a:rPr>
+              <a:t>•  전송 지연은 여전히 실제 문제</a:t>
             </a:r>
           </a:p>
         </p:txBody>
@@ -11529,7 +11431,7 @@
                 </a:solidFill>
                 <a:latin typeface="맑은 고딕"/>
               </a:rPr>
-              <a:t>구성을 파일로 남긴다</a:t>
+              <a:t>VALIDATE 계열 검증 명령</a:t>
             </a:r>
           </a:p>
         </p:txBody>
@@ -11612,7 +11514,7 @@
                 </a:solidFill>
                 <a:latin typeface="맑은 고딕"/>
               </a:rPr>
-              <a:t>•  어디에 생기는가</a:t>
+              <a:t>•  여섯 가지 형태</a:t>
             </a:r>
           </a:p>
           <a:p>
@@ -11628,7 +11530,7 @@
                 </a:solidFill>
                 <a:latin typeface="맑은 고딕"/>
               </a:rPr>
-              <a:t>•  경로는 줄 수 없다</a:t>
+              <a:t>•  전환 준비, 파라미터, 블록, 접속 경로</a:t>
             </a:r>
           </a:p>
           <a:p>
@@ -11644,7 +11546,7 @@
                 </a:solidFill>
                 <a:latin typeface="맑은 고딕"/>
               </a:rPr>
-              <a:t>•  가져오기의 제약</a:t>
+              <a:t>•  결과 파일을 남기는 명령</a:t>
             </a:r>
           </a:p>
         </p:txBody>
@@ -11745,7 +11647,7 @@
                 </a:solidFill>
                 <a:latin typeface="맑은 고딕"/>
               </a:rPr>
-              <a:t>이 장의 구성 (Agenda)</a:t>
+              <a:t>Agenda</a:t>
             </a:r>
           </a:p>
         </p:txBody>
@@ -11784,7 +11686,7 @@
                 </a:solidFill>
                 <a:latin typeface="맑은 고딕"/>
               </a:rPr>
-              <a:t>•  14.2  SHOW 와 VALIDATE</a:t>
+              <a:t>•  14.2  Broker 모니터링의 원리</a:t>
             </a:r>
           </a:p>
           <a:p>
@@ -11800,7 +11702,7 @@
                 </a:solidFill>
                 <a:latin typeface="맑은 고딕"/>
               </a:rPr>
-              <a:t>•  14.3  모니터링 전용 속성</a:t>
+              <a:t>•  14.3  SHOW 명령으로 상태 읽기</a:t>
             </a:r>
           </a:p>
           <a:p>
@@ -11816,7 +11718,7 @@
                 </a:solidFill>
                 <a:latin typeface="맑은 고딕"/>
               </a:rPr>
-              <a:t>•  14.4  임계값과 경고</a:t>
+              <a:t>•  14.4  모니터링 전용 속성  /  14.5  지연 임계값과 경고</a:t>
             </a:r>
           </a:p>
           <a:p>
@@ -11832,7 +11734,7 @@
                 </a:solidFill>
                 <a:latin typeface="맑은 고딕"/>
               </a:rPr>
-              <a:t>•  14.5  V$ 뷰와 대조</a:t>
+              <a:t>•  14.6  VALIDATE 계열 검증 명령</a:t>
             </a:r>
           </a:p>
           <a:p>
@@ -11848,7 +11750,7 @@
                 </a:solidFill>
                 <a:latin typeface="맑은 고딕"/>
               </a:rPr>
-              <a:t>•  14.6  구성을 파일로 남긴다</a:t>
+              <a:t>•  14.7  SHOW와 VALIDATE의 차이  /  14.8  구성 내보내기와 가져오기</a:t>
             </a:r>
           </a:p>
           <a:p>
@@ -11864,23 +11766,7 @@
                 </a:solidFill>
                 <a:latin typeface="맑은 고딕"/>
               </a:rPr>
-              <a:t>•  14.7  Fast-Start Failover</a:t>
-            </a:r>
-          </a:p>
-          <a:p>
-            <a:pPr algn="l">
-              <a:spcAft>
-                <a:spcPts val="1000"/>
-              </a:spcAft>
-            </a:pPr>
-            <a:r>
-              <a:rPr sz="1600" b="0">
-                <a:solidFill>
-                  <a:srgbClr val="222222"/>
-                </a:solidFill>
-                <a:latin typeface="맑은 고딕"/>
-              </a:rPr>
-              <a:t>•  14.8  감시 체계를 어떻게 짤 것인가</a:t>
+              <a:t>•  14.9  Broker 로그와 경고 로그  /  14.10  운영 시 주의점</a:t>
             </a:r>
           </a:p>
         </p:txBody>
@@ -11981,7 +11867,7 @@
                 </a:solidFill>
                 <a:latin typeface="맑은 고딕"/>
               </a:rPr>
-              <a:t>EXPORT CONFIGURATION</a:t>
+              <a:t>VALIDATE 여섯 가지</a:t>
             </a:r>
           </a:p>
         </p:txBody>
@@ -12020,7 +11906,7 @@
                 </a:solidFill>
                 <a:latin typeface="맑은 고딕"/>
               </a:rPr>
-              <a:t>어디에 생기나</a:t>
+              <a:t>무엇을 검사하는가</a:t>
             </a:r>
           </a:p>
         </p:txBody>
@@ -12059,7 +11945,7 @@
                 </a:solidFill>
                 <a:latin typeface="맑은 고딕"/>
               </a:rPr>
-              <a:t>•  `export configuration to 'ch14_export.xml'` → `Succeeded.`</a:t>
+              <a:t>•  DATABASE: 역할 전환 준비 상태</a:t>
             </a:r>
           </a:p>
           <a:p>
@@ -12075,7 +11961,7 @@
                 </a:solidFill>
                 <a:latin typeface="맑은 고딕"/>
               </a:rPr>
-              <a:t>•  **어디에 만들었는지 말해 주지 않는다**</a:t>
+              <a:t>•  DATABASE ... SPFILE: 파라미터 차이</a:t>
             </a:r>
           </a:p>
           <a:p>
@@ -12091,7 +11977,7 @@
                 </a:solidFill>
                 <a:latin typeface="맑은 고딕"/>
               </a:rPr>
-              <a:t>•  `$ORACLE_HOME/dbs` 에는 없다</a:t>
+              <a:t>•  DATABASE ... DATAFILE: 블록 비교, lost write</a:t>
             </a:r>
           </a:p>
           <a:p>
@@ -12107,7 +11993,7 @@
                 </a:solidFill>
                 <a:latin typeface="맑은 고딕"/>
               </a:rPr>
-              <a:t>•  실측 → `/u01/app/oracle/diag/rdbms/chicago/chicago/trace/`</a:t>
+              <a:t>•  FAR_SYNC: Far Sync 준비 상태</a:t>
             </a:r>
           </a:p>
           <a:p>
@@ -12123,7 +12009,7 @@
                 </a:solidFill>
                 <a:latin typeface="맑은 고딕"/>
               </a:rPr>
-              <a:t>•  104줄 4,433바이트, 권한 644</a:t>
+              <a:t>•  NETWORK CONFIGURATION, STATIC CONNECT IDENTIFIER</a:t>
             </a:r>
           </a:p>
         </p:txBody>
@@ -12224,7 +12110,7 @@
                 </a:solidFill>
                 <a:latin typeface="맑은 고딕"/>
               </a:rPr>
-              <a:t>오류 재현</a:t>
+              <a:t>VALIDATE DATABASE</a:t>
             </a:r>
           </a:p>
         </p:txBody>
@@ -12263,7 +12149,7 @@
                 </a:solidFill>
                 <a:latin typeface="맑은 고딕"/>
               </a:rPr>
-              <a:t>경로를 주면</a:t>
+              <a:t>역할 전환을 기준으로 한 점검</a:t>
             </a:r>
           </a:p>
         </p:txBody>
@@ -12302,7 +12188,7 @@
                 </a:solidFill>
                 <a:latin typeface="맑은 고딕"/>
               </a:rPr>
-              <a:t>•  `export configuration to '/tmp/ch14_abs.xml';`</a:t>
+              <a:t>•  Ready for Switchover / Ready for Failover</a:t>
             </a:r>
           </a:p>
           <a:p>
@@ -12318,7 +12204,7 @@
                 </a:solidFill>
                 <a:latin typeface="맑은 고딕"/>
               </a:rPr>
-              <a:t>•  → **`ORA-16540: invalid argument`**</a:t>
+              <a:t>•  Flashback Database Status: Reinstate 조건</a:t>
             </a:r>
           </a:p>
           <a:p>
@@ -12334,7 +12220,7 @@
                 </a:solidFill>
                 <a:latin typeface="맑은 고딕"/>
               </a:rPr>
-              <a:t>•  `ORA-06512: at "SYS.DBMS_DRS", line 1947`</a:t>
+              <a:t>•  Managed by Clusterware</a:t>
             </a:r>
           </a:p>
           <a:p>
@@ -12350,7 +12236,7 @@
                 </a:solidFill>
                 <a:latin typeface="맑은 고딕"/>
               </a:rPr>
-              <a:t>•  `/` 아래도 같은 오류 — **위치와 무관**</a:t>
+              <a:t>•  정적 접속 식별자로 실제 접속 시험</a:t>
             </a:r>
           </a:p>
           <a:p>
@@ -12366,7 +12252,7 @@
                 </a:solidFill>
                 <a:latin typeface="맑은 고딕"/>
               </a:rPr>
-              <a:t>•  인자는 경로가 아니라 **파일 이름**</a:t>
+              <a:t>•  Log Files Cleared: 전환 후 쓸 로그 준비</a:t>
             </a:r>
           </a:p>
         </p:txBody>
@@ -12467,7 +12353,7 @@
                 </a:solidFill>
                 <a:latin typeface="맑은 고딕"/>
               </a:rPr>
-              <a:t>오류 재현</a:t>
+              <a:t>VERBOSE와 로그 구성 계산</a:t>
             </a:r>
           </a:p>
         </p:txBody>
@@ -12506,7 +12392,7 @@
                 </a:solidFill>
                 <a:latin typeface="맑은 고딕"/>
               </a:rPr>
-              <a:t>가져오기는 거부된다</a:t>
+              <a:t>현재와 전환 후를 함께</a:t>
             </a:r>
           </a:p>
         </p:txBody>
@@ -12545,7 +12431,7 @@
                 </a:solidFill>
                 <a:latin typeface="맑은 고딕"/>
               </a:rPr>
-              <a:t>•  `import configuration from 'ch14_export.xml';`</a:t>
+              <a:t>•  용량 정보, 임시 파일 수, 온라인 이동 여부</a:t>
             </a:r>
           </a:p>
           <a:p>
@@ -12561,7 +12447,7 @@
                 </a:solidFill>
                 <a:latin typeface="맑은 고딕"/>
               </a:rPr>
-              <a:t>•  → **`ORA-16504: configuration already exists`**</a:t>
+              <a:t>•  적용·전송 정보, Gap Status</a:t>
             </a:r>
           </a:p>
           <a:p>
@@ -12577,7 +12463,7 @@
                 </a:solidFill>
                 <a:latin typeface="맑은 고딕"/>
               </a:rPr>
-              <a:t>•  덮어쓰기가 아니다 — 아예 받지 않는다</a:t>
+              <a:t>•  Current: 지금의 ORL과 상대 SRL 비교</a:t>
             </a:r>
           </a:p>
           <a:p>
@@ -12593,7 +12479,7 @@
                 </a:solidFill>
                 <a:latin typeface="맑은 고딕"/>
               </a:rPr>
-              <a:t>•  복구는 `REMOVE CONFIGURATION` → `IMPORT`</a:t>
+              <a:t>•  Future: 역할이 바뀐 뒤의 ORL과 SRL 비교</a:t>
             </a:r>
           </a:p>
           <a:p>
@@ -12609,7 +12495,7 @@
                 </a:solidFill>
                 <a:latin typeface="맑은 고딕"/>
               </a:rPr>
-              <a:t>•  그사이 **감시 공백 구간**이 생긴다</a:t>
+              <a:t>•  Primary에도 SRL이 필요한 이유</a:t>
             </a:r>
           </a:p>
         </p:txBody>
@@ -12710,7 +12596,7 @@
                 </a:solidFill>
                 <a:latin typeface="맑은 고딕"/>
               </a:rPr>
-              <a:t>구성 파일이 커진다</a:t>
+              <a:t>VALIDATE DATABASE SPFILE</a:t>
             </a:r>
           </a:p>
         </p:txBody>
@@ -12749,7 +12635,7 @@
                 </a:solidFill>
                 <a:latin typeface="맑은 고딕"/>
               </a:rPr>
-              <a:t>이력이 쌓인다</a:t>
+              <a:t>Primary와 Standby의 파라미터 차이</a:t>
             </a:r>
           </a:p>
         </p:txBody>
@@ -12788,7 +12674,7 @@
                 </a:solidFill>
                 <a:latin typeface="맑은 고딕"/>
               </a:rPr>
-              <a:t>•  13장 구성 직후 — **8,192** 바이트</a:t>
+              <a:t>•  값이 다른 파라미터만 나열</a:t>
             </a:r>
           </a:p>
           <a:p>
@@ -12804,7 +12690,7 @@
                 </a:solidFill>
                 <a:latin typeface="맑은 고딕"/>
               </a:rPr>
-              <a:t>•  14장 속성·FSFO 를 손본 뒤 — **12,288** 바이트</a:t>
+              <a:t>•  접속은 DGConnectIdentifier 사용</a:t>
             </a:r>
           </a:p>
           <a:p>
@@ -12820,7 +12706,7 @@
                 </a:solidFill>
                 <a:latin typeface="맑은 고딕"/>
               </a:rPr>
-              <a:t>•  기본값에서 벗어난 설정이 누적된다</a:t>
+              <a:t>•  전환 후 성능 차이를 미리 발견</a:t>
             </a:r>
           </a:p>
           <a:p>
@@ -12836,7 +12722,23 @@
                 </a:solidFill>
                 <a:latin typeface="맑은 고딕"/>
               </a:rPr>
-              <a:t>•  XML 을 정기적으로 남기고 `diff` 로 비교</a:t>
+              <a:t>•  원래 달라야 하는 항목도 섞여 나옴</a:t>
+            </a:r>
+          </a:p>
+          <a:p>
+            <a:pPr algn="l">
+              <a:spcAft>
+                <a:spcPts val="1000"/>
+              </a:spcAft>
+            </a:pPr>
+            <a:r>
+              <a:rPr sz="1700" b="0">
+                <a:solidFill>
+                  <a:srgbClr val="222222"/>
+                </a:solidFill>
+                <a:latin typeface="맑은 고딕"/>
+              </a:rPr>
+              <a:t>•  표기만 다른 항목도 보고됨</a:t>
             </a:r>
           </a:p>
         </p:txBody>
@@ -12868,7 +12770,7 @@
         <p:spPr>
           <a:xfrm>
             <a:off x="0" y="0"/>
-            <a:ext cx="12191695" cy="6858000"/>
+            <a:ext cx="12191695" cy="1005840"/>
           </a:xfrm>
           <a:prstGeom prst="rect">
             <a:avLst/>
@@ -12911,8 +12813,8 @@
         </p:nvSpPr>
         <p:spPr>
           <a:xfrm>
-            <a:off x="822960" y="2011680"/>
-            <a:ext cx="10515600" cy="1097280"/>
+            <a:off x="548640" y="91440"/>
+            <a:ext cx="10972800" cy="777240"/>
           </a:xfrm>
           <a:prstGeom prst="rect">
             <a:avLst/>
@@ -12931,13 +12833,13 @@
               </a:spcAft>
             </a:pPr>
             <a:r>
-              <a:rPr sz="4000" b="1">
+              <a:rPr sz="2600" b="1">
                 <a:solidFill>
                   <a:srgbClr val="FFFFFF"/>
                 </a:solidFill>
                 <a:latin typeface="맑은 고딕"/>
               </a:rPr>
-              <a:t>14.7</a:t>
+              <a:t>VALIDATE DATABASE DATAFILE</a:t>
             </a:r>
           </a:p>
         </p:txBody>
@@ -12950,8 +12852,8 @@
         </p:nvSpPr>
         <p:spPr>
           <a:xfrm>
-            <a:off x="822960" y="3017520"/>
-            <a:ext cx="10515600" cy="914400"/>
+            <a:off x="640080" y="1078992"/>
+            <a:ext cx="10881360" cy="457200"/>
           </a:xfrm>
           <a:prstGeom prst="rect">
             <a:avLst/>
@@ -12970,71 +12872,27 @@
               </a:spcAft>
             </a:pPr>
             <a:r>
-              <a:rPr sz="2800" b="1">
-                <a:solidFill>
-                  <a:srgbClr val="FFFFFF"/>
-                </a:solidFill>
-                <a:latin typeface="맑은 고딕"/>
-              </a:rPr>
-              <a:t>Fast-Start Failover</a:t>
-            </a:r>
-          </a:p>
-        </p:txBody>
-      </p:sp>
-      <p:sp>
-        <p:nvSpPr>
-          <p:cNvPr id="5" name="Rectangle 4"/>
-          <p:cNvSpPr/>
-          <p:nvPr/>
-        </p:nvSpPr>
-        <p:spPr>
-          <a:xfrm>
-            <a:off x="822960" y="4114800"/>
-            <a:ext cx="5486400" cy="54864"/>
-          </a:xfrm>
-          <a:prstGeom prst="rect">
-            <a:avLst/>
-          </a:prstGeom>
-          <a:solidFill>
-            <a:srgbClr val="FFFFFF"/>
-          </a:solidFill>
-          <a:ln>
-            <a:noFill/>
-          </a:ln>
-          <a:effectLst/>
-        </p:spPr>
-        <p:style>
-          <a:lnRef idx="1">
-            <a:schemeClr val="accent1"/>
-          </a:lnRef>
-          <a:fillRef idx="3">
-            <a:schemeClr val="accent1"/>
-          </a:fillRef>
-          <a:effectRef idx="2">
-            <a:schemeClr val="accent1"/>
-          </a:effectRef>
-          <a:fontRef idx="minor">
-            <a:schemeClr val="lt1"/>
-          </a:fontRef>
-        </p:style>
-        <p:txBody>
-          <a:bodyPr rtlCol="0" anchor="ctr"/>
-          <a:lstStyle/>
-          <a:p>
-            <a:pPr algn="ctr"/>
-          </a:p>
-        </p:txBody>
-      </p:sp>
-      <p:sp>
-        <p:nvSpPr>
-          <p:cNvPr id="6" name="TextBox 5"/>
+              <a:rPr sz="1500" b="0">
+                <a:solidFill>
+                  <a:srgbClr val="5A6672"/>
+                </a:solidFill>
+                <a:latin typeface="맑은 고딕"/>
+              </a:rPr>
+              <a:t>블록 단위 비교와 lost write</a:t>
+            </a:r>
+          </a:p>
+        </p:txBody>
+      </p:sp>
+      <p:sp>
+        <p:nvSpPr>
+          <p:cNvPr id="5" name="TextBox 4"/>
           <p:cNvSpPr txBox="1"/>
           <p:nvPr/>
         </p:nvSpPr>
         <p:spPr>
           <a:xfrm>
-            <a:off x="822960" y="4297680"/>
-            <a:ext cx="10058400" cy="2011680"/>
+            <a:off x="640080" y="1737360"/>
+            <a:ext cx="10881360" cy="4754880"/>
           </a:xfrm>
           <a:prstGeom prst="rect">
             <a:avLst/>
@@ -13049,49 +12907,81 @@
           <a:p>
             <a:pPr algn="l">
               <a:spcAft>
-                <a:spcPts val="800"/>
-              </a:spcAft>
-            </a:pPr>
-            <a:r>
-              <a:rPr sz="1600" b="0">
-                <a:solidFill>
-                  <a:srgbClr val="FFFFFF"/>
-                </a:solidFill>
-                <a:latin typeface="맑은 고딕"/>
-              </a:rPr>
-              <a:t>•  관측자가 필요한 이유</a:t>
-            </a:r>
-          </a:p>
-          <a:p>
-            <a:pPr algn="l">
-              <a:spcAft>
-                <a:spcPts val="800"/>
-              </a:spcAft>
-            </a:pPr>
-            <a:r>
-              <a:rPr sz="1600" b="0">
-                <a:solidFill>
-                  <a:srgbClr val="FFFFFF"/>
-                </a:solidFill>
-                <a:latin typeface="맑은 고딕"/>
-              </a:rPr>
-              <a:t>•  켜면 무엇이 달라지는가</a:t>
-            </a:r>
-          </a:p>
-          <a:p>
-            <a:pPr algn="l">
-              <a:spcAft>
-                <a:spcPts val="800"/>
-              </a:spcAft>
-            </a:pPr>
-            <a:r>
-              <a:rPr sz="1600" b="0">
-                <a:solidFill>
-                  <a:srgbClr val="FFFFFF"/>
-                </a:solidFill>
-                <a:latin typeface="맑은 고딕"/>
-              </a:rPr>
-              <a:t>•  끄는 순서</a:t>
+                <a:spcPts val="1000"/>
+              </a:spcAft>
+            </a:pPr>
+            <a:r>
+              <a:rPr sz="1700" b="0">
+                <a:solidFill>
+                  <a:srgbClr val="222222"/>
+                </a:solidFill>
+                <a:latin typeface="맑은 고딕"/>
+              </a:rPr>
+              <a:t>•  내부적으로 DBMS_DBCOMP 호출</a:t>
+            </a:r>
+          </a:p>
+          <a:p>
+            <a:pPr algn="l">
+              <a:spcAft>
+                <a:spcPts val="1000"/>
+              </a:spcAft>
+            </a:pPr>
+            <a:r>
+              <a:rPr sz="1700" b="0">
+                <a:solidFill>
+                  <a:srgbClr val="222222"/>
+                </a:solidFill>
+                <a:latin typeface="맑은 고딕"/>
+              </a:rPr>
+              <a:t>•  Primary나 ALL이면 모든 Standby와 비교</a:t>
+            </a:r>
+          </a:p>
+          <a:p>
+            <a:pPr algn="l">
+              <a:spcAft>
+                <a:spcPts val="1000"/>
+              </a:spcAft>
+            </a:pPr>
+            <a:r>
+              <a:rPr sz="1700" b="0">
+                <a:solidFill>
+                  <a:srgbClr val="222222"/>
+                </a:solidFill>
+                <a:latin typeface="맑은 고딕"/>
+              </a:rPr>
+              <a:t>•  OUTPUT 필수, 디렉터리 포함 시 DGM-17138</a:t>
+            </a:r>
+          </a:p>
+          <a:p>
+            <a:pPr algn="l">
+              <a:spcAft>
+                <a:spcPts val="1000"/>
+              </a:spcAft>
+            </a:pPr>
+            <a:r>
+              <a:rPr sz="1700" b="0">
+                <a:solidFill>
+                  <a:srgbClr val="222222"/>
+                </a:solidFill>
+                <a:latin typeface="맑은 고딕"/>
+              </a:rPr>
+              <a:t>•  결과는 대상 호스트의 trace 디렉터리</a:t>
+            </a:r>
+          </a:p>
+          <a:p>
+            <a:pPr algn="l">
+              <a:spcAft>
+                <a:spcPts val="1000"/>
+              </a:spcAft>
+            </a:pPr>
+            <a:r>
+              <a:rPr sz="1700" b="0">
+                <a:solidFill>
+                  <a:srgbClr val="222222"/>
+                </a:solidFill>
+                <a:latin typeface="맑은 고딕"/>
+              </a:rPr>
+              <a:t>•  시작 메시지만 내고 돌아온다</a:t>
             </a:r>
           </a:p>
         </p:txBody>
@@ -13192,7 +13082,7 @@
                 </a:solidFill>
                 <a:latin typeface="맑은 고딕"/>
               </a:rPr>
-              <a:t>FSFO 와 관측자</a:t>
+              <a:t>DATAFILE 결과 읽기</a:t>
             </a:r>
           </a:p>
         </p:txBody>
@@ -13231,7 +13121,7 @@
                 </a:solidFill>
                 <a:latin typeface="맑은 고딕"/>
               </a:rPr>
-              <a:t>왜 제3의 위치인가</a:t>
+              <a:t>0이어야 하는 열</a:t>
             </a:r>
           </a:p>
         </p:txBody>
@@ -13270,7 +13160,7 @@
                 </a:solidFill>
                 <a:latin typeface="맑은 고딕"/>
               </a:rPr>
-              <a:t>•  Primary 가 응답하지 않으면 자동으로 전환</a:t>
+              <a:t>•  SAMEV, SAMEV&amp;C: 같은 블록 쌍</a:t>
             </a:r>
           </a:p>
           <a:p>
@@ -13286,7 +13176,7 @@
                 </a:solidFill>
                 <a:latin typeface="맑은 고딕"/>
               </a:rPr>
-              <a:t>•  판단 주체 = **관측자(Observer)**</a:t>
+              <a:t>•  DIFFV: 적용 중이면 생길 수 있음</a:t>
             </a:r>
           </a:p>
           <a:p>
@@ -13302,7 +13192,7 @@
                 </a:solidFill>
                 <a:latin typeface="맑은 고딕"/>
               </a:rPr>
-              <a:t>•  Standby 가 스스로 판단하면 **split brain**</a:t>
+              <a:t>•  LWLOC, LWRMT: lost write, 0이어야 함</a:t>
             </a:r>
           </a:p>
           <a:p>
@@ -13318,7 +13208,7 @@
                 </a:solidFill>
                 <a:latin typeface="맑은 고딕"/>
               </a:rPr>
-              <a:t>•  관측자는 양쪽에 접속해 있어 구별할 수 있다</a:t>
+              <a:t>•  DIFFPAIR: 버전 같은데 내용 다름, 0이어야 함</a:t>
             </a:r>
           </a:p>
           <a:p>
@@ -13334,7 +13224,7 @@
                 </a:solidFill>
                 <a:latin typeface="맑은 고딕"/>
               </a:rPr>
-              <a:t>•  Primary·Standby 와 **다른 호스트**에 둔다</a:t>
+              <a:t>•  SKIPPED, ENCERR: 건너뛴 이유 확인</a:t>
             </a:r>
           </a:p>
         </p:txBody>
@@ -13435,7 +13325,7 @@
                 </a:solidFill>
                 <a:latin typeface="맑은 고딕"/>
               </a:rPr>
-              <a:t>관측자는 별개 프로세스</a:t>
+              <a:t>VALIDATE NETWORK CONFIGURATION</a:t>
             </a:r>
           </a:p>
         </p:txBody>
@@ -13474,7 +13364,7 @@
                 </a:solidFill>
                 <a:latin typeface="맑은 고딕"/>
               </a:rPr>
-              <a:t>구문이 말해 준다</a:t>
+              <a:t>구성원 사이 접속을 양방향으로</a:t>
             </a:r>
           </a:p>
         </p:txBody>
@@ -13513,7 +13403,7 @@
                 </a:solidFill>
                 <a:latin typeface="맑은 고딕"/>
               </a:rPr>
-              <a:t>•  `START OBSERVER ... IN BACKGROUND`</a:t>
+              <a:t>•  chicago에서 boston, boston에서 chicago</a:t>
             </a:r>
           </a:p>
           <a:p>
@@ -13529,7 +13419,7 @@
                 </a:solidFill>
                 <a:latin typeface="맑은 고딕"/>
               </a:rPr>
-              <a:t>•  `CONNECT IDENTIFIER IS &lt;connect identifier&gt;`</a:t>
+              <a:t>•  접속 문자열은 DGConnectIdentifier에서</a:t>
             </a:r>
           </a:p>
           <a:p>
@@ -13545,7 +13435,7 @@
                 </a:solidFill>
                 <a:latin typeface="맑은 고딕"/>
               </a:rPr>
-              <a:t>•  → **tnsnames 로 접속하는 클라이언트**</a:t>
+              <a:t>•  한 방향만 되는 경우를 잡는다</a:t>
             </a:r>
           </a:p>
           <a:p>
@@ -13561,7 +13451,7 @@
                 </a:solidFill>
                 <a:latin typeface="맑은 고딕"/>
               </a:rPr>
-              <a:t>•  `FILE IS &lt;observer file&gt;` — 상태를 파일에 남긴다</a:t>
+              <a:t>•  정적 접속 식별자 시험도 함께 수행</a:t>
             </a:r>
           </a:p>
           <a:p>
@@ -13577,7 +13467,7 @@
                 </a:solidFill>
                 <a:latin typeface="맑은 고딕"/>
               </a:rPr>
-              <a:t>•  DGMGRL 만 설치된 호스트에서 실행 가능</a:t>
+              <a:t>•  ALL 대신 구성원 이름으로 범위 지정</a:t>
             </a:r>
           </a:p>
         </p:txBody>
@@ -13678,7 +13568,7 @@
                 </a:solidFill>
                 <a:latin typeface="맑은 고딕"/>
               </a:rPr>
-              <a:t>전환 조건</a:t>
+              <a:t>VALIDATE STATIC CONNECT IDENTIFIER</a:t>
             </a:r>
           </a:p>
         </p:txBody>
@@ -13717,7 +13607,7 @@
                 </a:solidFill>
                 <a:latin typeface="맑은 고딕"/>
               </a:rPr>
-              <a:t>기본이 NO 인 둘</a:t>
+              <a:t>정적 서비스만으로 접속되는가</a:t>
             </a:r>
           </a:p>
         </p:txBody>
@@ -13756,7 +13646,7 @@
                 </a:solidFill>
                 <a:latin typeface="맑은 고딕"/>
               </a:rPr>
-              <a:t>•  `Corrupted Controlfile` YES</a:t>
+              <a:t>•  StaticConnectIdentifier 속성 값 사용</a:t>
             </a:r>
           </a:p>
           <a:p>
@@ -13772,7 +13662,7 @@
                 </a:solidFill>
                 <a:latin typeface="맑은 고딕"/>
               </a:rPr>
-              <a:t>•  `Corrupted Dictionary` YES</a:t>
+              <a:t>•  STATIC_SERVICE=TRUE를 붙여 새로 접속</a:t>
             </a:r>
           </a:p>
           <a:p>
@@ -13788,7 +13678,7 @@
                 </a:solidFill>
                 <a:latin typeface="맑은 고딕"/>
               </a:rPr>
-              <a:t>•  `Inaccessible Logfile` **NO**</a:t>
+              <a:t>•  동적 등록 서비스는 쓰지 않음</a:t>
             </a:r>
           </a:p>
           <a:p>
@@ -13804,7 +13694,7 @@
                 </a:solidFill>
                 <a:latin typeface="맑은 고딕"/>
               </a:rPr>
-              <a:t>•  `Stuck Archiver` **NO**</a:t>
+              <a:t>•  실패하면 ORA-12514와 Failed</a:t>
             </a:r>
           </a:p>
           <a:p>
@@ -13820,7 +13710,7 @@
                 </a:solidFill>
                 <a:latin typeface="맑은 고딕"/>
               </a:rPr>
-              <a:t>•  `Datafile Write Errors` YES</a:t>
+              <a:t>•  SHOW 상태 값에는 반영되지 않음</a:t>
             </a:r>
           </a:p>
         </p:txBody>
@@ -13921,7 +13811,7 @@
                 </a:solidFill>
                 <a:latin typeface="맑은 고딕"/>
               </a:rPr>
-              <a:t>오류 재현</a:t>
+              <a:t>VALIDATE FAR_SYNC</a:t>
             </a:r>
           </a:p>
         </p:txBody>
@@ -13960,7 +13850,7 @@
                 </a:solidFill>
                 <a:latin typeface="맑은 고딕"/>
               </a:rPr>
-              <a:t>전제 없이 켜면</a:t>
+              <a:t>Far Sync의 중계 준비</a:t>
             </a:r>
           </a:p>
         </p:txBody>
@@ -13999,7 +13889,7 @@
                 </a:solidFill>
                 <a:latin typeface="맑은 고딕"/>
               </a:rPr>
-              <a:t>•  `enable fast_start failover`</a:t>
+              <a:t>•  Far Sync가 받고 다시 보낼 준비가 됐는지</a:t>
             </a:r>
           </a:p>
           <a:p>
@@ -14015,7 +13905,7 @@
                 </a:solidFill>
                 <a:latin typeface="맑은 고딕"/>
               </a:rPr>
-              <a:t>•  → **`Warning: ORA-16827: Flashback Database is disabled`**</a:t>
+              <a:t>•  SRL 구성, 전송 대상 상태</a:t>
             </a:r>
           </a:p>
           <a:p>
@@ -14031,7 +13921,7 @@
                 </a:solidFill>
                 <a:latin typeface="맑은 고딕"/>
               </a:rPr>
-              <a:t>•  **Error 가 아니라 Warning. 그리고 켜졌다**</a:t>
+              <a:t>•  WHEN PRIMARY IS: 전환 후를 가정한 판정</a:t>
             </a:r>
           </a:p>
           <a:p>
@@ -14047,7 +13937,7 @@
                 </a:solidFill>
                 <a:latin typeface="맑은 고딕"/>
               </a:rPr>
-              <a:t>•  13장 보호 모드 변경은 ORA-16627 로 **거부**했다</a:t>
+              <a:t>•  RedoRoutes가 역할별로 다를 때 유용</a:t>
             </a:r>
           </a:p>
           <a:p>
@@ -14063,7 +13953,7 @@
                 </a:solidFill>
                 <a:latin typeface="맑은 고딕"/>
               </a:rPr>
-              <a:t>•  **검사 강도가 명령마다 다르다**</a:t>
+              <a:t>•  Far Sync 구성에서는 전환 전 점검 목록에</a:t>
             </a:r>
           </a:p>
         </p:txBody>
@@ -14095,7 +13985,7 @@
         <p:spPr>
           <a:xfrm>
             <a:off x="0" y="0"/>
-            <a:ext cx="12191695" cy="1005840"/>
+            <a:ext cx="12191695" cy="6858000"/>
           </a:xfrm>
           <a:prstGeom prst="rect">
             <a:avLst/>
@@ -14138,8 +14028,8 @@
         </p:nvSpPr>
         <p:spPr>
           <a:xfrm>
-            <a:off x="548640" y="91440"/>
-            <a:ext cx="10972800" cy="777240"/>
+            <a:off x="822960" y="2011680"/>
+            <a:ext cx="10515600" cy="1097280"/>
           </a:xfrm>
           <a:prstGeom prst="rect">
             <a:avLst/>
@@ -14158,13 +14048,13 @@
               </a:spcAft>
             </a:pPr>
             <a:r>
-              <a:rPr sz="2600" b="1">
+              <a:rPr sz="4000" b="1">
                 <a:solidFill>
                   <a:srgbClr val="FFFFFF"/>
                 </a:solidFill>
                 <a:latin typeface="맑은 고딕"/>
               </a:rPr>
-              <a:t>켜면 달라지는 화면</a:t>
+              <a:t>14.7</a:t>
             </a:r>
           </a:p>
         </p:txBody>
@@ -14177,8 +14067,8 @@
         </p:nvSpPr>
         <p:spPr>
           <a:xfrm>
-            <a:off x="640080" y="1078992"/>
-            <a:ext cx="10881360" cy="457200"/>
+            <a:off x="822960" y="3017520"/>
+            <a:ext cx="10515600" cy="914400"/>
           </a:xfrm>
           <a:prstGeom prst="rect">
             <a:avLst/>
@@ -14197,27 +14087,71 @@
               </a:spcAft>
             </a:pPr>
             <a:r>
-              <a:rPr sz="1500" b="0">
-                <a:solidFill>
-                  <a:srgbClr val="5A6672"/>
-                </a:solidFill>
-                <a:latin typeface="맑은 고딕"/>
-              </a:rPr>
-              <a:t>두 가지가 나타난다</a:t>
-            </a:r>
-          </a:p>
-        </p:txBody>
-      </p:sp>
-      <p:sp>
-        <p:nvSpPr>
-          <p:cNvPr id="5" name="TextBox 4"/>
+              <a:rPr sz="2800" b="1">
+                <a:solidFill>
+                  <a:srgbClr val="FFFFFF"/>
+                </a:solidFill>
+                <a:latin typeface="맑은 고딕"/>
+              </a:rPr>
+              <a:t>SHOW와 VALIDATE의 차이</a:t>
+            </a:r>
+          </a:p>
+        </p:txBody>
+      </p:sp>
+      <p:sp>
+        <p:nvSpPr>
+          <p:cNvPr id="5" name="Rectangle 4"/>
+          <p:cNvSpPr/>
+          <p:nvPr/>
+        </p:nvSpPr>
+        <p:spPr>
+          <a:xfrm>
+            <a:off x="822960" y="4114800"/>
+            <a:ext cx="5486400" cy="54864"/>
+          </a:xfrm>
+          <a:prstGeom prst="rect">
+            <a:avLst/>
+          </a:prstGeom>
+          <a:solidFill>
+            <a:srgbClr val="FFFFFF"/>
+          </a:solidFill>
+          <a:ln>
+            <a:noFill/>
+          </a:ln>
+          <a:effectLst/>
+        </p:spPr>
+        <p:style>
+          <a:lnRef idx="1">
+            <a:schemeClr val="accent1"/>
+          </a:lnRef>
+          <a:fillRef idx="3">
+            <a:schemeClr val="accent1"/>
+          </a:fillRef>
+          <a:effectRef idx="2">
+            <a:schemeClr val="accent1"/>
+          </a:effectRef>
+          <a:fontRef idx="minor">
+            <a:schemeClr val="lt1"/>
+          </a:fontRef>
+        </p:style>
+        <p:txBody>
+          <a:bodyPr rtlCol="0" anchor="ctr"/>
+          <a:lstStyle/>
+          <a:p>
+            <a:pPr algn="ctr"/>
+          </a:p>
+        </p:txBody>
+      </p:sp>
+      <p:sp>
+        <p:nvSpPr>
+          <p:cNvPr id="6" name="TextBox 5"/>
           <p:cNvSpPr txBox="1"/>
           <p:nvPr/>
         </p:nvSpPr>
         <p:spPr>
           <a:xfrm>
-            <a:off x="640080" y="1737360"/>
-            <a:ext cx="10881360" cy="4754880"/>
+            <a:off x="822960" y="4297680"/>
+            <a:ext cx="10058400" cy="2011680"/>
           </a:xfrm>
           <a:prstGeom prst="rect">
             <a:avLst/>
@@ -14232,81 +14166,49 @@
           <a:p>
             <a:pPr algn="l">
               <a:spcAft>
-                <a:spcPts val="1000"/>
-              </a:spcAft>
-            </a:pPr>
-            <a:r>
-              <a:rPr sz="1700" b="0">
-                <a:solidFill>
-                  <a:srgbClr val="222222"/>
-                </a:solidFill>
-                <a:latin typeface="맑은 고딕"/>
-              </a:rPr>
-              <a:t>•  `boston  - (*) Physical standby database`</a:t>
-            </a:r>
-          </a:p>
-          <a:p>
-            <a:pPr algn="l">
-              <a:spcAft>
-                <a:spcPts val="1000"/>
-              </a:spcAft>
-            </a:pPr>
-            <a:r>
-              <a:rPr sz="1700" b="0">
-                <a:solidFill>
-                  <a:srgbClr val="222222"/>
-                </a:solidFill>
-                <a:latin typeface="맑은 고딕"/>
-              </a:rPr>
-              <a:t>•  `(*) Fast-Start Failover target` — 범례까지 붙는다</a:t>
-            </a:r>
-          </a:p>
-          <a:p>
-            <a:pPr algn="l">
-              <a:spcAft>
-                <a:spcPts val="1000"/>
-              </a:spcAft>
-            </a:pPr>
-            <a:r>
-              <a:rPr sz="1700" b="0">
-                <a:solidFill>
-                  <a:srgbClr val="222222"/>
-                </a:solidFill>
-                <a:latin typeface="맑은 고딕"/>
-              </a:rPr>
-              <a:t>•  `Warning: ORA-16819: observer not started`</a:t>
-            </a:r>
-          </a:p>
-          <a:p>
-            <a:pPr algn="l">
-              <a:spcAft>
-                <a:spcPts val="1000"/>
-              </a:spcAft>
-            </a:pPr>
-            <a:r>
-              <a:rPr sz="1700" b="0">
-                <a:solidFill>
-                  <a:srgbClr val="222222"/>
-                </a:solidFill>
-                <a:latin typeface="맑은 고딕"/>
-              </a:rPr>
-              <a:t>•  `Enabled in Potential Data Loss Mode`</a:t>
-            </a:r>
-          </a:p>
-          <a:p>
-            <a:pPr algn="l">
-              <a:spcAft>
-                <a:spcPts val="1000"/>
-              </a:spcAft>
-            </a:pPr>
-            <a:r>
-              <a:rPr sz="1700" b="0">
-                <a:solidFill>
-                  <a:srgbClr val="222222"/>
-                </a:solidFill>
-                <a:latin typeface="맑은 고딕"/>
-              </a:rPr>
-              <a:t>•  Configuration Status: **WARNING**</a:t>
+                <a:spcPts val="800"/>
+              </a:spcAft>
+            </a:pPr>
+            <a:r>
+              <a:rPr sz="1600" b="0">
+                <a:solidFill>
+                  <a:srgbClr val="FFFFFF"/>
+                </a:solidFill>
+                <a:latin typeface="맑은 고딕"/>
+              </a:rPr>
+              <a:t>•  의도대로인가, 넘길 수 있는가</a:t>
+            </a:r>
+          </a:p>
+          <a:p>
+            <a:pPr algn="l">
+              <a:spcAft>
+                <a:spcPts val="800"/>
+              </a:spcAft>
+            </a:pPr>
+            <a:r>
+              <a:rPr sz="1600" b="0">
+                <a:solidFill>
+                  <a:srgbClr val="FFFFFF"/>
+                </a:solidFill>
+                <a:latin typeface="맑은 고딕"/>
+              </a:rPr>
+              <a:t>•  저장된 결과와 새 검사</a:t>
+            </a:r>
+          </a:p>
+          <a:p>
+            <a:pPr algn="l">
+              <a:spcAft>
+                <a:spcPts val="800"/>
+              </a:spcAft>
+            </a:pPr>
+            <a:r>
+              <a:rPr sz="1600" b="0">
+                <a:solidFill>
+                  <a:srgbClr val="FFFFFF"/>
+                </a:solidFill>
+                <a:latin typeface="맑은 고딕"/>
+              </a:rPr>
+              <a:t>•  감시용과 점검용으로 나눠 쓴다</a:t>
             </a:r>
           </a:p>
         </p:txBody>
@@ -14446,7 +14348,7 @@
                 </a:solidFill>
                 <a:latin typeface="맑은 고딕"/>
               </a:rPr>
-              <a:t>SHOW 와 VALIDATE</a:t>
+              <a:t>Broker 모니터링의 원리</a:t>
             </a:r>
           </a:p>
         </p:txBody>
@@ -14529,7 +14431,7 @@
                 </a:solidFill>
                 <a:latin typeface="맑은 고딕"/>
               </a:rPr>
-              <a:t>•  다른 질문에 답한다</a:t>
+              <a:t>•  DMON이 상태를 모으는 방식</a:t>
             </a:r>
           </a:p>
           <a:p>
@@ -14545,7 +14447,7 @@
                 </a:solidFill>
                 <a:latin typeface="맑은 고딕"/>
               </a:rPr>
-              <a:t>•  실측 — 전송을 끊어 본다</a:t>
+              <a:t>•  상태 값과 집계 규칙</a:t>
             </a:r>
           </a:p>
           <a:p>
@@ -14561,7 +14463,7 @@
                 </a:solidFill>
                 <a:latin typeface="맑은 고딕"/>
               </a:rPr>
-              <a:t>•  VALIDATE 가 읽어 주는 것</a:t>
+              <a:t>•  ORA-166xx 코드 읽는 법</a:t>
             </a:r>
           </a:p>
         </p:txBody>
@@ -14662,7 +14564,7 @@
                 </a:solidFill>
                 <a:latin typeface="맑은 고딕"/>
               </a:rPr>
-              <a:t>오류 재현</a:t>
+              <a:t>두 명령이 묻는 질문</a:t>
             </a:r>
           </a:p>
         </p:txBody>
@@ -14701,7 +14603,7 @@
                 </a:solidFill>
                 <a:latin typeface="맑은 고딕"/>
               </a:rPr>
-              <a:t>대상만 지우면</a:t>
+              <a:t>기준이 다르다</a:t>
             </a:r>
           </a:p>
         </p:txBody>
@@ -14740,7 +14642,7 @@
                 </a:solidFill>
                 <a:latin typeface="맑은 고딕"/>
               </a:rPr>
-              <a:t>•  `set property 'FastStartFailoverTarget'=''` 양쪽</a:t>
+              <a:t>•  SHOW: 의도대로 동작하는가</a:t>
             </a:r>
           </a:p>
           <a:p>
@@ -14756,7 +14658,7 @@
                 </a:solidFill>
                 <a:latin typeface="맑은 고딕"/>
               </a:rPr>
-              <a:t>•  `Fast-Start Failover:` **여전히 Enabled**</a:t>
+              <a:t>•  VALIDATE: 지정한 작업을 지금 할 수 있는가</a:t>
             </a:r>
           </a:p>
           <a:p>
@@ -14772,7 +14674,7 @@
                 </a:solidFill>
                 <a:latin typeface="맑은 고딕"/>
               </a:rPr>
-              <a:t>•  `Potential Targets: (none)` 인데 `Active Target: boston`</a:t>
+              <a:t>•  SHOW: 저장된 점검 결과, 가벼움</a:t>
             </a:r>
           </a:p>
           <a:p>
@@ -14788,7 +14690,7 @@
                 </a:solidFill>
                 <a:latin typeface="맑은 고딕"/>
               </a:rPr>
-              <a:t>•  기능은 켜져 있고 설정만 반쯤 지워진 **중간 상태**</a:t>
+              <a:t>•  VALIDATE: 명령 시점에 접속해 새로 검사</a:t>
             </a:r>
           </a:p>
           <a:p>
@@ -14804,7 +14706,7 @@
                 </a:solidFill>
                 <a:latin typeface="맑은 고딕"/>
               </a:rPr>
-              <a:t>•  속성을 지웠으니 껐다고 착각하기 쉽다</a:t>
+              <a:t>•  SHOW는 짧은 주기 감시, VALIDATE는 정기 점검</a:t>
             </a:r>
           </a:p>
         </p:txBody>
@@ -14905,7 +14807,7 @@
                 </a:solidFill>
                 <a:latin typeface="맑은 고딕"/>
               </a:rPr>
-              <a:t>끄는 순서</a:t>
+              <a:t>전송을 꺼 둔 채 잊은 Standby</a:t>
             </a:r>
           </a:p>
         </p:txBody>
@@ -14944,7 +14846,7 @@
                 </a:solidFill>
                 <a:latin typeface="맑은 고딕"/>
               </a:rPr>
-              <a:t>DISABLE 이 먼저</a:t>
+              <a:t>SHOW는 조용했다</a:t>
             </a:r>
           </a:p>
         </p:txBody>
@@ -14983,7 +14885,7 @@
                 </a:solidFill>
                 <a:latin typeface="맑은 고딕"/>
               </a:rPr>
-              <a:t>•  `disable fast_start failover`</a:t>
+              <a:t>•  점검 중 LogShipping=OFF, 원복 누락</a:t>
             </a:r>
           </a:p>
           <a:p>
@@ -14999,7 +14901,7 @@
                 </a:solidFill>
                 <a:latin typeface="맑은 고딕"/>
               </a:rPr>
-              <a:t>•  → `Fast-Start Failover: Disabled`, `Active Target: (none)`</a:t>
+              <a:t>•  SHOW CONFIGURATION: 계속 SUCCESS</a:t>
             </a:r>
           </a:p>
           <a:p>
@@ -15015,7 +14917,7 @@
                 </a:solidFill>
                 <a:latin typeface="맑은 고딕"/>
               </a:rPr>
-              <a:t>•  그다음 대상 속성을 지운다</a:t>
+              <a:t>•  지연 지표도 한동안 0에 가깝게 보임</a:t>
             </a:r>
           </a:p>
           <a:p>
@@ -15031,7 +14933,7 @@
                 </a:solidFill>
                 <a:latin typeface="맑은 고딕"/>
               </a:rPr>
-              <a:t>•  반대로 하면 중간 상태를 거친다</a:t>
+              <a:t>•  VALIDATE: Ready for Switchover No와 이유</a:t>
             </a:r>
           </a:p>
           <a:p>
@@ -15047,7 +14949,7 @@
                 </a:solidFill>
                 <a:latin typeface="맑은 고딕"/>
               </a:rPr>
-              <a:t>•  `OBSERVE ONLY` 로 먼저 관찰한 뒤 켜는 것이 안전</a:t>
+              <a:t>•  ON으로 되돌리자 갭 해소, 손실 없음</a:t>
             </a:r>
           </a:p>
         </p:txBody>
@@ -15079,7 +14981,7 @@
         <p:spPr>
           <a:xfrm>
             <a:off x="0" y="0"/>
-            <a:ext cx="12191695" cy="1005840"/>
+            <a:ext cx="12191695" cy="6858000"/>
           </a:xfrm>
           <a:prstGeom prst="rect">
             <a:avLst/>
@@ -15122,8 +15024,8 @@
         </p:nvSpPr>
         <p:spPr>
           <a:xfrm>
-            <a:off x="548640" y="91440"/>
-            <a:ext cx="10972800" cy="777240"/>
+            <a:off x="822960" y="2011680"/>
+            <a:ext cx="10515600" cy="1097280"/>
           </a:xfrm>
           <a:prstGeom prst="rect">
             <a:avLst/>
@@ -15142,13 +15044,13 @@
               </a:spcAft>
             </a:pPr>
             <a:r>
-              <a:rPr sz="2600" b="1">
+              <a:rPr sz="4000" b="1">
                 <a:solidFill>
                   <a:srgbClr val="FFFFFF"/>
                 </a:solidFill>
                 <a:latin typeface="맑은 고딕"/>
               </a:rPr>
-              <a:t>상태 갱신의 시차</a:t>
+              <a:t>14.8</a:t>
             </a:r>
           </a:p>
         </p:txBody>
@@ -15161,8 +15063,8 @@
         </p:nvSpPr>
         <p:spPr>
           <a:xfrm>
-            <a:off x="640080" y="1078992"/>
-            <a:ext cx="10881360" cy="457200"/>
+            <a:off x="822960" y="3017520"/>
+            <a:ext cx="10515600" cy="914400"/>
           </a:xfrm>
           <a:prstGeom prst="rect">
             <a:avLst/>
@@ -15181,27 +15083,71 @@
               </a:spcAft>
             </a:pPr>
             <a:r>
-              <a:rPr sz="1500" b="0">
-                <a:solidFill>
-                  <a:srgbClr val="5A6672"/>
-                </a:solidFill>
-                <a:latin typeface="맑은 고딕"/>
-              </a:rPr>
-              <a:t>한 번 보고 판단하지 않는다</a:t>
-            </a:r>
-          </a:p>
-        </p:txBody>
-      </p:sp>
-      <p:sp>
-        <p:nvSpPr>
-          <p:cNvPr id="5" name="TextBox 4"/>
+              <a:rPr sz="2800" b="1">
+                <a:solidFill>
+                  <a:srgbClr val="FFFFFF"/>
+                </a:solidFill>
+                <a:latin typeface="맑은 고딕"/>
+              </a:rPr>
+              <a:t>구성 내보내기와 가져오기</a:t>
+            </a:r>
+          </a:p>
+        </p:txBody>
+      </p:sp>
+      <p:sp>
+        <p:nvSpPr>
+          <p:cNvPr id="5" name="Rectangle 4"/>
+          <p:cNvSpPr/>
+          <p:nvPr/>
+        </p:nvSpPr>
+        <p:spPr>
+          <a:xfrm>
+            <a:off x="822960" y="4114800"/>
+            <a:ext cx="5486400" cy="54864"/>
+          </a:xfrm>
+          <a:prstGeom prst="rect">
+            <a:avLst/>
+          </a:prstGeom>
+          <a:solidFill>
+            <a:srgbClr val="FFFFFF"/>
+          </a:solidFill>
+          <a:ln>
+            <a:noFill/>
+          </a:ln>
+          <a:effectLst/>
+        </p:spPr>
+        <p:style>
+          <a:lnRef idx="1">
+            <a:schemeClr val="accent1"/>
+          </a:lnRef>
+          <a:fillRef idx="3">
+            <a:schemeClr val="accent1"/>
+          </a:fillRef>
+          <a:effectRef idx="2">
+            <a:schemeClr val="accent1"/>
+          </a:effectRef>
+          <a:fontRef idx="minor">
+            <a:schemeClr val="lt1"/>
+          </a:fontRef>
+        </p:style>
+        <p:txBody>
+          <a:bodyPr rtlCol="0" anchor="ctr"/>
+          <a:lstStyle/>
+          <a:p>
+            <a:pPr algn="ctr"/>
+          </a:p>
+        </p:txBody>
+      </p:sp>
+      <p:sp>
+        <p:nvSpPr>
+          <p:cNvPr id="6" name="TextBox 5"/>
           <p:cNvSpPr txBox="1"/>
           <p:nvPr/>
         </p:nvSpPr>
         <p:spPr>
           <a:xfrm>
-            <a:off x="640080" y="1737360"/>
-            <a:ext cx="10881360" cy="4754880"/>
+            <a:off x="822960" y="4297680"/>
+            <a:ext cx="10058400" cy="2011680"/>
           </a:xfrm>
           <a:prstGeom prst="rect">
             <a:avLst/>
@@ -15216,65 +15162,49 @@
           <a:p>
             <a:pPr algn="l">
               <a:spcAft>
-                <a:spcPts val="1000"/>
-              </a:spcAft>
-            </a:pPr>
-            <a:r>
-              <a:rPr sz="1700" b="0">
-                <a:solidFill>
-                  <a:srgbClr val="222222"/>
-                </a:solidFill>
-                <a:latin typeface="맑은 고딕"/>
-              </a:rPr>
-              <a:t>•  `DISABLE` 직후에도 ORA-16819 가 남아 있었다</a:t>
-            </a:r>
-          </a:p>
-          <a:p>
-            <a:pPr algn="l">
-              <a:spcAft>
-                <a:spcPts val="1000"/>
-              </a:spcAft>
-            </a:pPr>
-            <a:r>
-              <a:rPr sz="1700" b="0">
-                <a:solidFill>
-                  <a:srgbClr val="222222"/>
-                </a:solidFill>
-                <a:latin typeface="맑은 고딕"/>
-              </a:rPr>
-              <a:t>•  잠시 후 다시 조회 → `SUCCESS`</a:t>
-            </a:r>
-          </a:p>
-          <a:p>
-            <a:pPr algn="l">
-              <a:spcAft>
-                <a:spcPts val="1000"/>
-              </a:spcAft>
-            </a:pPr>
-            <a:r>
-              <a:rPr sz="1700" b="0">
-                <a:solidFill>
-                  <a:srgbClr val="222222"/>
-                </a:solidFill>
-                <a:latin typeface="맑은 고딕"/>
-              </a:rPr>
-              <a:t>•  `status updated NN seconds ago` 의 **초를 함께 읽는다**</a:t>
-            </a:r>
-          </a:p>
-          <a:p>
-            <a:pPr algn="l">
-              <a:spcAft>
-                <a:spcPts val="1000"/>
-              </a:spcAft>
-            </a:pPr>
-            <a:r>
-              <a:rPr sz="1700" b="0">
-                <a:solidFill>
-                  <a:srgbClr val="222222"/>
-                </a:solidFill>
-                <a:latin typeface="맑은 고딕"/>
-              </a:rPr>
-              <a:t>•  Broker 의 판정은 주기적으로 다시 계산된다</a:t>
+                <a:spcPts val="800"/>
+              </a:spcAft>
+            </a:pPr>
+            <a:r>
+              <a:rPr sz="1600" b="0">
+                <a:solidFill>
+                  <a:srgbClr val="FFFFFF"/>
+                </a:solidFill>
+                <a:latin typeface="맑은 고딕"/>
+              </a:rPr>
+              <a:t>•  구성 메타데이터를 XML로</a:t>
+            </a:r>
+          </a:p>
+          <a:p>
+            <a:pPr algn="l">
+              <a:spcAft>
+                <a:spcPts val="800"/>
+              </a:spcAft>
+            </a:pPr>
+            <a:r>
+              <a:rPr sz="1600" b="0">
+                <a:solidFill>
+                  <a:srgbClr val="FFFFFF"/>
+                </a:solidFill>
+                <a:latin typeface="맑은 고딕"/>
+              </a:rPr>
+              <a:t>•  위치는 trace 디렉터리 고정</a:t>
+            </a:r>
+          </a:p>
+          <a:p>
+            <a:pPr algn="l">
+              <a:spcAft>
+                <a:spcPts val="800"/>
+              </a:spcAft>
+            </a:pPr>
+            <a:r>
+              <a:rPr sz="1600" b="0">
+                <a:solidFill>
+                  <a:srgbClr val="FFFFFF"/>
+                </a:solidFill>
+                <a:latin typeface="맑은 고딕"/>
+              </a:rPr>
+              <a:t>•  가져오기는 구성이 없을 때만</a:t>
             </a:r>
           </a:p>
         </p:txBody>
@@ -15306,7 +15236,7 @@
         <p:spPr>
           <a:xfrm>
             <a:off x="0" y="0"/>
-            <a:ext cx="12191695" cy="6858000"/>
+            <a:ext cx="12191695" cy="1005840"/>
           </a:xfrm>
           <a:prstGeom prst="rect">
             <a:avLst/>
@@ -15349,8 +15279,8 @@
         </p:nvSpPr>
         <p:spPr>
           <a:xfrm>
-            <a:off x="822960" y="2011680"/>
-            <a:ext cx="10515600" cy="1097280"/>
+            <a:off x="548640" y="91440"/>
+            <a:ext cx="10972800" cy="777240"/>
           </a:xfrm>
           <a:prstGeom prst="rect">
             <a:avLst/>
@@ -15369,13 +15299,13 @@
               </a:spcAft>
             </a:pPr>
             <a:r>
-              <a:rPr sz="4000" b="1">
+              <a:rPr sz="2600" b="1">
                 <a:solidFill>
                   <a:srgbClr val="FFFFFF"/>
                 </a:solidFill>
                 <a:latin typeface="맑은 고딕"/>
               </a:rPr>
-              <a:t>14.8</a:t>
+              <a:t>EXPORT CONFIGURATION</a:t>
             </a:r>
           </a:p>
         </p:txBody>
@@ -15388,8 +15318,8 @@
         </p:nvSpPr>
         <p:spPr>
           <a:xfrm>
-            <a:off x="822960" y="3017520"/>
-            <a:ext cx="10515600" cy="914400"/>
+            <a:off x="640080" y="1078992"/>
+            <a:ext cx="10881360" cy="457200"/>
           </a:xfrm>
           <a:prstGeom prst="rect">
             <a:avLst/>
@@ -15408,71 +15338,27 @@
               </a:spcAft>
             </a:pPr>
             <a:r>
-              <a:rPr sz="2800" b="1">
-                <a:solidFill>
-                  <a:srgbClr val="FFFFFF"/>
-                </a:solidFill>
-                <a:latin typeface="맑은 고딕"/>
-              </a:rPr>
-              <a:t>감시 체계를 어떻게 짤 것인가</a:t>
-            </a:r>
-          </a:p>
-        </p:txBody>
-      </p:sp>
-      <p:sp>
-        <p:nvSpPr>
-          <p:cNvPr id="5" name="Rectangle 4"/>
-          <p:cNvSpPr/>
-          <p:nvPr/>
-        </p:nvSpPr>
-        <p:spPr>
-          <a:xfrm>
-            <a:off x="822960" y="4114800"/>
-            <a:ext cx="5486400" cy="54864"/>
-          </a:xfrm>
-          <a:prstGeom prst="rect">
-            <a:avLst/>
-          </a:prstGeom>
-          <a:solidFill>
-            <a:srgbClr val="FFFFFF"/>
-          </a:solidFill>
-          <a:ln>
-            <a:noFill/>
-          </a:ln>
-          <a:effectLst/>
-        </p:spPr>
-        <p:style>
-          <a:lnRef idx="1">
-            <a:schemeClr val="accent1"/>
-          </a:lnRef>
-          <a:fillRef idx="3">
-            <a:schemeClr val="accent1"/>
-          </a:fillRef>
-          <a:effectRef idx="2">
-            <a:schemeClr val="accent1"/>
-          </a:effectRef>
-          <a:fontRef idx="minor">
-            <a:schemeClr val="lt1"/>
-          </a:fontRef>
-        </p:style>
-        <p:txBody>
-          <a:bodyPr rtlCol="0" anchor="ctr"/>
-          <a:lstStyle/>
-          <a:p>
-            <a:pPr algn="ctr"/>
-          </a:p>
-        </p:txBody>
-      </p:sp>
-      <p:sp>
-        <p:nvSpPr>
-          <p:cNvPr id="6" name="TextBox 5"/>
+              <a:rPr sz="1500" b="0">
+                <a:solidFill>
+                  <a:srgbClr val="5A6672"/>
+                </a:solidFill>
+                <a:latin typeface="맑은 고딕"/>
+              </a:rPr>
+              <a:t>읽을 수 있는 구성 기록</a:t>
+            </a:r>
+          </a:p>
+        </p:txBody>
+      </p:sp>
+      <p:sp>
+        <p:nvSpPr>
+          <p:cNvPr id="5" name="TextBox 4"/>
           <p:cNvSpPr txBox="1"/>
           <p:nvPr/>
         </p:nvSpPr>
         <p:spPr>
           <a:xfrm>
-            <a:off x="822960" y="4297680"/>
-            <a:ext cx="10058400" cy="2011680"/>
+            <a:off x="640080" y="1737360"/>
+            <a:ext cx="10881360" cy="4754880"/>
           </a:xfrm>
           <a:prstGeom prst="rect">
             <a:avLst/>
@@ -15487,33 +15373,81 @@
           <a:p>
             <a:pPr algn="l">
               <a:spcAft>
-                <a:spcPts val="800"/>
-              </a:spcAft>
-            </a:pPr>
-            <a:r>
-              <a:rPr sz="1600" b="0">
-                <a:solidFill>
-                  <a:srgbClr val="FFFFFF"/>
-                </a:solidFill>
-                <a:latin typeface="맑은 고딕"/>
-              </a:rPr>
-              <a:t>•  다섯 층</a:t>
-            </a:r>
-          </a:p>
-          <a:p>
-            <a:pPr algn="l">
-              <a:spcAft>
-                <a:spcPts val="800"/>
-              </a:spcAft>
-            </a:pPr>
-            <a:r>
-              <a:rPr sz="1600" b="0">
-                <a:solidFill>
-                  <a:srgbClr val="FFFFFF"/>
-                </a:solidFill>
-                <a:latin typeface="맑은 고딕"/>
-              </a:rPr>
-              <a:t>•  가장 흔한 실수</a:t>
+                <a:spcPts val="1000"/>
+              </a:spcAft>
+            </a:pPr>
+            <a:r>
+              <a:rPr sz="1700" b="0">
+                <a:solidFill>
+                  <a:srgbClr val="222222"/>
+                </a:solidFill>
+                <a:latin typeface="맑은 고딕"/>
+              </a:rPr>
+              <a:t>•  이진 구성 파일 내용을 XML로 내보냄</a:t>
+            </a:r>
+          </a:p>
+          <a:p>
+            <a:pPr algn="l">
+              <a:spcAft>
+                <a:spcPts val="1000"/>
+              </a:spcAft>
+            </a:pPr>
+            <a:r>
+              <a:rPr sz="1700" b="0">
+                <a:solidFill>
+                  <a:srgbClr val="222222"/>
+                </a:solidFill>
+                <a:latin typeface="맑은 고딕"/>
+              </a:rPr>
+              <a:t>•  위치는 trace 디렉터리, 경로 지정 시 ORA-16540</a:t>
+            </a:r>
+          </a:p>
+          <a:p>
+            <a:pPr algn="l">
+              <a:spcAft>
+                <a:spcPts val="1000"/>
+              </a:spcAft>
+            </a:pPr>
+            <a:r>
+              <a:rPr sz="1700" b="0">
+                <a:solidFill>
+                  <a:srgbClr val="222222"/>
+                </a:solidFill>
+                <a:latin typeface="맑은 고딕"/>
+              </a:rPr>
+              <a:t>•  TO 생략 시 SID_dmon_번호_brkmeta_n.trc</a:t>
+            </a:r>
+          </a:p>
+          <a:p>
+            <a:pPr algn="l">
+              <a:spcAft>
+                <a:spcPts val="1000"/>
+              </a:spcAft>
+            </a:pPr>
+            <a:r>
+              <a:rPr sz="1700" b="0">
+                <a:solidFill>
+                  <a:srgbClr val="222222"/>
+                </a:solidFill>
+                <a:latin typeface="맑은 고딕"/>
+              </a:rPr>
+              <a:t>•  Default="True"로 손댄 속성 구별</a:t>
+            </a:r>
+          </a:p>
+          <a:p>
+            <a:pPr algn="l">
+              <a:spcAft>
+                <a:spcPts val="1000"/>
+              </a:spcAft>
+            </a:pPr>
+            <a:r>
+              <a:rPr sz="1700" b="0">
+                <a:solidFill>
+                  <a:srgbClr val="222222"/>
+                </a:solidFill>
+                <a:latin typeface="맑은 고딕"/>
+              </a:rPr>
+              <a:t>•  정기 내보내기와 diff로 변경 이력 관리</a:t>
             </a:r>
           </a:p>
         </p:txBody>
@@ -15614,7 +15548,7 @@
                 </a:solidFill>
                 <a:latin typeface="맑은 고딕"/>
               </a:rPr>
-              <a:t>감시의 다섯 층</a:t>
+              <a:t>IMPORT CONFIGURATION</a:t>
             </a:r>
           </a:p>
         </p:txBody>
@@ -15653,7 +15587,7 @@
                 </a:solidFill>
                 <a:latin typeface="맑은 고딕"/>
               </a:rPr>
-              <a:t>무엇을 얼마나 자주</a:t>
+              <a:t>덮어쓰지 않는 가져오기</a:t>
             </a:r>
           </a:p>
         </p:txBody>
@@ -15692,7 +15626,7 @@
                 </a:solidFill>
                 <a:latin typeface="맑은 고딕"/>
               </a:rPr>
-              <a:t>•  1층 `SHOW CONFIGURATION` — 분 단위. 설정과 다른 상태</a:t>
+              <a:t>•  trace 디렉터리의 파일을 읽어 구성 파일에 기록</a:t>
             </a:r>
           </a:p>
           <a:p>
@@ -15708,7 +15642,7 @@
                 </a:solidFill>
                 <a:latin typeface="맑은 고딕"/>
               </a:rPr>
-              <a:t>•  2층 `V$DATAGUARD_STATS` — 분 단위. 지연 추세</a:t>
+              <a:t>•  구성이 있으면 ORA-16504로 거부</a:t>
             </a:r>
           </a:p>
           <a:p>
@@ -15724,7 +15658,7 @@
                 </a:solidFill>
                 <a:latin typeface="맑은 고딕"/>
               </a:rPr>
-              <a:t>•  3층 `V$DATAGUARD_STATUS` — 필요시. 사건의 흐름</a:t>
+              <a:t>•  대표 용도: 다운그레이드 후 구성 복원</a:t>
             </a:r>
           </a:p>
           <a:p>
@@ -15740,7 +15674,7 @@
                 </a:solidFill>
                 <a:latin typeface="맑은 고딕"/>
               </a:rPr>
-              <a:t>•  4층 `VALIDATE DATABASE` — 일·주 단위. **전환 가능 여부**</a:t>
+              <a:t>•  구성 파일 손상 시 REMOVE 후 IMPORT</a:t>
             </a:r>
           </a:p>
           <a:p>
@@ -15756,7 +15690,7 @@
                 </a:solidFill>
                 <a:latin typeface="맑은 고딕"/>
               </a:rPr>
-              <a:t>•  5층 알림 로그 — 문제 발생 시. **근본 원인**</a:t>
+              <a:t>•  REMOVE부터 IMPORT까지 감시 공백</a:t>
             </a:r>
           </a:p>
         </p:txBody>
@@ -15788,7 +15722,7 @@
         <p:spPr>
           <a:xfrm>
             <a:off x="0" y="0"/>
-            <a:ext cx="12191695" cy="1005840"/>
+            <a:ext cx="12191695" cy="6858000"/>
           </a:xfrm>
           <a:prstGeom prst="rect">
             <a:avLst/>
@@ -15831,8 +15765,8 @@
         </p:nvSpPr>
         <p:spPr>
           <a:xfrm>
-            <a:off x="548640" y="91440"/>
-            <a:ext cx="10972800" cy="777240"/>
+            <a:off x="822960" y="2011680"/>
+            <a:ext cx="10515600" cy="1097280"/>
           </a:xfrm>
           <a:prstGeom prst="rect">
             <a:avLst/>
@@ -15851,13 +15785,13 @@
               </a:spcAft>
             </a:pPr>
             <a:r>
-              <a:rPr sz="2600" b="1">
+              <a:rPr sz="4000" b="1">
                 <a:solidFill>
                   <a:srgbClr val="FFFFFF"/>
                 </a:solidFill>
                 <a:latin typeface="맑은 고딕"/>
               </a:rPr>
-              <a:t>가장 흔한 실수</a:t>
+              <a:t>14.9</a:t>
             </a:r>
           </a:p>
         </p:txBody>
@@ -15870,8 +15804,8 @@
         </p:nvSpPr>
         <p:spPr>
           <a:xfrm>
-            <a:off x="640080" y="1078992"/>
-            <a:ext cx="10881360" cy="457200"/>
+            <a:off x="822960" y="3017520"/>
+            <a:ext cx="10515600" cy="914400"/>
           </a:xfrm>
           <a:prstGeom prst="rect">
             <a:avLst/>
@@ -15890,27 +15824,71 @@
               </a:spcAft>
             </a:pPr>
             <a:r>
-              <a:rPr sz="1500" b="0">
-                <a:solidFill>
-                  <a:srgbClr val="5A6672"/>
-                </a:solidFill>
-                <a:latin typeface="맑은 고딕"/>
-              </a:rPr>
-              <a:t>4층을 빠뜨린다</a:t>
-            </a:r>
-          </a:p>
-        </p:txBody>
-      </p:sp>
-      <p:sp>
-        <p:nvSpPr>
-          <p:cNvPr id="5" name="TextBox 4"/>
+              <a:rPr sz="2800" b="1">
+                <a:solidFill>
+                  <a:srgbClr val="FFFFFF"/>
+                </a:solidFill>
+                <a:latin typeface="맑은 고딕"/>
+              </a:rPr>
+              <a:t>Broker 로그와 경고 로그</a:t>
+            </a:r>
+          </a:p>
+        </p:txBody>
+      </p:sp>
+      <p:sp>
+        <p:nvSpPr>
+          <p:cNvPr id="5" name="Rectangle 4"/>
+          <p:cNvSpPr/>
+          <p:nvPr/>
+        </p:nvSpPr>
+        <p:spPr>
+          <a:xfrm>
+            <a:off x="822960" y="4114800"/>
+            <a:ext cx="5486400" cy="54864"/>
+          </a:xfrm>
+          <a:prstGeom prst="rect">
+            <a:avLst/>
+          </a:prstGeom>
+          <a:solidFill>
+            <a:srgbClr val="FFFFFF"/>
+          </a:solidFill>
+          <a:ln>
+            <a:noFill/>
+          </a:ln>
+          <a:effectLst/>
+        </p:spPr>
+        <p:style>
+          <a:lnRef idx="1">
+            <a:schemeClr val="accent1"/>
+          </a:lnRef>
+          <a:fillRef idx="3">
+            <a:schemeClr val="accent1"/>
+          </a:fillRef>
+          <a:effectRef idx="2">
+            <a:schemeClr val="accent1"/>
+          </a:effectRef>
+          <a:fontRef idx="minor">
+            <a:schemeClr val="lt1"/>
+          </a:fontRef>
+        </p:style>
+        <p:txBody>
+          <a:bodyPr rtlCol="0" anchor="ctr"/>
+          <a:lstStyle/>
+          <a:p>
+            <a:pPr algn="ctr"/>
+          </a:p>
+        </p:txBody>
+      </p:sp>
+      <p:sp>
+        <p:nvSpPr>
+          <p:cNvPr id="6" name="TextBox 5"/>
           <p:cNvSpPr txBox="1"/>
           <p:nvPr/>
         </p:nvSpPr>
         <p:spPr>
           <a:xfrm>
-            <a:off x="640080" y="1737360"/>
-            <a:ext cx="10881360" cy="4754880"/>
+            <a:off x="822960" y="4297680"/>
+            <a:ext cx="10058400" cy="2011680"/>
           </a:xfrm>
           <a:prstGeom prst="rect">
             <a:avLst/>
@@ -15925,65 +15903,49 @@
           <a:p>
             <a:pPr algn="l">
               <a:spcAft>
-                <a:spcPts val="1000"/>
-              </a:spcAft>
-            </a:pPr>
-            <a:r>
-              <a:rPr sz="1700" b="0">
-                <a:solidFill>
-                  <a:srgbClr val="222222"/>
-                </a:solidFill>
-                <a:latin typeface="맑은 고딕"/>
-              </a:rPr>
-              <a:t>•  1~3층은 숫자라서 자동 판정이 쉽다 — 대개 갖춰져 있다</a:t>
-            </a:r>
-          </a:p>
-          <a:p>
-            <a:pPr algn="l">
-              <a:spcAft>
-                <a:spcPts val="1000"/>
-              </a:spcAft>
-            </a:pPr>
-            <a:r>
-              <a:rPr sz="1700" b="0">
-                <a:solidFill>
-                  <a:srgbClr val="222222"/>
-                </a:solidFill>
-                <a:latin typeface="맑은 고딕"/>
-              </a:rPr>
-              <a:t>•  4층은 출력이 문장과 표라서 자동화가 어렵다</a:t>
-            </a:r>
-          </a:p>
-          <a:p>
-            <a:pPr algn="l">
-              <a:spcAft>
-                <a:spcPts val="1000"/>
-              </a:spcAft>
-            </a:pPr>
-            <a:r>
-              <a:rPr sz="1700" b="0">
-                <a:solidFill>
-                  <a:srgbClr val="222222"/>
-                </a:solidFill>
-                <a:latin typeface="맑은 고딕"/>
-              </a:rPr>
-              <a:t>•  평소에는 늘 `Yes` 라 넣을 필요를 못 느낀다</a:t>
-            </a:r>
-          </a:p>
-          <a:p>
-            <a:pPr algn="l">
-              <a:spcAft>
-                <a:spcPts val="1000"/>
-              </a:spcAft>
-            </a:pPr>
-            <a:r>
-              <a:rPr sz="1700" b="0">
-                <a:solidFill>
-                  <a:srgbClr val="222222"/>
-                </a:solidFill>
-                <a:latin typeface="맑은 고딕"/>
-              </a:rPr>
-              <a:t>•  그래서 **장애가 나서 전환하려 할 때 처음 안다**</a:t>
+                <a:spcPts val="800"/>
+              </a:spcAft>
+            </a:pPr>
+            <a:r>
+              <a:rPr sz="1600" b="0">
+                <a:solidFill>
+                  <a:srgbClr val="FFFFFF"/>
+                </a:solidFill>
+                <a:latin typeface="맑은 고딕"/>
+              </a:rPr>
+              <a:t>•  drc 로그는 그동안의 기록</a:t>
+            </a:r>
+          </a:p>
+          <a:p>
+            <a:pPr algn="l">
+              <a:spcAft>
+                <a:spcPts val="800"/>
+              </a:spcAft>
+            </a:pPr>
+            <a:r>
+              <a:rPr sz="1600" b="0">
+                <a:solidFill>
+                  <a:srgbClr val="FFFFFF"/>
+                </a:solidFill>
+                <a:latin typeface="맑은 고딕"/>
+              </a:rPr>
+              <a:t>•  경고 로그와 나란히 읽기</a:t>
+            </a:r>
+          </a:p>
+          <a:p>
+            <a:pPr algn="l">
+              <a:spcAft>
+                <a:spcPts val="800"/>
+              </a:spcAft>
+            </a:pPr>
+            <a:r>
+              <a:rPr sz="1600" b="0">
+                <a:solidFill>
+                  <a:srgbClr val="FFFFFF"/>
+                </a:solidFill>
+                <a:latin typeface="맑은 고딕"/>
+              </a:rPr>
+              <a:t>•  스크립트와 감시 주기</a:t>
             </a:r>
           </a:p>
         </p:txBody>
@@ -16084,7 +16046,7 @@
                 </a:solidFill>
                 <a:latin typeface="맑은 고딕"/>
               </a:rPr>
-              <a:t>스스로 판정해 보기</a:t>
+              <a:t>drc&lt;SID&gt;.log</a:t>
             </a:r>
           </a:p>
         </p:txBody>
@@ -16123,7 +16085,7 @@
                 </a:solidFill>
                 <a:latin typeface="맑은 고딕"/>
               </a:rPr>
-              <a:t>정상인가 조치인가</a:t>
+              <a:t>Broker의 활동 기록</a:t>
             </a:r>
           </a:p>
         </p:txBody>
@@ -16162,7 +16124,7 @@
                 </a:solidFill>
                 <a:latin typeface="맑은 고딕"/>
               </a:rPr>
-              <a:t>•  `LogShipping=OFF` 인데 SUCCESS → **설정한 대로**</a:t>
+              <a:t>•  경고 로그와 같은 ADR trace 디렉터리</a:t>
             </a:r>
           </a:p>
           <a:p>
@@ -16178,7 +16140,7 @@
                 </a:solidFill>
                 <a:latin typeface="맑은 고딕"/>
               </a:rPr>
-              <a:t>•  `VALIDATE` 가 `Ready for Switchover: No` → **조치 필요**</a:t>
+              <a:t>•  구성원마다 각자의 파일</a:t>
             </a:r>
           </a:p>
           <a:p>
@@ -16194,7 +16156,7 @@
                 </a:solidFill>
                 <a:latin typeface="맑은 고딕"/>
               </a:rPr>
-              <a:t>•  `Warning` 인데 `ERROR_CODE` 0 → 정상</a:t>
+              <a:t>•  명령과 결과, 속성 변경, 상태 요약</a:t>
             </a:r>
           </a:p>
           <a:p>
@@ -16210,7 +16172,7 @@
                 </a:solidFill>
                 <a:latin typeface="맑은 고딕"/>
               </a:rPr>
-              <a:t>•  `TopWaitEvents` 1위가 800만 → 정상 (유휴)</a:t>
+              <a:t>•  화면의 낱말 대신 ORA-16607 등 코드로 기록</a:t>
             </a:r>
           </a:p>
           <a:p>
@@ -16226,7 +16188,7 @@
                 </a:solidFill>
                 <a:latin typeface="맑은 고딕"/>
               </a:rPr>
-              <a:t>•  `ORA-16827` 인데 켜졌다 → **조치 필요**</a:t>
+              <a:t>•  경고가 생기고 사라진 시각은 로그에만</a:t>
             </a:r>
           </a:p>
         </p:txBody>
@@ -16258,7 +16220,7 @@
         <p:spPr>
           <a:xfrm>
             <a:off x="0" y="0"/>
-            <a:ext cx="12191695" cy="6858000"/>
+            <a:ext cx="12191695" cy="1005840"/>
           </a:xfrm>
           <a:prstGeom prst="rect">
             <a:avLst/>
@@ -16301,8 +16263,8 @@
         </p:nvSpPr>
         <p:spPr>
           <a:xfrm>
-            <a:off x="822960" y="2011680"/>
-            <a:ext cx="10515600" cy="1097280"/>
+            <a:off x="548640" y="91440"/>
+            <a:ext cx="10972800" cy="777240"/>
           </a:xfrm>
           <a:prstGeom prst="rect">
             <a:avLst/>
@@ -16321,13 +16283,13 @@
               </a:spcAft>
             </a:pPr>
             <a:r>
-              <a:rPr sz="4000" b="1">
+              <a:rPr sz="2600" b="1">
                 <a:solidFill>
                   <a:srgbClr val="FFFFFF"/>
                 </a:solidFill>
                 <a:latin typeface="맑은 고딕"/>
               </a:rPr>
-              <a:t>14.12</a:t>
+              <a:t>경고 로그와 TraceLevel</a:t>
             </a:r>
           </a:p>
         </p:txBody>
@@ -16340,8 +16302,8 @@
         </p:nvSpPr>
         <p:spPr>
           <a:xfrm>
-            <a:off x="822960" y="3017520"/>
-            <a:ext cx="10515600" cy="914400"/>
+            <a:off x="640080" y="1078992"/>
+            <a:ext cx="10881360" cy="457200"/>
           </a:xfrm>
           <a:prstGeom prst="rect">
             <a:avLst/>
@@ -16360,71 +16322,27 @@
               </a:spcAft>
             </a:pPr>
             <a:r>
-              <a:rPr sz="2800" b="1">
-                <a:solidFill>
-                  <a:srgbClr val="FFFFFF"/>
-                </a:solidFill>
-                <a:latin typeface="맑은 고딕"/>
-              </a:rPr>
-              <a:t>VALIDATE 의 나머지 형태와 Broker 로그</a:t>
-            </a:r>
-          </a:p>
-        </p:txBody>
-      </p:sp>
-      <p:sp>
-        <p:nvSpPr>
-          <p:cNvPr id="5" name="Rectangle 4"/>
-          <p:cNvSpPr/>
-          <p:nvPr/>
-        </p:nvSpPr>
-        <p:spPr>
-          <a:xfrm>
-            <a:off x="822960" y="4114800"/>
-            <a:ext cx="5486400" cy="54864"/>
-          </a:xfrm>
-          <a:prstGeom prst="rect">
-            <a:avLst/>
-          </a:prstGeom>
-          <a:solidFill>
-            <a:srgbClr val="FFFFFF"/>
-          </a:solidFill>
-          <a:ln>
-            <a:noFill/>
-          </a:ln>
-          <a:effectLst/>
-        </p:spPr>
-        <p:style>
-          <a:lnRef idx="1">
-            <a:schemeClr val="accent1"/>
-          </a:lnRef>
-          <a:fillRef idx="3">
-            <a:schemeClr val="accent1"/>
-          </a:fillRef>
-          <a:effectRef idx="2">
-            <a:schemeClr val="accent1"/>
-          </a:effectRef>
-          <a:fontRef idx="minor">
-            <a:schemeClr val="lt1"/>
-          </a:fontRef>
-        </p:style>
-        <p:txBody>
-          <a:bodyPr rtlCol="0" anchor="ctr"/>
-          <a:lstStyle/>
-          <a:p>
-            <a:pPr algn="ctr"/>
-          </a:p>
-        </p:txBody>
-      </p:sp>
-      <p:sp>
-        <p:nvSpPr>
-          <p:cNvPr id="6" name="TextBox 5"/>
+              <a:rPr sz="1500" b="0">
+                <a:solidFill>
+                  <a:srgbClr val="5A6672"/>
+                </a:solidFill>
+                <a:latin typeface="맑은 고딕"/>
+              </a:rPr>
+              <a:t>무엇을 하려 했고, 무엇이 일어났나</a:t>
+            </a:r>
+          </a:p>
+        </p:txBody>
+      </p:sp>
+      <p:sp>
+        <p:nvSpPr>
+          <p:cNvPr id="5" name="TextBox 4"/>
           <p:cNvSpPr txBox="1"/>
           <p:nvPr/>
         </p:nvSpPr>
         <p:spPr>
           <a:xfrm>
-            <a:off x="822960" y="4297680"/>
-            <a:ext cx="10058400" cy="2011680"/>
+            <a:off x="640080" y="1737360"/>
+            <a:ext cx="10881360" cy="4754880"/>
           </a:xfrm>
           <a:prstGeom prst="rect">
             <a:avLst/>
@@ -16439,33 +16357,81 @@
           <a:p>
             <a:pPr algn="l">
               <a:spcAft>
-                <a:spcPts val="800"/>
-              </a:spcAft>
-            </a:pPr>
-            <a:r>
-              <a:rPr sz="1600" b="0">
-                <a:solidFill>
-                  <a:srgbClr val="FFFFFF"/>
-                </a:solidFill>
-                <a:latin typeface="맑은 고딕"/>
-              </a:rPr>
-              <a:t>•  여섯 구문을 모두 쓴다</a:t>
-            </a:r>
-          </a:p>
-          <a:p>
-            <a:pPr algn="l">
-              <a:spcAft>
-                <a:spcPts val="800"/>
-              </a:spcAft>
-            </a:pPr>
-            <a:r>
-              <a:rPr sz="1600" b="0">
-                <a:solidFill>
-                  <a:srgbClr val="FFFFFF"/>
-                </a:solidFill>
-                <a:latin typeface="맑은 고딕"/>
-              </a:rPr>
-              <a:t>•  검사하지 않는 것이 있다</a:t>
+                <a:spcPts val="1000"/>
+              </a:spcAft>
+            </a:pPr>
+            <a:r>
+              <a:rPr sz="1700" b="0">
+                <a:solidFill>
+                  <a:srgbClr val="222222"/>
+                </a:solidFill>
+                <a:latin typeface="맑은 고딕"/>
+              </a:rPr>
+              <a:t>•  경고 로그: Broker가 실행한 ALTER SYSTEM 등</a:t>
+            </a:r>
+          </a:p>
+          <a:p>
+            <a:pPr algn="l">
+              <a:spcAft>
+                <a:spcPts val="1000"/>
+              </a:spcAft>
+            </a:pPr>
+            <a:r>
+              <a:rPr sz="1700" b="0">
+                <a:solidFill>
+                  <a:srgbClr val="222222"/>
+                </a:solidFill>
+                <a:latin typeface="맑은 고딕"/>
+              </a:rPr>
+              <a:t>•  Redo Apply 기동·중지 기록</a:t>
+            </a:r>
+          </a:p>
+          <a:p>
+            <a:pPr algn="l">
+              <a:spcAft>
+                <a:spcPts val="1000"/>
+              </a:spcAft>
+            </a:pPr>
+            <a:r>
+              <a:rPr sz="1700" b="0">
+                <a:solidFill>
+                  <a:srgbClr val="222222"/>
+                </a:solidFill>
+                <a:latin typeface="맑은 고딕"/>
+              </a:rPr>
+              <a:t>•  drc 로그와 같은 시각을 나란히 비교</a:t>
+            </a:r>
+          </a:p>
+          <a:p>
+            <a:pPr algn="l">
+              <a:spcAft>
+                <a:spcPts val="1000"/>
+              </a:spcAft>
+            </a:pPr>
+            <a:r>
+              <a:rPr sz="1700" b="0">
+                <a:solidFill>
+                  <a:srgbClr val="222222"/>
+                </a:solidFill>
+                <a:latin typeface="맑은 고딕"/>
+              </a:rPr>
+              <a:t>•  TraceLevel: 기본 USER, 분석 때 SUPPORT</a:t>
+            </a:r>
+          </a:p>
+          <a:p>
+            <a:pPr algn="l">
+              <a:spcAft>
+                <a:spcPts val="1000"/>
+              </a:spcAft>
+            </a:pPr>
+            <a:r>
+              <a:rPr sz="1700" b="0">
+                <a:solidFill>
+                  <a:srgbClr val="222222"/>
+                </a:solidFill>
+                <a:latin typeface="맑은 고딕"/>
+              </a:rPr>
+              <a:t>•  분석이 끝나면 USER로 되돌림</a:t>
             </a:r>
           </a:p>
         </p:txBody>
@@ -16566,7 +16532,7 @@
                 </a:solidFill>
                 <a:latin typeface="맑은 고딕"/>
               </a:rPr>
-              <a:t>VALIDATE 는 여섯 구문</a:t>
+              <a:t>감시 스크립트와 주기</a:t>
             </a:r>
           </a:p>
         </p:txBody>
@@ -16605,7 +16571,7 @@
                 </a:solidFill>
                 <a:latin typeface="맑은 고딕"/>
               </a:rPr>
-              <a:t>하나만 써 왔다</a:t>
+              <a:t>명령마다 맞는 주기가 있다</a:t>
             </a:r>
           </a:p>
         </p:txBody>
@@ -16644,7 +16610,7 @@
                 </a:solidFill>
                 <a:latin typeface="맑은 고딕"/>
               </a:rPr>
-              <a:t>•  `DATABASE [VERBOSE]` / `... DATAFILE &lt;n&gt; OUTPUT=&lt;file&gt;`</a:t>
+              <a:t>•  dgmgrl -silent로 배너 없이 결과만</a:t>
             </a:r>
           </a:p>
           <a:p>
@@ -16660,7 +16626,7 @@
                 </a:solidFill>
                 <a:latin typeface="맑은 고딕"/>
               </a:rPr>
-              <a:t>•  `... SPFILE` / `FAR_SYNC` (10장)</a:t>
+              <a:t>•  SET ECHO ON, SHOW ALL은 클라이언트 설정</a:t>
             </a:r>
           </a:p>
           <a:p>
@@ -16676,7 +16642,7 @@
                 </a:solidFill>
                 <a:latin typeface="맑은 고딕"/>
               </a:rPr>
-              <a:t>•  `NETWORK CONFIGURATION FOR { ALL | &lt;member&gt; }`</a:t>
+              <a:t>•  짧은 주기: SHOW CONFIGURATION 상태와 코드</a:t>
             </a:r>
           </a:p>
           <a:p>
@@ -16692,7 +16658,23 @@
                 </a:solidFill>
                 <a:latin typeface="맑은 고딕"/>
               </a:rPr>
-              <a:t>•  `STATIC CONNECT IDENTIFIER FOR { ALL | &lt;database&gt; }`</a:t>
+              <a:t>•  하루: 로그의 ORA-166 계열 건수 집계</a:t>
+            </a:r>
+          </a:p>
+          <a:p>
+            <a:pPr algn="l">
+              <a:spcAft>
+                <a:spcPts val="1000"/>
+              </a:spcAft>
+            </a:pPr>
+            <a:r>
+              <a:rPr sz="1700" b="0">
+                <a:solidFill>
+                  <a:srgbClr val="222222"/>
+                </a:solidFill>
+                <a:latin typeface="맑은 고딕"/>
+              </a:rPr>
+              <a:t>•  주·월, 전환 직전: VALIDATE 계열, EXPORT</a:t>
             </a:r>
           </a:p>
         </p:txBody>
@@ -16724,7 +16706,7 @@
         <p:spPr>
           <a:xfrm>
             <a:off x="0" y="0"/>
-            <a:ext cx="12191695" cy="1005840"/>
+            <a:ext cx="12191695" cy="6858000"/>
           </a:xfrm>
           <a:prstGeom prst="rect">
             <a:avLst/>
@@ -16767,8 +16749,8 @@
         </p:nvSpPr>
         <p:spPr>
           <a:xfrm>
-            <a:off x="548640" y="91440"/>
-            <a:ext cx="10972800" cy="777240"/>
+            <a:off x="822960" y="2011680"/>
+            <a:ext cx="10515600" cy="1097280"/>
           </a:xfrm>
           <a:prstGeom prst="rect">
             <a:avLst/>
@@ -16787,13 +16769,13 @@
               </a:spcAft>
             </a:pPr>
             <a:r>
-              <a:rPr sz="2600" b="1">
+              <a:rPr sz="4000" b="1">
                 <a:solidFill>
                   <a:srgbClr val="FFFFFF"/>
                 </a:solidFill>
                 <a:latin typeface="맑은 고딕"/>
               </a:rPr>
-              <a:t>DATAFILE 은 블록을 비교한다</a:t>
+              <a:t>14.10</a:t>
             </a:r>
           </a:p>
         </p:txBody>
@@ -16806,8 +16788,8 @@
         </p:nvSpPr>
         <p:spPr>
           <a:xfrm>
-            <a:off x="640080" y="1078992"/>
-            <a:ext cx="10881360" cy="457200"/>
+            <a:off x="822960" y="3017520"/>
+            <a:ext cx="10515600" cy="914400"/>
           </a:xfrm>
           <a:prstGeom prst="rect">
             <a:avLst/>
@@ -16826,27 +16808,71 @@
               </a:spcAft>
             </a:pPr>
             <a:r>
-              <a:rPr sz="1500" b="0">
-                <a:solidFill>
-                  <a:srgbClr val="5A6672"/>
-                </a:solidFill>
-                <a:latin typeface="맑은 고딕"/>
-              </a:rPr>
-              <a:t>5장의 그 엔진</a:t>
-            </a:r>
-          </a:p>
-        </p:txBody>
-      </p:sp>
-      <p:sp>
-        <p:nvSpPr>
-          <p:cNvPr id="5" name="TextBox 4"/>
+              <a:rPr sz="2800" b="1">
+                <a:solidFill>
+                  <a:srgbClr val="FFFFFF"/>
+                </a:solidFill>
+                <a:latin typeface="맑은 고딕"/>
+              </a:rPr>
+              <a:t>운영 시 주의점</a:t>
+            </a:r>
+          </a:p>
+        </p:txBody>
+      </p:sp>
+      <p:sp>
+        <p:nvSpPr>
+          <p:cNvPr id="5" name="Rectangle 4"/>
+          <p:cNvSpPr/>
+          <p:nvPr/>
+        </p:nvSpPr>
+        <p:spPr>
+          <a:xfrm>
+            <a:off x="822960" y="4114800"/>
+            <a:ext cx="5486400" cy="54864"/>
+          </a:xfrm>
+          <a:prstGeom prst="rect">
+            <a:avLst/>
+          </a:prstGeom>
+          <a:solidFill>
+            <a:srgbClr val="FFFFFF"/>
+          </a:solidFill>
+          <a:ln>
+            <a:noFill/>
+          </a:ln>
+          <a:effectLst/>
+        </p:spPr>
+        <p:style>
+          <a:lnRef idx="1">
+            <a:schemeClr val="accent1"/>
+          </a:lnRef>
+          <a:fillRef idx="3">
+            <a:schemeClr val="accent1"/>
+          </a:fillRef>
+          <a:effectRef idx="2">
+            <a:schemeClr val="accent1"/>
+          </a:effectRef>
+          <a:fontRef idx="minor">
+            <a:schemeClr val="lt1"/>
+          </a:fontRef>
+        </p:style>
+        <p:txBody>
+          <a:bodyPr rtlCol="0" anchor="ctr"/>
+          <a:lstStyle/>
+          <a:p>
+            <a:pPr algn="ctr"/>
+          </a:p>
+        </p:txBody>
+      </p:sp>
+      <p:sp>
+        <p:nvSpPr>
+          <p:cNvPr id="6" name="TextBox 5"/>
           <p:cNvSpPr txBox="1"/>
           <p:nvPr/>
         </p:nvSpPr>
         <p:spPr>
           <a:xfrm>
-            <a:off x="640080" y="1737360"/>
-            <a:ext cx="10881360" cy="4754880"/>
+            <a:off x="822960" y="4297680"/>
+            <a:ext cx="10058400" cy="2011680"/>
           </a:xfrm>
           <a:prstGeom prst="rect">
             <a:avLst/>
@@ -16861,65 +16887,49 @@
           <a:p>
             <a:pPr algn="l">
               <a:spcAft>
-                <a:spcPts val="1000"/>
-              </a:spcAft>
-            </a:pPr>
-            <a:r>
-              <a:rPr sz="1700" b="0">
-                <a:solidFill>
-                  <a:srgbClr val="222222"/>
-                </a:solidFill>
-                <a:latin typeface="맑은 고딕"/>
-              </a:rPr>
-              <a:t>•  결과물은 **대상(Standby) 쪽 trace** 에 생긴다</a:t>
-            </a:r>
-          </a:p>
-          <a:p>
-            <a:pPr algn="l">
-              <a:spcAft>
-                <a:spcPts val="1000"/>
-              </a:spcAft>
-            </a:pPr>
-            <a:r>
-              <a:rPr sz="1700" b="0">
-                <a:solidFill>
-                  <a:srgbClr val="222222"/>
-                </a:solidFill>
-                <a:latin typeface="맑은 고딕"/>
-              </a:rPr>
-              <a:t>•  내용은 5장 실습 07 의 **`DBMS_DBCOMP`** 비교 결과</a:t>
-            </a:r>
-          </a:p>
-          <a:p>
-            <a:pPr algn="l">
-              <a:spcAft>
-                <a:spcPts val="1000"/>
-              </a:spcAft>
-            </a:pPr>
-            <a:r>
-              <a:rPr sz="1700" b="0">
-                <a:solidFill>
-                  <a:srgbClr val="222222"/>
-                </a:solidFill>
-                <a:latin typeface="맑은 고딕"/>
-              </a:rPr>
-              <a:t>•  `CORR`·`LWLOC`·`LWRMT`·`DIFFPAIR` 가 **0** 이어야 한다</a:t>
-            </a:r>
-          </a:p>
-          <a:p>
-            <a:pPr algn="l">
-              <a:spcAft>
-                <a:spcPts val="1000"/>
-              </a:spcAft>
-            </a:pPr>
-            <a:r>
-              <a:rPr sz="1700" b="0">
-                <a:solidFill>
-                  <a:srgbClr val="222222"/>
-                </a:solidFill>
-                <a:latin typeface="맑은 고딕"/>
-              </a:rPr>
-              <a:t>•  없는 파일 번호 → **ORA-53201** + `SYS.DBMS_DBCOMP` 스택</a:t>
+                <a:spcPts val="800"/>
+              </a:spcAft>
+            </a:pPr>
+            <a:r>
+              <a:rPr sz="1600" b="0">
+                <a:solidFill>
+                  <a:srgbClr val="FFFFFF"/>
+                </a:solidFill>
+                <a:latin typeface="맑은 고딕"/>
+              </a:rPr>
+              <a:t>•  SUCCESS만으로 전환을 판단하지 않는다</a:t>
+            </a:r>
+          </a:p>
+          <a:p>
+            <a:pPr algn="l">
+              <a:spcAft>
+                <a:spcPts val="800"/>
+              </a:spcAft>
+            </a:pPr>
+            <a:r>
+              <a:rPr sz="1600" b="0">
+                <a:solidFill>
+                  <a:srgbClr val="FFFFFF"/>
+                </a:solidFill>
+                <a:latin typeface="맑은 고딕"/>
+              </a:rPr>
+              <a:t>•  원복은 체크리스트로</a:t>
+            </a:r>
+          </a:p>
+          <a:p>
+            <a:pPr algn="l">
+              <a:spcAft>
+                <a:spcPts val="800"/>
+              </a:spcAft>
+            </a:pPr>
+            <a:r>
+              <a:rPr sz="1600" b="0">
+                <a:solidFill>
+                  <a:srgbClr val="FFFFFF"/>
+                </a:solidFill>
+                <a:latin typeface="맑은 고딕"/>
+              </a:rPr>
+              <a:t>•  결과 파일과 로그를 남긴다</a:t>
             </a:r>
           </a:p>
         </p:txBody>
@@ -17020,7 +17030,7 @@
                 </a:solidFill>
                 <a:latin typeface="맑은 고딕"/>
               </a:rPr>
-              <a:t>두 명령의 질문</a:t>
+              <a:t>DMON과 상태 수집</a:t>
             </a:r>
           </a:p>
         </p:txBody>
@@ -17059,7 +17069,7 @@
                 </a:solidFill>
                 <a:latin typeface="맑은 고딕"/>
               </a:rPr>
-              <a:t>무엇을 묻는가</a:t>
+              <a:t>화면의 상태는 대개 저장된 점검 결과</a:t>
             </a:r>
           </a:p>
         </p:txBody>
@@ -17098,7 +17108,7 @@
                 </a:solidFill>
                 <a:latin typeface="맑은 고딕"/>
               </a:rPr>
-              <a:t>•  `SHOW CONFIGURATION` — 지금 **의도대로** 동작하는가</a:t>
+              <a:t>•  구성원마다 DMON 하나, 구성 파일을 메모리에 보관</a:t>
             </a:r>
           </a:p>
           <a:p>
@@ -17114,7 +17124,7 @@
                 </a:solidFill>
                 <a:latin typeface="맑은 고딕"/>
               </a:rPr>
-              <a:t>•  `SHOW DATABASE` — 이 멤버가 의도대로인가</a:t>
+              <a:t>•  Primary DMON이 주기적으로 상태 점검을 주도</a:t>
             </a:r>
           </a:p>
           <a:p>
@@ -17130,7 +17140,7 @@
                 </a:solidFill>
                 <a:latin typeface="맑은 고딕"/>
               </a:rPr>
-              <a:t>•  `VALIDATE DATABASE` — 지금 **역할을 바꿀 수 있는가**</a:t>
+              <a:t>•  각 구성원 DMON이 자기 쪽 사실을 확인해 회신</a:t>
             </a:r>
           </a:p>
           <a:p>
@@ -17146,7 +17156,23 @@
                 </a:solidFill>
                 <a:latin typeface="맑은 고딕"/>
               </a:rPr>
-              <a:t>•  세 번째만 미래를 묻는다</a:t>
+              <a:t>•  SHOW CONFIGURATION은 보관된 결과를 표시</a:t>
+            </a:r>
+          </a:p>
+          <a:p>
+            <a:pPr algn="l">
+              <a:spcAft>
+                <a:spcPts val="1000"/>
+              </a:spcAft>
+            </a:pPr>
+            <a:r>
+              <a:rPr sz="1700" b="0">
+                <a:solidFill>
+                  <a:srgbClr val="222222"/>
+                </a:solidFill>
+                <a:latin typeface="맑은 고딕"/>
+              </a:rPr>
+              <a:t>•  status updated 시간으로 결과의 신선도 확인</a:t>
             </a:r>
           </a:p>
         </p:txBody>
@@ -17247,7 +17273,7 @@
                 </a:solidFill>
                 <a:latin typeface="맑은 고딕"/>
               </a:rPr>
-              <a:t>SPFILE 은 파라미터를 비교한다</a:t>
+              <a:t>운영 시 주의점</a:t>
             </a:r>
           </a:p>
         </p:txBody>
@@ -17286,7 +17312,7 @@
                 </a:solidFill>
                 <a:latin typeface="맑은 고딕"/>
               </a:rPr>
-              <a:t>실측 4개 차이</a:t>
+              <a:t>조용한 위험을 줄이는 습관</a:t>
             </a:r>
           </a:p>
         </p:txBody>
@@ -17325,7 +17351,7 @@
                 </a:solidFill>
                 <a:latin typeface="맑은 고딕"/>
               </a:rPr>
-              <a:t>•  `audit_file_dest` / `fal_client` — 다른 것이 **정상**</a:t>
+              <a:t>•  계획된 전환 전에는 VALIDATE DATABASE</a:t>
             </a:r>
           </a:p>
           <a:p>
@@ -17341,7 +17367,7 @@
                 </a:solidFill>
                 <a:latin typeface="맑은 고딕"/>
               </a:rPr>
-              <a:t>•  `diagnostic_dest` — **끝의 슬래시 하나** 차이</a:t>
+              <a:t>•  updated 시간이 늘면 통신부터 확인</a:t>
             </a:r>
           </a:p>
           <a:p>
@@ -17357,7 +17383,7 @@
                 </a:solidFill>
                 <a:latin typeface="맑은 고딕"/>
               </a:rPr>
-              <a:t>•  `log_archive_trace` — chicago `0` / boston `NOT SPECIFIED`</a:t>
+              <a:t>•  Broker 관리 파라미터는 속성으로 변경</a:t>
             </a:r>
           </a:p>
           <a:p>
@@ -17373,7 +17399,23 @@
                 </a:solidFill>
                 <a:latin typeface="맑은 고딕"/>
               </a:rPr>
-              <a:t>•  전부 고치는 것이 아니라 **읽고 판정하는 것**이 목적</a:t>
+              <a:t>•  유지 보수 때 바꾼 속성은 원복 체크리스트에</a:t>
+            </a:r>
+          </a:p>
+          <a:p>
+            <a:pPr algn="l">
+              <a:spcAft>
+                <a:spcPts val="1000"/>
+              </a:spcAft>
+            </a:pPr>
+            <a:r>
+              <a:rPr sz="1700" b="0">
+                <a:solidFill>
+                  <a:srgbClr val="222222"/>
+                </a:solidFill>
+                <a:latin typeface="맑은 고딕"/>
+              </a:rPr>
+              <a:t>•  EXPORT 결과는 trace 밖으로, DATAFILE은 결과 확인</a:t>
             </a:r>
           </a:p>
         </p:txBody>
@@ -17474,7 +17516,7 @@
                 </a:solidFill>
                 <a:latin typeface="맑은 고딕"/>
               </a:rPr>
-              <a:t>★ VALIDATE 가 검사하지 않는 것</a:t>
+              <a:t>요약</a:t>
             </a:r>
           </a:p>
         </p:txBody>
@@ -17487,8 +17529,8 @@
         </p:nvSpPr>
         <p:spPr>
           <a:xfrm>
-            <a:off x="640080" y="1078992"/>
-            <a:ext cx="10881360" cy="457200"/>
+            <a:off x="640080" y="1371600"/>
+            <a:ext cx="10881360" cy="5120640"/>
           </a:xfrm>
           <a:prstGeom prst="rect">
             <a:avLst/>
@@ -17503,104 +17545,97 @@
           <a:p>
             <a:pPr algn="l">
               <a:spcAft>
-                <a:spcPts val="600"/>
-              </a:spcAft>
-            </a:pPr>
-            <a:r>
-              <a:rPr sz="1500" b="0">
-                <a:solidFill>
-                  <a:srgbClr val="5A6672"/>
-                </a:solidFill>
-                <a:latin typeface="맑은 고딕"/>
-              </a:rPr>
-              <a:t>한 단계 더 밀린 명제</a:t>
-            </a:r>
-          </a:p>
-        </p:txBody>
-      </p:sp>
-      <p:sp>
-        <p:nvSpPr>
-          <p:cNvPr id="5" name="TextBox 4"/>
-          <p:cNvSpPr txBox="1"/>
-          <p:nvPr/>
-        </p:nvSpPr>
-        <p:spPr>
-          <a:xfrm>
-            <a:off x="640080" y="1737360"/>
-            <a:ext cx="10881360" cy="4754880"/>
-          </a:xfrm>
-          <a:prstGeom prst="rect">
-            <a:avLst/>
-          </a:prstGeom>
-          <a:noFill/>
-        </p:spPr>
-        <p:txBody>
-          <a:bodyPr wrap="square">
-            <a:spAutoFit/>
-          </a:bodyPr>
-          <a:lstStyle/>
-          <a:p>
-            <a:pPr algn="l">
-              <a:spcAft>
-                <a:spcPts val="1000"/>
-              </a:spcAft>
-            </a:pPr>
-            <a:r>
-              <a:rPr sz="1700" b="0">
-                <a:solidFill>
-                  <a:srgbClr val="222222"/>
-                </a:solidFill>
-                <a:latin typeface="맑은 고딕"/>
-              </a:rPr>
-              <a:t>•  대상의 정적 등록을 지우고 확인하면</a:t>
-            </a:r>
-          </a:p>
-          <a:p>
-            <a:pPr algn="l">
-              <a:spcAft>
-                <a:spcPts val="1000"/>
-              </a:spcAft>
-            </a:pPr>
-            <a:r>
-              <a:rPr sz="1700" b="0">
-                <a:solidFill>
-                  <a:srgbClr val="222222"/>
-                </a:solidFill>
-                <a:latin typeface="맑은 고딕"/>
-              </a:rPr>
-              <a:t>•  `VALIDATE STATIC CONNECT IDENTIFIER` → **`ORA-12514` Failed**</a:t>
-            </a:r>
-          </a:p>
-          <a:p>
-            <a:pPr algn="l">
-              <a:spcAft>
-                <a:spcPts val="1000"/>
-              </a:spcAft>
-            </a:pPr>
-            <a:r>
-              <a:rPr sz="1700" b="0">
-                <a:solidFill>
-                  <a:srgbClr val="222222"/>
-                </a:solidFill>
-                <a:latin typeface="맑은 고딕"/>
-              </a:rPr>
-              <a:t>•  그런데 `VALIDATE DATABASE` → **`Ready for Switchover: Yes`**</a:t>
-            </a:r>
-          </a:p>
-          <a:p>
-            <a:pPr algn="l">
-              <a:spcAft>
-                <a:spcPts val="1000"/>
-              </a:spcAft>
-            </a:pPr>
-            <a:r>
-              <a:rPr sz="1700" b="0">
-                <a:solidFill>
-                  <a:srgbClr val="222222"/>
-                </a:solidFill>
-                <a:latin typeface="맑은 고딕"/>
-              </a:rPr>
-              <a:t>•  `SHOW CONFIGURATION` → **`SUCCESS`**</a:t>
+                <a:spcPts val="1000"/>
+              </a:spcAft>
+            </a:pPr>
+            <a:r>
+              <a:rPr sz="1600" b="0">
+                <a:solidFill>
+                  <a:srgbClr val="222222"/>
+                </a:solidFill>
+                <a:latin typeface="맑은 고딕"/>
+              </a:rPr>
+              <a:t>•  DMON이 상태를 모아 SUCCESS·WARNING·ERROR로 집계, 기준은 Intended State</a:t>
+            </a:r>
+          </a:p>
+          <a:p>
+            <a:pPr algn="l">
+              <a:spcAft>
+                <a:spcPts val="1000"/>
+              </a:spcAft>
+            </a:pPr>
+            <a:r>
+              <a:rPr sz="1600" b="0">
+                <a:solidFill>
+                  <a:srgbClr val="222222"/>
+                </a:solidFill>
+                <a:latin typeface="맑은 고딕"/>
+              </a:rPr>
+              <a:t>•  ORA-166xx는 구성, 구성원, 원인 순으로 읽는다</a:t>
+            </a:r>
+          </a:p>
+          <a:p>
+            <a:pPr algn="l">
+              <a:spcAft>
+                <a:spcPts val="1000"/>
+              </a:spcAft>
+            </a:pPr>
+            <a:r>
+              <a:rPr sz="1600" b="0">
+                <a:solidFill>
+                  <a:srgbClr val="222222"/>
+                </a:solidFill>
+                <a:latin typeface="맑은 고딕"/>
+              </a:rPr>
+              <a:t>•  SHOW CONFIGURATION → DATABASE → 모니터링 속성</a:t>
+            </a:r>
+          </a:p>
+          <a:p>
+            <a:pPr algn="l">
+              <a:spcAft>
+                <a:spcPts val="1000"/>
+              </a:spcAft>
+            </a:pPr>
+            <a:r>
+              <a:rPr sz="1600" b="0">
+                <a:solidFill>
+                  <a:srgbClr val="222222"/>
+                </a:solidFill>
+                <a:latin typeface="맑은 고딕"/>
+              </a:rPr>
+              <a:t>•  두 큐로 전송 구간과 적용 구간을 가른다</a:t>
+            </a:r>
+          </a:p>
+          <a:p>
+            <a:pPr algn="l">
+              <a:spcAft>
+                <a:spcPts val="1000"/>
+              </a:spcAft>
+            </a:pPr>
+            <a:r>
+              <a:rPr sz="1600" b="0">
+                <a:solidFill>
+                  <a:srgbClr val="222222"/>
+                </a:solidFill>
+                <a:latin typeface="맑은 고딕"/>
+              </a:rPr>
+              <a:t>•  임계값 3종 19c 기본 30초, 업무 기준으로 조정</a:t>
+            </a:r>
+          </a:p>
+          <a:p>
+            <a:pPr algn="l">
+              <a:spcAft>
+                <a:spcPts val="1000"/>
+              </a:spcAft>
+            </a:pPr>
+            <a:r>
+              <a:rPr sz="1600" b="0">
+                <a:solidFill>
+                  <a:srgbClr val="222222"/>
+                </a:solidFill>
+                <a:latin typeface="맑은 고딕"/>
+              </a:rPr>
+              <a:t>•  VALIDATE는 전환 가능성, EXPORT는 기록, drc 로그는 이력</a:t>
             </a:r>
           </a:p>
         </p:txBody>
@@ -17701,7 +17736,7 @@
                 </a:solidFill>
                 <a:latin typeface="맑은 고딕"/>
               </a:rPr>
-              <a:t>Broker 로그</a:t>
+              <a:t>퀴즈 (1/2)</a:t>
             </a:r>
           </a:p>
         </p:txBody>
@@ -17714,8 +17749,8 @@
         </p:nvSpPr>
         <p:spPr>
           <a:xfrm>
-            <a:off x="640080" y="1078992"/>
-            <a:ext cx="10881360" cy="457200"/>
+            <a:off x="640080" y="1371600"/>
+            <a:ext cx="10881360" cy="5120640"/>
           </a:xfrm>
           <a:prstGeom prst="rect">
             <a:avLst/>
@@ -17730,104 +17765,49 @@
           <a:p>
             <a:pPr algn="l">
               <a:spcAft>
-                <a:spcPts val="600"/>
-              </a:spcAft>
-            </a:pPr>
-            <a:r>
-              <a:rPr sz="1500" b="0">
-                <a:solidFill>
-                  <a:srgbClr val="5A6672"/>
-                </a:solidFill>
-                <a:latin typeface="맑은 고딕"/>
-              </a:rPr>
-              <a:t>drc&lt;DB_UNIQUE_NAME&gt;.log</a:t>
-            </a:r>
-          </a:p>
-        </p:txBody>
-      </p:sp>
-      <p:sp>
-        <p:nvSpPr>
-          <p:cNvPr id="5" name="TextBox 4"/>
-          <p:cNvSpPr txBox="1"/>
-          <p:nvPr/>
-        </p:nvSpPr>
-        <p:spPr>
-          <a:xfrm>
-            <a:off x="640080" y="1737360"/>
-            <a:ext cx="10881360" cy="4754880"/>
-          </a:xfrm>
-          <a:prstGeom prst="rect">
-            <a:avLst/>
-          </a:prstGeom>
-          <a:noFill/>
-        </p:spPr>
-        <p:txBody>
-          <a:bodyPr wrap="square">
-            <a:spAutoFit/>
-          </a:bodyPr>
-          <a:lstStyle/>
-          <a:p>
-            <a:pPr algn="l">
-              <a:spcAft>
-                <a:spcPts val="1000"/>
-              </a:spcAft>
-            </a:pPr>
-            <a:r>
-              <a:rPr sz="1700" b="0">
-                <a:solidFill>
-                  <a:srgbClr val="222222"/>
-                </a:solidFill>
-                <a:latin typeface="맑은 고딕"/>
-              </a:rPr>
-              <a:t>•  위치는 알림 로그와 같은 **ADR 의 trace**</a:t>
-            </a:r>
-          </a:p>
-          <a:p>
-            <a:pPr algn="l">
-              <a:spcAft>
-                <a:spcPts val="1000"/>
-              </a:spcAft>
-            </a:pPr>
-            <a:r>
-              <a:rPr sz="1700" b="0">
-                <a:solidFill>
-                  <a:srgbClr val="222222"/>
-                </a:solidFill>
-                <a:latin typeface="맑은 고딕"/>
-              </a:rPr>
-              <a:t>•  **명령과 결과가 한 쌍**으로 남는다 (`... completed with error ORA-16568`)</a:t>
-            </a:r>
-          </a:p>
-          <a:p>
-            <a:pPr algn="l">
-              <a:spcAft>
-                <a:spcPts val="1000"/>
-              </a:spcAft>
-            </a:pPr>
-            <a:r>
-              <a:rPr sz="1700" b="0">
-                <a:solidFill>
-                  <a:srgbClr val="222222"/>
-                </a:solidFill>
-                <a:latin typeface="맑은 고딕"/>
-              </a:rPr>
-              <a:t>•  화면에 없는 **구성 수준 오류 번호** — `ORA-16607`·`ORA-16608`</a:t>
-            </a:r>
-          </a:p>
-          <a:p>
-            <a:pPr algn="l">
-              <a:spcAft>
-                <a:spcPts val="1000"/>
-              </a:spcAft>
-            </a:pPr>
-            <a:r>
-              <a:rPr sz="1700" b="0">
-                <a:solidFill>
-                  <a:srgbClr val="222222"/>
-                </a:solidFill>
-                <a:latin typeface="맑은 고딕"/>
-              </a:rPr>
-              <a:t>•  정상은 **`ORA-0`**. Broker 가 스스로 실행한 `IncarnationTable` 도 남는다</a:t>
+                <a:spcPts val="1000"/>
+              </a:spcAft>
+            </a:pPr>
+            <a:r>
+              <a:rPr sz="1600" b="0">
+                <a:solidFill>
+                  <a:srgbClr val="222222"/>
+                </a:solidFill>
+                <a:latin typeface="맑은 고딕"/>
+              </a:rPr>
+              <a:t>•  Q1. ORA-16809가 보이면 먼저? → StatusReport 조회</a:t>
+            </a:r>
+          </a:p>
+          <a:p>
+            <a:pPr algn="l">
+              <a:spcAft>
+                <a:spcPts val="1000"/>
+              </a:spcAft>
+            </a:pPr>
+            <a:r>
+              <a:rPr sz="1600" b="0">
+                <a:solidFill>
+                  <a:srgbClr val="222222"/>
+                </a:solidFill>
+                <a:latin typeface="맑은 고딕"/>
+              </a:rPr>
+              <a:t>•  Q2. APPLY-OFF에서 적용 중지 상태는? → SUCCESS</a:t>
+            </a:r>
+          </a:p>
+          <a:p>
+            <a:pPr algn="l">
+              <a:spcAft>
+                <a:spcPts val="1000"/>
+              </a:spcAft>
+            </a:pPr>
+            <a:r>
+              <a:rPr sz="1600" b="0">
+                <a:solidFill>
+                  <a:srgbClr val="222222"/>
+                </a:solidFill>
+                <a:latin typeface="맑은 고딕"/>
+              </a:rPr>
+              <a:t>•  Q3. 값을 설정할 수 없는 속성은? → RecvQEntries (ORA-16568)</a:t>
             </a:r>
           </a:p>
         </p:txBody>
@@ -17928,7 +17908,7 @@
                 </a:solidFill>
                 <a:latin typeface="맑은 고딕"/>
               </a:rPr>
-              <a:t>요약</a:t>
+              <a:t>퀴즈 (2/2)</a:t>
             </a:r>
           </a:p>
         </p:txBody>
@@ -17967,7 +17947,7 @@
                 </a:solidFill>
                 <a:latin typeface="맑은 고딕"/>
               </a:rPr>
-              <a:t>•  `SHOW` 는 "의도대로인가", `VALIDATE` 는 "전환할 수 있는가"</a:t>
+              <a:t>•  Q4. 보낼 큐 비고 받은 큐가 쌓이면? → 적용 구간 병목</a:t>
             </a:r>
           </a:p>
           <a:p>
@@ -17983,7 +17963,7 @@
                 </a:solidFill>
                 <a:latin typeface="맑은 고딕"/>
               </a:rPr>
-              <a:t>•  실측 — `LogShipping=OFF` 인데 `SUCCESS`, 두 지연도 0</a:t>
+              <a:t>•  Q5. SHOW는 SUCCESS, 전환 불가인 원인은? → LogShipping OFF</a:t>
             </a:r>
           </a:p>
           <a:p>
@@ -17999,167 +17979,7 @@
                 </a:solidFill>
                 <a:latin typeface="맑은 고딕"/>
               </a:rPr>
-              <a:t>•  Broker 는 `DEFER` 가 아니라 **`RESET`** 을 쓴다</a:t>
-            </a:r>
-          </a:p>
-          <a:p>
-            <a:pPr algn="l">
-              <a:spcAft>
-                <a:spcPts val="1000"/>
-              </a:spcAft>
-            </a:pPr>
-            <a:r>
-              <a:rPr sz="1600" b="0">
-                <a:solidFill>
-                  <a:srgbClr val="222222"/>
-                </a:solidFill>
-                <a:latin typeface="맑은 고딕"/>
-              </a:rPr>
-              <a:t>•  `VERBOSE` 는 `Future` 구성까지 계산한다</a:t>
-            </a:r>
-          </a:p>
-          <a:p>
-            <a:pPr algn="l">
-              <a:spcAft>
-                <a:spcPts val="1000"/>
-              </a:spcAft>
-            </a:pPr>
-            <a:r>
-              <a:rPr sz="1600" b="0">
-                <a:solidFill>
-                  <a:srgbClr val="222222"/>
-                </a:solidFill>
-                <a:latin typeface="맑은 고딕"/>
-              </a:rPr>
-              <a:t>•  임계값 셋은 기본 30초 — ORA-16853·16855·16857</a:t>
-            </a:r>
-          </a:p>
-          <a:p>
-            <a:pPr algn="l">
-              <a:spcAft>
-                <a:spcPts val="1000"/>
-              </a:spcAft>
-            </a:pPr>
-            <a:r>
-              <a:rPr sz="1600" b="0">
-                <a:solidFill>
-                  <a:srgbClr val="222222"/>
-                </a:solidFill>
-                <a:latin typeface="맑은 고딕"/>
-              </a:rPr>
-              <a:t>•  **임계값이 있는 항목만 경보한다**</a:t>
-            </a:r>
-          </a:p>
-          <a:p>
-            <a:pPr algn="l">
-              <a:spcAft>
-                <a:spcPts val="1000"/>
-              </a:spcAft>
-            </a:pPr>
-            <a:r>
-              <a:rPr sz="1600" b="0">
-                <a:solidFill>
-                  <a:srgbClr val="222222"/>
-                </a:solidFill>
-                <a:latin typeface="맑은 고딕"/>
-              </a:rPr>
-              <a:t>•  `EXPORT` 는 trace 디렉터리. 경로를 주면 ORA-16540</a:t>
-            </a:r>
-          </a:p>
-          <a:p>
-            <a:pPr algn="l">
-              <a:spcAft>
-                <a:spcPts val="1000"/>
-              </a:spcAft>
-            </a:pPr>
-            <a:r>
-              <a:rPr sz="1600" b="0">
-                <a:solidFill>
-                  <a:srgbClr val="222222"/>
-                </a:solidFill>
-                <a:latin typeface="맑은 고딕"/>
-              </a:rPr>
-              <a:t>•  `IMPORT` 는 구성이 있으면 ORA-16504</a:t>
-            </a:r>
-          </a:p>
-          <a:p>
-            <a:pPr algn="l">
-              <a:spcAft>
-                <a:spcPts val="1000"/>
-              </a:spcAft>
-            </a:pPr>
-            <a:r>
-              <a:rPr sz="1600" b="0">
-                <a:solidFill>
-                  <a:srgbClr val="222222"/>
-                </a:solidFill>
-                <a:latin typeface="맑은 고딕"/>
-              </a:rPr>
-              <a:t>•  FSFO 는 전제 없이도 경고만 하고 켜진다 (ORA-16827)</a:t>
-            </a:r>
-          </a:p>
-          <a:p>
-            <a:pPr algn="l">
-              <a:spcAft>
-                <a:spcPts val="1000"/>
-              </a:spcAft>
-            </a:pPr>
-            <a:r>
-              <a:rPr sz="1600" b="0">
-                <a:solidFill>
-                  <a:srgbClr val="222222"/>
-                </a:solidFill>
-                <a:latin typeface="맑은 고딕"/>
-              </a:rPr>
-              <a:t>•  끌 때는 **`DISABLE` 이 먼저**</a:t>
-            </a:r>
-          </a:p>
-          <a:p>
-            <a:pPr algn="l">
-              <a:spcAft>
-                <a:spcPts val="1000"/>
-              </a:spcAft>
-            </a:pPr>
-            <a:r>
-              <a:rPr sz="1600" b="0">
-                <a:solidFill>
-                  <a:srgbClr val="222222"/>
-                </a:solidFill>
-                <a:latin typeface="맑은 고딕"/>
-              </a:rPr>
-              <a:t>•  감시 다섯 층 중 **4층을 빠뜨리는 것이 가장 흔한 실수**</a:t>
-            </a:r>
-          </a:p>
-          <a:p>
-            <a:pPr algn="l">
-              <a:spcAft>
-                <a:spcPts val="1000"/>
-              </a:spcAft>
-            </a:pPr>
-            <a:r>
-              <a:rPr sz="1600" b="0">
-                <a:solidFill>
-                  <a:srgbClr val="222222"/>
-                </a:solidFill>
-                <a:latin typeface="맑은 고딕"/>
-              </a:rPr>
-              <a:t>•  `VALIDATE` 는 여섯 구문. **★ `VALIDATE DATABASE` 는 Primary 의 정적 등록만 검사한다**</a:t>
-            </a:r>
-          </a:p>
-          <a:p>
-            <a:pPr algn="l">
-              <a:spcAft>
-                <a:spcPts val="1000"/>
-              </a:spcAft>
-            </a:pPr>
-            <a:r>
-              <a:rPr sz="1600" b="0">
-                <a:solidFill>
-                  <a:srgbClr val="222222"/>
-                </a:solidFill>
-                <a:latin typeface="맑은 고딕"/>
-              </a:rPr>
-              <a:t>•  `drc&lt;이름&gt;.log` 에 명령·결과와 **구성 수준 오류**(ORA-16607·16608)가 남는다</a:t>
+              <a:t>•  Q6. 구성이 있을 때 IMPORT는? → ORA-16504로 거부</a:t>
             </a:r>
           </a:p>
         </p:txBody>
@@ -18260,7 +18080,7 @@
                 </a:solidFill>
                 <a:latin typeface="맑은 고딕"/>
               </a:rPr>
-              <a:t>다음 장 예고</a:t>
+              <a:t>실습 개요</a:t>
             </a:r>
           </a:p>
         </p:txBody>
@@ -18299,7 +18119,7 @@
                 </a:solidFill>
                 <a:latin typeface="맑은 고딕"/>
               </a:rPr>
-              <a:t>•  15장 — V$ 뷰 기반 모니터링과 문제 해결</a:t>
+              <a:t>•  01 VALIDATE 읽기 / 02 SHOW와 VALIDATE의 차이 (14.6, 14.7)</a:t>
             </a:r>
           </a:p>
           <a:p>
@@ -18315,7 +18135,7 @@
                 </a:solidFill>
                 <a:latin typeface="맑은 고딕"/>
               </a:rPr>
-              <a:t>•  Broker 없이 SQL 만으로 진단하는 방법</a:t>
+              <a:t>•  03 모니터링 전용 속성 / 04 지연과 임계값 (14.4, 14.5)</a:t>
             </a:r>
           </a:p>
           <a:p>
@@ -18331,7 +18151,7 @@
                 </a:solidFill>
                 <a:latin typeface="맑은 고딕"/>
               </a:rPr>
-              <a:t>•  갭·성능·공간 문제의 절차화</a:t>
+              <a:t>•  05 V$ 뷰로 교차 확인 (15장 연결)</a:t>
             </a:r>
           </a:p>
           <a:p>
@@ -18347,7 +18167,39 @@
                 </a:solidFill>
                 <a:latin typeface="맑은 고딕"/>
               </a:rPr>
-              <a:t>•  이 장에서 본 뷰들을 실제 장애 상황에 적용한다</a:t>
+              <a:t>•  06 구성 내보내기 / 07 Fast-Start Failover 표시 (14.8, 14.3)</a:t>
+            </a:r>
+          </a:p>
+          <a:p>
+            <a:pPr algn="l">
+              <a:spcAft>
+                <a:spcPts val="1000"/>
+              </a:spcAft>
+            </a:pPr>
+            <a:r>
+              <a:rPr sz="1600" b="0">
+                <a:solidFill>
+                  <a:srgbClr val="222222"/>
+                </a:solidFill>
+                <a:latin typeface="맑은 고딕"/>
+              </a:rPr>
+              <a:t>•  08 VALIDATE의 나머지 형태 (14.6)</a:t>
+            </a:r>
+          </a:p>
+          <a:p>
+            <a:pPr algn="l">
+              <a:spcAft>
+                <a:spcPts val="1000"/>
+              </a:spcAft>
+            </a:pPr>
+            <a:r>
+              <a:rPr sz="1600" b="0">
+                <a:solidFill>
+                  <a:srgbClr val="222222"/>
+                </a:solidFill>
+                <a:latin typeface="맑은 고딕"/>
+              </a:rPr>
+              <a:t>•  09 Broker 로그 판독 (14.9)</a:t>
             </a:r>
           </a:p>
         </p:txBody>
@@ -18448,7 +18300,7 @@
                 </a:solidFill>
                 <a:latin typeface="맑은 고딕"/>
               </a:rPr>
-              <a:t>실측 — 전송을 끊는다</a:t>
+              <a:t>상태 값과 집계 규칙</a:t>
             </a:r>
           </a:p>
         </p:txBody>
@@ -18487,7 +18339,7 @@
                 </a:solidFill>
                 <a:latin typeface="맑은 고딕"/>
               </a:rPr>
-              <a:t>SHOW 는 뭐라고 하는가</a:t>
+              <a:t>가장 심각한 것이 위로 올라간다</a:t>
             </a:r>
           </a:p>
         </p:txBody>
@@ -18526,7 +18378,7 @@
                 </a:solidFill>
                 <a:latin typeface="맑은 고딕"/>
               </a:rPr>
-              <a:t>•  `edit database 'boston' set property 'LogShipping'='OFF'`</a:t>
+              <a:t>•  SUCCESS: 의도대로 동작, 경고 조건 없음</a:t>
             </a:r>
           </a:p>
           <a:p>
@@ -18542,7 +18394,7 @@
                 </a:solidFill>
                 <a:latin typeface="맑은 고딕"/>
               </a:rPr>
-              <a:t>•  Primary 에 변경 발생 + 로그 두 번 전환</a:t>
+              <a:t>•  WARNING: 동작하지만 주의 조건 있음</a:t>
             </a:r>
           </a:p>
           <a:p>
@@ -18558,7 +18410,7 @@
                 </a:solidFill>
                 <a:latin typeface="맑은 고딕"/>
               </a:rPr>
-              <a:t>•  `SHOW CONFIGURATION` → **SUCCESS**</a:t>
+              <a:t>•  ERROR: 의도한 상태를 만족하지 못함</a:t>
             </a:r>
           </a:p>
           <a:p>
@@ -18574,7 +18426,7 @@
                 </a:solidFill>
                 <a:latin typeface="맑은 고딕"/>
               </a:rPr>
-              <a:t>•  `SHOW DATABASE 'boston'` → **SUCCESS**</a:t>
+              <a:t>•  구성원 상태 = 그 구성원의 가장 심각한 문제</a:t>
             </a:r>
           </a:p>
           <a:p>
@@ -18590,7 +18442,7 @@
                 </a:solidFill>
                 <a:latin typeface="맑은 고딕"/>
               </a:rPr>
-              <a:t>•  Transport Lag **0** / Apply Lag **0**</a:t>
+              <a:t>•  구성 상태 = 구성원 상태를 다시 집계</a:t>
             </a:r>
           </a:p>
         </p:txBody>
@@ -18691,7 +18543,7 @@
                 </a:solidFill>
                 <a:latin typeface="맑은 고딕"/>
               </a:rPr>
-              <a:t>같은 시점의 VALIDATE</a:t>
+              <a:t>Intended State가 판정 기준</a:t>
             </a:r>
           </a:p>
         </p:txBody>
@@ -18730,7 +18582,7 @@
                 </a:solidFill>
                 <a:latin typeface="맑은 고딕"/>
               </a:rPr>
-              <a:t>다른 답이 나온다</a:t>
+              <a:t>의도와 실제를 견주는 구조</a:t>
             </a:r>
           </a:p>
         </p:txBody>
@@ -18769,7 +18621,7 @@
                 </a:solidFill>
                 <a:latin typeface="맑은 고딕"/>
               </a:rPr>
-              <a:t>•  `Ready for Switchover:` **No**</a:t>
+              <a:t>•  Primary: TRANSPORT-ON / TRANSPORT-OFF</a:t>
             </a:r>
           </a:p>
           <a:p>
@@ -18785,7 +18637,7 @@
                 </a:solidFill>
                 <a:latin typeface="맑은 고딕"/>
               </a:rPr>
-              <a:t>•  `Ready for Failover:` Yes (Primary Running)</a:t>
+              <a:t>•  물리 Standby: APPLY-ON / APPLY-OFF</a:t>
             </a:r>
           </a:p>
           <a:p>
@@ -18801,7 +18653,7 @@
                 </a:solidFill>
                 <a:latin typeface="맑은 고딕"/>
               </a:rPr>
-              <a:t>•  속성 표에 `LogShipping ON / OFF` **한 줄만**</a:t>
+              <a:t>•  APPLY-OFF에서 적용 중지는 정상</a:t>
             </a:r>
           </a:p>
           <a:p>
@@ -18817,7 +18669,23 @@
                 </a:solidFill>
                 <a:latin typeface="맑은 고딕"/>
               </a:rPr>
-              <a:t>•  VALIDATE 는 **값이 다른 것만** 골라 보여 준다</a:t>
+              <a:t>•  APPLY-ON에서 적용 중지는 ORA-16766, ERROR</a:t>
+            </a:r>
+          </a:p>
+          <a:p>
+            <a:pPr algn="l">
+              <a:spcAft>
+                <a:spcPts val="1000"/>
+              </a:spcAft>
+            </a:pPr>
+            <a:r>
+              <a:rPr sz="1700" b="0">
+                <a:solidFill>
+                  <a:srgbClr val="222222"/>
+                </a:solidFill>
+                <a:latin typeface="맑은 고딕"/>
+              </a:rPr>
+              <a:t>•  일부러 꺼 둔 기능은 경고 대상에서 빠진다</a:t>
             </a:r>
           </a:p>
         </p:txBody>
@@ -18918,7 +18786,7 @@
                 </a:solidFill>
                 <a:latin typeface="맑은 고딕"/>
               </a:rPr>
-              <a:t>Broker 는 RESET 을 쓴다</a:t>
+              <a:t>ORA-166xx 코드 읽는 법</a:t>
             </a:r>
           </a:p>
         </p:txBody>
@@ -18957,7 +18825,7 @@
                 </a:solidFill>
                 <a:latin typeface="맑은 고딕"/>
               </a:rPr>
-              <a:t>손으로 껐을 때와 다르다</a:t>
+              <a:t>구성, 구성원, 원인 순으로 내려간다</a:t>
             </a:r>
           </a:p>
         </p:txBody>
@@ -18996,7 +18864,7 @@
                 </a:solidFill>
                 <a:latin typeface="맑은 고딕"/>
               </a:rPr>
-              <a:t>•  `LOG_ARCHIVE_DEST_STATE_2` = **RESET** (DEFER 아님)</a:t>
+              <a:t>•  구성: 16607 실패, 16608 경고</a:t>
             </a:r>
           </a:p>
           <a:p>
@@ -19012,7 +18880,7 @@
                 </a:solidFill>
                 <a:latin typeface="맑은 고딕"/>
               </a:rPr>
-              <a:t>•  `V$ARCHIVE_DEST_STATUS` STATUS = **DEFERRED**</a:t>
+              <a:t>•  구성원: 16809, 16810 여러 문제 묶음</a:t>
             </a:r>
           </a:p>
           <a:p>
@@ -19028,7 +18896,7 @@
                 </a:solidFill>
                 <a:latin typeface="맑은 고딕"/>
               </a:rPr>
-              <a:t>•  7장에서 손으로 껐을 때는 `DEFER`</a:t>
+              <a:t>•  원인: 16766 적용 중지, 16737 전송 오류</a:t>
             </a:r>
           </a:p>
           <a:p>
@@ -19044,7 +18912,23 @@
                 </a:solidFill>
                 <a:latin typeface="맑은 고딕"/>
               </a:rPr>
-              <a:t>•  값만 보고 **누가 껐는지** 구별할 수 있다</a:t>
+              <a:t>•  원인: 16853·16855 지연 초과, 16857 연결 끊김</a:t>
+            </a:r>
+          </a:p>
+          <a:p>
+            <a:pPr algn="l">
+              <a:spcAft>
+                <a:spcPts val="1000"/>
+              </a:spcAft>
+            </a:pPr>
+            <a:r>
+              <a:rPr sz="1700" b="0">
+                <a:solidFill>
+                  <a:srgbClr val="222222"/>
+                </a:solidFill>
+                <a:latin typeface="맑은 고딕"/>
+              </a:rPr>
+              <a:t>•  원인: 16714·16715 속성 불일치, 16789 SRL</a:t>
             </a:r>
           </a:p>
         </p:txBody>
@@ -19145,7 +19029,7 @@
                 </a:solidFill>
                 <a:latin typeface="맑은 고딕"/>
               </a:rPr>
-              <a:t>VALIDATE 가 읽어 주는 것</a:t>
+              <a:t>묶음 코드와 통신 코드</a:t>
             </a:r>
           </a:p>
         </p:txBody>
@@ -19184,7 +19068,7 @@
                 </a:solidFill>
                 <a:latin typeface="맑은 고딕"/>
               </a:rPr>
-              <a:t>항목별로</a:t>
+              <a:t>화면에 다 나오지 않는 경우</a:t>
             </a:r>
           </a:p>
         </p:txBody>
@@ -19223,7 +19107,7 @@
                 </a:solidFill>
                 <a:latin typeface="맑은 고딕"/>
               </a:rPr>
-              <a:t>•  `Ready for Switchover` / `Ready for Failover` — 핵심 답</a:t>
+              <a:t>•  16809, 16810은 StatusReport로 펼친다</a:t>
             </a:r>
           </a:p>
           <a:p>
@@ -19239,7 +19123,7 @@
                 </a:solidFill>
                 <a:latin typeface="맑은 고딕"/>
               </a:rPr>
-              <a:t>•  `Flashback Database Status` — 16장 Reinstate 와 연결</a:t>
+              <a:t>•  16664는 결과를 받지 못했다는 뜻</a:t>
             </a:r>
           </a:p>
           <a:p>
@@ -19255,7 +19139,7 @@
                 </a:solidFill>
                 <a:latin typeface="맑은 고딕"/>
               </a:rPr>
-              <a:t>•  `static connect identifier` — **실제로 접속해 시험한다**</a:t>
+              <a:t>•  통신 오류 때 다른 상태 값은 오래된 정보</a:t>
             </a:r>
           </a:p>
           <a:p>
@@ -19271,7 +19155,7 @@
                 </a:solidFill>
                 <a:latin typeface="맑은 고딕"/>
               </a:rPr>
-              <a:t>•  `Log Files Cleared` — 전환 후 쓸 로그가 준비됐는가</a:t>
+              <a:t>•  DGM- 접두어는 DGMGRL 클라이언트 오류</a:t>
             </a:r>
           </a:p>
           <a:p>
@@ -19287,7 +19171,7 @@
                 </a:solidFill>
                 <a:latin typeface="맑은 고딕"/>
               </a:rPr>
-              <a:t>•  Primary 쪽은 항목이 적다 (Failover 대상이 아니므로)</a:t>
+              <a:t>•  정확한 문구는 oerr ora 번호로 확인</a:t>
             </a:r>
           </a:p>
         </p:txBody>
